--- a/docs/presentation/TriageGPT_deck.pptx
+++ b/docs/presentation/TriageGPT_deck.pptx
@@ -114,25 +114,25 @@
   <p:extLst>
     <p:ext uri="{521415D9-36F7-43E2-AB2F-B90AF26B5E84}">
       <p14:sectionLst xmlns:p14="http://schemas.microsoft.com/office/powerpoint/2010/main">
-        <p14:section name="Intro" id="{bf536373-b40f-e8f1-192b-6551fece773f}">
+        <p14:section name="Intro" id="{9fd5074b-6662-b40b-aafd-8598aff14ccd}">
           <p14:sldIdLst>
             <p14:sldId id="256"/>
             <p14:sldId id="257"/>
           </p14:sldIdLst>
         </p14:section>
-        <p14:section name="Demo and design" id="{d8979ab1-7fe5-e30b-a7d4-d2da4f987511}">
+        <p14:section name="Demo and design" id="{31bd753d-b210-4a14-eebd-40f1890a155c}">
           <p14:sldIdLst>
             <p14:sldId id="258"/>
             <p14:sldId id="259"/>
           </p14:sldIdLst>
         </p14:section>
-        <p14:section name="Results" id="{97575eed-0ddb-8c1e-b74f-1b8eae699852}">
+        <p14:section name="Results" id="{e20e48dc-d4f5-93c0-19eb-9cfab8f3f282}">
           <p14:sldIdLst>
             <p14:sldId id="260"/>
             <p14:sldId id="261"/>
           </p14:sldIdLst>
         </p14:section>
-        <p14:section name="Close" id="{4764adbc-b4fd-1d8a-dd56-9ab1cbef8b93}">
+        <p14:section name="Close" id="{33cf2afd-a1ff-d7e1-5608-88925293d2eb}">
           <p14:sldIdLst>
             <p14:sldId id="262"/>
             <p14:sldId id="263"/>
@@ -544,7 +544,7 @@
                 </a:solidFill>
                 <a:latin typeface="+mn-lt"/>
               </a:rPr>
-              <a:t>Answer / ask / refuse decisions correct (%)</a:t>
+              <a:t>Answer / ask / refuse decisions correct on unseen questions (%)</a:t>
             </a:r>
           </a:p>
         </c:rich>
@@ -611,10 +611,10 @@
                 <c:ptCount val="2"/>
                 <c:lvl>
                   <c:pt idx="0">
-                    <c:v>Tuned set (52 questions)</c:v>
+                    <c:v>First design, 24 unseen</c:v>
                   </c:pt>
                   <c:pt idx="1">
-                    <c:v>Held-out set (24 questions)</c:v>
+                    <c:v>Second design, 44 sealed (run once)</c:v>
                   </c:pt>
                 </c:lvl>
               </c:multiLvlStrCache>
@@ -627,10 +627,10 @@
                 <c:formatCode>General</c:formatCode>
                 <c:ptCount val="2"/>
                 <c:pt idx="0">
-                  <c:v>94.2</c:v>
+                  <c:v>75</c:v>
                 </c:pt>
                 <c:pt idx="1">
-                  <c:v>75</c:v>
+                  <c:v>88.6</c:v>
                 </c:pt>
               </c:numCache>
             </c:numRef>
@@ -1618,7 +1618,7 @@
           <a:p>
             <a:r>
               <a:rPr lang="en-US" dirty="0"/>
-              <a:t>I chose the thresholds by reading scores off the 52-question set, so its 96.2% is in-sample. I wrote the 24 held-out questions afterwards and never tuned on them. The drop is mostly cases where it asked for more information when it could have answered: the safe way to be wrong.</a:t>
+              <a:t>The first design scored 94-96% on the questions it was tuned on and 75% on 24 new ones. One live question exposed three faults: the gate read the wrong entry's score, the badge contradicted the answer, and escalations were incomplete. I fixed those, wrote 44 new questions before changing anything, froze the code and ran them once: 88.6%. The two sets differ in size and content, so this is not a like-for-like comparison. The sealed set is now spent.</a:t>
             </a:r>
             <a:endParaRPr lang="en-US" dirty="0"/>
           </a:p>
@@ -4169,7 +4169,7 @@
                   <a:schemeClr val="tx1"/>
                 </a:solidFill>
               </a:rPr>
-              <a:t>Gate: answer, ask, or refuse</a:t>
+              <a:t>Gate: refuse, confident, or uncertain</a:t>
             </a:r>
             <a:endParaRPr lang="en-US" sz="1500" dirty="0"/>
           </a:p>
@@ -4517,7 +4517,7 @@
                   <a:schemeClr val="tx1"/>
                 </a:solidFill>
               </a:rPr>
-              <a:t>Low confidence: the model is never called. Medium: it asks questions. High: it writes up the answer.</a:t>
+              <a:t>Nothing close: the model is never called. Confident: it writes up the answer. Uncertain: it chooses to answer, ask, or refuse.</a:t>
             </a:r>
             <a:endParaRPr lang="en-US" sz="1600" dirty="0"/>
           </a:p>
@@ -4939,7 +4939,7 @@
                   <a:schemeClr val="tx2"/>
                 </a:solidFill>
               </a:rPr>
-              <a:t>Trust the held-out score, not the tuned one</a:t>
+              <a:t>Unseen questions: 75% before, 88.6% after the fixes</a:t>
             </a:r>
             <a:endParaRPr lang="en-US" sz="3400" dirty="0"/>
           </a:p>
@@ -5057,7 +5057,7 @@
                   <a:schemeClr val="tx1"/>
                 </a:solidFill>
               </a:rPr>
-              <a:t>out-of-scope questions wrongly answered, on both sets</a:t>
+              <a:t>out-of-scope questions wrongly answered, on every set</a:t>
             </a:r>
             <a:endParaRPr lang="en-US" sz="1500" dirty="0"/>
           </a:p>
@@ -5123,7 +5123,7 @@
                 <a:ea typeface="Cambria" pitchFamily="34" charset="-122"/>
                 <a:cs typeface="Cambria" pitchFamily="34" charset="-120"/>
               </a:rPr>
-              <a:t>98.3%</a:t>
+              <a:t>100%</a:t>
             </a:r>
             <a:endParaRPr lang="en-US" sz="3600" dirty="0"/>
           </a:p>
@@ -5159,7 +5159,7 @@
                   <a:schemeClr val="tx1"/>
                 </a:solidFill>
               </a:rPr>
-              <a:t>of statements supported by a judge model (held-out)</a:t>
+              <a:t>of 260 statements supported by a judge model (sealed set)</a:t>
             </a:r>
             <a:endParaRPr lang="en-US" sz="1500" dirty="0"/>
           </a:p>
@@ -5225,7 +5225,7 @@
                 <a:ea typeface="Cambria" pitchFamily="34" charset="-122"/>
                 <a:cs typeface="Cambria" pitchFamily="34" charset="-120"/>
               </a:rPr>
-              <a:t>2.6 s</a:t>
+              <a:t>2.5 s</a:t>
             </a:r>
             <a:endParaRPr lang="en-US" sz="3600" dirty="0"/>
           </a:p>
@@ -5261,7 +5261,7 @@
                   <a:schemeClr val="tx1"/>
                 </a:solidFill>
               </a:rPr>
-              <a:t>median response time, p95 4.4 s</a:t>
+              <a:t>median response time, p95 6.9 s</a:t>
             </a:r>
             <a:endParaRPr lang="en-US" sz="1500" dirty="0"/>
           </a:p>
@@ -5435,7 +5435,7 @@
                 <a:ea typeface="Cambria" pitchFamily="34" charset="-122"/>
                 <a:cs typeface="Cambria" pitchFamily="34" charset="-120"/>
               </a:rPr>
-              <a:t>Too cautious on mixed paraphrases</a:t>
+              <a:t>Short vague messages</a:t>
             </a:r>
             <a:endParaRPr lang="en-US" sz="2000" dirty="0"/>
           </a:p>
@@ -5471,7 +5471,7 @@
                   <a:schemeClr val="tx1"/>
                 </a:solidFill>
               </a:rPr>
-              <a:t>3 of 14 answerable held-out questions got "need more info" although the right entry was found.</a:t>
+              <a:t>3 of 5 vague sealed questions ("the system seems down") were told "not in KB" instead of being asked what is wrong.</a:t>
             </a:r>
             <a:endParaRPr lang="en-US" sz="1600" dirty="0"/>
           </a:p>
@@ -5537,7 +5537,7 @@
                 <a:ea typeface="Cambria" pitchFamily="34" charset="-122"/>
                 <a:cs typeface="Cambria" pitchFamily="34" charset="-120"/>
               </a:rPr>
-              <a:t>Model can over-refuse</a:t>
+              <a:t>The model can still over-refuse</a:t>
             </a:r>
             <a:endParaRPr lang="en-US" sz="2000" dirty="0"/>
           </a:p>
@@ -5573,7 +5573,7 @@
                   <a:schemeClr val="tx1"/>
                 </a:solidFill>
               </a:rPr>
-              <a:t>One terminal-offline question was told "not in KB" even though the KB covers it.</a:t>
+              <a:t>A KEY_REVOKED question was judged outside the KB, although the KB covers it.</a:t>
             </a:r>
             <a:endParaRPr lang="en-US" sz="1600" dirty="0"/>
           </a:p>
@@ -5639,7 +5639,7 @@
                 <a:ea typeface="Cambria" pitchFamily="34" charset="-122"/>
                 <a:cs typeface="Cambria" pitchFamily="34" charset="-120"/>
               </a:rPr>
-              <a:t>Shared vocabulary</a:t>
+              <a:t>Free-tier limits</a:t>
             </a:r>
             <a:endParaRPr lang="en-US" sz="2000" dirty="0"/>
           </a:p>
@@ -5675,7 +5675,7 @@
                   <a:schemeClr val="tx1"/>
                 </a:solidFill>
               </a:rPr>
-              <a:t>"Printer at the office" is out of scope but got a clarifying question, not a flat refusal.</a:t>
+              <a:t>Daily token limits ran out twice during evaluation, so different runs used different models.</a:t>
             </a:r>
             <a:endParaRPr lang="en-US" sz="1600" dirty="0"/>
           </a:p>
@@ -5777,7 +5777,7 @@
                   <a:schemeClr val="tx1"/>
                 </a:solidFill>
               </a:rPr>
-              <a:t>52 + 24 questions written by one person; the judge is itself a model.</a:t>
+              <a:t>Sets of 24-52 questions by one person; the sealed set is spent; the judge is itself a model.</a:t>
             </a:r>
             <a:endParaRPr lang="en-US" sz="1600" dirty="0"/>
           </a:p>

--- a/docs/presentation/TriageGPT_deck.pptx
+++ b/docs/presentation/TriageGPT_deck.pptx
@@ -19,9 +19,10 @@
     <p:sldId id="267" r:id="rId13"/>
     <p:sldId id="268" r:id="rId14"/>
     <p:sldId id="269" r:id="rId15"/>
+    <p:sldId id="270" r:id="rId16"/>
   </p:sldIdLst>
   <p:notesMasterIdLst>
-    <p:notesMasterId r:id="rId16"/>
+    <p:notesMasterId r:id="rId17"/>
   </p:notesMasterIdLst>
   <p:sldSz cx="12192000" cy="6858000"/>
   <p:notesSz cx="6858000" cy="12192000"/>
@@ -937,7 +938,7 @@
           <a:p>
             <a:r>
               <a:rPr lang="en-US" dirty="0"/>
-              <a:t>About 1 minute. EDIT THE 'WHO DID WHAT' COLUMN so it names the specific tools you used and the specific files you wrote or reviewed yourself. The assignment grades that honesty, and you should be able to explain every file (docs/CODE_TOUR.md).</a:t>
+              <a:t>About 1 minute. The dangerous failure is answering something out of scope, and that is zero on every set. The remaining misses are the safe kind: asking or refusing when it could have answered. The judge was a different model from the writer (Gemini 3.1 Flash-Lite judging Gemini 3.5 Flash-Lite); it is a screening tool, not proof. With 44 questions the uncertainty is wide, roughly 75% to 95%.</a:t>
             </a:r>
             <a:endParaRPr lang="en-US" dirty="0"/>
           </a:p>
@@ -1025,7 +1026,7 @@
           <a:p>
             <a:r>
               <a:rPr lang="en-US" dirty="0"/>
-              <a:t>Close on the one line, then take questions. Likely questions are in docs/QA_PREP.md. Appendix slides follow for retrieval numbers, the stack and the full results table.</a:t>
+              <a:t>About 1 minute. EDIT THE 'WHO DID WHAT' COLUMN so it names the specific tools you used and the specific files you wrote or reviewed yourself. The assignment grades that honesty, and you should be able to explain every file (docs/CODE_TOUR.md).</a:t>
             </a:r>
             <a:endParaRPr lang="en-US" dirty="0"/>
           </a:p>
@@ -1113,7 +1114,7 @@
           <a:p>
             <a:r>
               <a:rPr lang="en-US" dirty="0"/>
-              <a:t>Appendix. Hit@k is whether the correct manual entry is among the top k retrieved. MRR was 0.908 / 0.955 / 0.948 for keyword / semantic / hybrid.</a:t>
+              <a:t>Close on the one line, then take questions. Likely questions are in docs/QA_PREP.md. Appendix slides follow for retrieval numbers, the stack and the full results table.</a:t>
             </a:r>
             <a:endParaRPr lang="en-US" dirty="0"/>
           </a:p>
@@ -1201,7 +1202,7 @@
           <a:p>
             <a:r>
               <a:rPr lang="en-US" dirty="0"/>
-              <a:t>Appendix. Model ids change often so the chain lives in an environment variable. Two ids in my first chain were wrong or retired, which I found by testing against both providers.</a:t>
+              <a:t>Appendix. Hit@k is whether the correct manual entry is among the top k retrieved. MRR was 0.908 / 0.955 / 0.948 for keyword / semantic / hybrid.</a:t>
             </a:r>
             <a:endParaRPr lang="en-US" dirty="0"/>
           </a:p>
@@ -1289,7 +1290,7 @@
           <a:p>
             <a:r>
               <a:rPr lang="en-US" dirty="0"/>
-              <a:t>Appendix. Full tables are in eval/ in the repository, and docs/DECISIONS.md explains each change.</a:t>
+              <a:t>Appendix. Model ids change often so the chain lives in an environment variable. Two ids in my first chain were wrong or retired, which I found by testing against both providers.</a:t>
             </a:r>
             <a:endParaRPr lang="en-US" dirty="0"/>
           </a:p>
@@ -1313,6 +1314,94 @@
             <a:fld id="{F7021451-1387-4CA6-816F-3879F97B5CBC}" type="slidenum">
               <a:rPr lang="en-US"/>
               <a:t>14</a:t>
+            </a:fld>
+            <a:endParaRPr lang="en-US"/>
+          </a:p>
+        </p:txBody>
+      </p:sp>
+    </p:spTree>
+    <p:extLst>
+      <p:ext uri="{BB962C8B-B14F-4D97-AF65-F5344CB8AC3E}">
+        <p14:creationId xmlns:p14="http://schemas.microsoft.com/office/powerpoint/2010/main" val="1024086991"/>
+      </p:ext>
+    </p:extLst>
+  </p:cSld>
+  <p:clrMapOvr>
+    <a:masterClrMapping/>
+  </p:clrMapOvr>
+</p:notes>
+</file>
+
+<file path=ppt/notesSlides/notesSlide15.xml><?xml version="1.0" encoding="utf-8"?>
+<p:notes xmlns:a="http://schemas.openxmlformats.org/drawingml/2006/main" xmlns:r="http://schemas.openxmlformats.org/officeDocument/2006/relationships" xmlns:p="http://schemas.openxmlformats.org/presentationml/2006/main">
+  <p:cSld>
+    <p:spTree>
+      <p:nvGrpSpPr>
+        <p:cNvPr id="1" name=""/>
+        <p:cNvGrpSpPr/>
+        <p:nvPr/>
+      </p:nvGrpSpPr>
+      <p:grpSpPr>
+        <a:xfrm>
+          <a:off x="0" y="0"/>
+          <a:ext cx="0" cy="0"/>
+          <a:chOff x="0" y="0"/>
+          <a:chExt cx="0" cy="0"/>
+        </a:xfrm>
+      </p:grpSpPr>
+      <p:sp>
+        <p:nvSpPr>
+          <p:cNvPr id="2" name="Slide Image Placeholder 1"/>
+          <p:cNvSpPr>
+            <a:spLocks noGrp="1" noRot="1" noChangeAspect="1"/>
+          </p:cNvSpPr>
+          <p:nvPr>
+            <p:ph type="sldImg"/>
+          </p:nvPr>
+        </p:nvSpPr>
+        <p:spPr/>
+      </p:sp>
+      <p:sp>
+        <p:nvSpPr>
+          <p:cNvPr id="3" name="Notes Placeholder 2"/>
+          <p:cNvSpPr>
+            <a:spLocks noGrp="1"/>
+          </p:cNvSpPr>
+          <p:nvPr>
+            <p:ph type="body" idx="1"/>
+          </p:nvPr>
+        </p:nvSpPr>
+        <p:spPr/>
+        <p:txBody>
+          <a:bodyPr/>
+          <a:lstStyle/>
+          <a:p>
+            <a:r>
+              <a:rPr lang="en-US" dirty="0"/>
+              <a:t>Appendix. Full tables are in eval/ in the repository, and docs/DECISIONS.md explains each change.</a:t>
+            </a:r>
+            <a:endParaRPr lang="en-US" dirty="0"/>
+          </a:p>
+        </p:txBody>
+      </p:sp>
+      <p:sp>
+        <p:nvSpPr>
+          <p:cNvPr id="4" name="Slide Number Placeholder 3"/>
+          <p:cNvSpPr>
+            <a:spLocks noGrp="1"/>
+          </p:cNvSpPr>
+          <p:nvPr>
+            <p:ph type="sldNum" sz="quarter" idx="10"/>
+          </p:nvPr>
+        </p:nvSpPr>
+        <p:spPr/>
+        <p:txBody>
+          <a:bodyPr/>
+          <a:lstStyle/>
+          <a:p>
+            <a:fld id="{F7021451-1387-4CA6-816F-3879F97B5CBC}" type="slidenum">
+              <a:rPr lang="en-US"/>
+              <a:t>15</a:t>
             </a:fld>
             <a:endParaRPr lang="en-US"/>
           </a:p>
@@ -1817,7 +1906,7 @@
           <a:p>
             <a:r>
               <a:rPr lang="en-US" dirty="0"/>
-              <a:t>About 1 minute. Say it plainly: my first version scored 94-96% on the questions I had tuned it on and 75% on new ones. That gap is the cost of tuning on a small set. So before changing anything I wrote 44 new questions, committed them (the git timestamps prove they predate the fixes), froze the code and ran them once.</a:t>
+              <a:t>About 1 minute. Say it plainly: my first version scored 94-96% on the questions I had tuned it on and 75% on new ones. That gap is the cost of tuning on a small set. I read every one of the six misses, which is the next slide. Before changing anything I wrote 44 new questions, committed them (the git timestamps prove they predate the fixes), froze the code and ran them once.</a:t>
             </a:r>
             <a:endParaRPr lang="en-US" dirty="0"/>
           </a:p>
@@ -1905,7 +1994,7 @@
           <a:p>
             <a:r>
               <a:rPr lang="en-US" dirty="0"/>
-              <a:t>About 1 minute. The dangerous failure is answering something out of scope, and that is zero on every set. The remaining misses are the safe kind: asking or refusing when it could have answered. The judge was a different model from the writer (Gemini 3.1 Flash-Lite judging Gemini 3.5 Flash-Lite); it is a screening tool, not proof. With 44 questions the uncertainty is wide, roughly 75% to 95%.</a:t>
+              <a:t>About 1 minute: THIS IS THE SLIDE THAT SHOWS ENGINEERING JUDGEMENT. The 75% was not a verdict, it was a to-do list. I read all six misses, found that retrieval had the right entry first in 13 of 14 answerable questions, so the fault was in the gate, not in search. That led to four root causes. 1) The gate used the wrong signal: it took the best semantic score among all five entries instead of the score of the entry ranked first. I fixed it by scoring the top entry, adding a keyword floor, and letting the model arbitrate the uncertain band. 2) The held-out set also exposed a security-guard false positive: Prompt Guard blocked a legitimate jargon-only question. I scored all 76 questions, found a clean gap (attacks at 0.99 or more, that question at 0.975) and moved the cut-off to 0.98. 3) and 4) came from one live question: the badge contradicted the answer, and only one of four escalation teams showed. Be straight about the result: on the same 24 questions four of six misses were fixed, one new miss appeared (the dashboard question now asks instead of answering), and two remain. Then say those 24 are now development data, so I wrote 44 new questions before changing anything and ran them once.</a:t>
             </a:r>
             <a:endParaRPr lang="en-US" dirty="0"/>
           </a:p>
@@ -1993,7 +2082,7 @@
           <a:p>
             <a:r>
               <a:rPr lang="en-US" dirty="0"/>
-              <a:t>About 1 minute. This is my own screenshot from testing: I asked 'Payment is hitting 504 again and again'. The content was right, but the label contradicted it and only one of four teams showed. I traced all three faults, fixed them, and wrote the sealed set before re-measuring. The 'before' images are dark because that was the old interface.</a:t>
+              <a:t>About 45 seconds. This is the evidence for causes 1, 3 and 4 on the previous slide. This is my own screenshot from testing: I asked 'Payment is hitting 504 again and again'. The content was right, but the label contradicted it and only one of four teams showed. I traced all three faults, fixed them, and wrote the sealed set before re-measuring. The 'before' images are dark because that was the old interface.</a:t>
             </a:r>
             <a:endParaRPr lang="en-US" dirty="0"/>
           </a:p>
@@ -2993,7 +3082,7 @@
                 <a:ea typeface="Segoe UI" pitchFamily="34" charset="-122"/>
                 <a:cs typeface="Segoe UI" pitchFamily="34" charset="-120"/>
               </a:rPr>
-              <a:t>   LIMITS, NEXT, AND WHO DID WHAT</a:t>
+              <a:t>   RESULTS</a:t>
             </a:r>
             <a:endParaRPr lang="en-US" sz="1100" dirty="0"/>
           </a:p>
@@ -3034,7 +3123,7 @@
                 <a:ea typeface="Segoe UI Semibold" pitchFamily="34" charset="-122"/>
                 <a:cs typeface="Segoe UI Semibold" pitchFamily="34" charset="-120"/>
               </a:rPr>
-              <a:t>Where it still breaks, and </a:t>
+              <a:t>88.6% on unseen questions, and </a:t>
             </a:r>
             <a:pPr algn="l" indent="0" marL="0">
               <a:buNone/>
@@ -3051,7 +3140,7 @@
                 <a:ea typeface="Segoe UI Semibold" pitchFamily="34" charset="-122"/>
                 <a:cs typeface="Segoe UI Semibold" pitchFamily="34" charset="-120"/>
               </a:rPr>
-              <a:t>what comes next.</a:t>
+              <a:t>no dangerous answers.</a:t>
             </a:r>
             <a:endParaRPr lang="en-US" sz="3000" dirty="0"/>
           </a:p>
@@ -3059,159 +3148,14 @@
       </p:sp>
       <p:sp>
         <p:nvSpPr>
-          <p:cNvPr id="4" name="Text 2"/>
-          <p:cNvSpPr txBox="1"/>
-          <p:nvPr/>
-        </p:nvSpPr>
-        <p:spPr>
-          <a:xfrm>
-            <a:off x="731520" y="2057400"/>
-            <a:ext cx="3119018" cy="411480"/>
-          </a:xfrm>
-          <a:prstGeom prst="rect">
-            <a:avLst/>
-          </a:prstGeom>
-          <a:noFill/>
-          <a:ln/>
-        </p:spPr>
-        <p:txBody>
-          <a:bodyPr wrap="square" lIns="0" tIns="0" rIns="0" bIns="0" rtlCol="0" anchor="ctr"/>
-          <a:lstStyle/>
-          <a:p>
-            <a:pPr indent="0" marL="0">
-              <a:buNone/>
-            </a:pPr>
-            <a:r>
-              <a:rPr lang="en-US" sz="1800" dirty="0">
-                <a:solidFill>
-                  <a:srgbClr val="0E2F2B"/>
-                </a:solidFill>
-                <a:latin typeface="Segoe UI Semibold" pitchFamily="34" charset="0"/>
-                <a:ea typeface="Segoe UI Semibold" pitchFamily="34" charset="-122"/>
-                <a:cs typeface="Segoe UI Semibold" pitchFamily="34" charset="-120"/>
-              </a:rPr>
-              <a:t>Still breaks</a:t>
-            </a:r>
-            <a:endParaRPr lang="en-US" sz="1800" dirty="0"/>
-          </a:p>
-        </p:txBody>
-      </p:sp>
-      <p:sp>
-        <p:nvSpPr>
-          <p:cNvPr id="5" name="Text 3"/>
-          <p:cNvSpPr txBox="1"/>
-          <p:nvPr/>
-        </p:nvSpPr>
-        <p:spPr>
-          <a:xfrm>
-            <a:off x="731520" y="2606040"/>
-            <a:ext cx="3073298" cy="3474720"/>
-          </a:xfrm>
-          <a:prstGeom prst="rect">
-            <a:avLst/>
-          </a:prstGeom>
-          <a:noFill/>
-          <a:ln/>
-        </p:spPr>
-        <p:txBody>
-          <a:bodyPr wrap="square" lIns="0" tIns="0" rIns="0" bIns="0" rtlCol="0" anchor="t"/>
-          <a:lstStyle/>
-          <a:p>
-            <a:pPr marL="177800" indent="-177800">
-              <a:spcAft>
-                <a:spcPts val="1300"/>
-              </a:spcAft>
-              <a:buSzPct val="100000"/>
-              <a:buChar char="•"/>
-            </a:pPr>
-            <a:r>
-              <a:rPr lang="en-US" sz="1400" dirty="0">
-                <a:solidFill>
-                  <a:srgbClr val="2B403C"/>
-                </a:solidFill>
-                <a:latin typeface="Segoe UI" pitchFamily="34" charset="0"/>
-                <a:ea typeface="Segoe UI" pitchFamily="34" charset="-122"/>
-                <a:cs typeface="Segoe UI" pitchFamily="34" charset="-120"/>
-              </a:rPr>
-              <a:t>Very short vague messages are sometimes refused instead of questioned.</a:t>
-            </a:r>
-            <a:endParaRPr lang="en-US" sz="1400" dirty="0"/>
-          </a:p>
-          <a:p>
-            <a:pPr marL="177800" indent="-177800">
-              <a:spcAft>
-                <a:spcPts val="1300"/>
-              </a:spcAft>
-              <a:buSzPct val="100000"/>
-              <a:buChar char="•"/>
-            </a:pPr>
-            <a:r>
-              <a:rPr lang="en-US" sz="1400" dirty="0">
-                <a:solidFill>
-                  <a:srgbClr val="2B403C"/>
-                </a:solidFill>
-                <a:latin typeface="Segoe UI" pitchFamily="34" charset="0"/>
-                <a:ea typeface="Segoe UI" pitchFamily="34" charset="-122"/>
-                <a:cs typeface="Segoe UI" pitchFamily="34" charset="-120"/>
-              </a:rPr>
-              <a:t>The model can over-refuse a question the manual does cover.</a:t>
-            </a:r>
-            <a:endParaRPr lang="en-US" sz="1400" dirty="0"/>
-          </a:p>
-          <a:p>
-            <a:pPr marL="177800" indent="-177800">
-              <a:spcAft>
-                <a:spcPts val="1300"/>
-              </a:spcAft>
-              <a:buSzPct val="100000"/>
-              <a:buChar char="•"/>
-            </a:pPr>
-            <a:r>
-              <a:rPr lang="en-US" sz="1400" dirty="0">
-                <a:solidFill>
-                  <a:srgbClr val="2B403C"/>
-                </a:solidFill>
-                <a:latin typeface="Segoe UI" pitchFamily="34" charset="0"/>
-                <a:ea typeface="Segoe UI" pitchFamily="34" charset="-122"/>
-                <a:cs typeface="Segoe UI" pitchFamily="34" charset="-120"/>
-              </a:rPr>
-              <a:t>Small, one-author test sets. The sealed set is now spent.</a:t>
-            </a:r>
-            <a:endParaRPr lang="en-US" sz="1400" dirty="0"/>
-          </a:p>
-          <a:p>
-            <a:pPr marL="177800" indent="-177800">
-              <a:spcAft>
-                <a:spcPts val="1300"/>
-              </a:spcAft>
-              <a:buSzPct val="100000"/>
-              <a:buChar char="•"/>
-            </a:pPr>
-            <a:r>
-              <a:rPr lang="en-US" sz="1400" dirty="0">
-                <a:solidFill>
-                  <a:srgbClr val="2B403C"/>
-                </a:solidFill>
-                <a:latin typeface="Segoe UI" pitchFamily="34" charset="0"/>
-                <a:ea typeface="Segoe UI" pitchFamily="34" charset="-122"/>
-                <a:cs typeface="Segoe UI" pitchFamily="34" charset="-120"/>
-              </a:rPr>
-              <a:t>Free-tier daily limits ran out twice, so runs used different models.</a:t>
-            </a:r>
-            <a:endParaRPr lang="en-US" sz="1400" dirty="0"/>
-          </a:p>
-        </p:txBody>
-      </p:sp>
-      <p:sp>
-        <p:nvSpPr>
-          <p:cNvPr id="6" name="Shape 4"/>
+          <p:cNvPr id="4" name="Shape 2"/>
           <p:cNvSpPr/>
           <p:nvPr/>
         </p:nvSpPr>
         <p:spPr>
           <a:xfrm>
-            <a:off x="4307738" y="2057400"/>
-            <a:ext cx="0" cy="4023360"/>
+            <a:off x="731520" y="2103120"/>
+            <a:ext cx="4846320" cy="0"/>
           </a:xfrm>
           <a:prstGeom prst="line">
             <a:avLst/>
@@ -3227,14 +3171,14 @@
       </p:sp>
       <p:sp>
         <p:nvSpPr>
-          <p:cNvPr id="7" name="Text 5"/>
-          <p:cNvSpPr txBox="1"/>
-          <p:nvPr/>
-        </p:nvSpPr>
-        <p:spPr>
-          <a:xfrm>
-            <a:off x="4627778" y="2057400"/>
-            <a:ext cx="3119018" cy="411480"/>
+          <p:cNvPr id="5" name="Text 3"/>
+          <p:cNvSpPr txBox="1"/>
+          <p:nvPr/>
+        </p:nvSpPr>
+        <p:spPr>
+          <a:xfrm>
+            <a:off x="731520" y="2194560"/>
+            <a:ext cx="2103120" cy="1005840"/>
           </a:xfrm>
           <a:prstGeom prst="rect">
             <a:avLst/>
@@ -3250,71 +3194,60 @@
               <a:buNone/>
             </a:pPr>
             <a:r>
-              <a:rPr lang="en-US" sz="1800" dirty="0">
+              <a:rPr lang="en-US" sz="5000" dirty="0">
                 <a:solidFill>
                   <a:srgbClr val="0E2F2B"/>
                 </a:solidFill>
-                <a:latin typeface="Segoe UI Semibold" pitchFamily="34" charset="0"/>
-                <a:ea typeface="Segoe UI Semibold" pitchFamily="34" charset="-122"/>
-                <a:cs typeface="Segoe UI Semibold" pitchFamily="34" charset="-120"/>
-              </a:rPr>
-              <a:t>Next</a:t>
-            </a:r>
-            <a:endParaRPr lang="en-US" sz="1800" dirty="0"/>
-          </a:p>
-        </p:txBody>
-      </p:sp>
-      <p:sp>
-        <p:nvSpPr>
-          <p:cNvPr id="8" name="Text 6"/>
-          <p:cNvSpPr txBox="1"/>
-          <p:nvPr/>
-        </p:nvSpPr>
-        <p:spPr>
-          <a:xfrm>
-            <a:off x="4627778" y="2606040"/>
-            <a:ext cx="3073298" cy="3474720"/>
-          </a:xfrm>
-          <a:prstGeom prst="rect">
-            <a:avLst/>
-          </a:prstGeom>
-          <a:noFill/>
-          <a:ln/>
-        </p:spPr>
-        <p:txBody>
-          <a:bodyPr wrap="square" lIns="0" tIns="0" rIns="0" bIns="0" rtlCol="0" anchor="t"/>
-          <a:lstStyle/>
-          <a:p>
-            <a:pPr marL="177800" indent="-177800">
-              <a:spcAft>
-                <a:spcPts val="1300"/>
-              </a:spcAft>
-              <a:buSzPct val="100000"/>
-              <a:buChar char="•"/>
-            </a:pPr>
-            <a:r>
-              <a:rPr lang="en-US" sz="1400" dirty="0">
-                <a:solidFill>
-                  <a:srgbClr val="2B403C"/>
+                <a:latin typeface="Segoe UI Light" pitchFamily="34" charset="0"/>
+                <a:ea typeface="Segoe UI Light" pitchFamily="34" charset="-122"/>
+                <a:cs typeface="Segoe UI Light" pitchFamily="34" charset="-120"/>
+              </a:rPr>
+              <a:t>0</a:t>
+            </a:r>
+            <a:endParaRPr lang="en-US" sz="5000" dirty="0"/>
+          </a:p>
+        </p:txBody>
+      </p:sp>
+      <p:sp>
+        <p:nvSpPr>
+          <p:cNvPr id="6" name="Text 4"/>
+          <p:cNvSpPr txBox="1"/>
+          <p:nvPr/>
+        </p:nvSpPr>
+        <p:spPr>
+          <a:xfrm>
+            <a:off x="2926080" y="2194560"/>
+            <a:ext cx="2651760" cy="1005840"/>
+          </a:xfrm>
+          <a:prstGeom prst="rect">
+            <a:avLst/>
+          </a:prstGeom>
+          <a:noFill/>
+          <a:ln/>
+        </p:spPr>
+        <p:txBody>
+          <a:bodyPr wrap="square" lIns="0" tIns="0" rIns="0" bIns="0" rtlCol="0" anchor="ctr"/>
+          <a:lstStyle/>
+          <a:p>
+            <a:pPr indent="0" marL="0">
+              <a:buNone/>
+            </a:pPr>
+            <a:r>
+              <a:rPr lang="en-US" sz="1300" b="1" dirty="0">
+                <a:solidFill>
+                  <a:srgbClr val="0E2F2B"/>
                 </a:solidFill>
                 <a:latin typeface="Segoe UI" pitchFamily="34" charset="0"/>
                 <a:ea typeface="Segoe UI" pitchFamily="34" charset="-122"/>
                 <a:cs typeface="Segoe UI" pitchFamily="34" charset="-120"/>
               </a:rPr>
-              <a:t>A cross-encoder re-ranker for the short, vague messages.</a:t>
-            </a:r>
-            <a:endParaRPr lang="en-US" sz="1400" dirty="0"/>
-          </a:p>
-          <a:p>
-            <a:pPr marL="177800" indent="-177800">
-              <a:spcAft>
-                <a:spcPts val="1300"/>
-              </a:spcAft>
-              <a:buSzPct val="100000"/>
-              <a:buChar char="•"/>
-            </a:pPr>
-            <a:r>
-              <a:rPr lang="en-US" sz="1400" dirty="0">
+              <a:t>of 10  </a:t>
+            </a:r>
+            <a:pPr indent="0" marL="0">
+              <a:buNone/>
+            </a:pPr>
+            <a:r>
+              <a:rPr lang="en-US" sz="1300" dirty="0">
                 <a:solidFill>
                   <a:srgbClr val="2B403C"/>
                 </a:solidFill>
@@ -3322,64 +3255,22 @@
                 <a:ea typeface="Segoe UI" pitchFamily="34" charset="-122"/>
                 <a:cs typeface="Segoe UI" pitchFamily="34" charset="-120"/>
               </a:rPr>
-              <a:t>A bigger labelled set with a proper train and test split.</a:t>
-            </a:r>
-            <a:endParaRPr lang="en-US" sz="1400" dirty="0"/>
-          </a:p>
-          <a:p>
-            <a:pPr marL="177800" indent="-177800">
-              <a:spcAft>
-                <a:spcPts val="1300"/>
-              </a:spcAft>
-              <a:buSzPct val="100000"/>
-              <a:buChar char="•"/>
-            </a:pPr>
-            <a:r>
-              <a:rPr lang="en-US" sz="1400" dirty="0">
-                <a:solidFill>
-                  <a:srgbClr val="2B403C"/>
-                </a:solidFill>
-                <a:latin typeface="Segoe UI" pitchFamily="34" charset="0"/>
-                <a:ea typeface="Segoe UI" pitchFamily="34" charset="-122"/>
-                <a:cs typeface="Segoe UI" pitchFamily="34" charset="-120"/>
-              </a:rPr>
-              <a:t>A feedback button that files a ticket against the cited entry.</a:t>
-            </a:r>
-            <a:endParaRPr lang="en-US" sz="1400" dirty="0"/>
-          </a:p>
-          <a:p>
-            <a:pPr marL="177800" indent="-177800">
-              <a:spcAft>
-                <a:spcPts val="1300"/>
-              </a:spcAft>
-              <a:buSzPct val="100000"/>
-              <a:buChar char="•"/>
-            </a:pPr>
-            <a:r>
-              <a:rPr lang="en-US" sz="1400" dirty="0">
-                <a:solidFill>
-                  <a:srgbClr val="2B403C"/>
-                </a:solidFill>
-                <a:latin typeface="Segoe UI" pitchFamily="34" charset="0"/>
-                <a:ea typeface="Segoe UI" pitchFamily="34" charset="-122"/>
-                <a:cs typeface="Segoe UI" pitchFamily="34" charset="-120"/>
-              </a:rPr>
-              <a:t>Signed-in, server-side chat history for teams.</a:t>
-            </a:r>
-            <a:endParaRPr lang="en-US" sz="1400" dirty="0"/>
-          </a:p>
-        </p:txBody>
-      </p:sp>
-      <p:sp>
-        <p:nvSpPr>
-          <p:cNvPr id="9" name="Shape 7"/>
+              <a:t>out-of-scope or hostile questions were answered</a:t>
+            </a:r>
+            <a:endParaRPr lang="en-US" sz="1300" dirty="0"/>
+          </a:p>
+        </p:txBody>
+      </p:sp>
+      <p:sp>
+        <p:nvSpPr>
+          <p:cNvPr id="7" name="Shape 5"/>
           <p:cNvSpPr/>
           <p:nvPr/>
         </p:nvSpPr>
         <p:spPr>
           <a:xfrm>
-            <a:off x="7883957" y="2057400"/>
-            <a:ext cx="0" cy="4023360"/>
+            <a:off x="731520" y="3474720"/>
+            <a:ext cx="4846320" cy="0"/>
           </a:xfrm>
           <a:prstGeom prst="line">
             <a:avLst/>
@@ -3395,14 +3286,14 @@
       </p:sp>
       <p:sp>
         <p:nvSpPr>
-          <p:cNvPr id="10" name="Text 8"/>
-          <p:cNvSpPr txBox="1"/>
-          <p:nvPr/>
-        </p:nvSpPr>
-        <p:spPr>
-          <a:xfrm>
-            <a:off x="8203997" y="2057400"/>
-            <a:ext cx="3119018" cy="411480"/>
+          <p:cNvPr id="8" name="Text 6"/>
+          <p:cNvSpPr txBox="1"/>
+          <p:nvPr/>
+        </p:nvSpPr>
+        <p:spPr>
+          <a:xfrm>
+            <a:off x="731520" y="3566160"/>
+            <a:ext cx="2103120" cy="1005840"/>
           </a:xfrm>
           <a:prstGeom prst="rect">
             <a:avLst/>
@@ -3418,7 +3309,434 @@
               <a:buNone/>
             </a:pPr>
             <a:r>
-              <a:rPr lang="en-US" sz="1800" dirty="0">
+              <a:rPr lang="en-US" sz="5000" dirty="0">
+                <a:solidFill>
+                  <a:srgbClr val="0E2F2B"/>
+                </a:solidFill>
+                <a:latin typeface="Segoe UI Light" pitchFamily="34" charset="0"/>
+                <a:ea typeface="Segoe UI Light" pitchFamily="34" charset="-122"/>
+                <a:cs typeface="Segoe UI Light" pitchFamily="34" charset="-120"/>
+              </a:rPr>
+              <a:t>260</a:t>
+            </a:r>
+            <a:endParaRPr lang="en-US" sz="5000" dirty="0"/>
+          </a:p>
+        </p:txBody>
+      </p:sp>
+      <p:sp>
+        <p:nvSpPr>
+          <p:cNvPr id="9" name="Text 7"/>
+          <p:cNvSpPr txBox="1"/>
+          <p:nvPr/>
+        </p:nvSpPr>
+        <p:spPr>
+          <a:xfrm>
+            <a:off x="2926080" y="3566160"/>
+            <a:ext cx="2651760" cy="1005840"/>
+          </a:xfrm>
+          <a:prstGeom prst="rect">
+            <a:avLst/>
+          </a:prstGeom>
+          <a:noFill/>
+          <a:ln/>
+        </p:spPr>
+        <p:txBody>
+          <a:bodyPr wrap="square" lIns="0" tIns="0" rIns="0" bIns="0" rtlCol="0" anchor="ctr"/>
+          <a:lstStyle/>
+          <a:p>
+            <a:pPr indent="0" marL="0">
+              <a:buNone/>
+            </a:pPr>
+            <a:r>
+              <a:rPr lang="en-US" sz="1300" b="1" dirty="0">
+                <a:solidFill>
+                  <a:srgbClr val="0E2F2B"/>
+                </a:solidFill>
+                <a:latin typeface="Segoe UI" pitchFamily="34" charset="0"/>
+                <a:ea typeface="Segoe UI" pitchFamily="34" charset="-122"/>
+                <a:cs typeface="Segoe UI" pitchFamily="34" charset="-120"/>
+              </a:rPr>
+              <a:t>of 260  </a:t>
+            </a:r>
+            <a:pPr indent="0" marL="0">
+              <a:buNone/>
+            </a:pPr>
+            <a:r>
+              <a:rPr lang="en-US" sz="1300" dirty="0">
+                <a:solidFill>
+                  <a:srgbClr val="2B403C"/>
+                </a:solidFill>
+                <a:latin typeface="Segoe UI" pitchFamily="34" charset="0"/>
+                <a:ea typeface="Segoe UI" pitchFamily="34" charset="-122"/>
+                <a:cs typeface="Segoe UI" pitchFamily="34" charset="-120"/>
+              </a:rPr>
+              <a:t>statements supported by a judge model</a:t>
+            </a:r>
+            <a:endParaRPr lang="en-US" sz="1300" dirty="0"/>
+          </a:p>
+        </p:txBody>
+      </p:sp>
+      <p:sp>
+        <p:nvSpPr>
+          <p:cNvPr id="10" name="Shape 8"/>
+          <p:cNvSpPr/>
+          <p:nvPr/>
+        </p:nvSpPr>
+        <p:spPr>
+          <a:xfrm>
+            <a:off x="731520" y="4846320"/>
+            <a:ext cx="4846320" cy="0"/>
+          </a:xfrm>
+          <a:prstGeom prst="line">
+            <a:avLst/>
+          </a:prstGeom>
+          <a:noFill/>
+          <a:ln w="9525">
+            <a:solidFill>
+              <a:srgbClr val="D8DFDB"/>
+            </a:solidFill>
+            <a:prstDash val="solid"/>
+          </a:ln>
+        </p:spPr>
+      </p:sp>
+      <p:sp>
+        <p:nvSpPr>
+          <p:cNvPr id="11" name="Text 9"/>
+          <p:cNvSpPr txBox="1"/>
+          <p:nvPr/>
+        </p:nvSpPr>
+        <p:spPr>
+          <a:xfrm>
+            <a:off x="731520" y="4937760"/>
+            <a:ext cx="2103120" cy="1005840"/>
+          </a:xfrm>
+          <a:prstGeom prst="rect">
+            <a:avLst/>
+          </a:prstGeom>
+          <a:noFill/>
+          <a:ln/>
+        </p:spPr>
+        <p:txBody>
+          <a:bodyPr wrap="square" lIns="0" tIns="0" rIns="0" bIns="0" rtlCol="0" anchor="ctr"/>
+          <a:lstStyle/>
+          <a:p>
+            <a:pPr indent="0" marL="0">
+              <a:buNone/>
+            </a:pPr>
+            <a:r>
+              <a:rPr lang="en-US" sz="5000" dirty="0">
+                <a:solidFill>
+                  <a:srgbClr val="0E2F2B"/>
+                </a:solidFill>
+                <a:latin typeface="Segoe UI Light" pitchFamily="34" charset="0"/>
+                <a:ea typeface="Segoe UI Light" pitchFamily="34" charset="-122"/>
+                <a:cs typeface="Segoe UI Light" pitchFamily="34" charset="-120"/>
+              </a:rPr>
+              <a:t>2.5 s</a:t>
+            </a:r>
+            <a:endParaRPr lang="en-US" sz="5000" dirty="0"/>
+          </a:p>
+        </p:txBody>
+      </p:sp>
+      <p:sp>
+        <p:nvSpPr>
+          <p:cNvPr id="12" name="Text 10"/>
+          <p:cNvSpPr txBox="1"/>
+          <p:nvPr/>
+        </p:nvSpPr>
+        <p:spPr>
+          <a:xfrm>
+            <a:off x="2926080" y="4937760"/>
+            <a:ext cx="2651760" cy="1005840"/>
+          </a:xfrm>
+          <a:prstGeom prst="rect">
+            <a:avLst/>
+          </a:prstGeom>
+          <a:noFill/>
+          <a:ln/>
+        </p:spPr>
+        <p:txBody>
+          <a:bodyPr wrap="square" lIns="0" tIns="0" rIns="0" bIns="0" rtlCol="0" anchor="ctr"/>
+          <a:lstStyle/>
+          <a:p>
+            <a:pPr indent="0" marL="0">
+              <a:buNone/>
+            </a:pPr>
+            <a:r>
+              <a:rPr lang="en-US" sz="1300" b="1" dirty="0">
+                <a:solidFill>
+                  <a:srgbClr val="0E2F2B"/>
+                </a:solidFill>
+                <a:latin typeface="Segoe UI" pitchFamily="34" charset="0"/>
+                <a:ea typeface="Segoe UI" pitchFamily="34" charset="-122"/>
+                <a:cs typeface="Segoe UI" pitchFamily="34" charset="-120"/>
+              </a:rPr>
+              <a:t>median  </a:t>
+            </a:r>
+            <a:pPr indent="0" marL="0">
+              <a:buNone/>
+            </a:pPr>
+            <a:r>
+              <a:rPr lang="en-US" sz="1300" dirty="0">
+                <a:solidFill>
+                  <a:srgbClr val="2B403C"/>
+                </a:solidFill>
+                <a:latin typeface="Segoe UI" pitchFamily="34" charset="0"/>
+                <a:ea typeface="Segoe UI" pitchFamily="34" charset="-122"/>
+                <a:cs typeface="Segoe UI" pitchFamily="34" charset="-120"/>
+              </a:rPr>
+              <a:t>to answer (6.9 s at the 95th percentile)</a:t>
+            </a:r>
+            <a:endParaRPr lang="en-US" sz="1300" dirty="0"/>
+          </a:p>
+        </p:txBody>
+      </p:sp>
+      <p:sp>
+        <p:nvSpPr>
+          <p:cNvPr id="13" name="Text 11"/>
+          <p:cNvSpPr txBox="1"/>
+          <p:nvPr/>
+        </p:nvSpPr>
+        <p:spPr>
+          <a:xfrm>
+            <a:off x="7818120" y="2057400"/>
+            <a:ext cx="3621024" cy="274320"/>
+          </a:xfrm>
+          <a:prstGeom prst="rect">
+            <a:avLst/>
+          </a:prstGeom>
+          <a:noFill/>
+          <a:ln/>
+        </p:spPr>
+        <p:txBody>
+          <a:bodyPr wrap="square" lIns="0" tIns="0" rIns="0" bIns="0" rtlCol="0" anchor="ctr"/>
+          <a:lstStyle/>
+          <a:p>
+            <a:pPr algn="ctr" indent="0" marL="0">
+              <a:buNone/>
+            </a:pPr>
+            <a:r>
+              <a:rPr lang="en-US" sz="1000" spc="200" kern="0" dirty="0">
+                <a:solidFill>
+                  <a:srgbClr val="6B7C78"/>
+                </a:solidFill>
+                <a:latin typeface="Segoe UI" pitchFamily="34" charset="0"/>
+                <a:ea typeface="Segoe UI" pitchFamily="34" charset="-122"/>
+                <a:cs typeface="Segoe UI" pitchFamily="34" charset="-120"/>
+              </a:rPr>
+              <a:t>WHAT IT DID</a:t>
+            </a:r>
+            <a:endParaRPr lang="en-US" sz="1000" dirty="0"/>
+          </a:p>
+        </p:txBody>
+      </p:sp>
+      <p:sp>
+        <p:nvSpPr>
+          <p:cNvPr id="14" name="Text 12"/>
+          <p:cNvSpPr txBox="1"/>
+          <p:nvPr/>
+        </p:nvSpPr>
+        <p:spPr>
+          <a:xfrm>
+            <a:off x="7818120" y="2286000"/>
+            <a:ext cx="1207008" cy="274320"/>
+          </a:xfrm>
+          <a:prstGeom prst="rect">
+            <a:avLst/>
+          </a:prstGeom>
+          <a:noFill/>
+          <a:ln/>
+        </p:spPr>
+        <p:txBody>
+          <a:bodyPr wrap="square" lIns="0" tIns="0" rIns="0" bIns="0" rtlCol="0" anchor="ctr"/>
+          <a:lstStyle/>
+          <a:p>
+            <a:pPr algn="ctr" indent="0" marL="0">
+              <a:buNone/>
+            </a:pPr>
+            <a:r>
+              <a:rPr lang="en-US" sz="1100" dirty="0">
+                <a:solidFill>
+                  <a:srgbClr val="2B403C"/>
+                </a:solidFill>
+                <a:latin typeface="Segoe UI" pitchFamily="34" charset="0"/>
+                <a:ea typeface="Segoe UI" pitchFamily="34" charset="-122"/>
+                <a:cs typeface="Segoe UI" pitchFamily="34" charset="-120"/>
+              </a:rPr>
+              <a:t>Answered</a:t>
+            </a:r>
+            <a:endParaRPr lang="en-US" sz="1100" dirty="0"/>
+          </a:p>
+        </p:txBody>
+      </p:sp>
+      <p:sp>
+        <p:nvSpPr>
+          <p:cNvPr id="15" name="Text 13"/>
+          <p:cNvSpPr txBox="1"/>
+          <p:nvPr/>
+        </p:nvSpPr>
+        <p:spPr>
+          <a:xfrm>
+            <a:off x="9025128" y="2286000"/>
+            <a:ext cx="1207008" cy="274320"/>
+          </a:xfrm>
+          <a:prstGeom prst="rect">
+            <a:avLst/>
+          </a:prstGeom>
+          <a:noFill/>
+          <a:ln/>
+        </p:spPr>
+        <p:txBody>
+          <a:bodyPr wrap="square" lIns="0" tIns="0" rIns="0" bIns="0" rtlCol="0" anchor="ctr"/>
+          <a:lstStyle/>
+          <a:p>
+            <a:pPr algn="ctr" indent="0" marL="0">
+              <a:buNone/>
+            </a:pPr>
+            <a:r>
+              <a:rPr lang="en-US" sz="1100" dirty="0">
+                <a:solidFill>
+                  <a:srgbClr val="2B403C"/>
+                </a:solidFill>
+                <a:latin typeface="Segoe UI" pitchFamily="34" charset="0"/>
+                <a:ea typeface="Segoe UI" pitchFamily="34" charset="-122"/>
+                <a:cs typeface="Segoe UI" pitchFamily="34" charset="-120"/>
+              </a:rPr>
+              <a:t>Asked</a:t>
+            </a:r>
+            <a:endParaRPr lang="en-US" sz="1100" dirty="0"/>
+          </a:p>
+        </p:txBody>
+      </p:sp>
+      <p:sp>
+        <p:nvSpPr>
+          <p:cNvPr id="16" name="Text 14"/>
+          <p:cNvSpPr txBox="1"/>
+          <p:nvPr/>
+        </p:nvSpPr>
+        <p:spPr>
+          <a:xfrm>
+            <a:off x="10232136" y="2286000"/>
+            <a:ext cx="1207008" cy="274320"/>
+          </a:xfrm>
+          <a:prstGeom prst="rect">
+            <a:avLst/>
+          </a:prstGeom>
+          <a:noFill/>
+          <a:ln/>
+        </p:spPr>
+        <p:txBody>
+          <a:bodyPr wrap="square" lIns="0" tIns="0" rIns="0" bIns="0" rtlCol="0" anchor="ctr"/>
+          <a:lstStyle/>
+          <a:p>
+            <a:pPr algn="ctr" indent="0" marL="0">
+              <a:buNone/>
+            </a:pPr>
+            <a:r>
+              <a:rPr lang="en-US" sz="1100" dirty="0">
+                <a:solidFill>
+                  <a:srgbClr val="2B403C"/>
+                </a:solidFill>
+                <a:latin typeface="Segoe UI" pitchFamily="34" charset="0"/>
+                <a:ea typeface="Segoe UI" pitchFamily="34" charset="-122"/>
+                <a:cs typeface="Segoe UI" pitchFamily="34" charset="-120"/>
+              </a:rPr>
+              <a:t>Refused</a:t>
+            </a:r>
+            <a:endParaRPr lang="en-US" sz="1100" dirty="0"/>
+          </a:p>
+        </p:txBody>
+      </p:sp>
+      <p:sp>
+        <p:nvSpPr>
+          <p:cNvPr id="17" name="Text 15"/>
+          <p:cNvSpPr txBox="1"/>
+          <p:nvPr/>
+        </p:nvSpPr>
+        <p:spPr>
+          <a:xfrm>
+            <a:off x="6492240" y="2606040"/>
+            <a:ext cx="1234440" cy="777240"/>
+          </a:xfrm>
+          <a:prstGeom prst="rect">
+            <a:avLst/>
+          </a:prstGeom>
+          <a:noFill/>
+          <a:ln/>
+        </p:spPr>
+        <p:txBody>
+          <a:bodyPr wrap="square" lIns="0" tIns="0" rIns="0" bIns="0" rtlCol="0" anchor="ctr"/>
+          <a:lstStyle/>
+          <a:p>
+            <a:pPr indent="0" marL="0">
+              <a:buNone/>
+            </a:pPr>
+            <a:r>
+              <a:rPr lang="en-US" sz="1100" dirty="0">
+                <a:solidFill>
+                  <a:srgbClr val="2B403C"/>
+                </a:solidFill>
+                <a:latin typeface="Segoe UI" pitchFamily="34" charset="0"/>
+                <a:ea typeface="Segoe UI" pitchFamily="34" charset="-122"/>
+                <a:cs typeface="Segoe UI" pitchFamily="34" charset="-120"/>
+              </a:rPr>
+              <a:t>Should answer (29)</a:t>
+            </a:r>
+            <a:endParaRPr lang="en-US" sz="1100" dirty="0"/>
+          </a:p>
+        </p:txBody>
+      </p:sp>
+      <p:sp>
+        <p:nvSpPr>
+          <p:cNvPr id="18" name="Shape 16"/>
+          <p:cNvSpPr/>
+          <p:nvPr/>
+        </p:nvSpPr>
+        <p:spPr>
+          <a:xfrm>
+            <a:off x="7818120" y="2606040"/>
+            <a:ext cx="1152144" cy="777240"/>
+          </a:xfrm>
+          <a:prstGeom prst="rect">
+            <a:avLst/>
+          </a:prstGeom>
+          <a:solidFill>
+            <a:srgbClr val="EEF7C9"/>
+          </a:solidFill>
+          <a:ln w="9525">
+            <a:solidFill>
+              <a:srgbClr val="D6F25C"/>
+            </a:solidFill>
+            <a:prstDash val="solid"/>
+          </a:ln>
+        </p:spPr>
+      </p:sp>
+      <p:sp>
+        <p:nvSpPr>
+          <p:cNvPr id="19" name="Text 17"/>
+          <p:cNvSpPr txBox="1"/>
+          <p:nvPr/>
+        </p:nvSpPr>
+        <p:spPr>
+          <a:xfrm>
+            <a:off x="7818120" y="2606040"/>
+            <a:ext cx="1152144" cy="777240"/>
+          </a:xfrm>
+          <a:prstGeom prst="rect">
+            <a:avLst/>
+          </a:prstGeom>
+          <a:noFill/>
+          <a:ln/>
+        </p:spPr>
+        <p:txBody>
+          <a:bodyPr wrap="square" lIns="0" tIns="0" rIns="0" bIns="0" rtlCol="0" anchor="ctr"/>
+          <a:lstStyle/>
+          <a:p>
+            <a:pPr algn="ctr" indent="0" marL="0">
+              <a:buNone/>
+            </a:pPr>
+            <a:r>
+              <a:rPr lang="en-US" sz="2800" dirty="0">
                 <a:solidFill>
                   <a:srgbClr val="0E2F2B"/>
                 </a:solidFill>
@@ -3426,42 +3744,166 @@
                 <a:ea typeface="Segoe UI Semibold" pitchFamily="34" charset="-122"/>
                 <a:cs typeface="Segoe UI Semibold" pitchFamily="34" charset="-120"/>
               </a:rPr>
-              <a:t>Who did what</a:t>
-            </a:r>
-            <a:endParaRPr lang="en-US" sz="1800" dirty="0"/>
-          </a:p>
-        </p:txBody>
-      </p:sp>
-      <p:sp>
-        <p:nvSpPr>
-          <p:cNvPr id="11" name="Text 9"/>
-          <p:cNvSpPr txBox="1"/>
-          <p:nvPr/>
-        </p:nvSpPr>
-        <p:spPr>
-          <a:xfrm>
-            <a:off x="8203997" y="2606040"/>
-            <a:ext cx="3073298" cy="3474720"/>
-          </a:xfrm>
-          <a:prstGeom prst="rect">
-            <a:avLst/>
-          </a:prstGeom>
-          <a:noFill/>
-          <a:ln/>
-        </p:spPr>
-        <p:txBody>
-          <a:bodyPr wrap="square" lIns="0" tIns="0" rIns="0" bIns="0" rtlCol="0" anchor="t"/>
-          <a:lstStyle/>
-          <a:p>
-            <a:pPr marL="177800" indent="-177800">
-              <a:spcAft>
-                <a:spcPts val="1300"/>
-              </a:spcAft>
-              <a:buSzPct val="100000"/>
-              <a:buChar char="•"/>
-            </a:pPr>
-            <a:r>
-              <a:rPr lang="en-US" sz="1400" dirty="0">
+              <a:t>27</a:t>
+            </a:r>
+            <a:endParaRPr lang="en-US" sz="2800" dirty="0"/>
+          </a:p>
+        </p:txBody>
+      </p:sp>
+      <p:sp>
+        <p:nvSpPr>
+          <p:cNvPr id="20" name="Shape 18"/>
+          <p:cNvSpPr/>
+          <p:nvPr/>
+        </p:nvSpPr>
+        <p:spPr>
+          <a:xfrm>
+            <a:off x="9025128" y="2606040"/>
+            <a:ext cx="1152144" cy="777240"/>
+          </a:xfrm>
+          <a:prstGeom prst="rect">
+            <a:avLst/>
+          </a:prstGeom>
+          <a:solidFill>
+            <a:srgbClr val="F7E3DE"/>
+          </a:solidFill>
+          <a:ln w="9525">
+            <a:solidFill>
+              <a:srgbClr val="E7B8AD"/>
+            </a:solidFill>
+            <a:prstDash val="solid"/>
+          </a:ln>
+        </p:spPr>
+      </p:sp>
+      <p:sp>
+        <p:nvSpPr>
+          <p:cNvPr id="21" name="Text 19"/>
+          <p:cNvSpPr txBox="1"/>
+          <p:nvPr/>
+        </p:nvSpPr>
+        <p:spPr>
+          <a:xfrm>
+            <a:off x="9025128" y="2606040"/>
+            <a:ext cx="1152144" cy="777240"/>
+          </a:xfrm>
+          <a:prstGeom prst="rect">
+            <a:avLst/>
+          </a:prstGeom>
+          <a:noFill/>
+          <a:ln/>
+        </p:spPr>
+        <p:txBody>
+          <a:bodyPr wrap="square" lIns="0" tIns="0" rIns="0" bIns="0" rtlCol="0" anchor="ctr"/>
+          <a:lstStyle/>
+          <a:p>
+            <a:pPr algn="ctr" indent="0" marL="0">
+              <a:buNone/>
+            </a:pPr>
+            <a:r>
+              <a:rPr lang="en-US" sz="2400" dirty="0">
+                <a:solidFill>
+                  <a:srgbClr val="B8452F"/>
+                </a:solidFill>
+                <a:latin typeface="Segoe UI Light" pitchFamily="34" charset="0"/>
+                <a:ea typeface="Segoe UI Light" pitchFamily="34" charset="-122"/>
+                <a:cs typeface="Segoe UI Light" pitchFamily="34" charset="-120"/>
+              </a:rPr>
+              <a:t>1</a:t>
+            </a:r>
+            <a:endParaRPr lang="en-US" sz="2400" dirty="0"/>
+          </a:p>
+        </p:txBody>
+      </p:sp>
+      <p:sp>
+        <p:nvSpPr>
+          <p:cNvPr id="22" name="Shape 20"/>
+          <p:cNvSpPr/>
+          <p:nvPr/>
+        </p:nvSpPr>
+        <p:spPr>
+          <a:xfrm>
+            <a:off x="10232136" y="2606040"/>
+            <a:ext cx="1152144" cy="777240"/>
+          </a:xfrm>
+          <a:prstGeom prst="rect">
+            <a:avLst/>
+          </a:prstGeom>
+          <a:solidFill>
+            <a:srgbClr val="F7E3DE"/>
+          </a:solidFill>
+          <a:ln w="9525">
+            <a:solidFill>
+              <a:srgbClr val="E7B8AD"/>
+            </a:solidFill>
+            <a:prstDash val="solid"/>
+          </a:ln>
+        </p:spPr>
+      </p:sp>
+      <p:sp>
+        <p:nvSpPr>
+          <p:cNvPr id="23" name="Text 21"/>
+          <p:cNvSpPr txBox="1"/>
+          <p:nvPr/>
+        </p:nvSpPr>
+        <p:spPr>
+          <a:xfrm>
+            <a:off x="10232136" y="2606040"/>
+            <a:ext cx="1152144" cy="777240"/>
+          </a:xfrm>
+          <a:prstGeom prst="rect">
+            <a:avLst/>
+          </a:prstGeom>
+          <a:noFill/>
+          <a:ln/>
+        </p:spPr>
+        <p:txBody>
+          <a:bodyPr wrap="square" lIns="0" tIns="0" rIns="0" bIns="0" rtlCol="0" anchor="ctr"/>
+          <a:lstStyle/>
+          <a:p>
+            <a:pPr algn="ctr" indent="0" marL="0">
+              <a:buNone/>
+            </a:pPr>
+            <a:r>
+              <a:rPr lang="en-US" sz="2400" dirty="0">
+                <a:solidFill>
+                  <a:srgbClr val="B8452F"/>
+                </a:solidFill>
+                <a:latin typeface="Segoe UI Light" pitchFamily="34" charset="0"/>
+                <a:ea typeface="Segoe UI Light" pitchFamily="34" charset="-122"/>
+                <a:cs typeface="Segoe UI Light" pitchFamily="34" charset="-120"/>
+              </a:rPr>
+              <a:t>1</a:t>
+            </a:r>
+            <a:endParaRPr lang="en-US" sz="2400" dirty="0"/>
+          </a:p>
+        </p:txBody>
+      </p:sp>
+      <p:sp>
+        <p:nvSpPr>
+          <p:cNvPr id="24" name="Text 22"/>
+          <p:cNvSpPr txBox="1"/>
+          <p:nvPr/>
+        </p:nvSpPr>
+        <p:spPr>
+          <a:xfrm>
+            <a:off x="6492240" y="3474720"/>
+            <a:ext cx="1234440" cy="777240"/>
+          </a:xfrm>
+          <a:prstGeom prst="rect">
+            <a:avLst/>
+          </a:prstGeom>
+          <a:noFill/>
+          <a:ln/>
+        </p:spPr>
+        <p:txBody>
+          <a:bodyPr wrap="square" lIns="0" tIns="0" rIns="0" bIns="0" rtlCol="0" anchor="ctr"/>
+          <a:lstStyle/>
+          <a:p>
+            <a:pPr indent="0" marL="0">
+              <a:buNone/>
+            </a:pPr>
+            <a:r>
+              <a:rPr lang="en-US" sz="1100" dirty="0">
                 <a:solidFill>
                   <a:srgbClr val="2B403C"/>
                 </a:solidFill>
@@ -3469,20 +3911,230 @@
                 <a:ea typeface="Segoe UI" pitchFamily="34" charset="-122"/>
                 <a:cs typeface="Segoe UI" pitchFamily="34" charset="-120"/>
               </a:rPr>
-              <a:t>AI-assisted: drafting the sample manual, scaffolding, boilerplate, UI code.</a:t>
-            </a:r>
-            <a:endParaRPr lang="en-US" sz="1400" dirty="0"/>
-          </a:p>
-          <a:p>
-            <a:pPr marL="177800" indent="-177800">
-              <a:spcAft>
-                <a:spcPts val="1300"/>
-              </a:spcAft>
-              <a:buSzPct val="100000"/>
-              <a:buChar char="•"/>
-            </a:pPr>
-            <a:r>
-              <a:rPr lang="en-US" sz="1400" dirty="0">
+              <a:t>Should ask (5)</a:t>
+            </a:r>
+            <a:endParaRPr lang="en-US" sz="1100" dirty="0"/>
+          </a:p>
+        </p:txBody>
+      </p:sp>
+      <p:sp>
+        <p:nvSpPr>
+          <p:cNvPr id="25" name="Shape 23"/>
+          <p:cNvSpPr/>
+          <p:nvPr/>
+        </p:nvSpPr>
+        <p:spPr>
+          <a:xfrm>
+            <a:off x="7818120" y="3474720"/>
+            <a:ext cx="1152144" cy="777240"/>
+          </a:xfrm>
+          <a:prstGeom prst="rect">
+            <a:avLst/>
+          </a:prstGeom>
+          <a:solidFill>
+            <a:srgbClr val="FFFFFF"/>
+          </a:solidFill>
+          <a:ln w="9525">
+            <a:solidFill>
+              <a:srgbClr val="D8DFDB"/>
+            </a:solidFill>
+            <a:prstDash val="solid"/>
+          </a:ln>
+        </p:spPr>
+      </p:sp>
+      <p:sp>
+        <p:nvSpPr>
+          <p:cNvPr id="26" name="Text 24"/>
+          <p:cNvSpPr txBox="1"/>
+          <p:nvPr/>
+        </p:nvSpPr>
+        <p:spPr>
+          <a:xfrm>
+            <a:off x="7818120" y="3474720"/>
+            <a:ext cx="1152144" cy="777240"/>
+          </a:xfrm>
+          <a:prstGeom prst="rect">
+            <a:avLst/>
+          </a:prstGeom>
+          <a:noFill/>
+          <a:ln/>
+        </p:spPr>
+        <p:txBody>
+          <a:bodyPr wrap="square" lIns="0" tIns="0" rIns="0" bIns="0" rtlCol="0" anchor="ctr"/>
+          <a:lstStyle/>
+          <a:p>
+            <a:pPr algn="ctr" indent="0" marL="0">
+              <a:buNone/>
+            </a:pPr>
+            <a:r>
+              <a:rPr lang="en-US" sz="2400" dirty="0">
+                <a:solidFill>
+                  <a:srgbClr val="6B7C78"/>
+                </a:solidFill>
+                <a:latin typeface="Segoe UI Light" pitchFamily="34" charset="0"/>
+                <a:ea typeface="Segoe UI Light" pitchFamily="34" charset="-122"/>
+                <a:cs typeface="Segoe UI Light" pitchFamily="34" charset="-120"/>
+              </a:rPr>
+              <a:t>0</a:t>
+            </a:r>
+            <a:endParaRPr lang="en-US" sz="2400" dirty="0"/>
+          </a:p>
+        </p:txBody>
+      </p:sp>
+      <p:sp>
+        <p:nvSpPr>
+          <p:cNvPr id="27" name="Shape 25"/>
+          <p:cNvSpPr/>
+          <p:nvPr/>
+        </p:nvSpPr>
+        <p:spPr>
+          <a:xfrm>
+            <a:off x="9025128" y="3474720"/>
+            <a:ext cx="1152144" cy="777240"/>
+          </a:xfrm>
+          <a:prstGeom prst="rect">
+            <a:avLst/>
+          </a:prstGeom>
+          <a:solidFill>
+            <a:srgbClr val="EEF7C9"/>
+          </a:solidFill>
+          <a:ln w="9525">
+            <a:solidFill>
+              <a:srgbClr val="D6F25C"/>
+            </a:solidFill>
+            <a:prstDash val="solid"/>
+          </a:ln>
+        </p:spPr>
+      </p:sp>
+      <p:sp>
+        <p:nvSpPr>
+          <p:cNvPr id="28" name="Text 26"/>
+          <p:cNvSpPr txBox="1"/>
+          <p:nvPr/>
+        </p:nvSpPr>
+        <p:spPr>
+          <a:xfrm>
+            <a:off x="9025128" y="3474720"/>
+            <a:ext cx="1152144" cy="777240"/>
+          </a:xfrm>
+          <a:prstGeom prst="rect">
+            <a:avLst/>
+          </a:prstGeom>
+          <a:noFill/>
+          <a:ln/>
+        </p:spPr>
+        <p:txBody>
+          <a:bodyPr wrap="square" lIns="0" tIns="0" rIns="0" bIns="0" rtlCol="0" anchor="ctr"/>
+          <a:lstStyle/>
+          <a:p>
+            <a:pPr algn="ctr" indent="0" marL="0">
+              <a:buNone/>
+            </a:pPr>
+            <a:r>
+              <a:rPr lang="en-US" sz="2800" dirty="0">
+                <a:solidFill>
+                  <a:srgbClr val="0E2F2B"/>
+                </a:solidFill>
+                <a:latin typeface="Segoe UI Semibold" pitchFamily="34" charset="0"/>
+                <a:ea typeface="Segoe UI Semibold" pitchFamily="34" charset="-122"/>
+                <a:cs typeface="Segoe UI Semibold" pitchFamily="34" charset="-120"/>
+              </a:rPr>
+              <a:t>2</a:t>
+            </a:r>
+            <a:endParaRPr lang="en-US" sz="2800" dirty="0"/>
+          </a:p>
+        </p:txBody>
+      </p:sp>
+      <p:sp>
+        <p:nvSpPr>
+          <p:cNvPr id="29" name="Shape 27"/>
+          <p:cNvSpPr/>
+          <p:nvPr/>
+        </p:nvSpPr>
+        <p:spPr>
+          <a:xfrm>
+            <a:off x="10232136" y="3474720"/>
+            <a:ext cx="1152144" cy="777240"/>
+          </a:xfrm>
+          <a:prstGeom prst="rect">
+            <a:avLst/>
+          </a:prstGeom>
+          <a:solidFill>
+            <a:srgbClr val="F7E3DE"/>
+          </a:solidFill>
+          <a:ln w="9525">
+            <a:solidFill>
+              <a:srgbClr val="E7B8AD"/>
+            </a:solidFill>
+            <a:prstDash val="solid"/>
+          </a:ln>
+        </p:spPr>
+      </p:sp>
+      <p:sp>
+        <p:nvSpPr>
+          <p:cNvPr id="30" name="Text 28"/>
+          <p:cNvSpPr txBox="1"/>
+          <p:nvPr/>
+        </p:nvSpPr>
+        <p:spPr>
+          <a:xfrm>
+            <a:off x="10232136" y="3474720"/>
+            <a:ext cx="1152144" cy="777240"/>
+          </a:xfrm>
+          <a:prstGeom prst="rect">
+            <a:avLst/>
+          </a:prstGeom>
+          <a:noFill/>
+          <a:ln/>
+        </p:spPr>
+        <p:txBody>
+          <a:bodyPr wrap="square" lIns="0" tIns="0" rIns="0" bIns="0" rtlCol="0" anchor="ctr"/>
+          <a:lstStyle/>
+          <a:p>
+            <a:pPr algn="ctr" indent="0" marL="0">
+              <a:buNone/>
+            </a:pPr>
+            <a:r>
+              <a:rPr lang="en-US" sz="2400" dirty="0">
+                <a:solidFill>
+                  <a:srgbClr val="B8452F"/>
+                </a:solidFill>
+                <a:latin typeface="Segoe UI Light" pitchFamily="34" charset="0"/>
+                <a:ea typeface="Segoe UI Light" pitchFamily="34" charset="-122"/>
+                <a:cs typeface="Segoe UI Light" pitchFamily="34" charset="-120"/>
+              </a:rPr>
+              <a:t>3</a:t>
+            </a:r>
+            <a:endParaRPr lang="en-US" sz="2400" dirty="0"/>
+          </a:p>
+        </p:txBody>
+      </p:sp>
+      <p:sp>
+        <p:nvSpPr>
+          <p:cNvPr id="31" name="Text 29"/>
+          <p:cNvSpPr txBox="1"/>
+          <p:nvPr/>
+        </p:nvSpPr>
+        <p:spPr>
+          <a:xfrm>
+            <a:off x="6492240" y="4343400"/>
+            <a:ext cx="1234440" cy="777240"/>
+          </a:xfrm>
+          <a:prstGeom prst="rect">
+            <a:avLst/>
+          </a:prstGeom>
+          <a:noFill/>
+          <a:ln/>
+        </p:spPr>
+        <p:txBody>
+          <a:bodyPr wrap="square" lIns="0" tIns="0" rIns="0" bIns="0" rtlCol="0" anchor="ctr"/>
+          <a:lstStyle/>
+          <a:p>
+            <a:pPr indent="0" marL="0">
+              <a:buNone/>
+            </a:pPr>
+            <a:r>
+              <a:rPr lang="en-US" sz="1100" dirty="0">
                 <a:solidFill>
                   <a:srgbClr val="2B403C"/>
                 </a:solidFill>
@@ -3490,20 +4142,230 @@
                 <a:ea typeface="Segoe UI" pitchFamily="34" charset="-122"/>
                 <a:cs typeface="Segoe UI" pitchFamily="34" charset="-120"/>
               </a:rPr>
-              <a:t>Mine: the architecture, the gate before the model, validation in code, thresholds, the three test sets, prompt rules, and review of every file.</a:t>
-            </a:r>
-            <a:endParaRPr lang="en-US" sz="1400" dirty="0"/>
-          </a:p>
-          <a:p>
-            <a:pPr marL="177800" indent="-177800">
-              <a:spcAft>
-                <a:spcPts val="1300"/>
-              </a:spcAft>
-              <a:buSzPct val="100000"/>
-              <a:buChar char="•"/>
-            </a:pPr>
-            <a:r>
-              <a:rPr lang="en-US" sz="1400" dirty="0">
+              <a:t>Should refuse (10)</a:t>
+            </a:r>
+            <a:endParaRPr lang="en-US" sz="1100" dirty="0"/>
+          </a:p>
+        </p:txBody>
+      </p:sp>
+      <p:sp>
+        <p:nvSpPr>
+          <p:cNvPr id="32" name="Shape 30"/>
+          <p:cNvSpPr/>
+          <p:nvPr/>
+        </p:nvSpPr>
+        <p:spPr>
+          <a:xfrm>
+            <a:off x="7818120" y="4343400"/>
+            <a:ext cx="1152144" cy="777240"/>
+          </a:xfrm>
+          <a:prstGeom prst="rect">
+            <a:avLst/>
+          </a:prstGeom>
+          <a:solidFill>
+            <a:srgbClr val="FFFFFF"/>
+          </a:solidFill>
+          <a:ln w="9525">
+            <a:solidFill>
+              <a:srgbClr val="D8DFDB"/>
+            </a:solidFill>
+            <a:prstDash val="solid"/>
+          </a:ln>
+        </p:spPr>
+      </p:sp>
+      <p:sp>
+        <p:nvSpPr>
+          <p:cNvPr id="33" name="Text 31"/>
+          <p:cNvSpPr txBox="1"/>
+          <p:nvPr/>
+        </p:nvSpPr>
+        <p:spPr>
+          <a:xfrm>
+            <a:off x="7818120" y="4343400"/>
+            <a:ext cx="1152144" cy="777240"/>
+          </a:xfrm>
+          <a:prstGeom prst="rect">
+            <a:avLst/>
+          </a:prstGeom>
+          <a:noFill/>
+          <a:ln/>
+        </p:spPr>
+        <p:txBody>
+          <a:bodyPr wrap="square" lIns="0" tIns="0" rIns="0" bIns="0" rtlCol="0" anchor="ctr"/>
+          <a:lstStyle/>
+          <a:p>
+            <a:pPr algn="ctr" indent="0" marL="0">
+              <a:buNone/>
+            </a:pPr>
+            <a:r>
+              <a:rPr lang="en-US" sz="2400" dirty="0">
+                <a:solidFill>
+                  <a:srgbClr val="6B7C78"/>
+                </a:solidFill>
+                <a:latin typeface="Segoe UI Light" pitchFamily="34" charset="0"/>
+                <a:ea typeface="Segoe UI Light" pitchFamily="34" charset="-122"/>
+                <a:cs typeface="Segoe UI Light" pitchFamily="34" charset="-120"/>
+              </a:rPr>
+              <a:t>0</a:t>
+            </a:r>
+            <a:endParaRPr lang="en-US" sz="2400" dirty="0"/>
+          </a:p>
+        </p:txBody>
+      </p:sp>
+      <p:sp>
+        <p:nvSpPr>
+          <p:cNvPr id="34" name="Shape 32"/>
+          <p:cNvSpPr/>
+          <p:nvPr/>
+        </p:nvSpPr>
+        <p:spPr>
+          <a:xfrm>
+            <a:off x="9025128" y="4343400"/>
+            <a:ext cx="1152144" cy="777240"/>
+          </a:xfrm>
+          <a:prstGeom prst="rect">
+            <a:avLst/>
+          </a:prstGeom>
+          <a:solidFill>
+            <a:srgbClr val="FFFFFF"/>
+          </a:solidFill>
+          <a:ln w="9525">
+            <a:solidFill>
+              <a:srgbClr val="D8DFDB"/>
+            </a:solidFill>
+            <a:prstDash val="solid"/>
+          </a:ln>
+        </p:spPr>
+      </p:sp>
+      <p:sp>
+        <p:nvSpPr>
+          <p:cNvPr id="35" name="Text 33"/>
+          <p:cNvSpPr txBox="1"/>
+          <p:nvPr/>
+        </p:nvSpPr>
+        <p:spPr>
+          <a:xfrm>
+            <a:off x="9025128" y="4343400"/>
+            <a:ext cx="1152144" cy="777240"/>
+          </a:xfrm>
+          <a:prstGeom prst="rect">
+            <a:avLst/>
+          </a:prstGeom>
+          <a:noFill/>
+          <a:ln/>
+        </p:spPr>
+        <p:txBody>
+          <a:bodyPr wrap="square" lIns="0" tIns="0" rIns="0" bIns="0" rtlCol="0" anchor="ctr"/>
+          <a:lstStyle/>
+          <a:p>
+            <a:pPr algn="ctr" indent="0" marL="0">
+              <a:buNone/>
+            </a:pPr>
+            <a:r>
+              <a:rPr lang="en-US" sz="2400" dirty="0">
+                <a:solidFill>
+                  <a:srgbClr val="6B7C78"/>
+                </a:solidFill>
+                <a:latin typeface="Segoe UI Light" pitchFamily="34" charset="0"/>
+                <a:ea typeface="Segoe UI Light" pitchFamily="34" charset="-122"/>
+                <a:cs typeface="Segoe UI Light" pitchFamily="34" charset="-120"/>
+              </a:rPr>
+              <a:t>0</a:t>
+            </a:r>
+            <a:endParaRPr lang="en-US" sz="2400" dirty="0"/>
+          </a:p>
+        </p:txBody>
+      </p:sp>
+      <p:sp>
+        <p:nvSpPr>
+          <p:cNvPr id="36" name="Shape 34"/>
+          <p:cNvSpPr/>
+          <p:nvPr/>
+        </p:nvSpPr>
+        <p:spPr>
+          <a:xfrm>
+            <a:off x="10232136" y="4343400"/>
+            <a:ext cx="1152144" cy="777240"/>
+          </a:xfrm>
+          <a:prstGeom prst="rect">
+            <a:avLst/>
+          </a:prstGeom>
+          <a:solidFill>
+            <a:srgbClr val="EEF7C9"/>
+          </a:solidFill>
+          <a:ln w="9525">
+            <a:solidFill>
+              <a:srgbClr val="D6F25C"/>
+            </a:solidFill>
+            <a:prstDash val="solid"/>
+          </a:ln>
+        </p:spPr>
+      </p:sp>
+      <p:sp>
+        <p:nvSpPr>
+          <p:cNvPr id="37" name="Text 35"/>
+          <p:cNvSpPr txBox="1"/>
+          <p:nvPr/>
+        </p:nvSpPr>
+        <p:spPr>
+          <a:xfrm>
+            <a:off x="10232136" y="4343400"/>
+            <a:ext cx="1152144" cy="777240"/>
+          </a:xfrm>
+          <a:prstGeom prst="rect">
+            <a:avLst/>
+          </a:prstGeom>
+          <a:noFill/>
+          <a:ln/>
+        </p:spPr>
+        <p:txBody>
+          <a:bodyPr wrap="square" lIns="0" tIns="0" rIns="0" bIns="0" rtlCol="0" anchor="ctr"/>
+          <a:lstStyle/>
+          <a:p>
+            <a:pPr algn="ctr" indent="0" marL="0">
+              <a:buNone/>
+            </a:pPr>
+            <a:r>
+              <a:rPr lang="en-US" sz="2800" dirty="0">
+                <a:solidFill>
+                  <a:srgbClr val="0E2F2B"/>
+                </a:solidFill>
+                <a:latin typeface="Segoe UI Semibold" pitchFamily="34" charset="0"/>
+                <a:ea typeface="Segoe UI Semibold" pitchFamily="34" charset="-122"/>
+                <a:cs typeface="Segoe UI Semibold" pitchFamily="34" charset="-120"/>
+              </a:rPr>
+              <a:t>10</a:t>
+            </a:r>
+            <a:endParaRPr lang="en-US" sz="2800" dirty="0"/>
+          </a:p>
+        </p:txBody>
+      </p:sp>
+      <p:sp>
+        <p:nvSpPr>
+          <p:cNvPr id="38" name="Text 36"/>
+          <p:cNvSpPr txBox="1"/>
+          <p:nvPr/>
+        </p:nvSpPr>
+        <p:spPr>
+          <a:xfrm>
+            <a:off x="6492240" y="5257800"/>
+            <a:ext cx="4946904" cy="822960"/>
+          </a:xfrm>
+          <a:prstGeom prst="rect">
+            <a:avLst/>
+          </a:prstGeom>
+          <a:noFill/>
+          <a:ln/>
+        </p:spPr>
+        <p:txBody>
+          <a:bodyPr wrap="square" lIns="0" tIns="0" rIns="0" bIns="0" rtlCol="0" anchor="t"/>
+          <a:lstStyle/>
+          <a:p>
+            <a:pPr indent="0" marL="0">
+              <a:buNone/>
+            </a:pPr>
+            <a:r>
+              <a:rPr lang="en-US" sz="1200" dirty="0">
                 <a:solidFill>
                   <a:srgbClr val="2B403C"/>
                 </a:solidFill>
@@ -3511,9 +4373,9 @@
                 <a:ea typeface="Segoe UI" pitchFamily="34" charset="-122"/>
                 <a:cs typeface="Segoe UI" pitchFamily="34" charset="-120"/>
               </a:rPr>
-              <a:t>Every number here comes from an evaluation report committed in the repository.</a:t>
-            </a:r>
-            <a:endParaRPr lang="en-US" sz="1400" dirty="0"/>
+              <a:t>Five misses: three very short vague messages (“the system seems down”) were told “not in KB” instead of being asked what is wrong, one question got follow-ups, and one was over-refused.</a:t>
+            </a:r>
+            <a:endParaRPr lang="en-US" sz="1200" dirty="0"/>
           </a:p>
         </p:txBody>
       </p:sp>
@@ -3592,14 +4454,14 @@
       </p:grpSpPr>
       <p:sp>
         <p:nvSpPr>
-          <p:cNvPr id="2" name="Text 0"/>
-          <p:cNvSpPr txBox="1"/>
-          <p:nvPr/>
-        </p:nvSpPr>
-        <p:spPr>
-          <a:xfrm>
-            <a:off x="731520" y="777240"/>
-            <a:ext cx="3657600" cy="274320"/>
+          <p:cNvPr id="2" name="eyebrow"/>
+          <p:cNvSpPr txBox="1"/>
+          <p:nvPr/>
+        </p:nvSpPr>
+        <p:spPr>
+          <a:xfrm>
+            <a:off x="731520" y="411480"/>
+            <a:ext cx="7315200" cy="274320"/>
           </a:xfrm>
           <a:prstGeom prst="rect">
             <a:avLst/>
@@ -3615,15 +4477,32 @@
               <a:buNone/>
             </a:pPr>
             <a:r>
-              <a:rPr lang="en-US" sz="1100" spc="200" kern="0" dirty="0">
-                <a:solidFill>
-                  <a:srgbClr val="6B7C78"/>
-                </a:solidFill>
+              <a:rPr lang="en-US" sz="1100" b="1" spc="200" kern="0" dirty="0">
+                <a:solidFill>
+                  <a:srgbClr val="0E2F2B"/>
+                </a:solidFill>
+                <a:highlight>
+                  <a:srgbClr val="D6F25C"/>
+                </a:highlight>
                 <a:latin typeface="Segoe UI" pitchFamily="34" charset="0"/>
                 <a:ea typeface="Segoe UI" pitchFamily="34" charset="-122"/>
                 <a:cs typeface="Segoe UI" pitchFamily="34" charset="-120"/>
               </a:rPr>
-              <a:t>THANK YOU</a:t>
+              <a:t> 10 </a:t>
+            </a:r>
+            <a:pPr indent="0" marL="0">
+              <a:buNone/>
+            </a:pPr>
+            <a:r>
+              <a:rPr lang="en-US" sz="1100" spc="200" kern="0" dirty="0">
+                <a:solidFill>
+                  <a:srgbClr val="6B7C78"/>
+                </a:solidFill>
+                <a:latin typeface="Segoe UI" pitchFamily="34" charset="0"/>
+                <a:ea typeface="Segoe UI" pitchFamily="34" charset="-122"/>
+                <a:cs typeface="Segoe UI" pitchFamily="34" charset="-120"/>
+              </a:rPr>
+              <a:t>   LIMITS, NEXT, AND WHO DID WHAT</a:t>
             </a:r>
             <a:endParaRPr lang="en-US" sz="1100" dirty="0"/>
           </a:p>
@@ -3631,14 +4510,16 @@
       </p:sp>
       <p:sp>
         <p:nvSpPr>
-          <p:cNvPr id="3" name="closing statement"/>
-          <p:cNvSpPr txBox="1"/>
-          <p:nvPr/>
-        </p:nvSpPr>
-        <p:spPr>
-          <a:xfrm>
-            <a:off x="731520" y="1691640"/>
-            <a:ext cx="6766560" cy="2926080"/>
+          <p:cNvPr id="3" name="Text 1"/>
+          <p:cNvSpPr/>
+          <p:nvPr>
+            <p:ph idx="101" type="title" hasCustomPrompt="1"/>
+          </p:nvPr>
+        </p:nvSpPr>
+        <p:spPr>
+          <a:xfrm>
+            <a:off x="731520" y="804672"/>
+            <a:ext cx="10728655" cy="822960"/>
           </a:xfrm>
           <a:prstGeom prst="rect">
             <a:avLst/>
@@ -3650,11 +4531,11 @@
           <a:bodyPr wrap="square" lIns="0" tIns="0" rIns="0" bIns="0" rtlCol="0" anchor="t"/>
           <a:lstStyle/>
           <a:p>
-            <a:pPr indent="0" marL="0">
-              <a:buNone/>
-            </a:pPr>
-            <a:r>
-              <a:rPr lang="en-US" sz="4600" dirty="0">
+            <a:pPr algn="l" indent="0" marL="0">
+              <a:buNone/>
+            </a:pPr>
+            <a:r>
+              <a:rPr lang="en-US" sz="3000" dirty="0">
                 <a:solidFill>
                   <a:srgbClr val="0E2F2B"/>
                 </a:solidFill>
@@ -3662,14 +4543,13 @@
                 <a:ea typeface="Segoe UI Semibold" pitchFamily="34" charset="-122"/>
                 <a:cs typeface="Segoe UI Semibold" pitchFamily="34" charset="-120"/>
               </a:rPr>
-              <a:t>The AI writes the answer.
-</a:t>
-            </a:r>
-            <a:pPr indent="0" marL="0">
-              <a:buNone/>
-            </a:pPr>
-            <a:r>
-              <a:rPr lang="en-US" sz="4600" dirty="0">
+              <a:t>Where it still breaks, and </a:t>
+            </a:r>
+            <a:pPr algn="l" indent="0" marL="0">
+              <a:buNone/>
+            </a:pPr>
+            <a:r>
+              <a:rPr lang="en-US" sz="3000" dirty="0">
                 <a:solidFill>
                   <a:srgbClr val="0E2F2B"/>
                 </a:solidFill>
@@ -3680,19 +4560,38 @@
                 <a:ea typeface="Segoe UI Semibold" pitchFamily="34" charset="-122"/>
                 <a:cs typeface="Segoe UI Semibold" pitchFamily="34" charset="-120"/>
               </a:rPr>
-              <a:t>It does not decide</a:t>
-            </a:r>
-            <a:pPr indent="0" marL="0">
-              <a:buNone/>
-            </a:pPr>
-            <a:endParaRPr lang="en-US" sz="4600" dirty="0"/>
-          </a:p>
-          <a:p>
-            <a:pPr indent="0" marL="0">
-              <a:buNone/>
-            </a:pPr>
-            <a:r>
-              <a:rPr lang="en-US" sz="4600" dirty="0">
+              <a:t>what comes next.</a:t>
+            </a:r>
+            <a:endParaRPr lang="en-US" sz="3000" dirty="0"/>
+          </a:p>
+        </p:txBody>
+      </p:sp>
+      <p:sp>
+        <p:nvSpPr>
+          <p:cNvPr id="4" name="Text 2"/>
+          <p:cNvSpPr txBox="1"/>
+          <p:nvPr/>
+        </p:nvSpPr>
+        <p:spPr>
+          <a:xfrm>
+            <a:off x="731520" y="2057400"/>
+            <a:ext cx="3119018" cy="411480"/>
+          </a:xfrm>
+          <a:prstGeom prst="rect">
+            <a:avLst/>
+          </a:prstGeom>
+          <a:noFill/>
+          <a:ln/>
+        </p:spPr>
+        <p:txBody>
+          <a:bodyPr wrap="square" lIns="0" tIns="0" rIns="0" bIns="0" rtlCol="0" anchor="ctr"/>
+          <a:lstStyle/>
+          <a:p>
+            <a:pPr indent="0" marL="0">
+              <a:buNone/>
+            </a:pPr>
+            <a:r>
+              <a:rPr lang="en-US" sz="1800" dirty="0">
                 <a:solidFill>
                   <a:srgbClr val="0E2F2B"/>
                 </a:solidFill>
@@ -3700,22 +4599,22 @@
                 <a:ea typeface="Segoe UI Semibold" pitchFamily="34" charset="-122"/>
                 <a:cs typeface="Segoe UI Semibold" pitchFamily="34" charset="-120"/>
               </a:rPr>
-              <a:t>what is true.</a:t>
-            </a:r>
-            <a:endParaRPr lang="en-US" sz="4600" dirty="0"/>
-          </a:p>
-        </p:txBody>
-      </p:sp>
-      <p:sp>
-        <p:nvSpPr>
-          <p:cNvPr id="4" name="Text 2"/>
-          <p:cNvSpPr txBox="1"/>
-          <p:nvPr/>
-        </p:nvSpPr>
-        <p:spPr>
-          <a:xfrm>
-            <a:off x="731520" y="4754880"/>
-            <a:ext cx="6035040" cy="822960"/>
+              <a:t>Still breaks</a:t>
+            </a:r>
+            <a:endParaRPr lang="en-US" sz="1800" dirty="0"/>
+          </a:p>
+        </p:txBody>
+      </p:sp>
+      <p:sp>
+        <p:nvSpPr>
+          <p:cNvPr id="5" name="Text 3"/>
+          <p:cNvSpPr txBox="1"/>
+          <p:nvPr/>
+        </p:nvSpPr>
+        <p:spPr>
+          <a:xfrm>
+            <a:off x="731520" y="2606040"/>
+            <a:ext cx="3073298" cy="3474720"/>
           </a:xfrm>
           <a:prstGeom prst="rect">
             <a:avLst/>
@@ -3727,58 +4626,124 @@
           <a:bodyPr wrap="square" lIns="0" tIns="0" rIns="0" bIns="0" rtlCol="0" anchor="t"/>
           <a:lstStyle/>
           <a:p>
-            <a:pPr indent="0" marL="0">
-              <a:buNone/>
-            </a:pPr>
-            <a:r>
-              <a:rPr lang="en-US" sz="1800" dirty="0">
+            <a:pPr marL="177800" indent="-177800">
+              <a:spcAft>
+                <a:spcPts val="1300"/>
+              </a:spcAft>
+              <a:buSzPct val="100000"/>
+              <a:buChar char="•"/>
+            </a:pPr>
+            <a:r>
+              <a:rPr lang="en-US" sz="1400" dirty="0">
                 <a:solidFill>
                   <a:srgbClr val="2B403C"/>
                 </a:solidFill>
-                <a:latin typeface="Segoe UI Light" pitchFamily="34" charset="0"/>
-                <a:ea typeface="Segoe UI Light" pitchFamily="34" charset="-122"/>
-                <a:cs typeface="Segoe UI Light" pitchFamily="34" charset="-120"/>
-              </a:rPr>
-              <a:t>Retrieval and code decide what the manual supports. The model writes it up, and code checks the result.</a:t>
-            </a:r>
-            <a:endParaRPr lang="en-US" sz="1800" dirty="0"/>
-          </a:p>
-        </p:txBody>
-      </p:sp>
-      <p:pic>
-        <p:nvPicPr>
-          <p:cNvPr id="5" name="Image 0" descr="QR code linking to the live demo">    </p:cNvPr>
-          <p:cNvPicPr>
-            <a:picLocks noChangeAspect="1"/>
-          </p:cNvPicPr>
-          <p:nvPr/>
-        </p:nvPicPr>
-        <p:blipFill>
-          <a:blip r:embed="rId1"/>
-          <a:stretch>
-            <a:fillRect/>
-          </a:stretch>
-        </p:blipFill>
-        <p:spPr>
-          <a:xfrm>
-            <a:off x="8092440" y="1600200"/>
-            <a:ext cx="2468880" cy="2468880"/>
-          </a:xfrm>
-          <a:prstGeom prst="rect">
-            <a:avLst/>
-          </a:prstGeom>
-        </p:spPr>
-      </p:pic>
-      <p:sp>
-        <p:nvSpPr>
-          <p:cNvPr id="6" name="Text 3"/>
-          <p:cNvSpPr txBox="1"/>
-          <p:nvPr/>
-        </p:nvSpPr>
-        <p:spPr>
-          <a:xfrm>
-            <a:off x="8092440" y="4206240"/>
-            <a:ext cx="2743200" cy="365760"/>
+                <a:latin typeface="Segoe UI" pitchFamily="34" charset="0"/>
+                <a:ea typeface="Segoe UI" pitchFamily="34" charset="-122"/>
+                <a:cs typeface="Segoe UI" pitchFamily="34" charset="-120"/>
+              </a:rPr>
+              <a:t>Very short vague messages are sometimes refused instead of questioned.</a:t>
+            </a:r>
+            <a:endParaRPr lang="en-US" sz="1400" dirty="0"/>
+          </a:p>
+          <a:p>
+            <a:pPr marL="177800" indent="-177800">
+              <a:spcAft>
+                <a:spcPts val="1300"/>
+              </a:spcAft>
+              <a:buSzPct val="100000"/>
+              <a:buChar char="•"/>
+            </a:pPr>
+            <a:r>
+              <a:rPr lang="en-US" sz="1400" dirty="0">
+                <a:solidFill>
+                  <a:srgbClr val="2B403C"/>
+                </a:solidFill>
+                <a:latin typeface="Segoe UI" pitchFamily="34" charset="0"/>
+                <a:ea typeface="Segoe UI" pitchFamily="34" charset="-122"/>
+                <a:cs typeface="Segoe UI" pitchFamily="34" charset="-120"/>
+              </a:rPr>
+              <a:t>The model can over-refuse a question the manual does cover.</a:t>
+            </a:r>
+            <a:endParaRPr lang="en-US" sz="1400" dirty="0"/>
+          </a:p>
+          <a:p>
+            <a:pPr marL="177800" indent="-177800">
+              <a:spcAft>
+                <a:spcPts val="1300"/>
+              </a:spcAft>
+              <a:buSzPct val="100000"/>
+              <a:buChar char="•"/>
+            </a:pPr>
+            <a:r>
+              <a:rPr lang="en-US" sz="1400" dirty="0">
+                <a:solidFill>
+                  <a:srgbClr val="2B403C"/>
+                </a:solidFill>
+                <a:latin typeface="Segoe UI" pitchFamily="34" charset="0"/>
+                <a:ea typeface="Segoe UI" pitchFamily="34" charset="-122"/>
+                <a:cs typeface="Segoe UI" pitchFamily="34" charset="-120"/>
+              </a:rPr>
+              <a:t>Small, one-author test sets. The sealed set is now spent.</a:t>
+            </a:r>
+            <a:endParaRPr lang="en-US" sz="1400" dirty="0"/>
+          </a:p>
+          <a:p>
+            <a:pPr marL="177800" indent="-177800">
+              <a:spcAft>
+                <a:spcPts val="1300"/>
+              </a:spcAft>
+              <a:buSzPct val="100000"/>
+              <a:buChar char="•"/>
+            </a:pPr>
+            <a:r>
+              <a:rPr lang="en-US" sz="1400" dirty="0">
+                <a:solidFill>
+                  <a:srgbClr val="2B403C"/>
+                </a:solidFill>
+                <a:latin typeface="Segoe UI" pitchFamily="34" charset="0"/>
+                <a:ea typeface="Segoe UI" pitchFamily="34" charset="-122"/>
+                <a:cs typeface="Segoe UI" pitchFamily="34" charset="-120"/>
+              </a:rPr>
+              <a:t>Free-tier daily limits ran out twice, so runs used different models.</a:t>
+            </a:r>
+            <a:endParaRPr lang="en-US" sz="1400" dirty="0"/>
+          </a:p>
+        </p:txBody>
+      </p:sp>
+      <p:sp>
+        <p:nvSpPr>
+          <p:cNvPr id="6" name="Shape 4"/>
+          <p:cNvSpPr/>
+          <p:nvPr/>
+        </p:nvSpPr>
+        <p:spPr>
+          <a:xfrm>
+            <a:off x="4307738" y="2057400"/>
+            <a:ext cx="0" cy="4023360"/>
+          </a:xfrm>
+          <a:prstGeom prst="line">
+            <a:avLst/>
+          </a:prstGeom>
+          <a:noFill/>
+          <a:ln w="9525">
+            <a:solidFill>
+              <a:srgbClr val="D8DFDB"/>
+            </a:solidFill>
+            <a:prstDash val="solid"/>
+          </a:ln>
+        </p:spPr>
+      </p:sp>
+      <p:sp>
+        <p:nvSpPr>
+          <p:cNvPr id="7" name="Text 5"/>
+          <p:cNvSpPr txBox="1"/>
+          <p:nvPr/>
+        </p:nvSpPr>
+        <p:spPr>
+          <a:xfrm>
+            <a:off x="4627778" y="2057400"/>
+            <a:ext cx="3119018" cy="411480"/>
           </a:xfrm>
           <a:prstGeom prst="rect">
             <a:avLst/>
@@ -3802,7 +4767,7 @@
                 <a:ea typeface="Segoe UI Semibold" pitchFamily="34" charset="-122"/>
                 <a:cs typeface="Segoe UI Semibold" pitchFamily="34" charset="-120"/>
               </a:rPr>
-              <a:t>Try it</a:t>
+              <a:t>Next</a:t>
             </a:r>
             <a:endParaRPr lang="en-US" sz="1800" dirty="0"/>
           </a:p>
@@ -3810,136 +4775,302 @@
       </p:sp>
       <p:sp>
         <p:nvSpPr>
-          <p:cNvPr id="7" name="Text 4">
-            <a:hlinkClick r:id="rId2" tooltip=""/>
-          </p:cNvPr>
-          <p:cNvSpPr txBox="1"/>
-          <p:nvPr/>
-        </p:nvSpPr>
-        <p:spPr>
-          <a:xfrm>
-            <a:off x="8092440" y="4617720"/>
-            <a:ext cx="3383280" cy="274320"/>
-          </a:xfrm>
-          <a:prstGeom prst="rect">
-            <a:avLst/>
-          </a:prstGeom>
-          <a:noFill/>
-          <a:ln/>
-        </p:spPr>
-        <p:txBody>
-          <a:bodyPr wrap="square" lIns="0" tIns="0" rIns="0" bIns="0" rtlCol="0" anchor="ctr"/>
-          <a:lstStyle/>
-          <a:p>
-            <a:pPr indent="0" marL="0">
-              <a:buNone/>
-            </a:pPr>
-            <a:r>
-              <a:rPr lang="en-US" sz="1200" u="sng" dirty="0">
-                <a:solidFill>
-                  <a:srgbClr val="1E6B58"/>
-                </a:solidFill>
-                <a:latin typeface="Consolas" pitchFamily="34" charset="0"/>
-                <a:ea typeface="Consolas" pitchFamily="34" charset="-122"/>
-                <a:cs typeface="Consolas" pitchFamily="34" charset="-120"/>
-                <a:hlinkClick r:id="rId2" invalidUrl="" action="" tgtFrame="" tooltip="" history="1" highlightClick="0" endSnd="0">
-                  <a:extLst>
-                    <a:ext uri="{A12FA001-AC4F-418D-AE19-62706E023703}">
-                      <ahyp:hlinkClr xmlns:ahyp="http://schemas.microsoft.com/office/drawing/2018/hyperlinkcolor" val="tx"/>
-                    </a:ext>
-                  </a:extLst>
-                </a:hlinkClick>
-              </a:rPr>
-              <a:t>triage-gpt-seven.vercel.app</a:t>
-            </a:r>
-            <a:endParaRPr lang="en-US" sz="1200" dirty="0"/>
-          </a:p>
-        </p:txBody>
-      </p:sp>
-      <p:sp>
-        <p:nvSpPr>
-          <p:cNvPr id="8" name="Text 5">
-            <a:hlinkClick r:id="rId3" tooltip=""/>
-          </p:cNvPr>
-          <p:cNvSpPr txBox="1"/>
-          <p:nvPr/>
-        </p:nvSpPr>
-        <p:spPr>
-          <a:xfrm>
-            <a:off x="8092440" y="4937760"/>
-            <a:ext cx="3931920" cy="274320"/>
-          </a:xfrm>
-          <a:prstGeom prst="rect">
-            <a:avLst/>
-          </a:prstGeom>
-          <a:noFill/>
-          <a:ln/>
-        </p:spPr>
-        <p:txBody>
-          <a:bodyPr wrap="square" lIns="0" tIns="0" rIns="0" bIns="0" rtlCol="0" anchor="ctr"/>
-          <a:lstStyle/>
-          <a:p>
-            <a:pPr indent="0" marL="0">
-              <a:buNone/>
-            </a:pPr>
-            <a:r>
-              <a:rPr lang="en-US" sz="900" u="sng" dirty="0">
-                <a:solidFill>
-                  <a:srgbClr val="6B7C78"/>
-                </a:solidFill>
-                <a:latin typeface="Consolas" pitchFamily="34" charset="0"/>
-                <a:ea typeface="Consolas" pitchFamily="34" charset="-122"/>
-                <a:cs typeface="Consolas" pitchFamily="34" charset="-120"/>
-                <a:hlinkClick r:id="rId3" invalidUrl="" action="" tgtFrame="" tooltip="" history="1" highlightClick="0" endSnd="0">
-                  <a:extLst>
-                    <a:ext uri="{A12FA001-AC4F-418D-AE19-62706E023703}">
-                      <ahyp:hlinkClr xmlns:ahyp="http://schemas.microsoft.com/office/drawing/2018/hyperlinkcolor" val="tx"/>
-                    </a:ext>
-                  </a:extLst>
-                </a:hlinkClick>
-              </a:rPr>
-              <a:t>github.com/ParthBiyani/AI-Troubleshooting-Assistant</a:t>
-            </a:r>
-            <a:endParaRPr lang="en-US" sz="900" dirty="0"/>
-          </a:p>
-        </p:txBody>
-      </p:sp>
-      <p:sp>
-        <p:nvSpPr>
-          <p:cNvPr id="9" name="Text 6"/>
-          <p:cNvSpPr txBox="1"/>
-          <p:nvPr/>
-        </p:nvSpPr>
-        <p:spPr>
-          <a:xfrm>
-            <a:off x="731520" y="6263640"/>
-            <a:ext cx="6400800" cy="274320"/>
-          </a:xfrm>
-          <a:prstGeom prst="rect">
-            <a:avLst/>
-          </a:prstGeom>
-          <a:noFill/>
-          <a:ln/>
-        </p:spPr>
-        <p:txBody>
-          <a:bodyPr wrap="square" lIns="0" tIns="0" rIns="0" bIns="0" rtlCol="0" anchor="ctr"/>
-          <a:lstStyle/>
-          <a:p>
-            <a:pPr indent="0" marL="0">
-              <a:buNone/>
-            </a:pPr>
-            <a:r>
-              <a:rPr lang="en-US" sz="1000" dirty="0">
-                <a:solidFill>
-                  <a:srgbClr val="6B7C78"/>
+          <p:cNvPr id="8" name="Text 6"/>
+          <p:cNvSpPr txBox="1"/>
+          <p:nvPr/>
+        </p:nvSpPr>
+        <p:spPr>
+          <a:xfrm>
+            <a:off x="4627778" y="2606040"/>
+            <a:ext cx="3073298" cy="3474720"/>
+          </a:xfrm>
+          <a:prstGeom prst="rect">
+            <a:avLst/>
+          </a:prstGeom>
+          <a:noFill/>
+          <a:ln/>
+        </p:spPr>
+        <p:txBody>
+          <a:bodyPr wrap="square" lIns="0" tIns="0" rIns="0" bIns="0" rtlCol="0" anchor="t"/>
+          <a:lstStyle/>
+          <a:p>
+            <a:pPr marL="177800" indent="-177800">
+              <a:spcAft>
+                <a:spcPts val="1300"/>
+              </a:spcAft>
+              <a:buSzPct val="100000"/>
+              <a:buChar char="•"/>
+            </a:pPr>
+            <a:r>
+              <a:rPr lang="en-US" sz="1400" dirty="0">
+                <a:solidFill>
+                  <a:srgbClr val="2B403C"/>
                 </a:solidFill>
                 <a:latin typeface="Segoe UI" pitchFamily="34" charset="0"/>
                 <a:ea typeface="Segoe UI" pitchFamily="34" charset="-122"/>
                 <a:cs typeface="Segoe UI" pitchFamily="34" charset="-120"/>
               </a:rPr>
-              <a:t>Sample data: Northwind Payments is a fictional company.</a:t>
-            </a:r>
-            <a:endParaRPr lang="en-US" sz="1000" dirty="0"/>
+              <a:t>A cross-encoder re-ranker for the short, vague messages.</a:t>
+            </a:r>
+            <a:endParaRPr lang="en-US" sz="1400" dirty="0"/>
+          </a:p>
+          <a:p>
+            <a:pPr marL="177800" indent="-177800">
+              <a:spcAft>
+                <a:spcPts val="1300"/>
+              </a:spcAft>
+              <a:buSzPct val="100000"/>
+              <a:buChar char="•"/>
+            </a:pPr>
+            <a:r>
+              <a:rPr lang="en-US" sz="1400" dirty="0">
+                <a:solidFill>
+                  <a:srgbClr val="2B403C"/>
+                </a:solidFill>
+                <a:latin typeface="Segoe UI" pitchFamily="34" charset="0"/>
+                <a:ea typeface="Segoe UI" pitchFamily="34" charset="-122"/>
+                <a:cs typeface="Segoe UI" pitchFamily="34" charset="-120"/>
+              </a:rPr>
+              <a:t>A bigger labelled set with a proper train and test split.</a:t>
+            </a:r>
+            <a:endParaRPr lang="en-US" sz="1400" dirty="0"/>
+          </a:p>
+          <a:p>
+            <a:pPr marL="177800" indent="-177800">
+              <a:spcAft>
+                <a:spcPts val="1300"/>
+              </a:spcAft>
+              <a:buSzPct val="100000"/>
+              <a:buChar char="•"/>
+            </a:pPr>
+            <a:r>
+              <a:rPr lang="en-US" sz="1400" dirty="0">
+                <a:solidFill>
+                  <a:srgbClr val="2B403C"/>
+                </a:solidFill>
+                <a:latin typeface="Segoe UI" pitchFamily="34" charset="0"/>
+                <a:ea typeface="Segoe UI" pitchFamily="34" charset="-122"/>
+                <a:cs typeface="Segoe UI" pitchFamily="34" charset="-120"/>
+              </a:rPr>
+              <a:t>A feedback button that files a ticket against the cited entry.</a:t>
+            </a:r>
+            <a:endParaRPr lang="en-US" sz="1400" dirty="0"/>
+          </a:p>
+          <a:p>
+            <a:pPr marL="177800" indent="-177800">
+              <a:spcAft>
+                <a:spcPts val="1300"/>
+              </a:spcAft>
+              <a:buSzPct val="100000"/>
+              <a:buChar char="•"/>
+            </a:pPr>
+            <a:r>
+              <a:rPr lang="en-US" sz="1400" dirty="0">
+                <a:solidFill>
+                  <a:srgbClr val="2B403C"/>
+                </a:solidFill>
+                <a:latin typeface="Segoe UI" pitchFamily="34" charset="0"/>
+                <a:ea typeface="Segoe UI" pitchFamily="34" charset="-122"/>
+                <a:cs typeface="Segoe UI" pitchFamily="34" charset="-120"/>
+              </a:rPr>
+              <a:t>Signed-in, server-side chat history for teams.</a:t>
+            </a:r>
+            <a:endParaRPr lang="en-US" sz="1400" dirty="0"/>
+          </a:p>
+        </p:txBody>
+      </p:sp>
+      <p:sp>
+        <p:nvSpPr>
+          <p:cNvPr id="9" name="Shape 7"/>
+          <p:cNvSpPr/>
+          <p:nvPr/>
+        </p:nvSpPr>
+        <p:spPr>
+          <a:xfrm>
+            <a:off x="7883957" y="2057400"/>
+            <a:ext cx="0" cy="4023360"/>
+          </a:xfrm>
+          <a:prstGeom prst="line">
+            <a:avLst/>
+          </a:prstGeom>
+          <a:noFill/>
+          <a:ln w="9525">
+            <a:solidFill>
+              <a:srgbClr val="D8DFDB"/>
+            </a:solidFill>
+            <a:prstDash val="solid"/>
+          </a:ln>
+        </p:spPr>
+      </p:sp>
+      <p:sp>
+        <p:nvSpPr>
+          <p:cNvPr id="10" name="Text 8"/>
+          <p:cNvSpPr txBox="1"/>
+          <p:nvPr/>
+        </p:nvSpPr>
+        <p:spPr>
+          <a:xfrm>
+            <a:off x="8203997" y="2057400"/>
+            <a:ext cx="3119018" cy="411480"/>
+          </a:xfrm>
+          <a:prstGeom prst="rect">
+            <a:avLst/>
+          </a:prstGeom>
+          <a:noFill/>
+          <a:ln/>
+        </p:spPr>
+        <p:txBody>
+          <a:bodyPr wrap="square" lIns="0" tIns="0" rIns="0" bIns="0" rtlCol="0" anchor="ctr"/>
+          <a:lstStyle/>
+          <a:p>
+            <a:pPr indent="0" marL="0">
+              <a:buNone/>
+            </a:pPr>
+            <a:r>
+              <a:rPr lang="en-US" sz="1800" dirty="0">
+                <a:solidFill>
+                  <a:srgbClr val="0E2F2B"/>
+                </a:solidFill>
+                <a:latin typeface="Segoe UI Semibold" pitchFamily="34" charset="0"/>
+                <a:ea typeface="Segoe UI Semibold" pitchFamily="34" charset="-122"/>
+                <a:cs typeface="Segoe UI Semibold" pitchFamily="34" charset="-120"/>
+              </a:rPr>
+              <a:t>Who did what</a:t>
+            </a:r>
+            <a:endParaRPr lang="en-US" sz="1800" dirty="0"/>
+          </a:p>
+        </p:txBody>
+      </p:sp>
+      <p:sp>
+        <p:nvSpPr>
+          <p:cNvPr id="11" name="Text 9"/>
+          <p:cNvSpPr txBox="1"/>
+          <p:nvPr/>
+        </p:nvSpPr>
+        <p:spPr>
+          <a:xfrm>
+            <a:off x="8203997" y="2606040"/>
+            <a:ext cx="3073298" cy="3474720"/>
+          </a:xfrm>
+          <a:prstGeom prst="rect">
+            <a:avLst/>
+          </a:prstGeom>
+          <a:noFill/>
+          <a:ln/>
+        </p:spPr>
+        <p:txBody>
+          <a:bodyPr wrap="square" lIns="0" tIns="0" rIns="0" bIns="0" rtlCol="0" anchor="t"/>
+          <a:lstStyle/>
+          <a:p>
+            <a:pPr marL="177800" indent="-177800">
+              <a:spcAft>
+                <a:spcPts val="1300"/>
+              </a:spcAft>
+              <a:buSzPct val="100000"/>
+              <a:buChar char="•"/>
+            </a:pPr>
+            <a:r>
+              <a:rPr lang="en-US" sz="1400" dirty="0">
+                <a:solidFill>
+                  <a:srgbClr val="2B403C"/>
+                </a:solidFill>
+                <a:latin typeface="Segoe UI" pitchFamily="34" charset="0"/>
+                <a:ea typeface="Segoe UI" pitchFamily="34" charset="-122"/>
+                <a:cs typeface="Segoe UI" pitchFamily="34" charset="-120"/>
+              </a:rPr>
+              <a:t>AI-assisted: drafting the sample manual, scaffolding, boilerplate, UI code.</a:t>
+            </a:r>
+            <a:endParaRPr lang="en-US" sz="1400" dirty="0"/>
+          </a:p>
+          <a:p>
+            <a:pPr marL="177800" indent="-177800">
+              <a:spcAft>
+                <a:spcPts val="1300"/>
+              </a:spcAft>
+              <a:buSzPct val="100000"/>
+              <a:buChar char="•"/>
+            </a:pPr>
+            <a:r>
+              <a:rPr lang="en-US" sz="1400" dirty="0">
+                <a:solidFill>
+                  <a:srgbClr val="2B403C"/>
+                </a:solidFill>
+                <a:latin typeface="Segoe UI" pitchFamily="34" charset="0"/>
+                <a:ea typeface="Segoe UI" pitchFamily="34" charset="-122"/>
+                <a:cs typeface="Segoe UI" pitchFamily="34" charset="-120"/>
+              </a:rPr>
+              <a:t>Mine: the architecture, the gate before the model, validation in code, thresholds, the three test sets, prompt rules, and review of every file.</a:t>
+            </a:r>
+            <a:endParaRPr lang="en-US" sz="1400" dirty="0"/>
+          </a:p>
+          <a:p>
+            <a:pPr marL="177800" indent="-177800">
+              <a:spcAft>
+                <a:spcPts val="1300"/>
+              </a:spcAft>
+              <a:buSzPct val="100000"/>
+              <a:buChar char="•"/>
+            </a:pPr>
+            <a:r>
+              <a:rPr lang="en-US" sz="1400" dirty="0">
+                <a:solidFill>
+                  <a:srgbClr val="2B403C"/>
+                </a:solidFill>
+                <a:latin typeface="Segoe UI" pitchFamily="34" charset="0"/>
+                <a:ea typeface="Segoe UI" pitchFamily="34" charset="-122"/>
+                <a:cs typeface="Segoe UI" pitchFamily="34" charset="-120"/>
+              </a:rPr>
+              <a:t>Every number here comes from an evaluation report committed in the repository.</a:t>
+            </a:r>
+            <a:endParaRPr lang="en-US" sz="1400" dirty="0"/>
+          </a:p>
+        </p:txBody>
+      </p:sp>
+      <p:sp>
+        <p:nvSpPr>
+          <p:cNvPr id="25" name="Slide Number Placeholder 0"/>
+          <p:cNvSpPr>
+            <a:spLocks noGrp="1"/>
+          </p:cNvSpPr>
+          <p:nvPr>
+            <p:ph type="sldNum" sz="quarter" idx="4294967295"/>
+          </p:nvPr>
+        </p:nvSpPr>
+        <p:spPr>
+          <a:xfrm>
+            <a:off x="10835640" y="6419088"/>
+            <a:ext cx="640080" cy="274320"/>
+          </a:xfrm>
+          <a:prstGeom prst="rect">
+            <a:avLst/>
+          </a:prstGeom>
+          <a:extLst>
+            <a:ext uri="{C572A759-6A51-4108-AA02-DFA0A04FC94B}">
+              <ma14:wrappingTextBoxFlag xmlns:ma14="http://schemas.microsoft.com/office/mac/drawingml/2011/main" val="0"/>
+            </a:ext>
+          </a:extLst>
+        </p:spPr>
+        <p:txBody>
+          <a:bodyPr/>
+          <a:lstStyle>
+            <a:lvl1pPr>
+              <a:defRPr sz="1000">
+                <a:solidFill>
+                  <a:srgbClr val="6B7C78"/>
+                </a:solidFill>
+                <a:latin typeface="Segoe UI"/>
+                <a:ea typeface="Segoe UI"/>
+                <a:cs typeface="Segoe UI"/>
+              </a:defRPr>
+            </a:lvl1pPr>
+          </a:lstStyle>
+          <a:p>
+            <a:pPr algn="r"/>
+            <a:fld id="{F7021451-1387-4CA6-816F-3879F97B5CBC}" type="slidenum">
+              <a:rPr b="0" lang="en-US"/>
+              <a:t>11</a:t>
+            </a:fld>
+            <a:endParaRPr lang="en-US"/>
           </a:p>
         </p:txBody>
       </p:sp>
@@ -3976,8 +5107,8 @@
         </p:nvSpPr>
         <p:spPr>
           <a:xfrm>
-            <a:off x="731520" y="411480"/>
-            <a:ext cx="7315200" cy="274320"/>
+            <a:off x="731520" y="777240"/>
+            <a:ext cx="3657600" cy="274320"/>
           </a:xfrm>
           <a:prstGeom prst="rect">
             <a:avLst/>
@@ -3993,32 +5124,15 @@
               <a:buNone/>
             </a:pPr>
             <a:r>
-              <a:rPr lang="en-US" sz="1100" b="1" spc="200" kern="0" dirty="0">
-                <a:solidFill>
-                  <a:srgbClr val="0E2F2B"/>
-                </a:solidFill>
-                <a:highlight>
-                  <a:srgbClr val="D6F25C"/>
-                </a:highlight>
+              <a:rPr lang="en-US" sz="1100" spc="200" kern="0" dirty="0">
+                <a:solidFill>
+                  <a:srgbClr val="6B7C78"/>
+                </a:solidFill>
                 <a:latin typeface="Segoe UI" pitchFamily="34" charset="0"/>
                 <a:ea typeface="Segoe UI" pitchFamily="34" charset="-122"/>
                 <a:cs typeface="Segoe UI" pitchFamily="34" charset="-120"/>
               </a:rPr>
-              <a:t> A </a:t>
-            </a:r>
-            <a:pPr indent="0" marL="0">
-              <a:buNone/>
-            </a:pPr>
-            <a:r>
-              <a:rPr lang="en-US" sz="1100" spc="200" kern="0" dirty="0">
-                <a:solidFill>
-                  <a:srgbClr val="6B7C78"/>
-                </a:solidFill>
-                <a:latin typeface="Segoe UI" pitchFamily="34" charset="0"/>
-                <a:ea typeface="Segoe UI" pitchFamily="34" charset="-122"/>
-                <a:cs typeface="Segoe UI" pitchFamily="34" charset="-120"/>
-              </a:rPr>
-              <a:t>   APPENDIX  ·  RETRIEVAL</a:t>
+              <a:t>THANK YOU</a:t>
             </a:r>
             <a:endParaRPr lang="en-US" sz="1100" dirty="0"/>
           </a:p>
@@ -4026,16 +5140,14 @@
       </p:sp>
       <p:sp>
         <p:nvSpPr>
-          <p:cNvPr id="3" name="Text 1"/>
-          <p:cNvSpPr/>
-          <p:nvPr>
-            <p:ph idx="101" type="title" hasCustomPrompt="1"/>
-          </p:nvPr>
-        </p:nvSpPr>
-        <p:spPr>
-          <a:xfrm>
-            <a:off x="731520" y="804672"/>
-            <a:ext cx="10728655" cy="822960"/>
+          <p:cNvPr id="3" name="closing statement"/>
+          <p:cNvSpPr txBox="1"/>
+          <p:nvPr/>
+        </p:nvSpPr>
+        <p:spPr>
+          <a:xfrm>
+            <a:off x="731520" y="1691640"/>
+            <a:ext cx="6766560" cy="2926080"/>
           </a:xfrm>
           <a:prstGeom prst="rect">
             <a:avLst/>
@@ -4047,11 +5159,11 @@
           <a:bodyPr wrap="square" lIns="0" tIns="0" rIns="0" bIns="0" rtlCol="0" anchor="t"/>
           <a:lstStyle/>
           <a:p>
-            <a:pPr algn="l" indent="0" marL="0">
-              <a:buNone/>
-            </a:pPr>
-            <a:r>
-              <a:rPr lang="en-US" sz="3000" dirty="0">
+            <a:pPr indent="0" marL="0">
+              <a:buNone/>
+            </a:pPr>
+            <a:r>
+              <a:rPr lang="en-US" sz="4600" dirty="0">
                 <a:solidFill>
                   <a:srgbClr val="0E2F2B"/>
                 </a:solidFill>
@@ -4059,13 +5171,14 @@
                 <a:ea typeface="Segoe UI Semibold" pitchFamily="34" charset="-122"/>
                 <a:cs typeface="Segoe UI Semibold" pitchFamily="34" charset="-120"/>
               </a:rPr>
-              <a:t>Hybrid search is robust, </a:t>
-            </a:r>
-            <a:pPr algn="l" indent="0" marL="0">
-              <a:buNone/>
-            </a:pPr>
-            <a:r>
-              <a:rPr lang="en-US" sz="3000" dirty="0">
+              <a:t>The AI writes the answer.
+</a:t>
+            </a:r>
+            <a:pPr indent="0" marL="0">
+              <a:buNone/>
+            </a:pPr>
+            <a:r>
+              <a:rPr lang="en-US" sz="4600" dirty="0">
                 <a:solidFill>
                   <a:srgbClr val="0E2F2B"/>
                 </a:solidFill>
@@ -4076,38 +5189,105 @@
                 <a:ea typeface="Segoe UI Semibold" pitchFamily="34" charset="-122"/>
                 <a:cs typeface="Segoe UI Semibold" pitchFamily="34" charset="-120"/>
               </a:rPr>
-              <a:t>not a clear win at rank one.</a:t>
-            </a:r>
-            <a:endParaRPr lang="en-US" sz="3000" dirty="0"/>
-          </a:p>
-        </p:txBody>
-      </p:sp>
-      <p:graphicFrame>
-        <p:nvGraphicFramePr>
-          <p:cNvPr id="4" name="Chart 0" descr=""/>
-          <p:cNvGraphicFramePr/>
-          <p:nvPr/>
-        </p:nvGraphicFramePr>
-        <p:xfrm>
-          <a:off x="731520" y="1920240"/>
-          <a:ext cx="6766560" cy="4206240"/>
-        </p:xfrm>
-        <a:graphic xmlns:a="http://schemas.openxmlformats.org/drawingml/2006/main">
-          <a:graphicData uri="http://schemas.openxmlformats.org/drawingml/2006/chart">
-            <c:chart xmlns:c="http://schemas.openxmlformats.org/drawingml/2006/chart" r:id="rId1"/>
-          </a:graphicData>
-        </a:graphic>
-      </p:graphicFrame>
-      <p:sp>
-        <p:nvSpPr>
-          <p:cNvPr id="5" name="Text 2"/>
-          <p:cNvSpPr txBox="1"/>
-          <p:nvPr/>
-        </p:nvSpPr>
-        <p:spPr>
-          <a:xfrm>
-            <a:off x="7955280" y="2103120"/>
-            <a:ext cx="3474720" cy="457200"/>
+              <a:t>It does not decide</a:t>
+            </a:r>
+            <a:pPr indent="0" marL="0">
+              <a:buNone/>
+            </a:pPr>
+            <a:endParaRPr lang="en-US" sz="4600" dirty="0"/>
+          </a:p>
+          <a:p>
+            <a:pPr indent="0" marL="0">
+              <a:buNone/>
+            </a:pPr>
+            <a:r>
+              <a:rPr lang="en-US" sz="4600" dirty="0">
+                <a:solidFill>
+                  <a:srgbClr val="0E2F2B"/>
+                </a:solidFill>
+                <a:latin typeface="Segoe UI Semibold" pitchFamily="34" charset="0"/>
+                <a:ea typeface="Segoe UI Semibold" pitchFamily="34" charset="-122"/>
+                <a:cs typeface="Segoe UI Semibold" pitchFamily="34" charset="-120"/>
+              </a:rPr>
+              <a:t>what is true.</a:t>
+            </a:r>
+            <a:endParaRPr lang="en-US" sz="4600" dirty="0"/>
+          </a:p>
+        </p:txBody>
+      </p:sp>
+      <p:sp>
+        <p:nvSpPr>
+          <p:cNvPr id="4" name="Text 2"/>
+          <p:cNvSpPr txBox="1"/>
+          <p:nvPr/>
+        </p:nvSpPr>
+        <p:spPr>
+          <a:xfrm>
+            <a:off x="731520" y="4754880"/>
+            <a:ext cx="6035040" cy="822960"/>
+          </a:xfrm>
+          <a:prstGeom prst="rect">
+            <a:avLst/>
+          </a:prstGeom>
+          <a:noFill/>
+          <a:ln/>
+        </p:spPr>
+        <p:txBody>
+          <a:bodyPr wrap="square" lIns="0" tIns="0" rIns="0" bIns="0" rtlCol="0" anchor="t"/>
+          <a:lstStyle/>
+          <a:p>
+            <a:pPr indent="0" marL="0">
+              <a:buNone/>
+            </a:pPr>
+            <a:r>
+              <a:rPr lang="en-US" sz="1800" dirty="0">
+                <a:solidFill>
+                  <a:srgbClr val="2B403C"/>
+                </a:solidFill>
+                <a:latin typeface="Segoe UI Light" pitchFamily="34" charset="0"/>
+                <a:ea typeface="Segoe UI Light" pitchFamily="34" charset="-122"/>
+                <a:cs typeface="Segoe UI Light" pitchFamily="34" charset="-120"/>
+              </a:rPr>
+              <a:t>Retrieval and code decide what the manual supports. The model writes it up, and code checks the result.</a:t>
+            </a:r>
+            <a:endParaRPr lang="en-US" sz="1800" dirty="0"/>
+          </a:p>
+        </p:txBody>
+      </p:sp>
+      <p:pic>
+        <p:nvPicPr>
+          <p:cNvPr id="5" name="Image 0" descr="QR code linking to the live demo">    </p:cNvPr>
+          <p:cNvPicPr>
+            <a:picLocks noChangeAspect="1"/>
+          </p:cNvPicPr>
+          <p:nvPr/>
+        </p:nvPicPr>
+        <p:blipFill>
+          <a:blip r:embed="rId1"/>
+          <a:stretch>
+            <a:fillRect/>
+          </a:stretch>
+        </p:blipFill>
+        <p:spPr>
+          <a:xfrm>
+            <a:off x="8092440" y="1600200"/>
+            <a:ext cx="2468880" cy="2468880"/>
+          </a:xfrm>
+          <a:prstGeom prst="rect">
+            <a:avLst/>
+          </a:prstGeom>
+        </p:spPr>
+      </p:pic>
+      <p:sp>
+        <p:nvSpPr>
+          <p:cNvPr id="6" name="Text 3"/>
+          <p:cNvSpPr txBox="1"/>
+          <p:nvPr/>
+        </p:nvSpPr>
+        <p:spPr>
+          <a:xfrm>
+            <a:off x="8092440" y="4206240"/>
+            <a:ext cx="2743200" cy="365760"/>
           </a:xfrm>
           <a:prstGeom prst="rect">
             <a:avLst/>
@@ -4123,7 +5303,142 @@
               <a:buNone/>
             </a:pPr>
             <a:r>
-              <a:rPr lang="en-US" sz="1200" dirty="0">
+              <a:rPr lang="en-US" sz="1800" dirty="0">
+                <a:solidFill>
+                  <a:srgbClr val="0E2F2B"/>
+                </a:solidFill>
+                <a:latin typeface="Segoe UI Semibold" pitchFamily="34" charset="0"/>
+                <a:ea typeface="Segoe UI Semibold" pitchFamily="34" charset="-122"/>
+                <a:cs typeface="Segoe UI Semibold" pitchFamily="34" charset="-120"/>
+              </a:rPr>
+              <a:t>Try it</a:t>
+            </a:r>
+            <a:endParaRPr lang="en-US" sz="1800" dirty="0"/>
+          </a:p>
+        </p:txBody>
+      </p:sp>
+      <p:sp>
+        <p:nvSpPr>
+          <p:cNvPr id="7" name="Text 4">
+            <a:hlinkClick r:id="rId2" tooltip=""/>
+          </p:cNvPr>
+          <p:cNvSpPr txBox="1"/>
+          <p:nvPr/>
+        </p:nvSpPr>
+        <p:spPr>
+          <a:xfrm>
+            <a:off x="8092440" y="4617720"/>
+            <a:ext cx="3383280" cy="274320"/>
+          </a:xfrm>
+          <a:prstGeom prst="rect">
+            <a:avLst/>
+          </a:prstGeom>
+          <a:noFill/>
+          <a:ln/>
+        </p:spPr>
+        <p:txBody>
+          <a:bodyPr wrap="square" lIns="0" tIns="0" rIns="0" bIns="0" rtlCol="0" anchor="ctr"/>
+          <a:lstStyle/>
+          <a:p>
+            <a:pPr indent="0" marL="0">
+              <a:buNone/>
+            </a:pPr>
+            <a:r>
+              <a:rPr lang="en-US" sz="1200" u="sng" dirty="0">
+                <a:solidFill>
+                  <a:srgbClr val="1E6B58"/>
+                </a:solidFill>
+                <a:latin typeface="Consolas" pitchFamily="34" charset="0"/>
+                <a:ea typeface="Consolas" pitchFamily="34" charset="-122"/>
+                <a:cs typeface="Consolas" pitchFamily="34" charset="-120"/>
+                <a:hlinkClick r:id="rId2" invalidUrl="" action="" tgtFrame="" tooltip="" history="1" highlightClick="0" endSnd="0">
+                  <a:extLst>
+                    <a:ext uri="{A12FA001-AC4F-418D-AE19-62706E023703}">
+                      <ahyp:hlinkClr xmlns:ahyp="http://schemas.microsoft.com/office/drawing/2018/hyperlinkcolor" val="tx"/>
+                    </a:ext>
+                  </a:extLst>
+                </a:hlinkClick>
+              </a:rPr>
+              <a:t>triage-gpt-seven.vercel.app</a:t>
+            </a:r>
+            <a:endParaRPr lang="en-US" sz="1200" dirty="0"/>
+          </a:p>
+        </p:txBody>
+      </p:sp>
+      <p:sp>
+        <p:nvSpPr>
+          <p:cNvPr id="8" name="Text 5">
+            <a:hlinkClick r:id="rId3" tooltip=""/>
+          </p:cNvPr>
+          <p:cNvSpPr txBox="1"/>
+          <p:nvPr/>
+        </p:nvSpPr>
+        <p:spPr>
+          <a:xfrm>
+            <a:off x="8092440" y="4937760"/>
+            <a:ext cx="3931920" cy="274320"/>
+          </a:xfrm>
+          <a:prstGeom prst="rect">
+            <a:avLst/>
+          </a:prstGeom>
+          <a:noFill/>
+          <a:ln/>
+        </p:spPr>
+        <p:txBody>
+          <a:bodyPr wrap="square" lIns="0" tIns="0" rIns="0" bIns="0" rtlCol="0" anchor="ctr"/>
+          <a:lstStyle/>
+          <a:p>
+            <a:pPr indent="0" marL="0">
+              <a:buNone/>
+            </a:pPr>
+            <a:r>
+              <a:rPr lang="en-US" sz="900" u="sng" dirty="0">
+                <a:solidFill>
+                  <a:srgbClr val="6B7C78"/>
+                </a:solidFill>
+                <a:latin typeface="Consolas" pitchFamily="34" charset="0"/>
+                <a:ea typeface="Consolas" pitchFamily="34" charset="-122"/>
+                <a:cs typeface="Consolas" pitchFamily="34" charset="-120"/>
+                <a:hlinkClick r:id="rId3" invalidUrl="" action="" tgtFrame="" tooltip="" history="1" highlightClick="0" endSnd="0">
+                  <a:extLst>
+                    <a:ext uri="{A12FA001-AC4F-418D-AE19-62706E023703}">
+                      <ahyp:hlinkClr xmlns:ahyp="http://schemas.microsoft.com/office/drawing/2018/hyperlinkcolor" val="tx"/>
+                    </a:ext>
+                  </a:extLst>
+                </a:hlinkClick>
+              </a:rPr>
+              <a:t>github.com/ParthBiyani/AI-Troubleshooting-Assistant</a:t>
+            </a:r>
+            <a:endParaRPr lang="en-US" sz="900" dirty="0"/>
+          </a:p>
+        </p:txBody>
+      </p:sp>
+      <p:sp>
+        <p:nvSpPr>
+          <p:cNvPr id="9" name="Text 6"/>
+          <p:cNvSpPr txBox="1"/>
+          <p:nvPr/>
+        </p:nvSpPr>
+        <p:spPr>
+          <a:xfrm>
+            <a:off x="731520" y="6263640"/>
+            <a:ext cx="6400800" cy="274320"/>
+          </a:xfrm>
+          <a:prstGeom prst="rect">
+            <a:avLst/>
+          </a:prstGeom>
+          <a:noFill/>
+          <a:ln/>
+        </p:spPr>
+        <p:txBody>
+          <a:bodyPr wrap="square" lIns="0" tIns="0" rIns="0" bIns="0" rtlCol="0" anchor="ctr"/>
+          <a:lstStyle/>
+          <a:p>
+            <a:pPr indent="0" marL="0">
+              <a:buNone/>
+            </a:pPr>
+            <a:r>
+              <a:rPr lang="en-US" sz="1000" dirty="0">
                 <a:solidFill>
                   <a:srgbClr val="6B7C78"/>
                 </a:solidFill>
@@ -4131,139 +5446,9 @@
                 <a:ea typeface="Segoe UI" pitchFamily="34" charset="-122"/>
                 <a:cs typeface="Segoe UI" pitchFamily="34" charset="-120"/>
               </a:rPr>
-              <a:t>Measured on the 37 answerable questions of the first set.</a:t>
-            </a:r>
-            <a:endParaRPr lang="en-US" sz="1200" dirty="0"/>
-          </a:p>
-        </p:txBody>
-      </p:sp>
-      <p:sp>
-        <p:nvSpPr>
-          <p:cNvPr id="6" name="Text 3"/>
-          <p:cNvSpPr txBox="1"/>
-          <p:nvPr/>
-        </p:nvSpPr>
-        <p:spPr>
-          <a:xfrm>
-            <a:off x="7955280" y="2651760"/>
-            <a:ext cx="3566160" cy="2926080"/>
-          </a:xfrm>
-          <a:prstGeom prst="rect">
-            <a:avLst/>
-          </a:prstGeom>
-          <a:noFill/>
-          <a:ln/>
-        </p:spPr>
-        <p:txBody>
-          <a:bodyPr wrap="square" lIns="0" tIns="0" rIns="0" bIns="0" rtlCol="0" anchor="t"/>
-          <a:lstStyle/>
-          <a:p>
-            <a:pPr marL="177800" indent="-177800">
-              <a:spcAft>
-                <a:spcPts val="1000"/>
-              </a:spcAft>
-              <a:buSzPct val="100000"/>
-              <a:buChar char="•"/>
-            </a:pPr>
-            <a:r>
-              <a:rPr lang="en-US" sz="1300" dirty="0">
-                <a:solidFill>
-                  <a:srgbClr val="2B403C"/>
-                </a:solidFill>
-                <a:latin typeface="Segoe UI" pitchFamily="34" charset="0"/>
-                <a:ea typeface="Segoe UI" pitchFamily="34" charset="-122"/>
-                <a:cs typeface="Segoe UI" pitchFamily="34" charset="-120"/>
-              </a:rPr>
-              <a:t>Semantic search alone found the right entry first most often.</a:t>
-            </a:r>
-            <a:endParaRPr lang="en-US" sz="1300" dirty="0"/>
-          </a:p>
-          <a:p>
-            <a:pPr marL="177800" indent="-177800">
-              <a:spcAft>
-                <a:spcPts val="1000"/>
-              </a:spcAft>
-              <a:buSzPct val="100000"/>
-              <a:buChar char="•"/>
-            </a:pPr>
-            <a:r>
-              <a:rPr lang="en-US" sz="1300" dirty="0">
-                <a:solidFill>
-                  <a:srgbClr val="2B403C"/>
-                </a:solidFill>
-                <a:latin typeface="Segoe UI" pitchFamily="34" charset="0"/>
-                <a:ea typeface="Segoe UI" pitchFamily="34" charset="-122"/>
-                <a:cs typeface="Segoe UI" pitchFamily="34" charset="-120"/>
-              </a:rPr>
-              <a:t>Hybrid was the only one to reach 100% in the top five.</a:t>
-            </a:r>
-            <a:endParaRPr lang="en-US" sz="1300" dirty="0"/>
-          </a:p>
-          <a:p>
-            <a:pPr marL="177800" indent="-177800">
-              <a:buSzPct val="100000"/>
-              <a:buChar char="•"/>
-            </a:pPr>
-            <a:r>
-              <a:rPr lang="en-US" sz="1300" dirty="0">
-                <a:solidFill>
-                  <a:srgbClr val="2B403C"/>
-                </a:solidFill>
-                <a:latin typeface="Segoe UI" pitchFamily="34" charset="0"/>
-                <a:ea typeface="Segoe UI" pitchFamily="34" charset="-122"/>
-                <a:cs typeface="Segoe UI" pitchFamily="34" charset="-120"/>
-              </a:rPr>
-              <a:t>I kept hybrid for exact codes such as RC 91 and 504, but I did not measure it to be better at rank one.</a:t>
-            </a:r>
-            <a:endParaRPr lang="en-US" sz="1300" dirty="0"/>
-          </a:p>
-        </p:txBody>
-      </p:sp>
-      <p:sp>
-        <p:nvSpPr>
-          <p:cNvPr id="25" name="Slide Number Placeholder 0"/>
-          <p:cNvSpPr>
-            <a:spLocks noGrp="1"/>
-          </p:cNvSpPr>
-          <p:nvPr>
-            <p:ph type="sldNum" sz="quarter" idx="4294967295"/>
-          </p:nvPr>
-        </p:nvSpPr>
-        <p:spPr>
-          <a:xfrm>
-            <a:off x="10835640" y="6419088"/>
-            <a:ext cx="640080" cy="274320"/>
-          </a:xfrm>
-          <a:prstGeom prst="rect">
-            <a:avLst/>
-          </a:prstGeom>
-          <a:extLst>
-            <a:ext uri="{C572A759-6A51-4108-AA02-DFA0A04FC94B}">
-              <ma14:wrappingTextBoxFlag xmlns:ma14="http://schemas.microsoft.com/office/mac/drawingml/2011/main" val="0"/>
-            </a:ext>
-          </a:extLst>
-        </p:spPr>
-        <p:txBody>
-          <a:bodyPr/>
-          <a:lstStyle>
-            <a:lvl1pPr>
-              <a:defRPr sz="1000">
-                <a:solidFill>
-                  <a:srgbClr val="6B7C78"/>
-                </a:solidFill>
-                <a:latin typeface="Segoe UI"/>
-                <a:ea typeface="Segoe UI"/>
-                <a:cs typeface="Segoe UI"/>
-              </a:defRPr>
-            </a:lvl1pPr>
-          </a:lstStyle>
-          <a:p>
-            <a:pPr algn="r"/>
-            <a:fld id="{F7021451-1387-4CA6-816F-3879F97B5CBC}" type="slidenum">
-              <a:rPr b="0" lang="en-US"/>
-              <a:t>12</a:t>
-            </a:fld>
-            <a:endParaRPr lang="en-US"/>
+              <a:t>Sample data: Northwind Payments is a fictional company.</a:t>
+            </a:r>
+            <a:endParaRPr lang="en-US" sz="1000" dirty="0"/>
           </a:p>
         </p:txBody>
       </p:sp>
@@ -4342,7 +5527,7 @@
                 <a:ea typeface="Segoe UI" pitchFamily="34" charset="-122"/>
                 <a:cs typeface="Segoe UI" pitchFamily="34" charset="-120"/>
               </a:rPr>
-              <a:t>   APPENDIX  ·  STACK</a:t>
+              <a:t>   APPENDIX  ·  RETRIEVAL</a:t>
             </a:r>
             <a:endParaRPr lang="en-US" sz="1100" dirty="0"/>
           </a:p>
@@ -4383,7 +5568,7 @@
                 <a:ea typeface="Segoe UI Semibold" pitchFamily="34" charset="-122"/>
                 <a:cs typeface="Segoe UI Semibold" pitchFamily="34" charset="-120"/>
               </a:rPr>
-              <a:t>What it runs on, and </a:t>
+              <a:t>Hybrid search is robust, </a:t>
             </a:r>
             <a:pPr algn="l" indent="0" marL="0">
               <a:buNone/>
@@ -4400,22 +5585,38 @@
                 <a:ea typeface="Segoe UI Semibold" pitchFamily="34" charset="-122"/>
                 <a:cs typeface="Segoe UI Semibold" pitchFamily="34" charset="-120"/>
               </a:rPr>
-              <a:t>what happens when a model fails.</a:t>
+              <a:t>not a clear win at rank one.</a:t>
             </a:r>
             <a:endParaRPr lang="en-US" sz="3000" dirty="0"/>
           </a:p>
         </p:txBody>
       </p:sp>
-      <p:sp>
-        <p:nvSpPr>
-          <p:cNvPr id="4" name="Text 2"/>
-          <p:cNvSpPr txBox="1"/>
-          <p:nvPr/>
-        </p:nvSpPr>
-        <p:spPr>
-          <a:xfrm>
-            <a:off x="731520" y="1965960"/>
-            <a:ext cx="2103120" cy="274320"/>
+      <p:graphicFrame>
+        <p:nvGraphicFramePr>
+          <p:cNvPr id="4" name="Chart 0" descr=""/>
+          <p:cNvGraphicFramePr/>
+          <p:nvPr/>
+        </p:nvGraphicFramePr>
+        <p:xfrm>
+          <a:off x="731520" y="1920240"/>
+          <a:ext cx="6766560" cy="4206240"/>
+        </p:xfrm>
+        <a:graphic xmlns:a="http://schemas.openxmlformats.org/drawingml/2006/main">
+          <a:graphicData uri="http://schemas.openxmlformats.org/drawingml/2006/chart">
+            <c:chart xmlns:c="http://schemas.openxmlformats.org/drawingml/2006/chart" r:id="rId1"/>
+          </a:graphicData>
+        </a:graphic>
+      </p:graphicFrame>
+      <p:sp>
+        <p:nvSpPr>
+          <p:cNvPr id="5" name="Text 2"/>
+          <p:cNvSpPr txBox="1"/>
+          <p:nvPr/>
+        </p:nvSpPr>
+        <p:spPr>
+          <a:xfrm>
+            <a:off x="7955280" y="2103120"/>
+            <a:ext cx="3474720" cy="457200"/>
           </a:xfrm>
           <a:prstGeom prst="rect">
             <a:avLst/>
@@ -4431,7 +5632,7 @@
               <a:buNone/>
             </a:pPr>
             <a:r>
-              <a:rPr lang="en-US" sz="1000" spc="200" kern="0" dirty="0">
+              <a:rPr lang="en-US" sz="1200" dirty="0">
                 <a:solidFill>
                   <a:srgbClr val="6B7C78"/>
                 </a:solidFill>
@@ -4439,178 +5640,81 @@
                 <a:ea typeface="Segoe UI" pitchFamily="34" charset="-122"/>
                 <a:cs typeface="Segoe UI" pitchFamily="34" charset="-120"/>
               </a:rPr>
-              <a:t>ROLE</a:t>
-            </a:r>
-            <a:endParaRPr lang="en-US" sz="1000" dirty="0"/>
-          </a:p>
-        </p:txBody>
-      </p:sp>
-      <p:sp>
-        <p:nvSpPr>
-          <p:cNvPr id="5" name="Text 3"/>
-          <p:cNvSpPr txBox="1"/>
-          <p:nvPr/>
-        </p:nvSpPr>
-        <p:spPr>
-          <a:xfrm>
-            <a:off x="2971800" y="1965960"/>
-            <a:ext cx="4572000" cy="274320"/>
-          </a:xfrm>
-          <a:prstGeom prst="rect">
-            <a:avLst/>
-          </a:prstGeom>
-          <a:noFill/>
-          <a:ln/>
-        </p:spPr>
-        <p:txBody>
-          <a:bodyPr wrap="square" lIns="0" tIns="0" rIns="0" bIns="0" rtlCol="0" anchor="ctr"/>
-          <a:lstStyle/>
-          <a:p>
-            <a:pPr indent="0" marL="0">
-              <a:buNone/>
-            </a:pPr>
-            <a:r>
-              <a:rPr lang="en-US" sz="1000" spc="200" kern="0" dirty="0">
-                <a:solidFill>
-                  <a:srgbClr val="6B7C78"/>
+              <a:t>Measured on the 37 answerable questions of the first set.</a:t>
+            </a:r>
+            <a:endParaRPr lang="en-US" sz="1200" dirty="0"/>
+          </a:p>
+        </p:txBody>
+      </p:sp>
+      <p:sp>
+        <p:nvSpPr>
+          <p:cNvPr id="6" name="Text 3"/>
+          <p:cNvSpPr txBox="1"/>
+          <p:nvPr/>
+        </p:nvSpPr>
+        <p:spPr>
+          <a:xfrm>
+            <a:off x="7955280" y="2651760"/>
+            <a:ext cx="3566160" cy="2926080"/>
+          </a:xfrm>
+          <a:prstGeom prst="rect">
+            <a:avLst/>
+          </a:prstGeom>
+          <a:noFill/>
+          <a:ln/>
+        </p:spPr>
+        <p:txBody>
+          <a:bodyPr wrap="square" lIns="0" tIns="0" rIns="0" bIns="0" rtlCol="0" anchor="t"/>
+          <a:lstStyle/>
+          <a:p>
+            <a:pPr marL="177800" indent="-177800">
+              <a:spcAft>
+                <a:spcPts val="1000"/>
+              </a:spcAft>
+              <a:buSzPct val="100000"/>
+              <a:buChar char="•"/>
+            </a:pPr>
+            <a:r>
+              <a:rPr lang="en-US" sz="1300" dirty="0">
+                <a:solidFill>
+                  <a:srgbClr val="2B403C"/>
                 </a:solidFill>
                 <a:latin typeface="Segoe UI" pitchFamily="34" charset="0"/>
                 <a:ea typeface="Segoe UI" pitchFamily="34" charset="-122"/>
                 <a:cs typeface="Segoe UI" pitchFamily="34" charset="-120"/>
               </a:rPr>
-              <a:t>WHAT</a:t>
-            </a:r>
-            <a:endParaRPr lang="en-US" sz="1000" dirty="0"/>
-          </a:p>
-        </p:txBody>
-      </p:sp>
-      <p:sp>
-        <p:nvSpPr>
-          <p:cNvPr id="6" name="Text 4"/>
-          <p:cNvSpPr txBox="1"/>
-          <p:nvPr/>
-        </p:nvSpPr>
-        <p:spPr>
-          <a:xfrm>
-            <a:off x="7772400" y="1965960"/>
-            <a:ext cx="3657600" cy="274320"/>
-          </a:xfrm>
-          <a:prstGeom prst="rect">
-            <a:avLst/>
-          </a:prstGeom>
-          <a:noFill/>
-          <a:ln/>
-        </p:spPr>
-        <p:txBody>
-          <a:bodyPr wrap="square" lIns="0" tIns="0" rIns="0" bIns="0" rtlCol="0" anchor="ctr"/>
-          <a:lstStyle/>
-          <a:p>
-            <a:pPr indent="0" marL="0">
-              <a:buNone/>
-            </a:pPr>
-            <a:r>
-              <a:rPr lang="en-US" sz="1000" spc="200" kern="0" dirty="0">
-                <a:solidFill>
-                  <a:srgbClr val="6B7C78"/>
+              <a:t>Semantic search alone found the right entry first most often.</a:t>
+            </a:r>
+            <a:endParaRPr lang="en-US" sz="1300" dirty="0"/>
+          </a:p>
+          <a:p>
+            <a:pPr marL="177800" indent="-177800">
+              <a:spcAft>
+                <a:spcPts val="1000"/>
+              </a:spcAft>
+              <a:buSzPct val="100000"/>
+              <a:buChar char="•"/>
+            </a:pPr>
+            <a:r>
+              <a:rPr lang="en-US" sz="1300" dirty="0">
+                <a:solidFill>
+                  <a:srgbClr val="2B403C"/>
                 </a:solidFill>
                 <a:latin typeface="Segoe UI" pitchFamily="34" charset="0"/>
                 <a:ea typeface="Segoe UI" pitchFamily="34" charset="-122"/>
                 <a:cs typeface="Segoe UI" pitchFamily="34" charset="-120"/>
               </a:rPr>
-              <a:t>WHY</a:t>
-            </a:r>
-            <a:endParaRPr lang="en-US" sz="1000" dirty="0"/>
-          </a:p>
-        </p:txBody>
-      </p:sp>
-      <p:sp>
-        <p:nvSpPr>
-          <p:cNvPr id="7" name="Shape 5"/>
-          <p:cNvSpPr/>
-          <p:nvPr/>
-        </p:nvSpPr>
-        <p:spPr>
-          <a:xfrm>
-            <a:off x="731520" y="2331720"/>
-            <a:ext cx="10728655" cy="0"/>
-          </a:xfrm>
-          <a:prstGeom prst="line">
-            <a:avLst/>
-          </a:prstGeom>
-          <a:noFill/>
-          <a:ln w="9525">
-            <a:solidFill>
-              <a:srgbClr val="D8DFDB"/>
-            </a:solidFill>
-            <a:prstDash val="solid"/>
-          </a:ln>
-        </p:spPr>
-      </p:sp>
-      <p:sp>
-        <p:nvSpPr>
-          <p:cNvPr id="8" name="Text 6"/>
-          <p:cNvSpPr txBox="1"/>
-          <p:nvPr/>
-        </p:nvSpPr>
-        <p:spPr>
-          <a:xfrm>
-            <a:off x="731520" y="2386584"/>
-            <a:ext cx="2103120" cy="548640"/>
-          </a:xfrm>
-          <a:prstGeom prst="rect">
-            <a:avLst/>
-          </a:prstGeom>
-          <a:noFill/>
-          <a:ln/>
-        </p:spPr>
-        <p:txBody>
-          <a:bodyPr wrap="square" lIns="0" tIns="0" rIns="0" bIns="0" rtlCol="0" anchor="ctr"/>
-          <a:lstStyle/>
-          <a:p>
-            <a:pPr indent="0" marL="0">
-              <a:buNone/>
+              <a:t>Hybrid was the only one to reach 100% in the top five.</a:t>
+            </a:r>
+            <a:endParaRPr lang="en-US" sz="1300" dirty="0"/>
+          </a:p>
+          <a:p>
+            <a:pPr marL="177800" indent="-177800">
+              <a:buSzPct val="100000"/>
+              <a:buChar char="•"/>
             </a:pPr>
             <a:r>
               <a:rPr lang="en-US" sz="1300" dirty="0">
-                <a:solidFill>
-                  <a:srgbClr val="0E2F2B"/>
-                </a:solidFill>
-                <a:latin typeface="Segoe UI Semibold" pitchFamily="34" charset="0"/>
-                <a:ea typeface="Segoe UI Semibold" pitchFamily="34" charset="-122"/>
-                <a:cs typeface="Segoe UI Semibold" pitchFamily="34" charset="-120"/>
-              </a:rPr>
-              <a:t>Answer writer</a:t>
-            </a:r>
-            <a:endParaRPr lang="en-US" sz="1300" dirty="0"/>
-          </a:p>
-        </p:txBody>
-      </p:sp>
-      <p:sp>
-        <p:nvSpPr>
-          <p:cNvPr id="9" name="Text 7"/>
-          <p:cNvSpPr txBox="1"/>
-          <p:nvPr/>
-        </p:nvSpPr>
-        <p:spPr>
-          <a:xfrm>
-            <a:off x="2971800" y="2386584"/>
-            <a:ext cx="4617720" cy="548640"/>
-          </a:xfrm>
-          <a:prstGeom prst="rect">
-            <a:avLst/>
-          </a:prstGeom>
-          <a:noFill/>
-          <a:ln/>
-        </p:spPr>
-        <p:txBody>
-          <a:bodyPr wrap="square" lIns="0" tIns="0" rIns="0" bIns="0" rtlCol="0" anchor="ctr"/>
-          <a:lstStyle/>
-          <a:p>
-            <a:pPr indent="0" marL="0">
-              <a:buNone/>
-            </a:pPr>
-            <a:r>
-              <a:rPr lang="en-US" sz="1150" dirty="0">
                 <a:solidFill>
                   <a:srgbClr val="2B403C"/>
                 </a:solidFill>
@@ -4618,748 +5722,9 @@
                 <a:ea typeface="Segoe UI" pitchFamily="34" charset="-122"/>
                 <a:cs typeface="Segoe UI" pitchFamily="34" charset="-120"/>
               </a:rPr>
-              <a:t>Groq gpt-oss-120b, then qwen3.8-27b, gpt-oss-20b, then Gemini 3.5 Flash-Lite</a:t>
-            </a:r>
-            <a:endParaRPr lang="en-US" sz="1150" dirty="0"/>
-          </a:p>
-        </p:txBody>
-      </p:sp>
-      <p:sp>
-        <p:nvSpPr>
-          <p:cNvPr id="10" name="Text 8"/>
-          <p:cNvSpPr txBox="1"/>
-          <p:nvPr/>
-        </p:nvSpPr>
-        <p:spPr>
-          <a:xfrm>
-            <a:off x="7772400" y="2386584"/>
-            <a:ext cx="3657600" cy="548640"/>
-          </a:xfrm>
-          <a:prstGeom prst="rect">
-            <a:avLst/>
-          </a:prstGeom>
-          <a:noFill/>
-          <a:ln/>
-        </p:spPr>
-        <p:txBody>
-          <a:bodyPr wrap="square" lIns="0" tIns="0" rIns="0" bIns="0" rtlCol="0" anchor="ctr"/>
-          <a:lstStyle/>
-          <a:p>
-            <a:pPr indent="0" marL="0">
-              <a:buNone/>
-            </a:pPr>
-            <a:r>
-              <a:rPr lang="en-US" sz="1150" dirty="0">
-                <a:solidFill>
-                  <a:srgbClr val="6B7C78"/>
-                </a:solidFill>
-                <a:latin typeface="Segoe UI" pitchFamily="34" charset="0"/>
-                <a:ea typeface="Segoe UI" pitchFamily="34" charset="-122"/>
-                <a:cs typeface="Segoe UI" pitchFamily="34" charset="-120"/>
-              </a:rPr>
-              <a:t>Free tier. A 429, an error or an empty answer moves to the next model.</a:t>
-            </a:r>
-            <a:endParaRPr lang="en-US" sz="1150" dirty="0"/>
-          </a:p>
-        </p:txBody>
-      </p:sp>
-      <p:sp>
-        <p:nvSpPr>
-          <p:cNvPr id="11" name="Shape 9"/>
-          <p:cNvSpPr/>
-          <p:nvPr/>
-        </p:nvSpPr>
-        <p:spPr>
-          <a:xfrm>
-            <a:off x="731520" y="2971800"/>
-            <a:ext cx="10728655" cy="0"/>
-          </a:xfrm>
-          <a:prstGeom prst="line">
-            <a:avLst/>
-          </a:prstGeom>
-          <a:noFill/>
-          <a:ln w="9525">
-            <a:solidFill>
-              <a:srgbClr val="D8DFDB"/>
-            </a:solidFill>
-            <a:prstDash val="solid"/>
-          </a:ln>
-        </p:spPr>
-      </p:sp>
-      <p:sp>
-        <p:nvSpPr>
-          <p:cNvPr id="12" name="Text 10"/>
-          <p:cNvSpPr txBox="1"/>
-          <p:nvPr/>
-        </p:nvSpPr>
-        <p:spPr>
-          <a:xfrm>
-            <a:off x="731520" y="3026664"/>
-            <a:ext cx="2103120" cy="548640"/>
-          </a:xfrm>
-          <a:prstGeom prst="rect">
-            <a:avLst/>
-          </a:prstGeom>
-          <a:noFill/>
-          <a:ln/>
-        </p:spPr>
-        <p:txBody>
-          <a:bodyPr wrap="square" lIns="0" tIns="0" rIns="0" bIns="0" rtlCol="0" anchor="ctr"/>
-          <a:lstStyle/>
-          <a:p>
-            <a:pPr indent="0" marL="0">
-              <a:buNone/>
-            </a:pPr>
-            <a:r>
-              <a:rPr lang="en-US" sz="1300" dirty="0">
-                <a:solidFill>
-                  <a:srgbClr val="0E2F2B"/>
-                </a:solidFill>
-                <a:latin typeface="Segoe UI Semibold" pitchFamily="34" charset="0"/>
-                <a:ea typeface="Segoe UI Semibold" pitchFamily="34" charset="-122"/>
-                <a:cs typeface="Segoe UI Semibold" pitchFamily="34" charset="-120"/>
-              </a:rPr>
-              <a:t>Injection guard</a:t>
+              <a:t>I kept hybrid for exact codes such as RC 91 and 504, but I did not measure it to be better at rank one.</a:t>
             </a:r>
             <a:endParaRPr lang="en-US" sz="1300" dirty="0"/>
-          </a:p>
-        </p:txBody>
-      </p:sp>
-      <p:sp>
-        <p:nvSpPr>
-          <p:cNvPr id="13" name="Text 11"/>
-          <p:cNvSpPr txBox="1"/>
-          <p:nvPr/>
-        </p:nvSpPr>
-        <p:spPr>
-          <a:xfrm>
-            <a:off x="2971800" y="3026664"/>
-            <a:ext cx="4617720" cy="548640"/>
-          </a:xfrm>
-          <a:prstGeom prst="rect">
-            <a:avLst/>
-          </a:prstGeom>
-          <a:noFill/>
-          <a:ln/>
-        </p:spPr>
-        <p:txBody>
-          <a:bodyPr wrap="square" lIns="0" tIns="0" rIns="0" bIns="0" rtlCol="0" anchor="ctr"/>
-          <a:lstStyle/>
-          <a:p>
-            <a:pPr indent="0" marL="0">
-              <a:buNone/>
-            </a:pPr>
-            <a:r>
-              <a:rPr lang="en-US" sz="1150" dirty="0">
-                <a:solidFill>
-                  <a:srgbClr val="2B403C"/>
-                </a:solidFill>
-                <a:latin typeface="Segoe UI" pitchFamily="34" charset="0"/>
-                <a:ea typeface="Segoe UI" pitchFamily="34" charset="-122"/>
-                <a:cs typeface="Segoe UI" pitchFamily="34" charset="-120"/>
-              </a:rPr>
-              <a:t>Regex heuristics, then Groq Prompt Guard (blocks at 0.98)</a:t>
-            </a:r>
-            <a:endParaRPr lang="en-US" sz="1150" dirty="0"/>
-          </a:p>
-        </p:txBody>
-      </p:sp>
-      <p:sp>
-        <p:nvSpPr>
-          <p:cNvPr id="14" name="Text 12"/>
-          <p:cNvSpPr txBox="1"/>
-          <p:nvPr/>
-        </p:nvSpPr>
-        <p:spPr>
-          <a:xfrm>
-            <a:off x="7772400" y="3026664"/>
-            <a:ext cx="3657600" cy="548640"/>
-          </a:xfrm>
-          <a:prstGeom prst="rect">
-            <a:avLst/>
-          </a:prstGeom>
-          <a:noFill/>
-          <a:ln/>
-        </p:spPr>
-        <p:txBody>
-          <a:bodyPr wrap="square" lIns="0" tIns="0" rIns="0" bIns="0" rtlCol="0" anchor="ctr"/>
-          <a:lstStyle/>
-          <a:p>
-            <a:pPr indent="0" marL="0">
-              <a:buNone/>
-            </a:pPr>
-            <a:r>
-              <a:rPr lang="en-US" sz="1150" dirty="0">
-                <a:solidFill>
-                  <a:srgbClr val="6B7C78"/>
-                </a:solidFill>
-                <a:latin typeface="Segoe UI" pitchFamily="34" charset="0"/>
-                <a:ea typeface="Segoe UI" pitchFamily="34" charset="-122"/>
-                <a:cs typeface="Segoe UI" pitchFamily="34" charset="-120"/>
-              </a:rPr>
-              <a:t>Cheap and fast. The margin is thin, so it is defence in depth.</a:t>
-            </a:r>
-            <a:endParaRPr lang="en-US" sz="1150" dirty="0"/>
-          </a:p>
-        </p:txBody>
-      </p:sp>
-      <p:sp>
-        <p:nvSpPr>
-          <p:cNvPr id="15" name="Shape 13"/>
-          <p:cNvSpPr/>
-          <p:nvPr/>
-        </p:nvSpPr>
-        <p:spPr>
-          <a:xfrm>
-            <a:off x="731520" y="3611880"/>
-            <a:ext cx="10728655" cy="0"/>
-          </a:xfrm>
-          <a:prstGeom prst="line">
-            <a:avLst/>
-          </a:prstGeom>
-          <a:noFill/>
-          <a:ln w="9525">
-            <a:solidFill>
-              <a:srgbClr val="D8DFDB"/>
-            </a:solidFill>
-            <a:prstDash val="solid"/>
-          </a:ln>
-        </p:spPr>
-      </p:sp>
-      <p:sp>
-        <p:nvSpPr>
-          <p:cNvPr id="16" name="Text 14"/>
-          <p:cNvSpPr txBox="1"/>
-          <p:nvPr/>
-        </p:nvSpPr>
-        <p:spPr>
-          <a:xfrm>
-            <a:off x="731520" y="3666744"/>
-            <a:ext cx="2103120" cy="548640"/>
-          </a:xfrm>
-          <a:prstGeom prst="rect">
-            <a:avLst/>
-          </a:prstGeom>
-          <a:noFill/>
-          <a:ln/>
-        </p:spPr>
-        <p:txBody>
-          <a:bodyPr wrap="square" lIns="0" tIns="0" rIns="0" bIns="0" rtlCol="0" anchor="ctr"/>
-          <a:lstStyle/>
-          <a:p>
-            <a:pPr indent="0" marL="0">
-              <a:buNone/>
-            </a:pPr>
-            <a:r>
-              <a:rPr lang="en-US" sz="1300" dirty="0">
-                <a:solidFill>
-                  <a:srgbClr val="0E2F2B"/>
-                </a:solidFill>
-                <a:latin typeface="Segoe UI Semibold" pitchFamily="34" charset="0"/>
-                <a:ea typeface="Segoe UI Semibold" pitchFamily="34" charset="-122"/>
-                <a:cs typeface="Segoe UI Semibold" pitchFamily="34" charset="-120"/>
-              </a:rPr>
-              <a:t>Embeddings</a:t>
-            </a:r>
-            <a:endParaRPr lang="en-US" sz="1300" dirty="0"/>
-          </a:p>
-        </p:txBody>
-      </p:sp>
-      <p:sp>
-        <p:nvSpPr>
-          <p:cNvPr id="17" name="Text 15"/>
-          <p:cNvSpPr txBox="1"/>
-          <p:nvPr/>
-        </p:nvSpPr>
-        <p:spPr>
-          <a:xfrm>
-            <a:off x="2971800" y="3666744"/>
-            <a:ext cx="4617720" cy="548640"/>
-          </a:xfrm>
-          <a:prstGeom prst="rect">
-            <a:avLst/>
-          </a:prstGeom>
-          <a:noFill/>
-          <a:ln/>
-        </p:spPr>
-        <p:txBody>
-          <a:bodyPr wrap="square" lIns="0" tIns="0" rIns="0" bIns="0" rtlCol="0" anchor="ctr"/>
-          <a:lstStyle/>
-          <a:p>
-            <a:pPr indent="0" marL="0">
-              <a:buNone/>
-            </a:pPr>
-            <a:r>
-              <a:rPr lang="en-US" sz="1150" dirty="0">
-                <a:solidFill>
-                  <a:srgbClr val="2B403C"/>
-                </a:solidFill>
-                <a:latin typeface="Segoe UI" pitchFamily="34" charset="0"/>
-                <a:ea typeface="Segoe UI" pitchFamily="34" charset="-122"/>
-                <a:cs typeface="Segoe UI" pitchFamily="34" charset="-120"/>
-              </a:rPr>
-              <a:t>bge-small-en-v1.5, quantised, run inside the app</a:t>
-            </a:r>
-            <a:endParaRPr lang="en-US" sz="1150" dirty="0"/>
-          </a:p>
-        </p:txBody>
-      </p:sp>
-      <p:sp>
-        <p:nvSpPr>
-          <p:cNvPr id="18" name="Text 16"/>
-          <p:cNvSpPr txBox="1"/>
-          <p:nvPr/>
-        </p:nvSpPr>
-        <p:spPr>
-          <a:xfrm>
-            <a:off x="7772400" y="3666744"/>
-            <a:ext cx="3657600" cy="548640"/>
-          </a:xfrm>
-          <a:prstGeom prst="rect">
-            <a:avLst/>
-          </a:prstGeom>
-          <a:noFill/>
-          <a:ln/>
-        </p:spPr>
-        <p:txBody>
-          <a:bodyPr wrap="square" lIns="0" tIns="0" rIns="0" bIns="0" rtlCol="0" anchor="ctr"/>
-          <a:lstStyle/>
-          <a:p>
-            <a:pPr indent="0" marL="0">
-              <a:buNone/>
-            </a:pPr>
-            <a:r>
-              <a:rPr lang="en-US" sz="1150" dirty="0">
-                <a:solidFill>
-                  <a:srgbClr val="6B7C78"/>
-                </a:solidFill>
-                <a:latin typeface="Segoe UI" pitchFamily="34" charset="0"/>
-                <a:ea typeface="Segoe UI" pitchFamily="34" charset="-122"/>
-                <a:cs typeface="Segoe UI" pitchFamily="34" charset="-120"/>
-              </a:rPr>
-              <a:t>No embeddings API needed; the model is bundled with the deployment.</a:t>
-            </a:r>
-            <a:endParaRPr lang="en-US" sz="1150" dirty="0"/>
-          </a:p>
-        </p:txBody>
-      </p:sp>
-      <p:sp>
-        <p:nvSpPr>
-          <p:cNvPr id="19" name="Shape 17"/>
-          <p:cNvSpPr/>
-          <p:nvPr/>
-        </p:nvSpPr>
-        <p:spPr>
-          <a:xfrm>
-            <a:off x="731520" y="4251960"/>
-            <a:ext cx="10728655" cy="0"/>
-          </a:xfrm>
-          <a:prstGeom prst="line">
-            <a:avLst/>
-          </a:prstGeom>
-          <a:noFill/>
-          <a:ln w="9525">
-            <a:solidFill>
-              <a:srgbClr val="D8DFDB"/>
-            </a:solidFill>
-            <a:prstDash val="solid"/>
-          </a:ln>
-        </p:spPr>
-      </p:sp>
-      <p:sp>
-        <p:nvSpPr>
-          <p:cNvPr id="20" name="Text 18"/>
-          <p:cNvSpPr txBox="1"/>
-          <p:nvPr/>
-        </p:nvSpPr>
-        <p:spPr>
-          <a:xfrm>
-            <a:off x="731520" y="4306824"/>
-            <a:ext cx="2103120" cy="548640"/>
-          </a:xfrm>
-          <a:prstGeom prst="rect">
-            <a:avLst/>
-          </a:prstGeom>
-          <a:noFill/>
-          <a:ln/>
-        </p:spPr>
-        <p:txBody>
-          <a:bodyPr wrap="square" lIns="0" tIns="0" rIns="0" bIns="0" rtlCol="0" anchor="ctr"/>
-          <a:lstStyle/>
-          <a:p>
-            <a:pPr indent="0" marL="0">
-              <a:buNone/>
-            </a:pPr>
-            <a:r>
-              <a:rPr lang="en-US" sz="1300" dirty="0">
-                <a:solidFill>
-                  <a:srgbClr val="0E2F2B"/>
-                </a:solidFill>
-                <a:latin typeface="Segoe UI Semibold" pitchFamily="34" charset="0"/>
-                <a:ea typeface="Segoe UI Semibold" pitchFamily="34" charset="-122"/>
-                <a:cs typeface="Segoe UI Semibold" pitchFamily="34" charset="-120"/>
-              </a:rPr>
-              <a:t>Search</a:t>
-            </a:r>
-            <a:endParaRPr lang="en-US" sz="1300" dirty="0"/>
-          </a:p>
-        </p:txBody>
-      </p:sp>
-      <p:sp>
-        <p:nvSpPr>
-          <p:cNvPr id="21" name="Text 19"/>
-          <p:cNvSpPr txBox="1"/>
-          <p:nvPr/>
-        </p:nvSpPr>
-        <p:spPr>
-          <a:xfrm>
-            <a:off x="2971800" y="4306824"/>
-            <a:ext cx="4617720" cy="548640"/>
-          </a:xfrm>
-          <a:prstGeom prst="rect">
-            <a:avLst/>
-          </a:prstGeom>
-          <a:noFill/>
-          <a:ln/>
-        </p:spPr>
-        <p:txBody>
-          <a:bodyPr wrap="square" lIns="0" tIns="0" rIns="0" bIns="0" rtlCol="0" anchor="ctr"/>
-          <a:lstStyle/>
-          <a:p>
-            <a:pPr indent="0" marL="0">
-              <a:buNone/>
-            </a:pPr>
-            <a:r>
-              <a:rPr lang="en-US" sz="1150" dirty="0">
-                <a:solidFill>
-                  <a:srgbClr val="2B403C"/>
-                </a:solidFill>
-                <a:latin typeface="Segoe UI" pitchFamily="34" charset="0"/>
-                <a:ea typeface="Segoe UI" pitchFamily="34" charset="-122"/>
-                <a:cs typeface="Segoe UI" pitchFamily="34" charset="-120"/>
-              </a:rPr>
-              <a:t>MiniSearch (keyword) plus cosine similarity, fused by RRF</a:t>
-            </a:r>
-            <a:endParaRPr lang="en-US" sz="1150" dirty="0"/>
-          </a:p>
-        </p:txBody>
-      </p:sp>
-      <p:sp>
-        <p:nvSpPr>
-          <p:cNvPr id="22" name="Text 20"/>
-          <p:cNvSpPr txBox="1"/>
-          <p:nvPr/>
-        </p:nvSpPr>
-        <p:spPr>
-          <a:xfrm>
-            <a:off x="7772400" y="4306824"/>
-            <a:ext cx="3657600" cy="548640"/>
-          </a:xfrm>
-          <a:prstGeom prst="rect">
-            <a:avLst/>
-          </a:prstGeom>
-          <a:noFill/>
-          <a:ln/>
-        </p:spPr>
-        <p:txBody>
-          <a:bodyPr wrap="square" lIns="0" tIns="0" rIns="0" bIns="0" rtlCol="0" anchor="ctr"/>
-          <a:lstStyle/>
-          <a:p>
-            <a:pPr indent="0" marL="0">
-              <a:buNone/>
-            </a:pPr>
-            <a:r>
-              <a:rPr lang="en-US" sz="1150" dirty="0">
-                <a:solidFill>
-                  <a:srgbClr val="6B7C78"/>
-                </a:solidFill>
-                <a:latin typeface="Segoe UI" pitchFamily="34" charset="0"/>
-                <a:ea typeface="Segoe UI" pitchFamily="34" charset="-122"/>
-                <a:cs typeface="Segoe UI" pitchFamily="34" charset="-120"/>
-              </a:rPr>
-              <a:t>67 entries need no vector database.</a:t>
-            </a:r>
-            <a:endParaRPr lang="en-US" sz="1150" dirty="0"/>
-          </a:p>
-        </p:txBody>
-      </p:sp>
-      <p:sp>
-        <p:nvSpPr>
-          <p:cNvPr id="23" name="Shape 21"/>
-          <p:cNvSpPr/>
-          <p:nvPr/>
-        </p:nvSpPr>
-        <p:spPr>
-          <a:xfrm>
-            <a:off x="731520" y="4892040"/>
-            <a:ext cx="10728655" cy="0"/>
-          </a:xfrm>
-          <a:prstGeom prst="line">
-            <a:avLst/>
-          </a:prstGeom>
-          <a:noFill/>
-          <a:ln w="9525">
-            <a:solidFill>
-              <a:srgbClr val="D8DFDB"/>
-            </a:solidFill>
-            <a:prstDash val="solid"/>
-          </a:ln>
-        </p:spPr>
-      </p:sp>
-      <p:sp>
-        <p:nvSpPr>
-          <p:cNvPr id="24" name="Text 22"/>
-          <p:cNvSpPr txBox="1"/>
-          <p:nvPr/>
-        </p:nvSpPr>
-        <p:spPr>
-          <a:xfrm>
-            <a:off x="731520" y="4946904"/>
-            <a:ext cx="2103120" cy="548640"/>
-          </a:xfrm>
-          <a:prstGeom prst="rect">
-            <a:avLst/>
-          </a:prstGeom>
-          <a:noFill/>
-          <a:ln/>
-        </p:spPr>
-        <p:txBody>
-          <a:bodyPr wrap="square" lIns="0" tIns="0" rIns="0" bIns="0" rtlCol="0" anchor="ctr"/>
-          <a:lstStyle/>
-          <a:p>
-            <a:pPr indent="0" marL="0">
-              <a:buNone/>
-            </a:pPr>
-            <a:r>
-              <a:rPr lang="en-US" sz="1300" dirty="0">
-                <a:solidFill>
-                  <a:srgbClr val="0E2F2B"/>
-                </a:solidFill>
-                <a:latin typeface="Segoe UI Semibold" pitchFamily="34" charset="0"/>
-                <a:ea typeface="Segoe UI Semibold" pitchFamily="34" charset="-122"/>
-                <a:cs typeface="Segoe UI Semibold" pitchFamily="34" charset="-120"/>
-              </a:rPr>
-              <a:t>App and hosting</a:t>
-            </a:r>
-            <a:endParaRPr lang="en-US" sz="1300" dirty="0"/>
-          </a:p>
-        </p:txBody>
-      </p:sp>
-      <p:sp>
-        <p:nvSpPr>
-          <p:cNvPr id="25" name="Text 23"/>
-          <p:cNvSpPr txBox="1"/>
-          <p:nvPr/>
-        </p:nvSpPr>
-        <p:spPr>
-          <a:xfrm>
-            <a:off x="2971800" y="4946904"/>
-            <a:ext cx="4617720" cy="548640"/>
-          </a:xfrm>
-          <a:prstGeom prst="rect">
-            <a:avLst/>
-          </a:prstGeom>
-          <a:noFill/>
-          <a:ln/>
-        </p:spPr>
-        <p:txBody>
-          <a:bodyPr wrap="square" lIns="0" tIns="0" rIns="0" bIns="0" rtlCol="0" anchor="ctr"/>
-          <a:lstStyle/>
-          <a:p>
-            <a:pPr indent="0" marL="0">
-              <a:buNone/>
-            </a:pPr>
-            <a:r>
-              <a:rPr lang="en-US" sz="1150" dirty="0">
-                <a:solidFill>
-                  <a:srgbClr val="2B403C"/>
-                </a:solidFill>
-                <a:latin typeface="Segoe UI" pitchFamily="34" charset="0"/>
-                <a:ea typeface="Segoe UI" pitchFamily="34" charset="-122"/>
-                <a:cs typeface="Segoe UI" pitchFamily="34" charset="-120"/>
-              </a:rPr>
-              <a:t>Next.js, TypeScript, deployed on Vercel from GitHub</a:t>
-            </a:r>
-            <a:endParaRPr lang="en-US" sz="1150" dirty="0"/>
-          </a:p>
-        </p:txBody>
-      </p:sp>
-      <p:sp>
-        <p:nvSpPr>
-          <p:cNvPr id="26" name="Text 24"/>
-          <p:cNvSpPr txBox="1"/>
-          <p:nvPr/>
-        </p:nvSpPr>
-        <p:spPr>
-          <a:xfrm>
-            <a:off x="7772400" y="4946904"/>
-            <a:ext cx="3657600" cy="548640"/>
-          </a:xfrm>
-          <a:prstGeom prst="rect">
-            <a:avLst/>
-          </a:prstGeom>
-          <a:noFill/>
-          <a:ln/>
-        </p:spPr>
-        <p:txBody>
-          <a:bodyPr wrap="square" lIns="0" tIns="0" rIns="0" bIns="0" rtlCol="0" anchor="ctr"/>
-          <a:lstStyle/>
-          <a:p>
-            <a:pPr indent="0" marL="0">
-              <a:buNone/>
-            </a:pPr>
-            <a:r>
-              <a:rPr lang="en-US" sz="1150" dirty="0">
-                <a:solidFill>
-                  <a:srgbClr val="6B7C78"/>
-                </a:solidFill>
-                <a:latin typeface="Segoe UI" pitchFamily="34" charset="0"/>
-                <a:ea typeface="Segoe UI" pitchFamily="34" charset="-122"/>
-                <a:cs typeface="Segoe UI" pitchFamily="34" charset="-120"/>
-              </a:rPr>
-              <a:t>Pull requests with CI: lint, types, tests, build, evaluation gate.</a:t>
-            </a:r>
-            <a:endParaRPr lang="en-US" sz="1150" dirty="0"/>
-          </a:p>
-        </p:txBody>
-      </p:sp>
-      <p:sp>
-        <p:nvSpPr>
-          <p:cNvPr id="27" name="Shape 25"/>
-          <p:cNvSpPr/>
-          <p:nvPr/>
-        </p:nvSpPr>
-        <p:spPr>
-          <a:xfrm>
-            <a:off x="731520" y="5532120"/>
-            <a:ext cx="10728655" cy="0"/>
-          </a:xfrm>
-          <a:prstGeom prst="line">
-            <a:avLst/>
-          </a:prstGeom>
-          <a:noFill/>
-          <a:ln w="9525">
-            <a:solidFill>
-              <a:srgbClr val="D8DFDB"/>
-            </a:solidFill>
-            <a:prstDash val="solid"/>
-          </a:ln>
-        </p:spPr>
-      </p:sp>
-      <p:sp>
-        <p:nvSpPr>
-          <p:cNvPr id="28" name="Text 26"/>
-          <p:cNvSpPr txBox="1"/>
-          <p:nvPr/>
-        </p:nvSpPr>
-        <p:spPr>
-          <a:xfrm>
-            <a:off x="731520" y="5586984"/>
-            <a:ext cx="2103120" cy="548640"/>
-          </a:xfrm>
-          <a:prstGeom prst="rect">
-            <a:avLst/>
-          </a:prstGeom>
-          <a:noFill/>
-          <a:ln/>
-        </p:spPr>
-        <p:txBody>
-          <a:bodyPr wrap="square" lIns="0" tIns="0" rIns="0" bIns="0" rtlCol="0" anchor="ctr"/>
-          <a:lstStyle/>
-          <a:p>
-            <a:pPr indent="0" marL="0">
-              <a:buNone/>
-            </a:pPr>
-            <a:r>
-              <a:rPr lang="en-US" sz="1300" dirty="0">
-                <a:solidFill>
-                  <a:srgbClr val="0E2F2B"/>
-                </a:solidFill>
-                <a:latin typeface="Segoe UI Semibold" pitchFamily="34" charset="0"/>
-                <a:ea typeface="Segoe UI Semibold" pitchFamily="34" charset="-122"/>
-                <a:cs typeface="Segoe UI Semibold" pitchFamily="34" charset="-120"/>
-              </a:rPr>
-              <a:t>Chat history</a:t>
-            </a:r>
-            <a:endParaRPr lang="en-US" sz="1300" dirty="0"/>
-          </a:p>
-        </p:txBody>
-      </p:sp>
-      <p:sp>
-        <p:nvSpPr>
-          <p:cNvPr id="29" name="Text 27"/>
-          <p:cNvSpPr txBox="1"/>
-          <p:nvPr/>
-        </p:nvSpPr>
-        <p:spPr>
-          <a:xfrm>
-            <a:off x="2971800" y="5586984"/>
-            <a:ext cx="4617720" cy="548640"/>
-          </a:xfrm>
-          <a:prstGeom prst="rect">
-            <a:avLst/>
-          </a:prstGeom>
-          <a:noFill/>
-          <a:ln/>
-        </p:spPr>
-        <p:txBody>
-          <a:bodyPr wrap="square" lIns="0" tIns="0" rIns="0" bIns="0" rtlCol="0" anchor="ctr"/>
-          <a:lstStyle/>
-          <a:p>
-            <a:pPr indent="0" marL="0">
-              <a:buNone/>
-            </a:pPr>
-            <a:r>
-              <a:rPr lang="en-US" sz="1150" dirty="0">
-                <a:solidFill>
-                  <a:srgbClr val="2B403C"/>
-                </a:solidFill>
-                <a:latin typeface="Segoe UI" pitchFamily="34" charset="0"/>
-                <a:ea typeface="Segoe UI" pitchFamily="34" charset="-122"/>
-                <a:cs typeface="Segoe UI" pitchFamily="34" charset="-120"/>
-              </a:rPr>
-              <a:t>In the visitor's own browser, masked before saving</a:t>
-            </a:r>
-            <a:endParaRPr lang="en-US" sz="1150" dirty="0"/>
-          </a:p>
-        </p:txBody>
-      </p:sp>
-      <p:sp>
-        <p:nvSpPr>
-          <p:cNvPr id="30" name="Text 28"/>
-          <p:cNvSpPr txBox="1"/>
-          <p:nvPr/>
-        </p:nvSpPr>
-        <p:spPr>
-          <a:xfrm>
-            <a:off x="7772400" y="5586984"/>
-            <a:ext cx="3657600" cy="548640"/>
-          </a:xfrm>
-          <a:prstGeom prst="rect">
-            <a:avLst/>
-          </a:prstGeom>
-          <a:noFill/>
-          <a:ln/>
-        </p:spPr>
-        <p:txBody>
-          <a:bodyPr wrap="square" lIns="0" tIns="0" rIns="0" bIns="0" rtlCol="0" anchor="ctr"/>
-          <a:lstStyle/>
-          <a:p>
-            <a:pPr indent="0" marL="0">
-              <a:buNone/>
-            </a:pPr>
-            <a:r>
-              <a:rPr lang="en-US" sz="1150" dirty="0">
-                <a:solidFill>
-                  <a:srgbClr val="6B7C78"/>
-                </a:solidFill>
-                <a:latin typeface="Segoe UI" pitchFamily="34" charset="0"/>
-                <a:ea typeface="Segoe UI" pitchFamily="34" charset="-122"/>
-                <a:cs typeface="Segoe UI" pitchFamily="34" charset="-120"/>
-              </a:rPr>
-              <a:t>No server-side log of anyone's questions.</a:t>
-            </a:r>
-            <a:endParaRPr lang="en-US" sz="1150" dirty="0"/>
           </a:p>
         </p:txBody>
       </p:sp>
@@ -5486,7 +5851,7 @@
                 <a:ea typeface="Segoe UI" pitchFamily="34" charset="-122"/>
                 <a:cs typeface="Segoe UI" pitchFamily="34" charset="-120"/>
               </a:rPr>
-              <a:t>   APPENDIX  ·  ALL RUNS</a:t>
+              <a:t>   APPENDIX  ·  STACK</a:t>
             </a:r>
             <a:endParaRPr lang="en-US" sz="1100" dirty="0"/>
           </a:p>
@@ -5527,7 +5892,7 @@
                 <a:ea typeface="Segoe UI Semibold" pitchFamily="34" charset="-122"/>
                 <a:cs typeface="Segoe UI Semibold" pitchFamily="34" charset="-120"/>
               </a:rPr>
-              <a:t>Every run, </a:t>
+              <a:t>What it runs on, and </a:t>
             </a:r>
             <a:pPr algn="l" indent="0" marL="0">
               <a:buNone/>
@@ -5544,6 +5909,1150 @@
                 <a:ea typeface="Segoe UI Semibold" pitchFamily="34" charset="-122"/>
                 <a:cs typeface="Segoe UI Semibold" pitchFamily="34" charset="-120"/>
               </a:rPr>
+              <a:t>what happens when a model fails.</a:t>
+            </a:r>
+            <a:endParaRPr lang="en-US" sz="3000" dirty="0"/>
+          </a:p>
+        </p:txBody>
+      </p:sp>
+      <p:sp>
+        <p:nvSpPr>
+          <p:cNvPr id="4" name="Text 2"/>
+          <p:cNvSpPr txBox="1"/>
+          <p:nvPr/>
+        </p:nvSpPr>
+        <p:spPr>
+          <a:xfrm>
+            <a:off x="731520" y="1965960"/>
+            <a:ext cx="2103120" cy="274320"/>
+          </a:xfrm>
+          <a:prstGeom prst="rect">
+            <a:avLst/>
+          </a:prstGeom>
+          <a:noFill/>
+          <a:ln/>
+        </p:spPr>
+        <p:txBody>
+          <a:bodyPr wrap="square" lIns="0" tIns="0" rIns="0" bIns="0" rtlCol="0" anchor="ctr"/>
+          <a:lstStyle/>
+          <a:p>
+            <a:pPr indent="0" marL="0">
+              <a:buNone/>
+            </a:pPr>
+            <a:r>
+              <a:rPr lang="en-US" sz="1000" spc="200" kern="0" dirty="0">
+                <a:solidFill>
+                  <a:srgbClr val="6B7C78"/>
+                </a:solidFill>
+                <a:latin typeface="Segoe UI" pitchFamily="34" charset="0"/>
+                <a:ea typeface="Segoe UI" pitchFamily="34" charset="-122"/>
+                <a:cs typeface="Segoe UI" pitchFamily="34" charset="-120"/>
+              </a:rPr>
+              <a:t>ROLE</a:t>
+            </a:r>
+            <a:endParaRPr lang="en-US" sz="1000" dirty="0"/>
+          </a:p>
+        </p:txBody>
+      </p:sp>
+      <p:sp>
+        <p:nvSpPr>
+          <p:cNvPr id="5" name="Text 3"/>
+          <p:cNvSpPr txBox="1"/>
+          <p:nvPr/>
+        </p:nvSpPr>
+        <p:spPr>
+          <a:xfrm>
+            <a:off x="2971800" y="1965960"/>
+            <a:ext cx="4572000" cy="274320"/>
+          </a:xfrm>
+          <a:prstGeom prst="rect">
+            <a:avLst/>
+          </a:prstGeom>
+          <a:noFill/>
+          <a:ln/>
+        </p:spPr>
+        <p:txBody>
+          <a:bodyPr wrap="square" lIns="0" tIns="0" rIns="0" bIns="0" rtlCol="0" anchor="ctr"/>
+          <a:lstStyle/>
+          <a:p>
+            <a:pPr indent="0" marL="0">
+              <a:buNone/>
+            </a:pPr>
+            <a:r>
+              <a:rPr lang="en-US" sz="1000" spc="200" kern="0" dirty="0">
+                <a:solidFill>
+                  <a:srgbClr val="6B7C78"/>
+                </a:solidFill>
+                <a:latin typeface="Segoe UI" pitchFamily="34" charset="0"/>
+                <a:ea typeface="Segoe UI" pitchFamily="34" charset="-122"/>
+                <a:cs typeface="Segoe UI" pitchFamily="34" charset="-120"/>
+              </a:rPr>
+              <a:t>WHAT</a:t>
+            </a:r>
+            <a:endParaRPr lang="en-US" sz="1000" dirty="0"/>
+          </a:p>
+        </p:txBody>
+      </p:sp>
+      <p:sp>
+        <p:nvSpPr>
+          <p:cNvPr id="6" name="Text 4"/>
+          <p:cNvSpPr txBox="1"/>
+          <p:nvPr/>
+        </p:nvSpPr>
+        <p:spPr>
+          <a:xfrm>
+            <a:off x="7772400" y="1965960"/>
+            <a:ext cx="3657600" cy="274320"/>
+          </a:xfrm>
+          <a:prstGeom prst="rect">
+            <a:avLst/>
+          </a:prstGeom>
+          <a:noFill/>
+          <a:ln/>
+        </p:spPr>
+        <p:txBody>
+          <a:bodyPr wrap="square" lIns="0" tIns="0" rIns="0" bIns="0" rtlCol="0" anchor="ctr"/>
+          <a:lstStyle/>
+          <a:p>
+            <a:pPr indent="0" marL="0">
+              <a:buNone/>
+            </a:pPr>
+            <a:r>
+              <a:rPr lang="en-US" sz="1000" spc="200" kern="0" dirty="0">
+                <a:solidFill>
+                  <a:srgbClr val="6B7C78"/>
+                </a:solidFill>
+                <a:latin typeface="Segoe UI" pitchFamily="34" charset="0"/>
+                <a:ea typeface="Segoe UI" pitchFamily="34" charset="-122"/>
+                <a:cs typeface="Segoe UI" pitchFamily="34" charset="-120"/>
+              </a:rPr>
+              <a:t>WHY</a:t>
+            </a:r>
+            <a:endParaRPr lang="en-US" sz="1000" dirty="0"/>
+          </a:p>
+        </p:txBody>
+      </p:sp>
+      <p:sp>
+        <p:nvSpPr>
+          <p:cNvPr id="7" name="Shape 5"/>
+          <p:cNvSpPr/>
+          <p:nvPr/>
+        </p:nvSpPr>
+        <p:spPr>
+          <a:xfrm>
+            <a:off x="731520" y="2331720"/>
+            <a:ext cx="10728655" cy="0"/>
+          </a:xfrm>
+          <a:prstGeom prst="line">
+            <a:avLst/>
+          </a:prstGeom>
+          <a:noFill/>
+          <a:ln w="9525">
+            <a:solidFill>
+              <a:srgbClr val="D8DFDB"/>
+            </a:solidFill>
+            <a:prstDash val="solid"/>
+          </a:ln>
+        </p:spPr>
+      </p:sp>
+      <p:sp>
+        <p:nvSpPr>
+          <p:cNvPr id="8" name="Text 6"/>
+          <p:cNvSpPr txBox="1"/>
+          <p:nvPr/>
+        </p:nvSpPr>
+        <p:spPr>
+          <a:xfrm>
+            <a:off x="731520" y="2386584"/>
+            <a:ext cx="2103120" cy="548640"/>
+          </a:xfrm>
+          <a:prstGeom prst="rect">
+            <a:avLst/>
+          </a:prstGeom>
+          <a:noFill/>
+          <a:ln/>
+        </p:spPr>
+        <p:txBody>
+          <a:bodyPr wrap="square" lIns="0" tIns="0" rIns="0" bIns="0" rtlCol="0" anchor="ctr"/>
+          <a:lstStyle/>
+          <a:p>
+            <a:pPr indent="0" marL="0">
+              <a:buNone/>
+            </a:pPr>
+            <a:r>
+              <a:rPr lang="en-US" sz="1300" dirty="0">
+                <a:solidFill>
+                  <a:srgbClr val="0E2F2B"/>
+                </a:solidFill>
+                <a:latin typeface="Segoe UI Semibold" pitchFamily="34" charset="0"/>
+                <a:ea typeface="Segoe UI Semibold" pitchFamily="34" charset="-122"/>
+                <a:cs typeface="Segoe UI Semibold" pitchFamily="34" charset="-120"/>
+              </a:rPr>
+              <a:t>Answer writer</a:t>
+            </a:r>
+            <a:endParaRPr lang="en-US" sz="1300" dirty="0"/>
+          </a:p>
+        </p:txBody>
+      </p:sp>
+      <p:sp>
+        <p:nvSpPr>
+          <p:cNvPr id="9" name="Text 7"/>
+          <p:cNvSpPr txBox="1"/>
+          <p:nvPr/>
+        </p:nvSpPr>
+        <p:spPr>
+          <a:xfrm>
+            <a:off x="2971800" y="2386584"/>
+            <a:ext cx="4617720" cy="548640"/>
+          </a:xfrm>
+          <a:prstGeom prst="rect">
+            <a:avLst/>
+          </a:prstGeom>
+          <a:noFill/>
+          <a:ln/>
+        </p:spPr>
+        <p:txBody>
+          <a:bodyPr wrap="square" lIns="0" tIns="0" rIns="0" bIns="0" rtlCol="0" anchor="ctr"/>
+          <a:lstStyle/>
+          <a:p>
+            <a:pPr indent="0" marL="0">
+              <a:buNone/>
+            </a:pPr>
+            <a:r>
+              <a:rPr lang="en-US" sz="1150" dirty="0">
+                <a:solidFill>
+                  <a:srgbClr val="2B403C"/>
+                </a:solidFill>
+                <a:latin typeface="Segoe UI" pitchFamily="34" charset="0"/>
+                <a:ea typeface="Segoe UI" pitchFamily="34" charset="-122"/>
+                <a:cs typeface="Segoe UI" pitchFamily="34" charset="-120"/>
+              </a:rPr>
+              <a:t>Groq gpt-oss-120b, then qwen3.8-27b, gpt-oss-20b, then Gemini 3.5 Flash-Lite</a:t>
+            </a:r>
+            <a:endParaRPr lang="en-US" sz="1150" dirty="0"/>
+          </a:p>
+        </p:txBody>
+      </p:sp>
+      <p:sp>
+        <p:nvSpPr>
+          <p:cNvPr id="10" name="Text 8"/>
+          <p:cNvSpPr txBox="1"/>
+          <p:nvPr/>
+        </p:nvSpPr>
+        <p:spPr>
+          <a:xfrm>
+            <a:off x="7772400" y="2386584"/>
+            <a:ext cx="3657600" cy="548640"/>
+          </a:xfrm>
+          <a:prstGeom prst="rect">
+            <a:avLst/>
+          </a:prstGeom>
+          <a:noFill/>
+          <a:ln/>
+        </p:spPr>
+        <p:txBody>
+          <a:bodyPr wrap="square" lIns="0" tIns="0" rIns="0" bIns="0" rtlCol="0" anchor="ctr"/>
+          <a:lstStyle/>
+          <a:p>
+            <a:pPr indent="0" marL="0">
+              <a:buNone/>
+            </a:pPr>
+            <a:r>
+              <a:rPr lang="en-US" sz="1150" dirty="0">
+                <a:solidFill>
+                  <a:srgbClr val="6B7C78"/>
+                </a:solidFill>
+                <a:latin typeface="Segoe UI" pitchFamily="34" charset="0"/>
+                <a:ea typeface="Segoe UI" pitchFamily="34" charset="-122"/>
+                <a:cs typeface="Segoe UI" pitchFamily="34" charset="-120"/>
+              </a:rPr>
+              <a:t>Free tier. A 429, an error or an empty answer moves to the next model.</a:t>
+            </a:r>
+            <a:endParaRPr lang="en-US" sz="1150" dirty="0"/>
+          </a:p>
+        </p:txBody>
+      </p:sp>
+      <p:sp>
+        <p:nvSpPr>
+          <p:cNvPr id="11" name="Shape 9"/>
+          <p:cNvSpPr/>
+          <p:nvPr/>
+        </p:nvSpPr>
+        <p:spPr>
+          <a:xfrm>
+            <a:off x="731520" y="2971800"/>
+            <a:ext cx="10728655" cy="0"/>
+          </a:xfrm>
+          <a:prstGeom prst="line">
+            <a:avLst/>
+          </a:prstGeom>
+          <a:noFill/>
+          <a:ln w="9525">
+            <a:solidFill>
+              <a:srgbClr val="D8DFDB"/>
+            </a:solidFill>
+            <a:prstDash val="solid"/>
+          </a:ln>
+        </p:spPr>
+      </p:sp>
+      <p:sp>
+        <p:nvSpPr>
+          <p:cNvPr id="12" name="Text 10"/>
+          <p:cNvSpPr txBox="1"/>
+          <p:nvPr/>
+        </p:nvSpPr>
+        <p:spPr>
+          <a:xfrm>
+            <a:off x="731520" y="3026664"/>
+            <a:ext cx="2103120" cy="548640"/>
+          </a:xfrm>
+          <a:prstGeom prst="rect">
+            <a:avLst/>
+          </a:prstGeom>
+          <a:noFill/>
+          <a:ln/>
+        </p:spPr>
+        <p:txBody>
+          <a:bodyPr wrap="square" lIns="0" tIns="0" rIns="0" bIns="0" rtlCol="0" anchor="ctr"/>
+          <a:lstStyle/>
+          <a:p>
+            <a:pPr indent="0" marL="0">
+              <a:buNone/>
+            </a:pPr>
+            <a:r>
+              <a:rPr lang="en-US" sz="1300" dirty="0">
+                <a:solidFill>
+                  <a:srgbClr val="0E2F2B"/>
+                </a:solidFill>
+                <a:latin typeface="Segoe UI Semibold" pitchFamily="34" charset="0"/>
+                <a:ea typeface="Segoe UI Semibold" pitchFamily="34" charset="-122"/>
+                <a:cs typeface="Segoe UI Semibold" pitchFamily="34" charset="-120"/>
+              </a:rPr>
+              <a:t>Injection guard</a:t>
+            </a:r>
+            <a:endParaRPr lang="en-US" sz="1300" dirty="0"/>
+          </a:p>
+        </p:txBody>
+      </p:sp>
+      <p:sp>
+        <p:nvSpPr>
+          <p:cNvPr id="13" name="Text 11"/>
+          <p:cNvSpPr txBox="1"/>
+          <p:nvPr/>
+        </p:nvSpPr>
+        <p:spPr>
+          <a:xfrm>
+            <a:off x="2971800" y="3026664"/>
+            <a:ext cx="4617720" cy="548640"/>
+          </a:xfrm>
+          <a:prstGeom prst="rect">
+            <a:avLst/>
+          </a:prstGeom>
+          <a:noFill/>
+          <a:ln/>
+        </p:spPr>
+        <p:txBody>
+          <a:bodyPr wrap="square" lIns="0" tIns="0" rIns="0" bIns="0" rtlCol="0" anchor="ctr"/>
+          <a:lstStyle/>
+          <a:p>
+            <a:pPr indent="0" marL="0">
+              <a:buNone/>
+            </a:pPr>
+            <a:r>
+              <a:rPr lang="en-US" sz="1150" dirty="0">
+                <a:solidFill>
+                  <a:srgbClr val="2B403C"/>
+                </a:solidFill>
+                <a:latin typeface="Segoe UI" pitchFamily="34" charset="0"/>
+                <a:ea typeface="Segoe UI" pitchFamily="34" charset="-122"/>
+                <a:cs typeface="Segoe UI" pitchFamily="34" charset="-120"/>
+              </a:rPr>
+              <a:t>Regex heuristics, then Groq Prompt Guard (blocks at 0.98)</a:t>
+            </a:r>
+            <a:endParaRPr lang="en-US" sz="1150" dirty="0"/>
+          </a:p>
+        </p:txBody>
+      </p:sp>
+      <p:sp>
+        <p:nvSpPr>
+          <p:cNvPr id="14" name="Text 12"/>
+          <p:cNvSpPr txBox="1"/>
+          <p:nvPr/>
+        </p:nvSpPr>
+        <p:spPr>
+          <a:xfrm>
+            <a:off x="7772400" y="3026664"/>
+            <a:ext cx="3657600" cy="548640"/>
+          </a:xfrm>
+          <a:prstGeom prst="rect">
+            <a:avLst/>
+          </a:prstGeom>
+          <a:noFill/>
+          <a:ln/>
+        </p:spPr>
+        <p:txBody>
+          <a:bodyPr wrap="square" lIns="0" tIns="0" rIns="0" bIns="0" rtlCol="0" anchor="ctr"/>
+          <a:lstStyle/>
+          <a:p>
+            <a:pPr indent="0" marL="0">
+              <a:buNone/>
+            </a:pPr>
+            <a:r>
+              <a:rPr lang="en-US" sz="1150" dirty="0">
+                <a:solidFill>
+                  <a:srgbClr val="6B7C78"/>
+                </a:solidFill>
+                <a:latin typeface="Segoe UI" pitchFamily="34" charset="0"/>
+                <a:ea typeface="Segoe UI" pitchFamily="34" charset="-122"/>
+                <a:cs typeface="Segoe UI" pitchFamily="34" charset="-120"/>
+              </a:rPr>
+              <a:t>Cheap and fast. The margin is thin, so it is defence in depth.</a:t>
+            </a:r>
+            <a:endParaRPr lang="en-US" sz="1150" dirty="0"/>
+          </a:p>
+        </p:txBody>
+      </p:sp>
+      <p:sp>
+        <p:nvSpPr>
+          <p:cNvPr id="15" name="Shape 13"/>
+          <p:cNvSpPr/>
+          <p:nvPr/>
+        </p:nvSpPr>
+        <p:spPr>
+          <a:xfrm>
+            <a:off x="731520" y="3611880"/>
+            <a:ext cx="10728655" cy="0"/>
+          </a:xfrm>
+          <a:prstGeom prst="line">
+            <a:avLst/>
+          </a:prstGeom>
+          <a:noFill/>
+          <a:ln w="9525">
+            <a:solidFill>
+              <a:srgbClr val="D8DFDB"/>
+            </a:solidFill>
+            <a:prstDash val="solid"/>
+          </a:ln>
+        </p:spPr>
+      </p:sp>
+      <p:sp>
+        <p:nvSpPr>
+          <p:cNvPr id="16" name="Text 14"/>
+          <p:cNvSpPr txBox="1"/>
+          <p:nvPr/>
+        </p:nvSpPr>
+        <p:spPr>
+          <a:xfrm>
+            <a:off x="731520" y="3666744"/>
+            <a:ext cx="2103120" cy="548640"/>
+          </a:xfrm>
+          <a:prstGeom prst="rect">
+            <a:avLst/>
+          </a:prstGeom>
+          <a:noFill/>
+          <a:ln/>
+        </p:spPr>
+        <p:txBody>
+          <a:bodyPr wrap="square" lIns="0" tIns="0" rIns="0" bIns="0" rtlCol="0" anchor="ctr"/>
+          <a:lstStyle/>
+          <a:p>
+            <a:pPr indent="0" marL="0">
+              <a:buNone/>
+            </a:pPr>
+            <a:r>
+              <a:rPr lang="en-US" sz="1300" dirty="0">
+                <a:solidFill>
+                  <a:srgbClr val="0E2F2B"/>
+                </a:solidFill>
+                <a:latin typeface="Segoe UI Semibold" pitchFamily="34" charset="0"/>
+                <a:ea typeface="Segoe UI Semibold" pitchFamily="34" charset="-122"/>
+                <a:cs typeface="Segoe UI Semibold" pitchFamily="34" charset="-120"/>
+              </a:rPr>
+              <a:t>Embeddings</a:t>
+            </a:r>
+            <a:endParaRPr lang="en-US" sz="1300" dirty="0"/>
+          </a:p>
+        </p:txBody>
+      </p:sp>
+      <p:sp>
+        <p:nvSpPr>
+          <p:cNvPr id="17" name="Text 15"/>
+          <p:cNvSpPr txBox="1"/>
+          <p:nvPr/>
+        </p:nvSpPr>
+        <p:spPr>
+          <a:xfrm>
+            <a:off x="2971800" y="3666744"/>
+            <a:ext cx="4617720" cy="548640"/>
+          </a:xfrm>
+          <a:prstGeom prst="rect">
+            <a:avLst/>
+          </a:prstGeom>
+          <a:noFill/>
+          <a:ln/>
+        </p:spPr>
+        <p:txBody>
+          <a:bodyPr wrap="square" lIns="0" tIns="0" rIns="0" bIns="0" rtlCol="0" anchor="ctr"/>
+          <a:lstStyle/>
+          <a:p>
+            <a:pPr indent="0" marL="0">
+              <a:buNone/>
+            </a:pPr>
+            <a:r>
+              <a:rPr lang="en-US" sz="1150" dirty="0">
+                <a:solidFill>
+                  <a:srgbClr val="2B403C"/>
+                </a:solidFill>
+                <a:latin typeface="Segoe UI" pitchFamily="34" charset="0"/>
+                <a:ea typeface="Segoe UI" pitchFamily="34" charset="-122"/>
+                <a:cs typeface="Segoe UI" pitchFamily="34" charset="-120"/>
+              </a:rPr>
+              <a:t>bge-small-en-v1.5, quantised, run inside the app</a:t>
+            </a:r>
+            <a:endParaRPr lang="en-US" sz="1150" dirty="0"/>
+          </a:p>
+        </p:txBody>
+      </p:sp>
+      <p:sp>
+        <p:nvSpPr>
+          <p:cNvPr id="18" name="Text 16"/>
+          <p:cNvSpPr txBox="1"/>
+          <p:nvPr/>
+        </p:nvSpPr>
+        <p:spPr>
+          <a:xfrm>
+            <a:off x="7772400" y="3666744"/>
+            <a:ext cx="3657600" cy="548640"/>
+          </a:xfrm>
+          <a:prstGeom prst="rect">
+            <a:avLst/>
+          </a:prstGeom>
+          <a:noFill/>
+          <a:ln/>
+        </p:spPr>
+        <p:txBody>
+          <a:bodyPr wrap="square" lIns="0" tIns="0" rIns="0" bIns="0" rtlCol="0" anchor="ctr"/>
+          <a:lstStyle/>
+          <a:p>
+            <a:pPr indent="0" marL="0">
+              <a:buNone/>
+            </a:pPr>
+            <a:r>
+              <a:rPr lang="en-US" sz="1150" dirty="0">
+                <a:solidFill>
+                  <a:srgbClr val="6B7C78"/>
+                </a:solidFill>
+                <a:latin typeface="Segoe UI" pitchFamily="34" charset="0"/>
+                <a:ea typeface="Segoe UI" pitchFamily="34" charset="-122"/>
+                <a:cs typeface="Segoe UI" pitchFamily="34" charset="-120"/>
+              </a:rPr>
+              <a:t>No embeddings API needed; the model is bundled with the deployment.</a:t>
+            </a:r>
+            <a:endParaRPr lang="en-US" sz="1150" dirty="0"/>
+          </a:p>
+        </p:txBody>
+      </p:sp>
+      <p:sp>
+        <p:nvSpPr>
+          <p:cNvPr id="19" name="Shape 17"/>
+          <p:cNvSpPr/>
+          <p:nvPr/>
+        </p:nvSpPr>
+        <p:spPr>
+          <a:xfrm>
+            <a:off x="731520" y="4251960"/>
+            <a:ext cx="10728655" cy="0"/>
+          </a:xfrm>
+          <a:prstGeom prst="line">
+            <a:avLst/>
+          </a:prstGeom>
+          <a:noFill/>
+          <a:ln w="9525">
+            <a:solidFill>
+              <a:srgbClr val="D8DFDB"/>
+            </a:solidFill>
+            <a:prstDash val="solid"/>
+          </a:ln>
+        </p:spPr>
+      </p:sp>
+      <p:sp>
+        <p:nvSpPr>
+          <p:cNvPr id="20" name="Text 18"/>
+          <p:cNvSpPr txBox="1"/>
+          <p:nvPr/>
+        </p:nvSpPr>
+        <p:spPr>
+          <a:xfrm>
+            <a:off x="731520" y="4306824"/>
+            <a:ext cx="2103120" cy="548640"/>
+          </a:xfrm>
+          <a:prstGeom prst="rect">
+            <a:avLst/>
+          </a:prstGeom>
+          <a:noFill/>
+          <a:ln/>
+        </p:spPr>
+        <p:txBody>
+          <a:bodyPr wrap="square" lIns="0" tIns="0" rIns="0" bIns="0" rtlCol="0" anchor="ctr"/>
+          <a:lstStyle/>
+          <a:p>
+            <a:pPr indent="0" marL="0">
+              <a:buNone/>
+            </a:pPr>
+            <a:r>
+              <a:rPr lang="en-US" sz="1300" dirty="0">
+                <a:solidFill>
+                  <a:srgbClr val="0E2F2B"/>
+                </a:solidFill>
+                <a:latin typeface="Segoe UI Semibold" pitchFamily="34" charset="0"/>
+                <a:ea typeface="Segoe UI Semibold" pitchFamily="34" charset="-122"/>
+                <a:cs typeface="Segoe UI Semibold" pitchFamily="34" charset="-120"/>
+              </a:rPr>
+              <a:t>Search</a:t>
+            </a:r>
+            <a:endParaRPr lang="en-US" sz="1300" dirty="0"/>
+          </a:p>
+        </p:txBody>
+      </p:sp>
+      <p:sp>
+        <p:nvSpPr>
+          <p:cNvPr id="21" name="Text 19"/>
+          <p:cNvSpPr txBox="1"/>
+          <p:nvPr/>
+        </p:nvSpPr>
+        <p:spPr>
+          <a:xfrm>
+            <a:off x="2971800" y="4306824"/>
+            <a:ext cx="4617720" cy="548640"/>
+          </a:xfrm>
+          <a:prstGeom prst="rect">
+            <a:avLst/>
+          </a:prstGeom>
+          <a:noFill/>
+          <a:ln/>
+        </p:spPr>
+        <p:txBody>
+          <a:bodyPr wrap="square" lIns="0" tIns="0" rIns="0" bIns="0" rtlCol="0" anchor="ctr"/>
+          <a:lstStyle/>
+          <a:p>
+            <a:pPr indent="0" marL="0">
+              <a:buNone/>
+            </a:pPr>
+            <a:r>
+              <a:rPr lang="en-US" sz="1150" dirty="0">
+                <a:solidFill>
+                  <a:srgbClr val="2B403C"/>
+                </a:solidFill>
+                <a:latin typeface="Segoe UI" pitchFamily="34" charset="0"/>
+                <a:ea typeface="Segoe UI" pitchFamily="34" charset="-122"/>
+                <a:cs typeface="Segoe UI" pitchFamily="34" charset="-120"/>
+              </a:rPr>
+              <a:t>MiniSearch (keyword) plus cosine similarity, fused by RRF</a:t>
+            </a:r>
+            <a:endParaRPr lang="en-US" sz="1150" dirty="0"/>
+          </a:p>
+        </p:txBody>
+      </p:sp>
+      <p:sp>
+        <p:nvSpPr>
+          <p:cNvPr id="22" name="Text 20"/>
+          <p:cNvSpPr txBox="1"/>
+          <p:nvPr/>
+        </p:nvSpPr>
+        <p:spPr>
+          <a:xfrm>
+            <a:off x="7772400" y="4306824"/>
+            <a:ext cx="3657600" cy="548640"/>
+          </a:xfrm>
+          <a:prstGeom prst="rect">
+            <a:avLst/>
+          </a:prstGeom>
+          <a:noFill/>
+          <a:ln/>
+        </p:spPr>
+        <p:txBody>
+          <a:bodyPr wrap="square" lIns="0" tIns="0" rIns="0" bIns="0" rtlCol="0" anchor="ctr"/>
+          <a:lstStyle/>
+          <a:p>
+            <a:pPr indent="0" marL="0">
+              <a:buNone/>
+            </a:pPr>
+            <a:r>
+              <a:rPr lang="en-US" sz="1150" dirty="0">
+                <a:solidFill>
+                  <a:srgbClr val="6B7C78"/>
+                </a:solidFill>
+                <a:latin typeface="Segoe UI" pitchFamily="34" charset="0"/>
+                <a:ea typeface="Segoe UI" pitchFamily="34" charset="-122"/>
+                <a:cs typeface="Segoe UI" pitchFamily="34" charset="-120"/>
+              </a:rPr>
+              <a:t>67 entries need no vector database.</a:t>
+            </a:r>
+            <a:endParaRPr lang="en-US" sz="1150" dirty="0"/>
+          </a:p>
+        </p:txBody>
+      </p:sp>
+      <p:sp>
+        <p:nvSpPr>
+          <p:cNvPr id="23" name="Shape 21"/>
+          <p:cNvSpPr/>
+          <p:nvPr/>
+        </p:nvSpPr>
+        <p:spPr>
+          <a:xfrm>
+            <a:off x="731520" y="4892040"/>
+            <a:ext cx="10728655" cy="0"/>
+          </a:xfrm>
+          <a:prstGeom prst="line">
+            <a:avLst/>
+          </a:prstGeom>
+          <a:noFill/>
+          <a:ln w="9525">
+            <a:solidFill>
+              <a:srgbClr val="D8DFDB"/>
+            </a:solidFill>
+            <a:prstDash val="solid"/>
+          </a:ln>
+        </p:spPr>
+      </p:sp>
+      <p:sp>
+        <p:nvSpPr>
+          <p:cNvPr id="24" name="Text 22"/>
+          <p:cNvSpPr txBox="1"/>
+          <p:nvPr/>
+        </p:nvSpPr>
+        <p:spPr>
+          <a:xfrm>
+            <a:off x="731520" y="4946904"/>
+            <a:ext cx="2103120" cy="548640"/>
+          </a:xfrm>
+          <a:prstGeom prst="rect">
+            <a:avLst/>
+          </a:prstGeom>
+          <a:noFill/>
+          <a:ln/>
+        </p:spPr>
+        <p:txBody>
+          <a:bodyPr wrap="square" lIns="0" tIns="0" rIns="0" bIns="0" rtlCol="0" anchor="ctr"/>
+          <a:lstStyle/>
+          <a:p>
+            <a:pPr indent="0" marL="0">
+              <a:buNone/>
+            </a:pPr>
+            <a:r>
+              <a:rPr lang="en-US" sz="1300" dirty="0">
+                <a:solidFill>
+                  <a:srgbClr val="0E2F2B"/>
+                </a:solidFill>
+                <a:latin typeface="Segoe UI Semibold" pitchFamily="34" charset="0"/>
+                <a:ea typeface="Segoe UI Semibold" pitchFamily="34" charset="-122"/>
+                <a:cs typeface="Segoe UI Semibold" pitchFamily="34" charset="-120"/>
+              </a:rPr>
+              <a:t>App and hosting</a:t>
+            </a:r>
+            <a:endParaRPr lang="en-US" sz="1300" dirty="0"/>
+          </a:p>
+        </p:txBody>
+      </p:sp>
+      <p:sp>
+        <p:nvSpPr>
+          <p:cNvPr id="25" name="Text 23"/>
+          <p:cNvSpPr txBox="1"/>
+          <p:nvPr/>
+        </p:nvSpPr>
+        <p:spPr>
+          <a:xfrm>
+            <a:off x="2971800" y="4946904"/>
+            <a:ext cx="4617720" cy="548640"/>
+          </a:xfrm>
+          <a:prstGeom prst="rect">
+            <a:avLst/>
+          </a:prstGeom>
+          <a:noFill/>
+          <a:ln/>
+        </p:spPr>
+        <p:txBody>
+          <a:bodyPr wrap="square" lIns="0" tIns="0" rIns="0" bIns="0" rtlCol="0" anchor="ctr"/>
+          <a:lstStyle/>
+          <a:p>
+            <a:pPr indent="0" marL="0">
+              <a:buNone/>
+            </a:pPr>
+            <a:r>
+              <a:rPr lang="en-US" sz="1150" dirty="0">
+                <a:solidFill>
+                  <a:srgbClr val="2B403C"/>
+                </a:solidFill>
+                <a:latin typeface="Segoe UI" pitchFamily="34" charset="0"/>
+                <a:ea typeface="Segoe UI" pitchFamily="34" charset="-122"/>
+                <a:cs typeface="Segoe UI" pitchFamily="34" charset="-120"/>
+              </a:rPr>
+              <a:t>Next.js, TypeScript, deployed on Vercel from GitHub</a:t>
+            </a:r>
+            <a:endParaRPr lang="en-US" sz="1150" dirty="0"/>
+          </a:p>
+        </p:txBody>
+      </p:sp>
+      <p:sp>
+        <p:nvSpPr>
+          <p:cNvPr id="26" name="Text 24"/>
+          <p:cNvSpPr txBox="1"/>
+          <p:nvPr/>
+        </p:nvSpPr>
+        <p:spPr>
+          <a:xfrm>
+            <a:off x="7772400" y="4946904"/>
+            <a:ext cx="3657600" cy="548640"/>
+          </a:xfrm>
+          <a:prstGeom prst="rect">
+            <a:avLst/>
+          </a:prstGeom>
+          <a:noFill/>
+          <a:ln/>
+        </p:spPr>
+        <p:txBody>
+          <a:bodyPr wrap="square" lIns="0" tIns="0" rIns="0" bIns="0" rtlCol="0" anchor="ctr"/>
+          <a:lstStyle/>
+          <a:p>
+            <a:pPr indent="0" marL="0">
+              <a:buNone/>
+            </a:pPr>
+            <a:r>
+              <a:rPr lang="en-US" sz="1150" dirty="0">
+                <a:solidFill>
+                  <a:srgbClr val="6B7C78"/>
+                </a:solidFill>
+                <a:latin typeface="Segoe UI" pitchFamily="34" charset="0"/>
+                <a:ea typeface="Segoe UI" pitchFamily="34" charset="-122"/>
+                <a:cs typeface="Segoe UI" pitchFamily="34" charset="-120"/>
+              </a:rPr>
+              <a:t>Pull requests with CI: lint, types, tests, build, evaluation gate.</a:t>
+            </a:r>
+            <a:endParaRPr lang="en-US" sz="1150" dirty="0"/>
+          </a:p>
+        </p:txBody>
+      </p:sp>
+      <p:sp>
+        <p:nvSpPr>
+          <p:cNvPr id="27" name="Shape 25"/>
+          <p:cNvSpPr/>
+          <p:nvPr/>
+        </p:nvSpPr>
+        <p:spPr>
+          <a:xfrm>
+            <a:off x="731520" y="5532120"/>
+            <a:ext cx="10728655" cy="0"/>
+          </a:xfrm>
+          <a:prstGeom prst="line">
+            <a:avLst/>
+          </a:prstGeom>
+          <a:noFill/>
+          <a:ln w="9525">
+            <a:solidFill>
+              <a:srgbClr val="D8DFDB"/>
+            </a:solidFill>
+            <a:prstDash val="solid"/>
+          </a:ln>
+        </p:spPr>
+      </p:sp>
+      <p:sp>
+        <p:nvSpPr>
+          <p:cNvPr id="28" name="Text 26"/>
+          <p:cNvSpPr txBox="1"/>
+          <p:nvPr/>
+        </p:nvSpPr>
+        <p:spPr>
+          <a:xfrm>
+            <a:off x="731520" y="5586984"/>
+            <a:ext cx="2103120" cy="548640"/>
+          </a:xfrm>
+          <a:prstGeom prst="rect">
+            <a:avLst/>
+          </a:prstGeom>
+          <a:noFill/>
+          <a:ln/>
+        </p:spPr>
+        <p:txBody>
+          <a:bodyPr wrap="square" lIns="0" tIns="0" rIns="0" bIns="0" rtlCol="0" anchor="ctr"/>
+          <a:lstStyle/>
+          <a:p>
+            <a:pPr indent="0" marL="0">
+              <a:buNone/>
+            </a:pPr>
+            <a:r>
+              <a:rPr lang="en-US" sz="1300" dirty="0">
+                <a:solidFill>
+                  <a:srgbClr val="0E2F2B"/>
+                </a:solidFill>
+                <a:latin typeface="Segoe UI Semibold" pitchFamily="34" charset="0"/>
+                <a:ea typeface="Segoe UI Semibold" pitchFamily="34" charset="-122"/>
+                <a:cs typeface="Segoe UI Semibold" pitchFamily="34" charset="-120"/>
+              </a:rPr>
+              <a:t>Chat history</a:t>
+            </a:r>
+            <a:endParaRPr lang="en-US" sz="1300" dirty="0"/>
+          </a:p>
+        </p:txBody>
+      </p:sp>
+      <p:sp>
+        <p:nvSpPr>
+          <p:cNvPr id="29" name="Text 27"/>
+          <p:cNvSpPr txBox="1"/>
+          <p:nvPr/>
+        </p:nvSpPr>
+        <p:spPr>
+          <a:xfrm>
+            <a:off x="2971800" y="5586984"/>
+            <a:ext cx="4617720" cy="548640"/>
+          </a:xfrm>
+          <a:prstGeom prst="rect">
+            <a:avLst/>
+          </a:prstGeom>
+          <a:noFill/>
+          <a:ln/>
+        </p:spPr>
+        <p:txBody>
+          <a:bodyPr wrap="square" lIns="0" tIns="0" rIns="0" bIns="0" rtlCol="0" anchor="ctr"/>
+          <a:lstStyle/>
+          <a:p>
+            <a:pPr indent="0" marL="0">
+              <a:buNone/>
+            </a:pPr>
+            <a:r>
+              <a:rPr lang="en-US" sz="1150" dirty="0">
+                <a:solidFill>
+                  <a:srgbClr val="2B403C"/>
+                </a:solidFill>
+                <a:latin typeface="Segoe UI" pitchFamily="34" charset="0"/>
+                <a:ea typeface="Segoe UI" pitchFamily="34" charset="-122"/>
+                <a:cs typeface="Segoe UI" pitchFamily="34" charset="-120"/>
+              </a:rPr>
+              <a:t>In the visitor's own browser, masked before saving</a:t>
+            </a:r>
+            <a:endParaRPr lang="en-US" sz="1150" dirty="0"/>
+          </a:p>
+        </p:txBody>
+      </p:sp>
+      <p:sp>
+        <p:nvSpPr>
+          <p:cNvPr id="30" name="Text 28"/>
+          <p:cNvSpPr txBox="1"/>
+          <p:nvPr/>
+        </p:nvSpPr>
+        <p:spPr>
+          <a:xfrm>
+            <a:off x="7772400" y="5586984"/>
+            <a:ext cx="3657600" cy="548640"/>
+          </a:xfrm>
+          <a:prstGeom prst="rect">
+            <a:avLst/>
+          </a:prstGeom>
+          <a:noFill/>
+          <a:ln/>
+        </p:spPr>
+        <p:txBody>
+          <a:bodyPr wrap="square" lIns="0" tIns="0" rIns="0" bIns="0" rtlCol="0" anchor="ctr"/>
+          <a:lstStyle/>
+          <a:p>
+            <a:pPr indent="0" marL="0">
+              <a:buNone/>
+            </a:pPr>
+            <a:r>
+              <a:rPr lang="en-US" sz="1150" dirty="0">
+                <a:solidFill>
+                  <a:srgbClr val="6B7C78"/>
+                </a:solidFill>
+                <a:latin typeface="Segoe UI" pitchFamily="34" charset="0"/>
+                <a:ea typeface="Segoe UI" pitchFamily="34" charset="-122"/>
+                <a:cs typeface="Segoe UI" pitchFamily="34" charset="-120"/>
+              </a:rPr>
+              <a:t>No server-side log of anyone's questions.</a:t>
+            </a:r>
+            <a:endParaRPr lang="en-US" sz="1150" dirty="0"/>
+          </a:p>
+        </p:txBody>
+      </p:sp>
+      <p:sp>
+        <p:nvSpPr>
+          <p:cNvPr id="25" name="Slide Number Placeholder 0"/>
+          <p:cNvSpPr>
+            <a:spLocks noGrp="1"/>
+          </p:cNvSpPr>
+          <p:nvPr>
+            <p:ph type="sldNum" sz="quarter" idx="4294967295"/>
+          </p:nvPr>
+        </p:nvSpPr>
+        <p:spPr>
+          <a:xfrm>
+            <a:off x="10835640" y="6419088"/>
+            <a:ext cx="640080" cy="274320"/>
+          </a:xfrm>
+          <a:prstGeom prst="rect">
+            <a:avLst/>
+          </a:prstGeom>
+          <a:extLst>
+            <a:ext uri="{C572A759-6A51-4108-AA02-DFA0A04FC94B}">
+              <ma14:wrappingTextBoxFlag xmlns:ma14="http://schemas.microsoft.com/office/mac/drawingml/2011/main" val="0"/>
+            </a:ext>
+          </a:extLst>
+        </p:spPr>
+        <p:txBody>
+          <a:bodyPr/>
+          <a:lstStyle>
+            <a:lvl1pPr>
+              <a:defRPr sz="1000">
+                <a:solidFill>
+                  <a:srgbClr val="6B7C78"/>
+                </a:solidFill>
+                <a:latin typeface="Segoe UI"/>
+                <a:ea typeface="Segoe UI"/>
+                <a:cs typeface="Segoe UI"/>
+              </a:defRPr>
+            </a:lvl1pPr>
+          </a:lstStyle>
+          <a:p>
+            <a:pPr algn="r"/>
+            <a:fld id="{F7021451-1387-4CA6-816F-3879F97B5CBC}" type="slidenum">
+              <a:rPr b="0" lang="en-US"/>
+              <a:t>14</a:t>
+            </a:fld>
+            <a:endParaRPr lang="en-US"/>
+          </a:p>
+        </p:txBody>
+      </p:sp>
+    </p:spTree>
+  </p:cSld>
+  <p:clrMapOvr>
+    <a:masterClrMapping/>
+  </p:clrMapOvr>
+</p:sld>
+</file>
+
+<file path=ppt/slides/slide15.xml><?xml version="1.0" encoding="utf-8"?>
+<p:sld xmlns:a="http://schemas.openxmlformats.org/drawingml/2006/main" xmlns:r="http://schemas.openxmlformats.org/officeDocument/2006/relationships" xmlns:p="http://schemas.openxmlformats.org/presentationml/2006/main">
+  <p:cSld name="Slide 15">
+    <p:spTree>
+      <p:nvGrpSpPr>
+        <p:cNvPr id="1" name=""/>
+        <p:cNvGrpSpPr/>
+        <p:nvPr/>
+      </p:nvGrpSpPr>
+      <p:grpSpPr>
+        <a:xfrm>
+          <a:off x="0" y="0"/>
+          <a:ext cx="0" cy="0"/>
+          <a:chOff x="0" y="0"/>
+          <a:chExt cx="0" cy="0"/>
+        </a:xfrm>
+      </p:grpSpPr>
+      <p:sp>
+        <p:nvSpPr>
+          <p:cNvPr id="2" name="Text 0"/>
+          <p:cNvSpPr txBox="1"/>
+          <p:nvPr/>
+        </p:nvSpPr>
+        <p:spPr>
+          <a:xfrm>
+            <a:off x="731520" y="411480"/>
+            <a:ext cx="7315200" cy="274320"/>
+          </a:xfrm>
+          <a:prstGeom prst="rect">
+            <a:avLst/>
+          </a:prstGeom>
+          <a:noFill/>
+          <a:ln/>
+        </p:spPr>
+        <p:txBody>
+          <a:bodyPr wrap="square" lIns="0" tIns="0" rIns="0" bIns="0" rtlCol="0" anchor="ctr"/>
+          <a:lstStyle/>
+          <a:p>
+            <a:pPr indent="0" marL="0">
+              <a:buNone/>
+            </a:pPr>
+            <a:r>
+              <a:rPr lang="en-US" sz="1100" b="1" spc="200" kern="0" dirty="0">
+                <a:solidFill>
+                  <a:srgbClr val="0E2F2B"/>
+                </a:solidFill>
+                <a:highlight>
+                  <a:srgbClr val="D6F25C"/>
+                </a:highlight>
+                <a:latin typeface="Segoe UI" pitchFamily="34" charset="0"/>
+                <a:ea typeface="Segoe UI" pitchFamily="34" charset="-122"/>
+                <a:cs typeface="Segoe UI" pitchFamily="34" charset="-120"/>
+              </a:rPr>
+              <a:t> A </a:t>
+            </a:r>
+            <a:pPr indent="0" marL="0">
+              <a:buNone/>
+            </a:pPr>
+            <a:r>
+              <a:rPr lang="en-US" sz="1100" spc="200" kern="0" dirty="0">
+                <a:solidFill>
+                  <a:srgbClr val="6B7C78"/>
+                </a:solidFill>
+                <a:latin typeface="Segoe UI" pitchFamily="34" charset="0"/>
+                <a:ea typeface="Segoe UI" pitchFamily="34" charset="-122"/>
+                <a:cs typeface="Segoe UI" pitchFamily="34" charset="-120"/>
+              </a:rPr>
+              <a:t>   APPENDIX  ·  ALL RUNS</a:t>
+            </a:r>
+            <a:endParaRPr lang="en-US" sz="1100" dirty="0"/>
+          </a:p>
+        </p:txBody>
+      </p:sp>
+      <p:sp>
+        <p:nvSpPr>
+          <p:cNvPr id="3" name="Text 1"/>
+          <p:cNvSpPr/>
+          <p:nvPr>
+            <p:ph idx="101" type="title" hasCustomPrompt="1"/>
+          </p:nvPr>
+        </p:nvSpPr>
+        <p:spPr>
+          <a:xfrm>
+            <a:off x="731520" y="804672"/>
+            <a:ext cx="10728655" cy="822960"/>
+          </a:xfrm>
+          <a:prstGeom prst="rect">
+            <a:avLst/>
+          </a:prstGeom>
+          <a:noFill/>
+          <a:ln/>
+        </p:spPr>
+        <p:txBody>
+          <a:bodyPr wrap="square" lIns="0" tIns="0" rIns="0" bIns="0" rtlCol="0" anchor="t"/>
+          <a:lstStyle/>
+          <a:p>
+            <a:pPr algn="l" indent="0" marL="0">
+              <a:buNone/>
+            </a:pPr>
+            <a:r>
+              <a:rPr lang="en-US" sz="3000" dirty="0">
+                <a:solidFill>
+                  <a:srgbClr val="0E2F2B"/>
+                </a:solidFill>
+                <a:latin typeface="Segoe UI Semibold" pitchFamily="34" charset="0"/>
+                <a:ea typeface="Segoe UI Semibold" pitchFamily="34" charset="-122"/>
+                <a:cs typeface="Segoe UI Semibold" pitchFamily="34" charset="-120"/>
+              </a:rPr>
+              <a:t>Every run, </a:t>
+            </a:r>
+            <a:pPr algn="l" indent="0" marL="0">
+              <a:buNone/>
+            </a:pPr>
+            <a:r>
+              <a:rPr lang="en-US" sz="3000" dirty="0">
+                <a:solidFill>
+                  <a:srgbClr val="0E2F2B"/>
+                </a:solidFill>
+                <a:highlight>
+                  <a:srgbClr val="D6F25C"/>
+                </a:highlight>
+                <a:latin typeface="Segoe UI Semibold" pitchFamily="34" charset="0"/>
+                <a:ea typeface="Segoe UI Semibold" pitchFamily="34" charset="-122"/>
+                <a:cs typeface="Segoe UI Semibold" pitchFamily="34" charset="-120"/>
+              </a:rPr>
               <a:t>including the ones that flatter me.</a:t>
             </a:r>
             <a:endParaRPr lang="en-US" sz="3000" dirty="0"/>
@@ -5552,7 +7061,7 @@
       </p:sp>
       <p:graphicFrame>
         <p:nvGraphicFramePr>
-          <p:cNvPr id="15" name="Table 0"/>
+          <p:cNvPr id="16" name="Table 0"/>
           <p:cNvGraphicFramePr>
             <a:graphicFrameLocks noGrp="1"/>
           </p:cNvGraphicFramePr>
@@ -7459,7 +8968,7 @@
             <a:pPr algn="r"/>
             <a:fld id="{F7021451-1387-4CA6-816F-3879F97B5CBC}" type="slidenum">
               <a:rPr b="0" lang="en-US"/>
-              <a:t>14</a:t>
+              <a:t>15</a:t>
             </a:fld>
             <a:endParaRPr lang="en-US"/>
           </a:p>
@@ -13054,7 +14563,7 @@
                 <a:ea typeface="Segoe UI" pitchFamily="34" charset="-122"/>
                 <a:cs typeface="Segoe UI" pitchFamily="34" charset="-120"/>
               </a:rPr>
-              <a:t>The first honest number. I then inspected its failures, so it became development data too.</a:t>
+              <a:t>The first honest number. Its six misses became my to-do list (next slide), so it is development data too.</a:t>
             </a:r>
             <a:endParaRPr lang="en-US" sz="1250" dirty="0"/>
           </a:p>
@@ -13457,7 +14966,7 @@
                 <a:ea typeface="Segoe UI" pitchFamily="34" charset="-122"/>
                 <a:cs typeface="Segoe UI" pitchFamily="34" charset="-120"/>
               </a:rPr>
-              <a:t>   RESULTS</a:t>
+              <a:t>   WHAT THE 75% TOLD ME</a:t>
             </a:r>
             <a:endParaRPr lang="en-US" sz="1100" dirty="0"/>
           </a:p>
@@ -13498,7 +15007,7 @@
                 <a:ea typeface="Segoe UI Semibold" pitchFamily="34" charset="-122"/>
                 <a:cs typeface="Segoe UI Semibold" pitchFamily="34" charset="-120"/>
               </a:rPr>
-              <a:t>88.6% on unseen questions, and </a:t>
+              <a:t>The 75% pointed at four causes. </a:t>
             </a:r>
             <a:pPr algn="l" indent="0" marL="0">
               <a:buNone/>
@@ -13515,7 +15024,7 @@
                 <a:ea typeface="Segoe UI Semibold" pitchFamily="34" charset="-122"/>
                 <a:cs typeface="Segoe UI Semibold" pitchFamily="34" charset="-120"/>
               </a:rPr>
-              <a:t>no dangerous answers.</a:t>
+              <a:t>I fixed each one.</a:t>
             </a:r>
             <a:endParaRPr lang="en-US" sz="3000" dirty="0"/>
           </a:p>
@@ -13523,14 +15032,349 @@
       </p:sp>
       <p:sp>
         <p:nvSpPr>
-          <p:cNvPr id="4" name="Shape 2"/>
+          <p:cNvPr id="4" name="Text 2"/>
+          <p:cNvSpPr txBox="1"/>
+          <p:nvPr/>
+        </p:nvSpPr>
+        <p:spPr>
+          <a:xfrm>
+            <a:off x="731520" y="1737360"/>
+            <a:ext cx="2606040" cy="256032"/>
+          </a:xfrm>
+          <a:prstGeom prst="rect">
+            <a:avLst/>
+          </a:prstGeom>
+          <a:noFill/>
+          <a:ln/>
+        </p:spPr>
+        <p:txBody>
+          <a:bodyPr wrap="square" lIns="0" tIns="0" rIns="0" bIns="0" rtlCol="0" anchor="ctr"/>
+          <a:lstStyle/>
+          <a:p>
+            <a:pPr indent="0" marL="0">
+              <a:buNone/>
+            </a:pPr>
+            <a:r>
+              <a:rPr lang="en-US" sz="1000" spc="200" kern="0" dirty="0">
+                <a:solidFill>
+                  <a:srgbClr val="6B7C78"/>
+                </a:solidFill>
+                <a:latin typeface="Segoe UI" pitchFamily="34" charset="0"/>
+                <a:ea typeface="Segoe UI" pitchFamily="34" charset="-122"/>
+                <a:cs typeface="Segoe UI" pitchFamily="34" charset="-120"/>
+              </a:rPr>
+              <a:t>WHAT I SAW</a:t>
+            </a:r>
+            <a:endParaRPr lang="en-US" sz="1000" dirty="0"/>
+          </a:p>
+        </p:txBody>
+      </p:sp>
+      <p:sp>
+        <p:nvSpPr>
+          <p:cNvPr id="5" name="Text 3"/>
+          <p:cNvSpPr txBox="1"/>
+          <p:nvPr/>
+        </p:nvSpPr>
+        <p:spPr>
+          <a:xfrm>
+            <a:off x="3474720" y="1737360"/>
+            <a:ext cx="2468880" cy="256032"/>
+          </a:xfrm>
+          <a:prstGeom prst="rect">
+            <a:avLst/>
+          </a:prstGeom>
+          <a:noFill/>
+          <a:ln/>
+        </p:spPr>
+        <p:txBody>
+          <a:bodyPr wrap="square" lIns="0" tIns="0" rIns="0" bIns="0" rtlCol="0" anchor="ctr"/>
+          <a:lstStyle/>
+          <a:p>
+            <a:pPr indent="0" marL="0">
+              <a:buNone/>
+            </a:pPr>
+            <a:r>
+              <a:rPr lang="en-US" sz="1000" spc="200" kern="0" dirty="0">
+                <a:solidFill>
+                  <a:srgbClr val="6B7C78"/>
+                </a:solidFill>
+                <a:latin typeface="Segoe UI" pitchFamily="34" charset="0"/>
+                <a:ea typeface="Segoe UI" pitchFamily="34" charset="-122"/>
+                <a:cs typeface="Segoe UI" pitchFamily="34" charset="-120"/>
+              </a:rPr>
+              <a:t>ROOT CAUSE</a:t>
+            </a:r>
+            <a:endParaRPr lang="en-US" sz="1000" dirty="0"/>
+          </a:p>
+        </p:txBody>
+      </p:sp>
+      <p:sp>
+        <p:nvSpPr>
+          <p:cNvPr id="6" name="Text 4"/>
+          <p:cNvSpPr txBox="1"/>
+          <p:nvPr/>
+        </p:nvSpPr>
+        <p:spPr>
+          <a:xfrm>
+            <a:off x="6080760" y="1737360"/>
+            <a:ext cx="2788920" cy="256032"/>
+          </a:xfrm>
+          <a:prstGeom prst="rect">
+            <a:avLst/>
+          </a:prstGeom>
+          <a:noFill/>
+          <a:ln/>
+        </p:spPr>
+        <p:txBody>
+          <a:bodyPr wrap="square" lIns="0" tIns="0" rIns="0" bIns="0" rtlCol="0" anchor="ctr"/>
+          <a:lstStyle/>
+          <a:p>
+            <a:pPr indent="0" marL="0">
+              <a:buNone/>
+            </a:pPr>
+            <a:r>
+              <a:rPr lang="en-US" sz="1000" spc="200" kern="0" dirty="0">
+                <a:solidFill>
+                  <a:srgbClr val="6B7C78"/>
+                </a:solidFill>
+                <a:latin typeface="Segoe UI" pitchFamily="34" charset="0"/>
+                <a:ea typeface="Segoe UI" pitchFamily="34" charset="-122"/>
+                <a:cs typeface="Segoe UI" pitchFamily="34" charset="-120"/>
+              </a:rPr>
+              <a:t>THE FIX</a:t>
+            </a:r>
+            <a:endParaRPr lang="en-US" sz="1000" dirty="0"/>
+          </a:p>
+        </p:txBody>
+      </p:sp>
+      <p:sp>
+        <p:nvSpPr>
+          <p:cNvPr id="7" name="Text 5"/>
+          <p:cNvSpPr txBox="1"/>
+          <p:nvPr/>
+        </p:nvSpPr>
+        <p:spPr>
+          <a:xfrm>
+            <a:off x="9006840" y="1737360"/>
+            <a:ext cx="2450592" cy="256032"/>
+          </a:xfrm>
+          <a:prstGeom prst="rect">
+            <a:avLst/>
+          </a:prstGeom>
+          <a:noFill/>
+          <a:ln/>
+        </p:spPr>
+        <p:txBody>
+          <a:bodyPr wrap="square" lIns="0" tIns="0" rIns="0" bIns="0" rtlCol="0" anchor="ctr"/>
+          <a:lstStyle/>
+          <a:p>
+            <a:pPr indent="0" marL="0">
+              <a:buNone/>
+            </a:pPr>
+            <a:r>
+              <a:rPr lang="en-US" sz="1000" spc="200" kern="0" dirty="0">
+                <a:solidFill>
+                  <a:srgbClr val="6B7C78"/>
+                </a:solidFill>
+                <a:latin typeface="Segoe UI" pitchFamily="34" charset="0"/>
+                <a:ea typeface="Segoe UI" pitchFamily="34" charset="-122"/>
+                <a:cs typeface="Segoe UI" pitchFamily="34" charset="-120"/>
+              </a:rPr>
+              <a:t>EVIDENCE</a:t>
+            </a:r>
+            <a:endParaRPr lang="en-US" sz="1000" dirty="0"/>
+          </a:p>
+        </p:txBody>
+      </p:sp>
+      <p:sp>
+        <p:nvSpPr>
+          <p:cNvPr id="8" name="Shape 6"/>
           <p:cNvSpPr/>
           <p:nvPr/>
         </p:nvSpPr>
         <p:spPr>
           <a:xfrm>
+            <a:off x="731520" y="2011680"/>
+            <a:ext cx="10728655" cy="0"/>
+          </a:xfrm>
+          <a:prstGeom prst="line">
+            <a:avLst/>
+          </a:prstGeom>
+          <a:noFill/>
+          <a:ln w="12700">
+            <a:solidFill>
+              <a:srgbClr val="0E2F2B"/>
+            </a:solidFill>
+            <a:prstDash val="solid"/>
+          </a:ln>
+        </p:spPr>
+      </p:sp>
+      <p:sp>
+        <p:nvSpPr>
+          <p:cNvPr id="9" name="Text 7"/>
+          <p:cNvSpPr txBox="1"/>
+          <p:nvPr/>
+        </p:nvSpPr>
+        <p:spPr>
+          <a:xfrm>
             <a:off x="731520" y="2103120"/>
-            <a:ext cx="4846320" cy="0"/>
+            <a:ext cx="2606040" cy="758952"/>
+          </a:xfrm>
+          <a:prstGeom prst="rect">
+            <a:avLst/>
+          </a:prstGeom>
+          <a:noFill/>
+          <a:ln/>
+        </p:spPr>
+        <p:txBody>
+          <a:bodyPr wrap="square" lIns="0" tIns="0" rIns="0" bIns="0" rtlCol="0" anchor="t"/>
+          <a:lstStyle/>
+          <a:p>
+            <a:pPr indent="0" marL="0">
+              <a:buNone/>
+            </a:pPr>
+            <a:r>
+              <a:rPr lang="en-US" sz="1150" dirty="0">
+                <a:solidFill>
+                  <a:srgbClr val="0E2F2B"/>
+                </a:solidFill>
+                <a:latin typeface="Segoe UI" pitchFamily="34" charset="0"/>
+                <a:ea typeface="Segoe UI" pitchFamily="34" charset="-122"/>
+                <a:cs typeface="Segoe UI" pitchFamily="34" charset="-120"/>
+              </a:rPr>
+              <a:t>Right entry ranked first in 13 of 14 answerable questions, yet 4 got “need more info” or “not in KB”.</a:t>
+            </a:r>
+            <a:endParaRPr lang="en-US" sz="1150" dirty="0"/>
+          </a:p>
+        </p:txBody>
+      </p:sp>
+      <p:sp>
+        <p:nvSpPr>
+          <p:cNvPr id="10" name="Text 8"/>
+          <p:cNvSpPr txBox="1"/>
+          <p:nvPr/>
+        </p:nvSpPr>
+        <p:spPr>
+          <a:xfrm>
+            <a:off x="3474720" y="2103120"/>
+            <a:ext cx="2468880" cy="758952"/>
+          </a:xfrm>
+          <a:prstGeom prst="rect">
+            <a:avLst/>
+          </a:prstGeom>
+          <a:noFill/>
+          <a:ln/>
+        </p:spPr>
+        <p:txBody>
+          <a:bodyPr wrap="square" lIns="0" tIns="0" rIns="0" bIns="0" rtlCol="0" anchor="t"/>
+          <a:lstStyle/>
+          <a:p>
+            <a:pPr indent="0" marL="0">
+              <a:buNone/>
+            </a:pPr>
+            <a:r>
+              <a:rPr lang="en-US" sz="1150" dirty="0">
+                <a:solidFill>
+                  <a:srgbClr val="2B403C"/>
+                </a:solidFill>
+                <a:latin typeface="Segoe UI" pitchFamily="34" charset="0"/>
+                <a:ea typeface="Segoe UI" pitchFamily="34" charset="-122"/>
+                <a:cs typeface="Segoe UI" pitchFamily="34" charset="-120"/>
+              </a:rPr>
+              <a:t>The gate read the best semantic score of any entry, not the top-ranked one's, and trusted a squeezed score band.</a:t>
+            </a:r>
+            <a:endParaRPr lang="en-US" sz="1150" dirty="0"/>
+          </a:p>
+        </p:txBody>
+      </p:sp>
+      <p:sp>
+        <p:nvSpPr>
+          <p:cNvPr id="11" name="Text 9"/>
+          <p:cNvSpPr txBox="1"/>
+          <p:nvPr/>
+        </p:nvSpPr>
+        <p:spPr>
+          <a:xfrm>
+            <a:off x="6080760" y="2103120"/>
+            <a:ext cx="2788920" cy="758952"/>
+          </a:xfrm>
+          <a:prstGeom prst="rect">
+            <a:avLst/>
+          </a:prstGeom>
+          <a:noFill/>
+          <a:ln/>
+        </p:spPr>
+        <p:txBody>
+          <a:bodyPr wrap="square" lIns="0" tIns="0" rIns="0" bIns="0" rtlCol="0" anchor="t"/>
+          <a:lstStyle/>
+          <a:p>
+            <a:pPr indent="0" marL="0">
+              <a:buNone/>
+            </a:pPr>
+            <a:r>
+              <a:rPr lang="en-US" sz="1150" dirty="0">
+                <a:solidFill>
+                  <a:srgbClr val="2B403C"/>
+                </a:solidFill>
+                <a:latin typeface="Segoe UI" pitchFamily="34" charset="0"/>
+                <a:ea typeface="Segoe UI" pitchFamily="34" charset="-122"/>
+                <a:cs typeface="Segoe UI" pitchFamily="34" charset="-120"/>
+              </a:rPr>
+              <a:t>Score the top-ranked entry plus a keyword floor. The model decides the uncertain band, and the label follows its output.</a:t>
+            </a:r>
+            <a:endParaRPr lang="en-US" sz="1150" dirty="0"/>
+          </a:p>
+        </p:txBody>
+      </p:sp>
+      <p:sp>
+        <p:nvSpPr>
+          <p:cNvPr id="12" name="Text 10"/>
+          <p:cNvSpPr txBox="1"/>
+          <p:nvPr/>
+        </p:nvSpPr>
+        <p:spPr>
+          <a:xfrm>
+            <a:off x="9006840" y="2103120"/>
+            <a:ext cx="2450592" cy="758952"/>
+          </a:xfrm>
+          <a:prstGeom prst="rect">
+            <a:avLst/>
+          </a:prstGeom>
+          <a:noFill/>
+          <a:ln/>
+        </p:spPr>
+        <p:txBody>
+          <a:bodyPr wrap="square" lIns="0" tIns="0" rIns="0" bIns="0" rtlCol="0" anchor="t"/>
+          <a:lstStyle/>
+          <a:p>
+            <a:pPr indent="0" marL="0">
+              <a:buNone/>
+            </a:pPr>
+            <a:r>
+              <a:rPr lang="en-US" sz="1150" dirty="0">
+                <a:solidFill>
+                  <a:srgbClr val="1E6B58"/>
+                </a:solidFill>
+                <a:latin typeface="Segoe UI Semibold" pitchFamily="34" charset="0"/>
+                <a:ea typeface="Segoe UI Semibold" pitchFamily="34" charset="-122"/>
+                <a:cs typeface="Segoe UI Semibold" pitchFamily="34" charset="-120"/>
+              </a:rPr>
+              <a:t>Same 24 questions: 75% to 87.5%. Unseen 44 questions: 88.6%.</a:t>
+            </a:r>
+            <a:endParaRPr lang="en-US" sz="1150" dirty="0"/>
+          </a:p>
+        </p:txBody>
+      </p:sp>
+      <p:sp>
+        <p:nvSpPr>
+          <p:cNvPr id="13" name="Shape 11"/>
+          <p:cNvSpPr/>
+          <p:nvPr/>
+        </p:nvSpPr>
+        <p:spPr>
+          <a:xfrm>
+            <a:off x="731520" y="2907792"/>
+            <a:ext cx="10728655" cy="0"/>
           </a:xfrm>
           <a:prstGeom prst="line">
             <a:avLst/>
@@ -13546,69 +15390,30 @@
       </p:sp>
       <p:sp>
         <p:nvSpPr>
-          <p:cNvPr id="5" name="Text 3"/>
-          <p:cNvSpPr txBox="1"/>
-          <p:nvPr/>
-        </p:nvSpPr>
-        <p:spPr>
-          <a:xfrm>
-            <a:off x="731520" y="2194560"/>
-            <a:ext cx="2103120" cy="1005840"/>
-          </a:xfrm>
-          <a:prstGeom prst="rect">
-            <a:avLst/>
-          </a:prstGeom>
-          <a:noFill/>
-          <a:ln/>
-        </p:spPr>
-        <p:txBody>
-          <a:bodyPr wrap="square" lIns="0" tIns="0" rIns="0" bIns="0" rtlCol="0" anchor="ctr"/>
-          <a:lstStyle/>
-          <a:p>
-            <a:pPr indent="0" marL="0">
-              <a:buNone/>
-            </a:pPr>
-            <a:r>
-              <a:rPr lang="en-US" sz="5000" dirty="0">
-                <a:solidFill>
-                  <a:srgbClr val="0E2F2B"/>
-                </a:solidFill>
-                <a:latin typeface="Segoe UI Light" pitchFamily="34" charset="0"/>
-                <a:ea typeface="Segoe UI Light" pitchFamily="34" charset="-122"/>
-                <a:cs typeface="Segoe UI Light" pitchFamily="34" charset="-120"/>
-              </a:rPr>
-              <a:t>0</a:t>
-            </a:r>
-            <a:endParaRPr lang="en-US" sz="5000" dirty="0"/>
-          </a:p>
-        </p:txBody>
-      </p:sp>
-      <p:sp>
-        <p:nvSpPr>
-          <p:cNvPr id="6" name="Text 4"/>
-          <p:cNvSpPr txBox="1"/>
-          <p:nvPr/>
-        </p:nvSpPr>
-        <p:spPr>
-          <a:xfrm>
-            <a:off x="2926080" y="2194560"/>
-            <a:ext cx="2651760" cy="1005840"/>
-          </a:xfrm>
-          <a:prstGeom prst="rect">
-            <a:avLst/>
-          </a:prstGeom>
-          <a:noFill/>
-          <a:ln/>
-        </p:spPr>
-        <p:txBody>
-          <a:bodyPr wrap="square" lIns="0" tIns="0" rIns="0" bIns="0" rtlCol="0" anchor="ctr"/>
-          <a:lstStyle/>
-          <a:p>
-            <a:pPr indent="0" marL="0">
-              <a:buNone/>
-            </a:pPr>
-            <a:r>
-              <a:rPr lang="en-US" sz="1300" b="1" dirty="0">
+          <p:cNvPr id="14" name="Text 12"/>
+          <p:cNvSpPr txBox="1"/>
+          <p:nvPr/>
+        </p:nvSpPr>
+        <p:spPr>
+          <a:xfrm>
+            <a:off x="731520" y="2999232"/>
+            <a:ext cx="2606040" cy="758952"/>
+          </a:xfrm>
+          <a:prstGeom prst="rect">
+            <a:avLst/>
+          </a:prstGeom>
+          <a:noFill/>
+          <a:ln/>
+        </p:spPr>
+        <p:txBody>
+          <a:bodyPr wrap="square" lIns="0" tIns="0" rIns="0" bIns="0" rtlCol="0" anchor="t"/>
+          <a:lstStyle/>
+          <a:p>
+            <a:pPr indent="0" marL="0">
+              <a:buNone/>
+            </a:pPr>
+            <a:r>
+              <a:rPr lang="en-US" sz="1150" dirty="0">
                 <a:solidFill>
                   <a:srgbClr val="0E2F2B"/>
                 </a:solidFill>
@@ -13616,13 +15421,38 @@
                 <a:ea typeface="Segoe UI" pitchFamily="34" charset="-122"/>
                 <a:cs typeface="Segoe UI" pitchFamily="34" charset="-120"/>
               </a:rPr>
-              <a:t>of 10  </a:t>
-            </a:r>
-            <a:pPr indent="0" marL="0">
-              <a:buNone/>
-            </a:pPr>
-            <a:r>
-              <a:rPr lang="en-US" sz="1300" dirty="0">
+              <a:t>A real question, “CrashLoopBackOff on the payments pods”, was blocked as an attack.</a:t>
+            </a:r>
+            <a:endParaRPr lang="en-US" sz="1150" dirty="0"/>
+          </a:p>
+        </p:txBody>
+      </p:sp>
+      <p:sp>
+        <p:nvSpPr>
+          <p:cNvPr id="15" name="Text 13"/>
+          <p:cNvSpPr txBox="1"/>
+          <p:nvPr/>
+        </p:nvSpPr>
+        <p:spPr>
+          <a:xfrm>
+            <a:off x="3474720" y="2999232"/>
+            <a:ext cx="2468880" cy="758952"/>
+          </a:xfrm>
+          <a:prstGeom prst="rect">
+            <a:avLst/>
+          </a:prstGeom>
+          <a:noFill/>
+          <a:ln/>
+        </p:spPr>
+        <p:txBody>
+          <a:bodyPr wrap="square" lIns="0" tIns="0" rIns="0" bIns="0" rtlCol="0" anchor="t"/>
+          <a:lstStyle/>
+          <a:p>
+            <a:pPr indent="0" marL="0">
+              <a:buNone/>
+            </a:pPr>
+            <a:r>
+              <a:rPr lang="en-US" sz="1150" dirty="0">
                 <a:solidFill>
                   <a:srgbClr val="2B403C"/>
                 </a:solidFill>
@@ -13630,22 +15460,100 @@
                 <a:ea typeface="Segoe UI" pitchFamily="34" charset="-122"/>
                 <a:cs typeface="Segoe UI" pitchFamily="34" charset="-120"/>
               </a:rPr>
-              <a:t>out-of-scope or hostile questions were answered</a:t>
-            </a:r>
-            <a:endParaRPr lang="en-US" sz="1300" dirty="0"/>
-          </a:p>
-        </p:txBody>
-      </p:sp>
-      <p:sp>
-        <p:nvSpPr>
-          <p:cNvPr id="7" name="Shape 5"/>
+              <a:t>Prompt Guard scores jargon-only text at 0.975. My cut-off was 0.5.</a:t>
+            </a:r>
+            <a:endParaRPr lang="en-US" sz="1150" dirty="0"/>
+          </a:p>
+        </p:txBody>
+      </p:sp>
+      <p:sp>
+        <p:nvSpPr>
+          <p:cNvPr id="16" name="Text 14"/>
+          <p:cNvSpPr txBox="1"/>
+          <p:nvPr/>
+        </p:nvSpPr>
+        <p:spPr>
+          <a:xfrm>
+            <a:off x="6080760" y="2999232"/>
+            <a:ext cx="2788920" cy="758952"/>
+          </a:xfrm>
+          <a:prstGeom prst="rect">
+            <a:avLst/>
+          </a:prstGeom>
+          <a:noFill/>
+          <a:ln/>
+        </p:spPr>
+        <p:txBody>
+          <a:bodyPr wrap="square" lIns="0" tIns="0" rIns="0" bIns="0" rtlCol="0" anchor="t"/>
+          <a:lstStyle/>
+          <a:p>
+            <a:pPr indent="0" marL="0">
+              <a:buNone/>
+            </a:pPr>
+            <a:r>
+              <a:rPr lang="en-US" sz="1150" dirty="0">
+                <a:solidFill>
+                  <a:srgbClr val="2B403C"/>
+                </a:solidFill>
+                <a:latin typeface="Segoe UI" pitchFamily="34" charset="0"/>
+                <a:ea typeface="Segoe UI" pitchFamily="34" charset="-122"/>
+                <a:cs typeface="Segoe UI" pitchFamily="34" charset="-120"/>
+              </a:rPr>
+              <a:t>Scored all 76 questions, moved the cut-off to 0.98, added tests.</a:t>
+            </a:r>
+            <a:endParaRPr lang="en-US" sz="1150" dirty="0"/>
+          </a:p>
+        </p:txBody>
+      </p:sp>
+      <p:sp>
+        <p:nvSpPr>
+          <p:cNvPr id="17" name="Text 15"/>
+          <p:cNvSpPr txBox="1"/>
+          <p:nvPr/>
+        </p:nvSpPr>
+        <p:spPr>
+          <a:xfrm>
+            <a:off x="9006840" y="2999232"/>
+            <a:ext cx="2450592" cy="758952"/>
+          </a:xfrm>
+          <a:prstGeom prst="rect">
+            <a:avLst/>
+          </a:prstGeom>
+          <a:noFill/>
+          <a:ln/>
+        </p:spPr>
+        <p:txBody>
+          <a:bodyPr wrap="square" lIns="0" tIns="0" rIns="0" bIns="0" rtlCol="0" anchor="t"/>
+          <a:lstStyle/>
+          <a:p>
+            <a:pPr indent="0" marL="0">
+              <a:buNone/>
+            </a:pPr>
+            <a:r>
+              <a:rPr lang="en-US" sz="1150" dirty="0">
+                <a:solidFill>
+                  <a:srgbClr val="1E6B58"/>
+                </a:solidFill>
+                <a:latin typeface="Segoe UI Semibold" pitchFamily="34" charset="0"/>
+                <a:ea typeface="Segoe UI Semibold" pitchFamily="34" charset="-122"/>
+                <a:cs typeface="Segoe UI Semibold" pitchFamily="34" charset="-120"/>
+              </a:rPr>
+              <a:t>Real attacks still score 0.99+. 3 of 3 sealed attacks refused.</a:t>
+            </a:r>
+            <a:endParaRPr lang="en-US" sz="1150" dirty="0"/>
+          </a:p>
+        </p:txBody>
+      </p:sp>
+      <p:sp>
+        <p:nvSpPr>
+          <p:cNvPr id="18" name="Shape 16"/>
           <p:cNvSpPr/>
           <p:nvPr/>
         </p:nvSpPr>
         <p:spPr>
           <a:xfrm>
-            <a:off x="731520" y="3474720"/>
-            <a:ext cx="4846320" cy="0"/>
+            <a:off x="731520" y="3803904"/>
+            <a:ext cx="10728655" cy="0"/>
           </a:xfrm>
           <a:prstGeom prst="line">
             <a:avLst/>
@@ -13661,69 +15569,30 @@
       </p:sp>
       <p:sp>
         <p:nvSpPr>
-          <p:cNvPr id="8" name="Text 6"/>
-          <p:cNvSpPr txBox="1"/>
-          <p:nvPr/>
-        </p:nvSpPr>
-        <p:spPr>
-          <a:xfrm>
-            <a:off x="731520" y="3566160"/>
-            <a:ext cx="2103120" cy="1005840"/>
-          </a:xfrm>
-          <a:prstGeom prst="rect">
-            <a:avLst/>
-          </a:prstGeom>
-          <a:noFill/>
-          <a:ln/>
-        </p:spPr>
-        <p:txBody>
-          <a:bodyPr wrap="square" lIns="0" tIns="0" rIns="0" bIns="0" rtlCol="0" anchor="ctr"/>
-          <a:lstStyle/>
-          <a:p>
-            <a:pPr indent="0" marL="0">
-              <a:buNone/>
-            </a:pPr>
-            <a:r>
-              <a:rPr lang="en-US" sz="5000" dirty="0">
-                <a:solidFill>
-                  <a:srgbClr val="0E2F2B"/>
-                </a:solidFill>
-                <a:latin typeface="Segoe UI Light" pitchFamily="34" charset="0"/>
-                <a:ea typeface="Segoe UI Light" pitchFamily="34" charset="-122"/>
-                <a:cs typeface="Segoe UI Light" pitchFamily="34" charset="-120"/>
-              </a:rPr>
-              <a:t>260</a:t>
-            </a:r>
-            <a:endParaRPr lang="en-US" sz="5000" dirty="0"/>
-          </a:p>
-        </p:txBody>
-      </p:sp>
-      <p:sp>
-        <p:nvSpPr>
-          <p:cNvPr id="9" name="Text 7"/>
-          <p:cNvSpPr txBox="1"/>
-          <p:nvPr/>
-        </p:nvSpPr>
-        <p:spPr>
-          <a:xfrm>
-            <a:off x="2926080" y="3566160"/>
-            <a:ext cx="2651760" cy="1005840"/>
-          </a:xfrm>
-          <a:prstGeom prst="rect">
-            <a:avLst/>
-          </a:prstGeom>
-          <a:noFill/>
-          <a:ln/>
-        </p:spPr>
-        <p:txBody>
-          <a:bodyPr wrap="square" lIns="0" tIns="0" rIns="0" bIns="0" rtlCol="0" anchor="ctr"/>
-          <a:lstStyle/>
-          <a:p>
-            <a:pPr indent="0" marL="0">
-              <a:buNone/>
-            </a:pPr>
-            <a:r>
-              <a:rPr lang="en-US" sz="1300" b="1" dirty="0">
+          <p:cNvPr id="19" name="Text 17"/>
+          <p:cNvSpPr txBox="1"/>
+          <p:nvPr/>
+        </p:nvSpPr>
+        <p:spPr>
+          <a:xfrm>
+            <a:off x="731520" y="3895344"/>
+            <a:ext cx="2606040" cy="758952"/>
+          </a:xfrm>
+          <a:prstGeom prst="rect">
+            <a:avLst/>
+          </a:prstGeom>
+          <a:noFill/>
+          <a:ln/>
+        </p:spPr>
+        <p:txBody>
+          <a:bodyPr wrap="square" lIns="0" tIns="0" rIns="0" bIns="0" rtlCol="0" anchor="t"/>
+          <a:lstStyle/>
+          <a:p>
+            <a:pPr indent="0" marL="0">
+              <a:buNone/>
+            </a:pPr>
+            <a:r>
+              <a:rPr lang="en-US" sz="1150" dirty="0">
                 <a:solidFill>
                   <a:srgbClr val="0E2F2B"/>
                 </a:solidFill>
@@ -13731,13 +15600,38 @@
                 <a:ea typeface="Segoe UI" pitchFamily="34" charset="-122"/>
                 <a:cs typeface="Segoe UI" pitchFamily="34" charset="-120"/>
               </a:rPr>
-              <a:t>of 260  </a:t>
-            </a:r>
-            <a:pPr indent="0" marL="0">
-              <a:buNone/>
-            </a:pPr>
-            <a:r>
-              <a:rPr lang="en-US" sz="1300" dirty="0">
+              <a:t>The card said “Need more info” above a complete answer.</a:t>
+            </a:r>
+            <a:endParaRPr lang="en-US" sz="1150" dirty="0"/>
+          </a:p>
+        </p:txBody>
+      </p:sp>
+      <p:sp>
+        <p:nvSpPr>
+          <p:cNvPr id="20" name="Text 18"/>
+          <p:cNvSpPr txBox="1"/>
+          <p:nvPr/>
+        </p:nvSpPr>
+        <p:spPr>
+          <a:xfrm>
+            <a:off x="3474720" y="3895344"/>
+            <a:ext cx="2468880" cy="758952"/>
+          </a:xfrm>
+          <a:prstGeom prst="rect">
+            <a:avLst/>
+          </a:prstGeom>
+          <a:noFill/>
+          <a:ln/>
+        </p:spPr>
+        <p:txBody>
+          <a:bodyPr wrap="square" lIns="0" tIns="0" rIns="0" bIns="0" rtlCol="0" anchor="t"/>
+          <a:lstStyle/>
+          <a:p>
+            <a:pPr indent="0" marL="0">
+              <a:buNone/>
+            </a:pPr>
+            <a:r>
+              <a:rPr lang="en-US" sz="1150" dirty="0">
                 <a:solidFill>
                   <a:srgbClr val="2B403C"/>
                 </a:solidFill>
@@ -13745,22 +15639,100 @@
                 <a:ea typeface="Segoe UI" pitchFamily="34" charset="-122"/>
                 <a:cs typeface="Segoe UI" pitchFamily="34" charset="-120"/>
               </a:rPr>
-              <a:t>statements supported by a judge model</a:t>
-            </a:r>
-            <a:endParaRPr lang="en-US" sz="1300" dirty="0"/>
-          </a:p>
-        </p:txBody>
-      </p:sp>
-      <p:sp>
-        <p:nvSpPr>
-          <p:cNvPr id="10" name="Shape 8"/>
+              <a:t>The badge came from the gate, not from the validated model output.</a:t>
+            </a:r>
+            <a:endParaRPr lang="en-US" sz="1150" dirty="0"/>
+          </a:p>
+        </p:txBody>
+      </p:sp>
+      <p:sp>
+        <p:nvSpPr>
+          <p:cNvPr id="21" name="Text 19"/>
+          <p:cNvSpPr txBox="1"/>
+          <p:nvPr/>
+        </p:nvSpPr>
+        <p:spPr>
+          <a:xfrm>
+            <a:off x="6080760" y="3895344"/>
+            <a:ext cx="2788920" cy="758952"/>
+          </a:xfrm>
+          <a:prstGeom prst="rect">
+            <a:avLst/>
+          </a:prstGeom>
+          <a:noFill/>
+          <a:ln/>
+        </p:spPr>
+        <p:txBody>
+          <a:bodyPr wrap="square" lIns="0" tIns="0" rIns="0" bIns="0" rtlCol="0" anchor="t"/>
+          <a:lstStyle/>
+          <a:p>
+            <a:pPr indent="0" marL="0">
+              <a:buNone/>
+            </a:pPr>
+            <a:r>
+              <a:rPr lang="en-US" sz="1150" dirty="0">
+                <a:solidFill>
+                  <a:srgbClr val="2B403C"/>
+                </a:solidFill>
+                <a:latin typeface="Segoe UI" pitchFamily="34" charset="0"/>
+                <a:ea typeface="Segoe UI" pitchFamily="34" charset="-122"/>
+                <a:cs typeface="Segoe UI" pitchFamily="34" charset="-120"/>
+              </a:rPr>
+              <a:t>The badge follows the validated output. A gate refusal stays final.</a:t>
+            </a:r>
+            <a:endParaRPr lang="en-US" sz="1150" dirty="0"/>
+          </a:p>
+        </p:txBody>
+      </p:sp>
+      <p:sp>
+        <p:nvSpPr>
+          <p:cNvPr id="22" name="Text 20"/>
+          <p:cNvSpPr txBox="1"/>
+          <p:nvPr/>
+        </p:nvSpPr>
+        <p:spPr>
+          <a:xfrm>
+            <a:off x="9006840" y="3895344"/>
+            <a:ext cx="2450592" cy="758952"/>
+          </a:xfrm>
+          <a:prstGeom prst="rect">
+            <a:avLst/>
+          </a:prstGeom>
+          <a:noFill/>
+          <a:ln/>
+        </p:spPr>
+        <p:txBody>
+          <a:bodyPr wrap="square" lIns="0" tIns="0" rIns="0" bIns="0" rtlCol="0" anchor="t"/>
+          <a:lstStyle/>
+          <a:p>
+            <a:pPr indent="0" marL="0">
+              <a:buNone/>
+            </a:pPr>
+            <a:r>
+              <a:rPr lang="en-US" sz="1150" dirty="0">
+                <a:solidFill>
+                  <a:srgbClr val="1E6B58"/>
+                </a:solidFill>
+                <a:latin typeface="Segoe UI Semibold" pitchFamily="34" charset="0"/>
+                <a:ea typeface="Segoe UI Semibold" pitchFamily="34" charset="-122"/>
+                <a:cs typeface="Segoe UI Semibold" pitchFamily="34" charset="-120"/>
+              </a:rPr>
+              <a:t>Tests for both directions. Slide 9 shows it.</a:t>
+            </a:r>
+            <a:endParaRPr lang="en-US" sz="1150" dirty="0"/>
+          </a:p>
+        </p:txBody>
+      </p:sp>
+      <p:sp>
+        <p:nvSpPr>
+          <p:cNvPr id="23" name="Shape 21"/>
           <p:cNvSpPr/>
           <p:nvPr/>
         </p:nvSpPr>
         <p:spPr>
           <a:xfrm>
-            <a:off x="731520" y="4846320"/>
-            <a:ext cx="4846320" cy="0"/>
+            <a:off x="731520" y="4700016"/>
+            <a:ext cx="10728655" cy="0"/>
           </a:xfrm>
           <a:prstGeom prst="line">
             <a:avLst/>
@@ -13776,69 +15748,30 @@
       </p:sp>
       <p:sp>
         <p:nvSpPr>
-          <p:cNvPr id="11" name="Text 9"/>
-          <p:cNvSpPr txBox="1"/>
-          <p:nvPr/>
-        </p:nvSpPr>
-        <p:spPr>
-          <a:xfrm>
-            <a:off x="731520" y="4937760"/>
-            <a:ext cx="2103120" cy="1005840"/>
-          </a:xfrm>
-          <a:prstGeom prst="rect">
-            <a:avLst/>
-          </a:prstGeom>
-          <a:noFill/>
-          <a:ln/>
-        </p:spPr>
-        <p:txBody>
-          <a:bodyPr wrap="square" lIns="0" tIns="0" rIns="0" bIns="0" rtlCol="0" anchor="ctr"/>
-          <a:lstStyle/>
-          <a:p>
-            <a:pPr indent="0" marL="0">
-              <a:buNone/>
-            </a:pPr>
-            <a:r>
-              <a:rPr lang="en-US" sz="5000" dirty="0">
-                <a:solidFill>
-                  <a:srgbClr val="0E2F2B"/>
-                </a:solidFill>
-                <a:latin typeface="Segoe UI Light" pitchFamily="34" charset="0"/>
-                <a:ea typeface="Segoe UI Light" pitchFamily="34" charset="-122"/>
-                <a:cs typeface="Segoe UI Light" pitchFamily="34" charset="-120"/>
-              </a:rPr>
-              <a:t>2.5 s</a:t>
-            </a:r>
-            <a:endParaRPr lang="en-US" sz="5000" dirty="0"/>
-          </a:p>
-        </p:txBody>
-      </p:sp>
-      <p:sp>
-        <p:nvSpPr>
-          <p:cNvPr id="12" name="Text 10"/>
-          <p:cNvSpPr txBox="1"/>
-          <p:nvPr/>
-        </p:nvSpPr>
-        <p:spPr>
-          <a:xfrm>
-            <a:off x="2926080" y="4937760"/>
-            <a:ext cx="2651760" cy="1005840"/>
-          </a:xfrm>
-          <a:prstGeom prst="rect">
-            <a:avLst/>
-          </a:prstGeom>
-          <a:noFill/>
-          <a:ln/>
-        </p:spPr>
-        <p:txBody>
-          <a:bodyPr wrap="square" lIns="0" tIns="0" rIns="0" bIns="0" rtlCol="0" anchor="ctr"/>
-          <a:lstStyle/>
-          <a:p>
-            <a:pPr indent="0" marL="0">
-              <a:buNone/>
-            </a:pPr>
-            <a:r>
-              <a:rPr lang="en-US" sz="1300" b="1" dirty="0">
+          <p:cNvPr id="24" name="Text 22"/>
+          <p:cNvSpPr txBox="1"/>
+          <p:nvPr/>
+        </p:nvSpPr>
+        <p:spPr>
+          <a:xfrm>
+            <a:off x="731520" y="4791456"/>
+            <a:ext cx="2606040" cy="758952"/>
+          </a:xfrm>
+          <a:prstGeom prst="rect">
+            <a:avLst/>
+          </a:prstGeom>
+          <a:noFill/>
+          <a:ln/>
+        </p:spPr>
+        <p:txBody>
+          <a:bodyPr wrap="square" lIns="0" tIns="0" rIns="0" bIns="0" rtlCol="0" anchor="t"/>
+          <a:lstStyle/>
+          <a:p>
+            <a:pPr indent="0" marL="0">
+              <a:buNone/>
+            </a:pPr>
+            <a:r>
+              <a:rPr lang="en-US" sz="1150" dirty="0">
                 <a:solidFill>
                   <a:srgbClr val="0E2F2B"/>
                 </a:solidFill>
@@ -13846,13 +15779,38 @@
                 <a:ea typeface="Segoe UI" pitchFamily="34" charset="-122"/>
                 <a:cs typeface="Segoe UI" pitchFamily="34" charset="-120"/>
               </a:rPr>
-              <a:t>median  </a:t>
-            </a:r>
-            <a:pPr indent="0" marL="0">
-              <a:buNone/>
-            </a:pPr>
-            <a:r>
-              <a:rPr lang="en-US" sz="1300" dirty="0">
+              <a:t>One escalation team shown where the entry lists four. Attach list empty.</a:t>
+            </a:r>
+            <a:endParaRPr lang="en-US" sz="1150" dirty="0"/>
+          </a:p>
+        </p:txBody>
+      </p:sp>
+      <p:sp>
+        <p:nvSpPr>
+          <p:cNvPr id="25" name="Text 23"/>
+          <p:cNvSpPr txBox="1"/>
+          <p:nvPr/>
+        </p:nvSpPr>
+        <p:spPr>
+          <a:xfrm>
+            <a:off x="3474720" y="4791456"/>
+            <a:ext cx="2468880" cy="758952"/>
+          </a:xfrm>
+          <a:prstGeom prst="rect">
+            <a:avLst/>
+          </a:prstGeom>
+          <a:noFill/>
+          <a:ln/>
+        </p:spPr>
+        <p:txBody>
+          <a:bodyPr wrap="square" lIns="0" tIns="0" rIns="0" bIns="0" rtlCol="0" anchor="t"/>
+          <a:lstStyle/>
+          <a:p>
+            <a:pPr indent="0" marL="0">
+              <a:buNone/>
+            </a:pPr>
+            <a:r>
+              <a:rPr lang="en-US" sz="1150" dirty="0">
                 <a:solidFill>
                   <a:srgbClr val="2B403C"/>
                 </a:solidFill>
@@ -13860,455 +15818,105 @@
                 <a:ea typeface="Segoe UI" pitchFamily="34" charset="-122"/>
                 <a:cs typeface="Segoe UI" pitchFamily="34" charset="-120"/>
               </a:rPr>
-              <a:t>to answer (6.9 s at the 95th percentile)</a:t>
-            </a:r>
-            <a:endParaRPr lang="en-US" sz="1300" dirty="0"/>
-          </a:p>
-        </p:txBody>
-      </p:sp>
-      <p:sp>
-        <p:nvSpPr>
-          <p:cNvPr id="13" name="Text 11"/>
-          <p:cNvSpPr txBox="1"/>
-          <p:nvPr/>
-        </p:nvSpPr>
-        <p:spPr>
-          <a:xfrm>
-            <a:off x="7818120" y="2057400"/>
-            <a:ext cx="3621024" cy="274320"/>
-          </a:xfrm>
-          <a:prstGeom prst="rect">
-            <a:avLst/>
-          </a:prstGeom>
-          <a:noFill/>
-          <a:ln/>
-        </p:spPr>
-        <p:txBody>
-          <a:bodyPr wrap="square" lIns="0" tIns="0" rIns="0" bIns="0" rtlCol="0" anchor="ctr"/>
-          <a:lstStyle/>
-          <a:p>
-            <a:pPr algn="ctr" indent="0" marL="0">
-              <a:buNone/>
-            </a:pPr>
-            <a:r>
-              <a:rPr lang="en-US" sz="1000" spc="200" kern="0" dirty="0">
-                <a:solidFill>
-                  <a:srgbClr val="6B7C78"/>
+              <a:t>The output schema allowed only a single escalation.</a:t>
+            </a:r>
+            <a:endParaRPr lang="en-US" sz="1150" dirty="0"/>
+          </a:p>
+        </p:txBody>
+      </p:sp>
+      <p:sp>
+        <p:nvSpPr>
+          <p:cNvPr id="26" name="Text 24"/>
+          <p:cNvSpPr txBox="1"/>
+          <p:nvPr/>
+        </p:nvSpPr>
+        <p:spPr>
+          <a:xfrm>
+            <a:off x="6080760" y="4791456"/>
+            <a:ext cx="2788920" cy="758952"/>
+          </a:xfrm>
+          <a:prstGeom prst="rect">
+            <a:avLst/>
+          </a:prstGeom>
+          <a:noFill/>
+          <a:ln/>
+        </p:spPr>
+        <p:txBody>
+          <a:bodyPr wrap="square" lIns="0" tIns="0" rIns="0" bIns="0" rtlCol="0" anchor="t"/>
+          <a:lstStyle/>
+          <a:p>
+            <a:pPr indent="0" marL="0">
+              <a:buNone/>
+            </a:pPr>
+            <a:r>
+              <a:rPr lang="en-US" sz="1150" dirty="0">
+                <a:solidFill>
+                  <a:srgbClr val="2B403C"/>
                 </a:solidFill>
                 <a:latin typeface="Segoe UI" pitchFamily="34" charset="0"/>
                 <a:ea typeface="Segoe UI" pitchFamily="34" charset="-122"/>
                 <a:cs typeface="Segoe UI" pitchFamily="34" charset="-120"/>
               </a:rPr>
-              <a:t>WHAT IT DID</a:t>
-            </a:r>
-            <a:endParaRPr lang="en-US" sz="1000" dirty="0"/>
-          </a:p>
-        </p:txBody>
-      </p:sp>
-      <p:sp>
-        <p:nvSpPr>
-          <p:cNvPr id="14" name="Text 12"/>
-          <p:cNvSpPr txBox="1"/>
-          <p:nvPr/>
-        </p:nvSpPr>
-        <p:spPr>
-          <a:xfrm>
-            <a:off x="7818120" y="2286000"/>
-            <a:ext cx="1207008" cy="274320"/>
-          </a:xfrm>
-          <a:prstGeom prst="rect">
-            <a:avLst/>
-          </a:prstGeom>
-          <a:noFill/>
-          <a:ln/>
-        </p:spPr>
-        <p:txBody>
-          <a:bodyPr wrap="square" lIns="0" tIns="0" rIns="0" bIns="0" rtlCol="0" anchor="ctr"/>
-          <a:lstStyle/>
-          <a:p>
-            <a:pPr algn="ctr" indent="0" marL="0">
-              <a:buNone/>
-            </a:pPr>
-            <a:r>
-              <a:rPr lang="en-US" sz="1100" dirty="0">
-                <a:solidFill>
-                  <a:srgbClr val="2B403C"/>
-                </a:solidFill>
-                <a:latin typeface="Segoe UI" pitchFamily="34" charset="0"/>
-                <a:ea typeface="Segoe UI" pitchFamily="34" charset="-122"/>
-                <a:cs typeface="Segoe UI" pitchFamily="34" charset="-120"/>
-              </a:rPr>
-              <a:t>Answered</a:t>
-            </a:r>
-            <a:endParaRPr lang="en-US" sz="1100" dirty="0"/>
-          </a:p>
-        </p:txBody>
-      </p:sp>
-      <p:sp>
-        <p:nvSpPr>
-          <p:cNvPr id="15" name="Text 13"/>
-          <p:cNvSpPr txBox="1"/>
-          <p:nvPr/>
-        </p:nvSpPr>
-        <p:spPr>
-          <a:xfrm>
-            <a:off x="9025128" y="2286000"/>
-            <a:ext cx="1207008" cy="274320"/>
-          </a:xfrm>
-          <a:prstGeom prst="rect">
-            <a:avLst/>
-          </a:prstGeom>
-          <a:noFill/>
-          <a:ln/>
-        </p:spPr>
-        <p:txBody>
-          <a:bodyPr wrap="square" lIns="0" tIns="0" rIns="0" bIns="0" rtlCol="0" anchor="ctr"/>
-          <a:lstStyle/>
-          <a:p>
-            <a:pPr algn="ctr" indent="0" marL="0">
-              <a:buNone/>
-            </a:pPr>
-            <a:r>
-              <a:rPr lang="en-US" sz="1100" dirty="0">
-                <a:solidFill>
-                  <a:srgbClr val="2B403C"/>
-                </a:solidFill>
-                <a:latin typeface="Segoe UI" pitchFamily="34" charset="0"/>
-                <a:ea typeface="Segoe UI" pitchFamily="34" charset="-122"/>
-                <a:cs typeface="Segoe UI" pitchFamily="34" charset="-120"/>
-              </a:rPr>
-              <a:t>Asked</a:t>
-            </a:r>
-            <a:endParaRPr lang="en-US" sz="1100" dirty="0"/>
-          </a:p>
-        </p:txBody>
-      </p:sp>
-      <p:sp>
-        <p:nvSpPr>
-          <p:cNvPr id="16" name="Text 14"/>
-          <p:cNvSpPr txBox="1"/>
-          <p:nvPr/>
-        </p:nvSpPr>
-        <p:spPr>
-          <a:xfrm>
-            <a:off x="10232136" y="2286000"/>
-            <a:ext cx="1207008" cy="274320"/>
-          </a:xfrm>
-          <a:prstGeom prst="rect">
-            <a:avLst/>
-          </a:prstGeom>
-          <a:noFill/>
-          <a:ln/>
-        </p:spPr>
-        <p:txBody>
-          <a:bodyPr wrap="square" lIns="0" tIns="0" rIns="0" bIns="0" rtlCol="0" anchor="ctr"/>
-          <a:lstStyle/>
-          <a:p>
-            <a:pPr algn="ctr" indent="0" marL="0">
-              <a:buNone/>
-            </a:pPr>
-            <a:r>
-              <a:rPr lang="en-US" sz="1100" dirty="0">
-                <a:solidFill>
-                  <a:srgbClr val="2B403C"/>
-                </a:solidFill>
-                <a:latin typeface="Segoe UI" pitchFamily="34" charset="0"/>
-                <a:ea typeface="Segoe UI" pitchFamily="34" charset="-122"/>
-                <a:cs typeface="Segoe UI" pitchFamily="34" charset="-120"/>
-              </a:rPr>
-              <a:t>Refused</a:t>
-            </a:r>
-            <a:endParaRPr lang="en-US" sz="1100" dirty="0"/>
-          </a:p>
-        </p:txBody>
-      </p:sp>
-      <p:sp>
-        <p:nvSpPr>
-          <p:cNvPr id="17" name="Text 15"/>
-          <p:cNvSpPr txBox="1"/>
-          <p:nvPr/>
-        </p:nvSpPr>
-        <p:spPr>
-          <a:xfrm>
-            <a:off x="6492240" y="2606040"/>
-            <a:ext cx="1234440" cy="777240"/>
-          </a:xfrm>
-          <a:prstGeom prst="rect">
-            <a:avLst/>
-          </a:prstGeom>
-          <a:noFill/>
-          <a:ln/>
-        </p:spPr>
-        <p:txBody>
-          <a:bodyPr wrap="square" lIns="0" tIns="0" rIns="0" bIns="0" rtlCol="0" anchor="ctr"/>
-          <a:lstStyle/>
-          <a:p>
-            <a:pPr indent="0" marL="0">
-              <a:buNone/>
-            </a:pPr>
-            <a:r>
-              <a:rPr lang="en-US" sz="1100" dirty="0">
-                <a:solidFill>
-                  <a:srgbClr val="2B403C"/>
-                </a:solidFill>
-                <a:latin typeface="Segoe UI" pitchFamily="34" charset="0"/>
-                <a:ea typeface="Segoe UI" pitchFamily="34" charset="-122"/>
-                <a:cs typeface="Segoe UI" pitchFamily="34" charset="-120"/>
-              </a:rPr>
-              <a:t>Should answer (29)</a:t>
-            </a:r>
-            <a:endParaRPr lang="en-US" sz="1100" dirty="0"/>
-          </a:p>
-        </p:txBody>
-      </p:sp>
-      <p:sp>
-        <p:nvSpPr>
-          <p:cNvPr id="18" name="Shape 16"/>
-          <p:cNvSpPr/>
-          <p:nvPr/>
-        </p:nvSpPr>
-        <p:spPr>
-          <a:xfrm>
-            <a:off x="7818120" y="2606040"/>
-            <a:ext cx="1152144" cy="777240"/>
-          </a:xfrm>
-          <a:prstGeom prst="rect">
-            <a:avLst/>
-          </a:prstGeom>
-          <a:solidFill>
-            <a:srgbClr val="EEF7C9"/>
-          </a:solidFill>
-          <a:ln w="9525">
-            <a:solidFill>
-              <a:srgbClr val="D6F25C"/>
-            </a:solidFill>
-            <a:prstDash val="solid"/>
-          </a:ln>
-        </p:spPr>
-      </p:sp>
-      <p:sp>
-        <p:nvSpPr>
-          <p:cNvPr id="19" name="Text 17"/>
-          <p:cNvSpPr txBox="1"/>
-          <p:nvPr/>
-        </p:nvSpPr>
-        <p:spPr>
-          <a:xfrm>
-            <a:off x="7818120" y="2606040"/>
-            <a:ext cx="1152144" cy="777240"/>
-          </a:xfrm>
-          <a:prstGeom prst="rect">
-            <a:avLst/>
-          </a:prstGeom>
-          <a:noFill/>
-          <a:ln/>
-        </p:spPr>
-        <p:txBody>
-          <a:bodyPr wrap="square" lIns="0" tIns="0" rIns="0" bIns="0" rtlCol="0" anchor="ctr"/>
-          <a:lstStyle/>
-          <a:p>
-            <a:pPr algn="ctr" indent="0" marL="0">
-              <a:buNone/>
-            </a:pPr>
-            <a:r>
-              <a:rPr lang="en-US" sz="2800" dirty="0">
-                <a:solidFill>
-                  <a:srgbClr val="0E2F2B"/>
+              <a:t>The schema returns every route and the attach list. Prompt v1.2 asks for both.</a:t>
+            </a:r>
+            <a:endParaRPr lang="en-US" sz="1150" dirty="0"/>
+          </a:p>
+        </p:txBody>
+      </p:sp>
+      <p:sp>
+        <p:nvSpPr>
+          <p:cNvPr id="27" name="Text 25"/>
+          <p:cNvSpPr txBox="1"/>
+          <p:nvPr/>
+        </p:nvSpPr>
+        <p:spPr>
+          <a:xfrm>
+            <a:off x="9006840" y="4791456"/>
+            <a:ext cx="2450592" cy="758952"/>
+          </a:xfrm>
+          <a:prstGeom prst="rect">
+            <a:avLst/>
+          </a:prstGeom>
+          <a:noFill/>
+          <a:ln/>
+        </p:spPr>
+        <p:txBody>
+          <a:bodyPr wrap="square" lIns="0" tIns="0" rIns="0" bIns="0" rtlCol="0" anchor="t"/>
+          <a:lstStyle/>
+          <a:p>
+            <a:pPr indent="0" marL="0">
+              <a:buNone/>
+            </a:pPr>
+            <a:r>
+              <a:rPr lang="en-US" sz="1150" dirty="0">
+                <a:solidFill>
+                  <a:srgbClr val="1E6B58"/>
                 </a:solidFill>
                 <a:latin typeface="Segoe UI Semibold" pitchFamily="34" charset="0"/>
                 <a:ea typeface="Segoe UI Semibold" pitchFamily="34" charset="-122"/>
                 <a:cs typeface="Segoe UI Semibold" pitchFamily="34" charset="-120"/>
               </a:rPr>
-              <a:t>27</a:t>
-            </a:r>
-            <a:endParaRPr lang="en-US" sz="2800" dirty="0"/>
-          </a:p>
-        </p:txBody>
-      </p:sp>
-      <p:sp>
-        <p:nvSpPr>
-          <p:cNvPr id="20" name="Shape 18"/>
+              <a:t>The 504 answer now lists PPE, ABP, DBRE and SRE.</a:t>
+            </a:r>
+            <a:endParaRPr lang="en-US" sz="1150" dirty="0"/>
+          </a:p>
+        </p:txBody>
+      </p:sp>
+      <p:sp>
+        <p:nvSpPr>
+          <p:cNvPr id="28" name="Shape 26"/>
           <p:cNvSpPr/>
           <p:nvPr/>
         </p:nvSpPr>
         <p:spPr>
           <a:xfrm>
-            <a:off x="9025128" y="2606040"/>
-            <a:ext cx="1152144" cy="777240"/>
-          </a:xfrm>
-          <a:prstGeom prst="rect">
-            <a:avLst/>
-          </a:prstGeom>
-          <a:solidFill>
-            <a:srgbClr val="F7E3DE"/>
-          </a:solidFill>
-          <a:ln w="9525">
-            <a:solidFill>
-              <a:srgbClr val="E7B8AD"/>
-            </a:solidFill>
-            <a:prstDash val="solid"/>
-          </a:ln>
-        </p:spPr>
-      </p:sp>
-      <p:sp>
-        <p:nvSpPr>
-          <p:cNvPr id="21" name="Text 19"/>
-          <p:cNvSpPr txBox="1"/>
-          <p:nvPr/>
-        </p:nvSpPr>
-        <p:spPr>
-          <a:xfrm>
-            <a:off x="9025128" y="2606040"/>
-            <a:ext cx="1152144" cy="777240"/>
-          </a:xfrm>
-          <a:prstGeom prst="rect">
-            <a:avLst/>
-          </a:prstGeom>
-          <a:noFill/>
-          <a:ln/>
-        </p:spPr>
-        <p:txBody>
-          <a:bodyPr wrap="square" lIns="0" tIns="0" rIns="0" bIns="0" rtlCol="0" anchor="ctr"/>
-          <a:lstStyle/>
-          <a:p>
-            <a:pPr algn="ctr" indent="0" marL="0">
-              <a:buNone/>
-            </a:pPr>
-            <a:r>
-              <a:rPr lang="en-US" sz="2400" dirty="0">
-                <a:solidFill>
-                  <a:srgbClr val="B8452F"/>
-                </a:solidFill>
-                <a:latin typeface="Segoe UI Light" pitchFamily="34" charset="0"/>
-                <a:ea typeface="Segoe UI Light" pitchFamily="34" charset="-122"/>
-                <a:cs typeface="Segoe UI Light" pitchFamily="34" charset="-120"/>
-              </a:rPr>
-              <a:t>1</a:t>
-            </a:r>
-            <a:endParaRPr lang="en-US" sz="2400" dirty="0"/>
-          </a:p>
-        </p:txBody>
-      </p:sp>
-      <p:sp>
-        <p:nvSpPr>
-          <p:cNvPr id="22" name="Shape 20"/>
-          <p:cNvSpPr/>
-          <p:nvPr/>
-        </p:nvSpPr>
-        <p:spPr>
-          <a:xfrm>
-            <a:off x="10232136" y="2606040"/>
-            <a:ext cx="1152144" cy="777240"/>
-          </a:xfrm>
-          <a:prstGeom prst="rect">
-            <a:avLst/>
-          </a:prstGeom>
-          <a:solidFill>
-            <a:srgbClr val="F7E3DE"/>
-          </a:solidFill>
-          <a:ln w="9525">
-            <a:solidFill>
-              <a:srgbClr val="E7B8AD"/>
-            </a:solidFill>
-            <a:prstDash val="solid"/>
-          </a:ln>
-        </p:spPr>
-      </p:sp>
-      <p:sp>
-        <p:nvSpPr>
-          <p:cNvPr id="23" name="Text 21"/>
-          <p:cNvSpPr txBox="1"/>
-          <p:nvPr/>
-        </p:nvSpPr>
-        <p:spPr>
-          <a:xfrm>
-            <a:off x="10232136" y="2606040"/>
-            <a:ext cx="1152144" cy="777240"/>
-          </a:xfrm>
-          <a:prstGeom prst="rect">
-            <a:avLst/>
-          </a:prstGeom>
-          <a:noFill/>
-          <a:ln/>
-        </p:spPr>
-        <p:txBody>
-          <a:bodyPr wrap="square" lIns="0" tIns="0" rIns="0" bIns="0" rtlCol="0" anchor="ctr"/>
-          <a:lstStyle/>
-          <a:p>
-            <a:pPr algn="ctr" indent="0" marL="0">
-              <a:buNone/>
-            </a:pPr>
-            <a:r>
-              <a:rPr lang="en-US" sz="2400" dirty="0">
-                <a:solidFill>
-                  <a:srgbClr val="B8452F"/>
-                </a:solidFill>
-                <a:latin typeface="Segoe UI Light" pitchFamily="34" charset="0"/>
-                <a:ea typeface="Segoe UI Light" pitchFamily="34" charset="-122"/>
-                <a:cs typeface="Segoe UI Light" pitchFamily="34" charset="-120"/>
-              </a:rPr>
-              <a:t>1</a:t>
-            </a:r>
-            <a:endParaRPr lang="en-US" sz="2400" dirty="0"/>
-          </a:p>
-        </p:txBody>
-      </p:sp>
-      <p:sp>
-        <p:nvSpPr>
-          <p:cNvPr id="24" name="Text 22"/>
-          <p:cNvSpPr txBox="1"/>
-          <p:nvPr/>
-        </p:nvSpPr>
-        <p:spPr>
-          <a:xfrm>
-            <a:off x="6492240" y="3474720"/>
-            <a:ext cx="1234440" cy="777240"/>
-          </a:xfrm>
-          <a:prstGeom prst="rect">
-            <a:avLst/>
-          </a:prstGeom>
-          <a:noFill/>
-          <a:ln/>
-        </p:spPr>
-        <p:txBody>
-          <a:bodyPr wrap="square" lIns="0" tIns="0" rIns="0" bIns="0" rtlCol="0" anchor="ctr"/>
-          <a:lstStyle/>
-          <a:p>
-            <a:pPr indent="0" marL="0">
-              <a:buNone/>
-            </a:pPr>
-            <a:r>
-              <a:rPr lang="en-US" sz="1100" dirty="0">
-                <a:solidFill>
-                  <a:srgbClr val="2B403C"/>
-                </a:solidFill>
-                <a:latin typeface="Segoe UI" pitchFamily="34" charset="0"/>
-                <a:ea typeface="Segoe UI" pitchFamily="34" charset="-122"/>
-                <a:cs typeface="Segoe UI" pitchFamily="34" charset="-120"/>
-              </a:rPr>
-              <a:t>Should ask (5)</a:t>
-            </a:r>
-            <a:endParaRPr lang="en-US" sz="1100" dirty="0"/>
-          </a:p>
-        </p:txBody>
-      </p:sp>
-      <p:sp>
-        <p:nvSpPr>
-          <p:cNvPr id="25" name="Shape 23"/>
-          <p:cNvSpPr/>
-          <p:nvPr/>
-        </p:nvSpPr>
-        <p:spPr>
-          <a:xfrm>
-            <a:off x="7818120" y="3474720"/>
-            <a:ext cx="1152144" cy="777240"/>
-          </a:xfrm>
-          <a:prstGeom prst="rect">
-            <a:avLst/>
-          </a:prstGeom>
-          <a:solidFill>
-            <a:srgbClr val="FFFFFF"/>
-          </a:solidFill>
+            <a:off x="731520" y="5596128"/>
+            <a:ext cx="10728655" cy="0"/>
+          </a:xfrm>
+          <a:prstGeom prst="line">
+            <a:avLst/>
+          </a:prstGeom>
+          <a:noFill/>
           <a:ln w="9525">
             <a:solidFill>
               <a:srgbClr val="D8DFDB"/>
@@ -14319,197 +15927,30 @@
       </p:sp>
       <p:sp>
         <p:nvSpPr>
-          <p:cNvPr id="26" name="Text 24"/>
-          <p:cNvSpPr txBox="1"/>
-          <p:nvPr/>
-        </p:nvSpPr>
-        <p:spPr>
-          <a:xfrm>
-            <a:off x="7818120" y="3474720"/>
-            <a:ext cx="1152144" cy="777240"/>
-          </a:xfrm>
-          <a:prstGeom prst="rect">
-            <a:avLst/>
-          </a:prstGeom>
-          <a:noFill/>
-          <a:ln/>
-        </p:spPr>
-        <p:txBody>
-          <a:bodyPr wrap="square" lIns="0" tIns="0" rIns="0" bIns="0" rtlCol="0" anchor="ctr"/>
-          <a:lstStyle/>
-          <a:p>
-            <a:pPr algn="ctr" indent="0" marL="0">
-              <a:buNone/>
-            </a:pPr>
-            <a:r>
-              <a:rPr lang="en-US" sz="2400" dirty="0">
-                <a:solidFill>
-                  <a:srgbClr val="6B7C78"/>
-                </a:solidFill>
-                <a:latin typeface="Segoe UI Light" pitchFamily="34" charset="0"/>
-                <a:ea typeface="Segoe UI Light" pitchFamily="34" charset="-122"/>
-                <a:cs typeface="Segoe UI Light" pitchFamily="34" charset="-120"/>
-              </a:rPr>
-              <a:t>0</a:t>
-            </a:r>
-            <a:endParaRPr lang="en-US" sz="2400" dirty="0"/>
-          </a:p>
-        </p:txBody>
-      </p:sp>
-      <p:sp>
-        <p:nvSpPr>
-          <p:cNvPr id="27" name="Shape 25"/>
-          <p:cNvSpPr/>
-          <p:nvPr/>
-        </p:nvSpPr>
-        <p:spPr>
-          <a:xfrm>
-            <a:off x="9025128" y="3474720"/>
-            <a:ext cx="1152144" cy="777240"/>
-          </a:xfrm>
-          <a:prstGeom prst="rect">
-            <a:avLst/>
-          </a:prstGeom>
-          <a:solidFill>
-            <a:srgbClr val="EEF7C9"/>
-          </a:solidFill>
-          <a:ln w="9525">
-            <a:solidFill>
-              <a:srgbClr val="D6F25C"/>
-            </a:solidFill>
-            <a:prstDash val="solid"/>
-          </a:ln>
-        </p:spPr>
-      </p:sp>
-      <p:sp>
-        <p:nvSpPr>
-          <p:cNvPr id="28" name="Text 26"/>
-          <p:cNvSpPr txBox="1"/>
-          <p:nvPr/>
-        </p:nvSpPr>
-        <p:spPr>
-          <a:xfrm>
-            <a:off x="9025128" y="3474720"/>
-            <a:ext cx="1152144" cy="777240"/>
-          </a:xfrm>
-          <a:prstGeom prst="rect">
-            <a:avLst/>
-          </a:prstGeom>
-          <a:noFill/>
-          <a:ln/>
-        </p:spPr>
-        <p:txBody>
-          <a:bodyPr wrap="square" lIns="0" tIns="0" rIns="0" bIns="0" rtlCol="0" anchor="ctr"/>
-          <a:lstStyle/>
-          <a:p>
-            <a:pPr algn="ctr" indent="0" marL="0">
-              <a:buNone/>
-            </a:pPr>
-            <a:r>
-              <a:rPr lang="en-US" sz="2800" dirty="0">
-                <a:solidFill>
-                  <a:srgbClr val="0E2F2B"/>
-                </a:solidFill>
-                <a:latin typeface="Segoe UI Semibold" pitchFamily="34" charset="0"/>
-                <a:ea typeface="Segoe UI Semibold" pitchFamily="34" charset="-122"/>
-                <a:cs typeface="Segoe UI Semibold" pitchFamily="34" charset="-120"/>
-              </a:rPr>
-              <a:t>2</a:t>
-            </a:r>
-            <a:endParaRPr lang="en-US" sz="2800" dirty="0"/>
-          </a:p>
-        </p:txBody>
-      </p:sp>
-      <p:sp>
-        <p:nvSpPr>
-          <p:cNvPr id="29" name="Shape 27"/>
-          <p:cNvSpPr/>
-          <p:nvPr/>
-        </p:nvSpPr>
-        <p:spPr>
-          <a:xfrm>
-            <a:off x="10232136" y="3474720"/>
-            <a:ext cx="1152144" cy="777240"/>
-          </a:xfrm>
-          <a:prstGeom prst="rect">
-            <a:avLst/>
-          </a:prstGeom>
-          <a:solidFill>
-            <a:srgbClr val="F7E3DE"/>
-          </a:solidFill>
-          <a:ln w="9525">
-            <a:solidFill>
-              <a:srgbClr val="E7B8AD"/>
-            </a:solidFill>
-            <a:prstDash val="solid"/>
-          </a:ln>
-        </p:spPr>
-      </p:sp>
-      <p:sp>
-        <p:nvSpPr>
-          <p:cNvPr id="30" name="Text 28"/>
-          <p:cNvSpPr txBox="1"/>
-          <p:nvPr/>
-        </p:nvSpPr>
-        <p:spPr>
-          <a:xfrm>
-            <a:off x="10232136" y="3474720"/>
-            <a:ext cx="1152144" cy="777240"/>
-          </a:xfrm>
-          <a:prstGeom prst="rect">
-            <a:avLst/>
-          </a:prstGeom>
-          <a:noFill/>
-          <a:ln/>
-        </p:spPr>
-        <p:txBody>
-          <a:bodyPr wrap="square" lIns="0" tIns="0" rIns="0" bIns="0" rtlCol="0" anchor="ctr"/>
-          <a:lstStyle/>
-          <a:p>
-            <a:pPr algn="ctr" indent="0" marL="0">
-              <a:buNone/>
-            </a:pPr>
-            <a:r>
-              <a:rPr lang="en-US" sz="2400" dirty="0">
-                <a:solidFill>
-                  <a:srgbClr val="B8452F"/>
-                </a:solidFill>
-                <a:latin typeface="Segoe UI Light" pitchFamily="34" charset="0"/>
-                <a:ea typeface="Segoe UI Light" pitchFamily="34" charset="-122"/>
-                <a:cs typeface="Segoe UI Light" pitchFamily="34" charset="-120"/>
-              </a:rPr>
-              <a:t>3</a:t>
-            </a:r>
-            <a:endParaRPr lang="en-US" sz="2400" dirty="0"/>
-          </a:p>
-        </p:txBody>
-      </p:sp>
-      <p:sp>
-        <p:nvSpPr>
-          <p:cNvPr id="31" name="Text 29"/>
-          <p:cNvSpPr txBox="1"/>
-          <p:nvPr/>
-        </p:nvSpPr>
-        <p:spPr>
-          <a:xfrm>
-            <a:off x="6492240" y="4343400"/>
-            <a:ext cx="1234440" cy="777240"/>
-          </a:xfrm>
-          <a:prstGeom prst="rect">
-            <a:avLst/>
-          </a:prstGeom>
-          <a:noFill/>
-          <a:ln/>
-        </p:spPr>
-        <p:txBody>
-          <a:bodyPr wrap="square" lIns="0" tIns="0" rIns="0" bIns="0" rtlCol="0" anchor="ctr"/>
-          <a:lstStyle/>
-          <a:p>
-            <a:pPr indent="0" marL="0">
-              <a:buNone/>
-            </a:pPr>
-            <a:r>
-              <a:rPr lang="en-US" sz="1100" dirty="0">
+          <p:cNvPr id="29" name="Text 27"/>
+          <p:cNvSpPr txBox="1"/>
+          <p:nvPr/>
+        </p:nvSpPr>
+        <p:spPr>
+          <a:xfrm>
+            <a:off x="731520" y="5733288"/>
+            <a:ext cx="10728655" cy="548640"/>
+          </a:xfrm>
+          <a:prstGeom prst="rect">
+            <a:avLst/>
+          </a:prstGeom>
+          <a:noFill/>
+          <a:ln/>
+        </p:spPr>
+        <p:txBody>
+          <a:bodyPr wrap="square" lIns="0" tIns="0" rIns="0" bIns="0" rtlCol="0" anchor="t"/>
+          <a:lstStyle/>
+          <a:p>
+            <a:pPr indent="0" marL="0">
+              <a:buNone/>
+            </a:pPr>
+            <a:r>
+              <a:rPr lang="en-US" sz="1250" dirty="0">
                 <a:solidFill>
                   <a:srgbClr val="2B403C"/>
                 </a:solidFill>
@@ -14517,240 +15958,40 @@
                 <a:ea typeface="Segoe UI" pitchFamily="34" charset="-122"/>
                 <a:cs typeface="Segoe UI" pitchFamily="34" charset="-120"/>
               </a:rPr>
-              <a:t>Should refuse (10)</a:t>
-            </a:r>
-            <a:endParaRPr lang="en-US" sz="1100" dirty="0"/>
-          </a:p>
-        </p:txBody>
-      </p:sp>
-      <p:sp>
-        <p:nvSpPr>
-          <p:cNvPr id="32" name="Shape 30"/>
-          <p:cNvSpPr/>
-          <p:nvPr/>
-        </p:nvSpPr>
-        <p:spPr>
-          <a:xfrm>
-            <a:off x="7818120" y="4343400"/>
-            <a:ext cx="1152144" cy="777240"/>
-          </a:xfrm>
-          <a:prstGeom prst="rect">
-            <a:avLst/>
-          </a:prstGeom>
-          <a:solidFill>
-            <a:srgbClr val="FFFFFF"/>
-          </a:solidFill>
-          <a:ln w="9525">
-            <a:solidFill>
-              <a:srgbClr val="D8DFDB"/>
-            </a:solidFill>
-            <a:prstDash val="solid"/>
-          </a:ln>
-        </p:spPr>
-      </p:sp>
-      <p:sp>
-        <p:nvSpPr>
-          <p:cNvPr id="33" name="Text 31"/>
-          <p:cNvSpPr txBox="1"/>
-          <p:nvPr/>
-        </p:nvSpPr>
-        <p:spPr>
-          <a:xfrm>
-            <a:off x="7818120" y="4343400"/>
-            <a:ext cx="1152144" cy="777240"/>
-          </a:xfrm>
-          <a:prstGeom prst="rect">
-            <a:avLst/>
-          </a:prstGeom>
-          <a:noFill/>
-          <a:ln/>
-        </p:spPr>
-        <p:txBody>
-          <a:bodyPr wrap="square" lIns="0" tIns="0" rIns="0" bIns="0" rtlCol="0" anchor="ctr"/>
-          <a:lstStyle/>
-          <a:p>
-            <a:pPr algn="ctr" indent="0" marL="0">
-              <a:buNone/>
-            </a:pPr>
-            <a:r>
-              <a:rPr lang="en-US" sz="2400" dirty="0">
-                <a:solidFill>
-                  <a:srgbClr val="6B7C78"/>
-                </a:solidFill>
-                <a:latin typeface="Segoe UI Light" pitchFamily="34" charset="0"/>
-                <a:ea typeface="Segoe UI Light" pitchFamily="34" charset="-122"/>
-                <a:cs typeface="Segoe UI Light" pitchFamily="34" charset="-120"/>
-              </a:rPr>
-              <a:t>0</a:t>
-            </a:r>
-            <a:endParaRPr lang="en-US" sz="2400" dirty="0"/>
-          </a:p>
-        </p:txBody>
-      </p:sp>
-      <p:sp>
-        <p:nvSpPr>
-          <p:cNvPr id="34" name="Shape 32"/>
-          <p:cNvSpPr/>
-          <p:nvPr/>
-        </p:nvSpPr>
-        <p:spPr>
-          <a:xfrm>
-            <a:off x="9025128" y="4343400"/>
-            <a:ext cx="1152144" cy="777240"/>
-          </a:xfrm>
-          <a:prstGeom prst="rect">
-            <a:avLst/>
-          </a:prstGeom>
-          <a:solidFill>
-            <a:srgbClr val="FFFFFF"/>
-          </a:solidFill>
-          <a:ln w="9525">
-            <a:solidFill>
-              <a:srgbClr val="D8DFDB"/>
-            </a:solidFill>
-            <a:prstDash val="solid"/>
-          </a:ln>
-        </p:spPr>
-      </p:sp>
-      <p:sp>
-        <p:nvSpPr>
-          <p:cNvPr id="35" name="Text 33"/>
-          <p:cNvSpPr txBox="1"/>
-          <p:nvPr/>
-        </p:nvSpPr>
-        <p:spPr>
-          <a:xfrm>
-            <a:off x="9025128" y="4343400"/>
-            <a:ext cx="1152144" cy="777240"/>
-          </a:xfrm>
-          <a:prstGeom prst="rect">
-            <a:avLst/>
-          </a:prstGeom>
-          <a:noFill/>
-          <a:ln/>
-        </p:spPr>
-        <p:txBody>
-          <a:bodyPr wrap="square" lIns="0" tIns="0" rIns="0" bIns="0" rtlCol="0" anchor="ctr"/>
-          <a:lstStyle/>
-          <a:p>
-            <a:pPr algn="ctr" indent="0" marL="0">
-              <a:buNone/>
-            </a:pPr>
-            <a:r>
-              <a:rPr lang="en-US" sz="2400" dirty="0">
-                <a:solidFill>
-                  <a:srgbClr val="6B7C78"/>
-                </a:solidFill>
-                <a:latin typeface="Segoe UI Light" pitchFamily="34" charset="0"/>
-                <a:ea typeface="Segoe UI Light" pitchFamily="34" charset="-122"/>
-                <a:cs typeface="Segoe UI Light" pitchFamily="34" charset="-120"/>
-              </a:rPr>
-              <a:t>0</a:t>
-            </a:r>
-            <a:endParaRPr lang="en-US" sz="2400" dirty="0"/>
-          </a:p>
-        </p:txBody>
-      </p:sp>
-      <p:sp>
-        <p:nvSpPr>
-          <p:cNvPr id="36" name="Shape 34"/>
-          <p:cNvSpPr/>
-          <p:nvPr/>
-        </p:nvSpPr>
-        <p:spPr>
-          <a:xfrm>
-            <a:off x="10232136" y="4343400"/>
-            <a:ext cx="1152144" cy="777240"/>
-          </a:xfrm>
-          <a:prstGeom prst="rect">
-            <a:avLst/>
-          </a:prstGeom>
-          <a:solidFill>
-            <a:srgbClr val="EEF7C9"/>
-          </a:solidFill>
-          <a:ln w="9525">
-            <a:solidFill>
-              <a:srgbClr val="D6F25C"/>
-            </a:solidFill>
-            <a:prstDash val="solid"/>
-          </a:ln>
-        </p:spPr>
-      </p:sp>
-      <p:sp>
-        <p:nvSpPr>
-          <p:cNvPr id="37" name="Text 35"/>
-          <p:cNvSpPr txBox="1"/>
-          <p:nvPr/>
-        </p:nvSpPr>
-        <p:spPr>
-          <a:xfrm>
-            <a:off x="10232136" y="4343400"/>
-            <a:ext cx="1152144" cy="777240"/>
-          </a:xfrm>
-          <a:prstGeom prst="rect">
-            <a:avLst/>
-          </a:prstGeom>
-          <a:noFill/>
-          <a:ln/>
-        </p:spPr>
-        <p:txBody>
-          <a:bodyPr wrap="square" lIns="0" tIns="0" rIns="0" bIns="0" rtlCol="0" anchor="ctr"/>
-          <a:lstStyle/>
-          <a:p>
-            <a:pPr algn="ctr" indent="0" marL="0">
-              <a:buNone/>
-            </a:pPr>
-            <a:r>
-              <a:rPr lang="en-US" sz="2800" dirty="0">
+              <a:t>On the same 24 questions: </a:t>
+            </a:r>
+            <a:pPr indent="0" marL="0">
+              <a:buNone/>
+            </a:pPr>
+            <a:r>
+              <a:rPr lang="en-US" sz="1250" b="1" dirty="0">
                 <a:solidFill>
                   <a:srgbClr val="0E2F2B"/>
                 </a:solidFill>
-                <a:latin typeface="Segoe UI Semibold" pitchFamily="34" charset="0"/>
-                <a:ea typeface="Segoe UI Semibold" pitchFamily="34" charset="-122"/>
-                <a:cs typeface="Segoe UI Semibold" pitchFamily="34" charset="-120"/>
-              </a:rPr>
-              <a:t>10</a:t>
-            </a:r>
-            <a:endParaRPr lang="en-US" sz="2800" dirty="0"/>
-          </a:p>
-        </p:txBody>
-      </p:sp>
-      <p:sp>
-        <p:nvSpPr>
-          <p:cNvPr id="38" name="Text 36"/>
-          <p:cNvSpPr txBox="1"/>
-          <p:nvPr/>
-        </p:nvSpPr>
-        <p:spPr>
-          <a:xfrm>
-            <a:off x="6492240" y="5257800"/>
-            <a:ext cx="4946904" cy="822960"/>
-          </a:xfrm>
-          <a:prstGeom prst="rect">
-            <a:avLst/>
-          </a:prstGeom>
-          <a:noFill/>
-          <a:ln/>
-        </p:spPr>
-        <p:txBody>
-          <a:bodyPr wrap="square" lIns="0" tIns="0" rIns="0" bIns="0" rtlCol="0" anchor="t"/>
-          <a:lstStyle/>
-          <a:p>
-            <a:pPr indent="0" marL="0">
-              <a:buNone/>
-            </a:pPr>
-            <a:r>
-              <a:rPr lang="en-US" sz="1200" dirty="0">
-                <a:solidFill>
-                  <a:srgbClr val="2B403C"/>
-                </a:solidFill>
+                <a:highlight>
+                  <a:srgbClr val="D6F25C"/>
+                </a:highlight>
                 <a:latin typeface="Segoe UI" pitchFamily="34" charset="0"/>
                 <a:ea typeface="Segoe UI" pitchFamily="34" charset="-122"/>
                 <a:cs typeface="Segoe UI" pitchFamily="34" charset="-120"/>
               </a:rPr>
-              <a:t>Five misses: three very short vague messages (“the system seems down”) were told “not in KB” instead of being asked what is wrong, one question got follow-ups, and one was over-refused.</a:t>
-            </a:r>
-            <a:endParaRPr lang="en-US" sz="1200" dirty="0"/>
+              <a:t>4 of the 6 misses were fixed, 1 new miss appeared, 2 remain.</a:t>
+            </a:r>
+            <a:pPr indent="0" marL="0">
+              <a:buNone/>
+            </a:pPr>
+            <a:r>
+              <a:rPr lang="en-US" sz="1250" dirty="0">
+                <a:solidFill>
+                  <a:srgbClr val="2B403C"/>
+                </a:solidFill>
+                <a:latin typeface="Segoe UI" pitchFamily="34" charset="0"/>
+                <a:ea typeface="Segoe UI" pitchFamily="34" charset="-122"/>
+                <a:cs typeface="Segoe UI" pitchFamily="34" charset="-120"/>
+              </a:rPr>
+              <a:t> Those 24 are now development data, so the 44 unseen questions are the fair measure.</a:t>
+            </a:r>
+            <a:endParaRPr lang="en-US" sz="1250" dirty="0"/>
           </a:p>
         </p:txBody>
       </p:sp>
@@ -14877,7 +16118,7 @@
                 <a:ea typeface="Segoe UI" pitchFamily="34" charset="-122"/>
                 <a:cs typeface="Segoe UI" pitchFamily="34" charset="-120"/>
               </a:rPr>
-              <a:t>   WHAT BROKE</a:t>
+              <a:t>   HOW I FOUND IT</a:t>
             </a:r>
             <a:endParaRPr lang="en-US" sz="1100" dirty="0"/>
           </a:p>
@@ -14935,7 +16176,7 @@
                 <a:ea typeface="Segoe UI Semibold" pitchFamily="34" charset="-122"/>
                 <a:cs typeface="Segoe UI Semibold" pitchFamily="34" charset="-120"/>
               </a:rPr>
-              <a:t>exposed three faults.</a:t>
+              <a:t>showed me three of them.</a:t>
             </a:r>
             <a:endParaRPr lang="en-US" sz="3000" dirty="0"/>
           </a:p>

--- a/docs/presentation/TriageGPT_deck.pptx
+++ b/docs/presentation/TriageGPT_deck.pptx
@@ -938,7 +938,7 @@
           <a:p>
             <a:r>
               <a:rPr lang="en-US" dirty="0"/>
-              <a:t>About 1 minute. The dangerous failure is answering something out of scope, and that is zero on every set. The remaining misses are the safe kind: asking or refusing when it could have answered. The judge was a different model from the writer (Gemini 3.1 Flash-Lite judging Gemini 3.5 Flash-Lite); it is a screening tool, not proof. With 44 questions the uncertainty is wide, roughly 75% to 95%.</a:t>
+              <a:t>About 30 seconds. EDIT THE 'WHO DID WHAT' COLUMN so it names the specific tools you used and the specific files you wrote or reviewed yourself. The assignment grades that honesty, and you should be able to explain every file (docs/CODE_TOUR.md).</a:t>
             </a:r>
             <a:endParaRPr lang="en-US" dirty="0"/>
           </a:p>
@@ -1026,7 +1026,7 @@
           <a:p>
             <a:r>
               <a:rPr lang="en-US" dirty="0"/>
-              <a:t>About 1 minute. EDIT THE 'WHO DID WHAT' COLUMN so it names the specific tools you used and the specific files you wrote or reviewed yourself. The assignment grades that honesty, and you should be able to explain every file (docs/CODE_TOUR.md).</a:t>
+              <a:t>Close on the one line, then take questions. Likely questions are in docs/QA_PREP.md. Appendix slides follow: the live-question faults, retrieval numbers, the stack and the full results table.</a:t>
             </a:r>
             <a:endParaRPr lang="en-US" dirty="0"/>
           </a:p>
@@ -1114,7 +1114,7 @@
           <a:p>
             <a:r>
               <a:rPr lang="en-US" dirty="0"/>
-              <a:t>Close on the one line, then take questions. Likely questions are in docs/QA_PREP.md. Appendix slides follow for retrieval numbers, the stack and the full results table.</a:t>
+              <a:t>Appendix, only if asked. This is my own screenshot from testing. The 'before' images are dark because that was the old interface.</a:t>
             </a:r>
             <a:endParaRPr lang="en-US" dirty="0"/>
           </a:p>
@@ -1290,7 +1290,7 @@
           <a:p>
             <a:r>
               <a:rPr lang="en-US" dirty="0"/>
-              <a:t>Appendix. Model ids change often so the chain lives in an environment variable. Two ids in my first chain were wrong or retired, which I found by testing against both providers.</a:t>
+              <a:t>Appendix. Model ids change often so the chain lives in an environment variable.</a:t>
             </a:r>
             <a:endParaRPr lang="en-US" dirty="0"/>
           </a:p>
@@ -1378,7 +1378,7 @@
           <a:p>
             <a:r>
               <a:rPr lang="en-US" dirty="0"/>
-              <a:t>Appendix. Full tables are in eval/ in the repository, and docs/DECISIONS.md explains each change.</a:t>
+              <a:t>Appendix. Full tables are in eval/ in the repository, and docs/DECISIONS.md has the detailed reasoning for each change.</a:t>
             </a:r>
             <a:endParaRPr lang="en-US" dirty="0"/>
           </a:p>
@@ -1466,7 +1466,7 @@
           <a:p>
             <a:r>
               <a:rPr lang="en-US" dirty="0"/>
-              <a:t>0:30-1:15. The problem is not search speed, it is trust. A chatbot that sounds confident but invents a fix is worse than no chatbot in payments. So the goal is not 'answer everything': it is answer from the manual, show the source, and say so when the manual does not cover it.</a:t>
+              <a:t>0:30-1:00. The problem is not search speed, it is trust. A chatbot that sounds confident but invents a fix is worse than no chatbot in payments. So the goal is not 'answer everything': it is answer from the manual, show the source, and say so when the manual does not cover it.</a:t>
             </a:r>
             <a:endParaRPr lang="en-US" dirty="0"/>
           </a:p>
@@ -1554,7 +1554,7 @@
           <a:p>
             <a:r>
               <a:rPr lang="en-US" dirty="0"/>
-              <a:t>1:15-1:45, then switch to the LIVE DEMO (about 4 minutes). Demo order: (1) 'customer says money got cut twice for one order' - open a citation chip; (2) 'payment failing' - answer one follow-up; (3) 'my laptop VPN is not connecting'; (4) the card-number example, then the 'ignore all previous instructions' example. Finish by ticking 'Under the hood'.</a:t>
+              <a:t>1:00-1:30, then switch to the LIVE DEMO (about 3.5 minutes). Demo order: (1) 'customer says money got cut twice for one order' - open a citation chip; (2) 'payment failing' - answer one follow-up; (3) 'my laptop VPN is not connecting'; (4) the card-number example, then the 'ignore all previous instructions' example. Finish by ticking 'Under the hood'.</a:t>
             </a:r>
             <a:endParaRPr lang="en-US" dirty="0"/>
           </a:p>
@@ -1642,7 +1642,7 @@
           <a:p>
             <a:r>
               <a:rPr lang="en-US" dirty="0"/>
-              <a:t>Backup if the live demo is unavailable: these three screenshots are real. Point out the badge on each (Answer from KB / Need more info / Not in KB). The refusal is decided by code before the model is called, so it does not depend on a prompt being obeyed.</a:t>
+              <a:t>Backup if the live demo is unavailable: these three screenshots are real. Point out the badge on each (Answer from KB / Need more info / Not in KB). The refusal is decided by code before the model is called.</a:t>
             </a:r>
             <a:endParaRPr lang="en-US" dirty="0"/>
           </a:p>
@@ -1730,7 +1730,7 @@
           <a:p>
             <a:r>
               <a:rPr lang="en-US" dirty="0"/>
-              <a:t>About 1 minute. Hybrid search: keyword search catches exact codes like RC 91 or 504, embeddings catch paraphrases, Reciprocal Rank Fusion merges them. No vector database for 67 entries, on purpose. The gate runs before the model; the validator runs after it.</a:t>
+              <a:t>About 50 seconds. Hybrid search: keyword search catches exact codes like RC 91 or 504, embeddings catch paraphrases, Reciprocal Rank Fusion merges them. No vector database for 67 entries, on purpose. The gate runs before the model; the validator runs after it.</a:t>
             </a:r>
             <a:endParaRPr lang="en-US" dirty="0"/>
           </a:p>
@@ -1818,7 +1818,7 @@
           <a:p>
             <a:r>
               <a:rPr lang="en-US" dirty="0"/>
-              <a:t>About 1 minute. All three are covered by unit tests. The masking is also checked end to end: a scripted browser typed a card number and the stored chat history contained only the masked form. Be honest about the injection guard: it is two layers (regex plus Groq Prompt Guard at a 0.98 threshold) and the margin is thin, so it is defence in depth, not a guarantee.</a:t>
+              <a:t>About 40 seconds. All three are covered by unit tests, and the masking is also checked end to end in a real browser: the stored chat history contained only the masked form. The injection guard is two layers (regex plus Groq Prompt Guard at a 0.98 cut-off derived from scoring all 76 test questions).</a:t>
             </a:r>
             <a:endParaRPr lang="en-US" dirty="0"/>
           </a:p>
@@ -1906,7 +1906,7 @@
           <a:p>
             <a:r>
               <a:rPr lang="en-US" dirty="0"/>
-              <a:t>About 1 minute. Say it plainly: my first version scored 94-96% on the questions I had tuned it on and 75% on new ones. That gap is the cost of tuning on a small set. I read every one of the six misses, which is the next slide. Before changing anything I wrote 44 new questions, committed them (the git timestamps prove they predate the fixes), froze the code and ran them once.</a:t>
+              <a:t>About 45 seconds. THE INSIGHT: I had set the gate's thresholds by reading scores off the same 52 questions, so 94% told me how well I had tuned it, not how good it was. That is the classic trap of measuring on the data you tuned on. So I wrote 24 fresh questions it had never seen: 75%. That was the honest baseline. Importantly, retrieval had the right entry first in 13 of 14 answerable questions, so search was sound and the weakness was in the decision layer around it. Then, to avoid repeating the mistake, I wrote 44 more questions, committed them before touching the code, froze the code, and ran them exactly once.</a:t>
             </a:r>
             <a:endParaRPr lang="en-US" dirty="0"/>
           </a:p>
@@ -1994,7 +1994,7 @@
           <a:p>
             <a:r>
               <a:rPr lang="en-US" dirty="0"/>
-              <a:t>About 1 minute: THIS IS THE SLIDE THAT SHOWS ENGINEERING JUDGEMENT. The 75% was not a verdict, it was a to-do list. I read all six misses, found that retrieval had the right entry first in 13 of 14 answerable questions, so the fault was in the gate, not in search. That led to four root causes. 1) The gate used the wrong signal: it took the best semantic score among all five entries instead of the score of the entry ranked first. I fixed it by scoring the top entry, adding a keyword floor, and letting the model arbitrate the uncertain band. 2) The held-out set also exposed a security-guard false positive: Prompt Guard blocked a legitimate jargon-only question. I scored all 76 questions, found a clean gap (attacks at 0.99 or more, that question at 0.975) and moved the cut-off to 0.98. 3) and 4) came from one live question: the badge contradicted the answer, and only one of four escalation teams showed. Be straight about the result: on the same 24 questions four of six misses were fixed, one new miss appeared (the dashboard question now asks instead of answering), and two remain. Then say those 24 are now development data, so I wrote 44 new questions before changing anything and ran them once.</a:t>
+              <a:t>About 1 minute: THIS IS THE ENGINEERING SLIDE. Diagnose: I did not guess. I measured each layer separately; retrieval was right 13 times out of 14, so the loss was in the gate. Fix: the gate had been reading the best semantic score of any retrieved entry instead of the score of the entry ranked first, and it trusted a score band that small embedding models compress into about 0.45-0.90. I made it score the top-ranked entry, added a keyword-support floor, and let the model decide only the genuinely uncertain middle band, with the label always following the validated output. I also derived the injection guard's cut-off from data: scoring all 76 questions showed real attacks at 0.99 or more and the nearest legitimate question at 0.975, so 0.98. Prove: 44 fresh questions committed before the fixes, code frozen, run once: 88.6% with no out-of-scope question answered. If asked: the 87.5% re-run is on questions I had inspected, so I treat only the 88.6% as the fair number; detailed fault list is in the appendix and docs/DECISIONS.md.</a:t>
             </a:r>
             <a:endParaRPr lang="en-US" dirty="0"/>
           </a:p>
@@ -2082,7 +2082,7 @@
           <a:p>
             <a:r>
               <a:rPr lang="en-US" dirty="0"/>
-              <a:t>About 45 seconds. This is the evidence for causes 1, 3 and 4 on the previous slide. This is my own screenshot from testing: I asked 'Payment is hitting 504 again and again'. The content was right, but the label contradicted it and only one of four teams showed. I traced all three faults, fixed them, and wrote the sealed set before re-measuring. The 'before' images are dark because that was the old interface.</a:t>
+              <a:t>About 35 seconds. The dangerous failure is answering something out of scope, and that is zero. The remaining misses are the safe kind. The judge was a different model from the writer (Gemini 3.1 Flash-Lite judging Gemini 3.5 Flash-Lite); it is a screening tool, not proof. With 44 questions the uncertainty is wide, roughly 75% to 95%.</a:t>
             </a:r>
             <a:endParaRPr lang="en-US" dirty="0"/>
           </a:p>
@@ -3082,7 +3082,7 @@
                 <a:ea typeface="Segoe UI" pitchFamily="34" charset="-122"/>
                 <a:cs typeface="Segoe UI" pitchFamily="34" charset="-120"/>
               </a:rPr>
-              <a:t>   RESULTS</a:t>
+              <a:t>   LIMITS, NEXT, AND WHO DID WHAT</a:t>
             </a:r>
             <a:endParaRPr lang="en-US" sz="1100" dirty="0"/>
           </a:p>
@@ -3123,7 +3123,7 @@
                 <a:ea typeface="Segoe UI Semibold" pitchFamily="34" charset="-122"/>
                 <a:cs typeface="Segoe UI Semibold" pitchFamily="34" charset="-120"/>
               </a:rPr>
-              <a:t>88.6% on unseen questions, and </a:t>
+              <a:t>Where it still breaks, and </a:t>
             </a:r>
             <a:pPr algn="l" indent="0" marL="0">
               <a:buNone/>
@@ -3140,7 +3140,7 @@
                 <a:ea typeface="Segoe UI Semibold" pitchFamily="34" charset="-122"/>
                 <a:cs typeface="Segoe UI Semibold" pitchFamily="34" charset="-120"/>
               </a:rPr>
-              <a:t>no dangerous answers.</a:t>
+              <a:t>what comes next.</a:t>
             </a:r>
             <a:endParaRPr lang="en-US" sz="3000" dirty="0"/>
           </a:p>
@@ -3148,14 +3148,138 @@
       </p:sp>
       <p:sp>
         <p:nvSpPr>
-          <p:cNvPr id="4" name="Shape 2"/>
+          <p:cNvPr id="4" name="Text 2"/>
+          <p:cNvSpPr txBox="1"/>
+          <p:nvPr/>
+        </p:nvSpPr>
+        <p:spPr>
+          <a:xfrm>
+            <a:off x="731520" y="2057400"/>
+            <a:ext cx="3119018" cy="411480"/>
+          </a:xfrm>
+          <a:prstGeom prst="rect">
+            <a:avLst/>
+          </a:prstGeom>
+          <a:noFill/>
+          <a:ln/>
+        </p:spPr>
+        <p:txBody>
+          <a:bodyPr wrap="square" lIns="0" tIns="0" rIns="0" bIns="0" rtlCol="0" anchor="ctr"/>
+          <a:lstStyle/>
+          <a:p>
+            <a:pPr indent="0" marL="0">
+              <a:buNone/>
+            </a:pPr>
+            <a:r>
+              <a:rPr lang="en-US" sz="2000" dirty="0">
+                <a:solidFill>
+                  <a:srgbClr val="0E2F2B"/>
+                </a:solidFill>
+                <a:latin typeface="Segoe UI Semibold" pitchFamily="34" charset="0"/>
+                <a:ea typeface="Segoe UI Semibold" pitchFamily="34" charset="-122"/>
+                <a:cs typeface="Segoe UI Semibold" pitchFamily="34" charset="-120"/>
+              </a:rPr>
+              <a:t>Still breaks</a:t>
+            </a:r>
+            <a:endParaRPr lang="en-US" sz="2000" dirty="0"/>
+          </a:p>
+        </p:txBody>
+      </p:sp>
+      <p:sp>
+        <p:nvSpPr>
+          <p:cNvPr id="5" name="Text 3"/>
+          <p:cNvSpPr txBox="1"/>
+          <p:nvPr/>
+        </p:nvSpPr>
+        <p:spPr>
+          <a:xfrm>
+            <a:off x="731520" y="2697480"/>
+            <a:ext cx="3027578" cy="3108960"/>
+          </a:xfrm>
+          <a:prstGeom prst="rect">
+            <a:avLst/>
+          </a:prstGeom>
+          <a:noFill/>
+          <a:ln/>
+        </p:spPr>
+        <p:txBody>
+          <a:bodyPr wrap="square" lIns="0" tIns="0" rIns="0" bIns="0" rtlCol="0" anchor="t"/>
+          <a:lstStyle/>
+          <a:p>
+            <a:pPr marL="177800" indent="-177800">
+              <a:spcAft>
+                <a:spcPts val="900"/>
+              </a:spcAft>
+              <a:buSzPct val="100000"/>
+              <a:buChar char="•"/>
+            </a:pPr>
+            <a:r>
+              <a:rPr lang="en-US" sz="1500" dirty="0">
+                <a:solidFill>
+                  <a:srgbClr val="2B403C"/>
+                </a:solidFill>
+                <a:latin typeface="Segoe UI" pitchFamily="34" charset="0"/>
+                <a:ea typeface="Segoe UI" pitchFamily="34" charset="-122"/>
+                <a:cs typeface="Segoe UI" pitchFamily="34" charset="-120"/>
+              </a:rPr>
+              <a:t>Very short vague messages</a:t>
+            </a:r>
+            <a:endParaRPr lang="en-US" sz="1500" dirty="0"/>
+          </a:p>
+          <a:p>
+            <a:pPr marL="177800" indent="-177800">
+              <a:spcAft>
+                <a:spcPts val="900"/>
+              </a:spcAft>
+              <a:buSzPct val="100000"/>
+              <a:buChar char="•"/>
+            </a:pPr>
+            <a:r>
+              <a:rPr lang="en-US" sz="1500" dirty="0">
+                <a:solidFill>
+                  <a:srgbClr val="2B403C"/>
+                </a:solidFill>
+                <a:latin typeface="Segoe UI" pitchFamily="34" charset="0"/>
+                <a:ea typeface="Segoe UI" pitchFamily="34" charset="-122"/>
+                <a:cs typeface="Segoe UI" pitchFamily="34" charset="-120"/>
+              </a:rPr>
+              <a:t>Occasional over-refusal</a:t>
+            </a:r>
+            <a:endParaRPr lang="en-US" sz="1500" dirty="0"/>
+          </a:p>
+          <a:p>
+            <a:pPr marL="177800" indent="-177800">
+              <a:spcAft>
+                <a:spcPts val="900"/>
+              </a:spcAft>
+              <a:buSzPct val="100000"/>
+              <a:buChar char="•"/>
+            </a:pPr>
+            <a:r>
+              <a:rPr lang="en-US" sz="1500" dirty="0">
+                <a:solidFill>
+                  <a:srgbClr val="2B403C"/>
+                </a:solidFill>
+                <a:latin typeface="Segoe UI" pitchFamily="34" charset="0"/>
+                <a:ea typeface="Segoe UI" pitchFamily="34" charset="-122"/>
+                <a:cs typeface="Segoe UI" pitchFamily="34" charset="-120"/>
+              </a:rPr>
+              <a:t>Small, one-author test sets</a:t>
+            </a:r>
+            <a:endParaRPr lang="en-US" sz="1500" dirty="0"/>
+          </a:p>
+        </p:txBody>
+      </p:sp>
+      <p:sp>
+        <p:nvSpPr>
+          <p:cNvPr id="6" name="Shape 4"/>
           <p:cNvSpPr/>
           <p:nvPr/>
         </p:nvSpPr>
         <p:spPr>
           <a:xfrm>
-            <a:off x="731520" y="2103120"/>
-            <a:ext cx="4846320" cy="0"/>
+            <a:off x="4307738" y="2057400"/>
+            <a:ext cx="0" cy="3291840"/>
           </a:xfrm>
           <a:prstGeom prst="line">
             <a:avLst/>
@@ -3171,14 +3295,14 @@
       </p:sp>
       <p:sp>
         <p:nvSpPr>
-          <p:cNvPr id="5" name="Text 3"/>
-          <p:cNvSpPr txBox="1"/>
-          <p:nvPr/>
-        </p:nvSpPr>
-        <p:spPr>
-          <a:xfrm>
-            <a:off x="731520" y="2194560"/>
-            <a:ext cx="2103120" cy="1005840"/>
+          <p:cNvPr id="7" name="Text 5"/>
+          <p:cNvSpPr txBox="1"/>
+          <p:nvPr/>
+        </p:nvSpPr>
+        <p:spPr>
+          <a:xfrm>
+            <a:off x="4627778" y="2057400"/>
+            <a:ext cx="3119018" cy="411480"/>
           </a:xfrm>
           <a:prstGeom prst="rect">
             <a:avLst/>
@@ -3194,60 +3318,71 @@
               <a:buNone/>
             </a:pPr>
             <a:r>
-              <a:rPr lang="en-US" sz="5000" dirty="0">
+              <a:rPr lang="en-US" sz="2000" dirty="0">
                 <a:solidFill>
                   <a:srgbClr val="0E2F2B"/>
                 </a:solidFill>
-                <a:latin typeface="Segoe UI Light" pitchFamily="34" charset="0"/>
-                <a:ea typeface="Segoe UI Light" pitchFamily="34" charset="-122"/>
-                <a:cs typeface="Segoe UI Light" pitchFamily="34" charset="-120"/>
-              </a:rPr>
-              <a:t>0</a:t>
-            </a:r>
-            <a:endParaRPr lang="en-US" sz="5000" dirty="0"/>
-          </a:p>
-        </p:txBody>
-      </p:sp>
-      <p:sp>
-        <p:nvSpPr>
-          <p:cNvPr id="6" name="Text 4"/>
-          <p:cNvSpPr txBox="1"/>
-          <p:nvPr/>
-        </p:nvSpPr>
-        <p:spPr>
-          <a:xfrm>
-            <a:off x="2926080" y="2194560"/>
-            <a:ext cx="2651760" cy="1005840"/>
-          </a:xfrm>
-          <a:prstGeom prst="rect">
-            <a:avLst/>
-          </a:prstGeom>
-          <a:noFill/>
-          <a:ln/>
-        </p:spPr>
-        <p:txBody>
-          <a:bodyPr wrap="square" lIns="0" tIns="0" rIns="0" bIns="0" rtlCol="0" anchor="ctr"/>
-          <a:lstStyle/>
-          <a:p>
-            <a:pPr indent="0" marL="0">
-              <a:buNone/>
-            </a:pPr>
-            <a:r>
-              <a:rPr lang="en-US" sz="1300" b="1" dirty="0">
-                <a:solidFill>
-                  <a:srgbClr val="0E2F2B"/>
+                <a:latin typeface="Segoe UI Semibold" pitchFamily="34" charset="0"/>
+                <a:ea typeface="Segoe UI Semibold" pitchFamily="34" charset="-122"/>
+                <a:cs typeface="Segoe UI Semibold" pitchFamily="34" charset="-120"/>
+              </a:rPr>
+              <a:t>Next</a:t>
+            </a:r>
+            <a:endParaRPr lang="en-US" sz="2000" dirty="0"/>
+          </a:p>
+        </p:txBody>
+      </p:sp>
+      <p:sp>
+        <p:nvSpPr>
+          <p:cNvPr id="8" name="Text 6"/>
+          <p:cNvSpPr txBox="1"/>
+          <p:nvPr/>
+        </p:nvSpPr>
+        <p:spPr>
+          <a:xfrm>
+            <a:off x="4627778" y="2697480"/>
+            <a:ext cx="3027578" cy="3108960"/>
+          </a:xfrm>
+          <a:prstGeom prst="rect">
+            <a:avLst/>
+          </a:prstGeom>
+          <a:noFill/>
+          <a:ln/>
+        </p:spPr>
+        <p:txBody>
+          <a:bodyPr wrap="square" lIns="0" tIns="0" rIns="0" bIns="0" rtlCol="0" anchor="t"/>
+          <a:lstStyle/>
+          <a:p>
+            <a:pPr marL="177800" indent="-177800">
+              <a:spcAft>
+                <a:spcPts val="900"/>
+              </a:spcAft>
+              <a:buSzPct val="100000"/>
+              <a:buChar char="•"/>
+            </a:pPr>
+            <a:r>
+              <a:rPr lang="en-US" sz="1500" dirty="0">
+                <a:solidFill>
+                  <a:srgbClr val="2B403C"/>
                 </a:solidFill>
                 <a:latin typeface="Segoe UI" pitchFamily="34" charset="0"/>
                 <a:ea typeface="Segoe UI" pitchFamily="34" charset="-122"/>
                 <a:cs typeface="Segoe UI" pitchFamily="34" charset="-120"/>
               </a:rPr>
-              <a:t>of 10  </a:t>
-            </a:r>
-            <a:pPr indent="0" marL="0">
-              <a:buNone/>
-            </a:pPr>
-            <a:r>
-              <a:rPr lang="en-US" sz="1300" dirty="0">
+              <a:t>Cross-encoder re-ranker</a:t>
+            </a:r>
+            <a:endParaRPr lang="en-US" sz="1500" dirty="0"/>
+          </a:p>
+          <a:p>
+            <a:pPr marL="177800" indent="-177800">
+              <a:spcAft>
+                <a:spcPts val="900"/>
+              </a:spcAft>
+              <a:buSzPct val="100000"/>
+              <a:buChar char="•"/>
+            </a:pPr>
+            <a:r>
+              <a:rPr lang="en-US" sz="1500" dirty="0">
                 <a:solidFill>
                   <a:srgbClr val="2B403C"/>
                 </a:solidFill>
@@ -3255,22 +3390,43 @@
                 <a:ea typeface="Segoe UI" pitchFamily="34" charset="-122"/>
                 <a:cs typeface="Segoe UI" pitchFamily="34" charset="-120"/>
               </a:rPr>
-              <a:t>out-of-scope or hostile questions were answered</a:t>
-            </a:r>
-            <a:endParaRPr lang="en-US" sz="1300" dirty="0"/>
-          </a:p>
-        </p:txBody>
-      </p:sp>
-      <p:sp>
-        <p:nvSpPr>
-          <p:cNvPr id="7" name="Shape 5"/>
+              <a:t>Bigger labelled set, proper split</a:t>
+            </a:r>
+            <a:endParaRPr lang="en-US" sz="1500" dirty="0"/>
+          </a:p>
+          <a:p>
+            <a:pPr marL="177800" indent="-177800">
+              <a:spcAft>
+                <a:spcPts val="900"/>
+              </a:spcAft>
+              <a:buSzPct val="100000"/>
+              <a:buChar char="•"/>
+            </a:pPr>
+            <a:r>
+              <a:rPr lang="en-US" sz="1500" dirty="0">
+                <a:solidFill>
+                  <a:srgbClr val="2B403C"/>
+                </a:solidFill>
+                <a:latin typeface="Segoe UI" pitchFamily="34" charset="0"/>
+                <a:ea typeface="Segoe UI" pitchFamily="34" charset="-122"/>
+                <a:cs typeface="Segoe UI" pitchFamily="34" charset="-120"/>
+              </a:rPr>
+              <a:t>Feedback button on every answer</a:t>
+            </a:r>
+            <a:endParaRPr lang="en-US" sz="1500" dirty="0"/>
+          </a:p>
+        </p:txBody>
+      </p:sp>
+      <p:sp>
+        <p:nvSpPr>
+          <p:cNvPr id="9" name="Shape 7"/>
           <p:cNvSpPr/>
           <p:nvPr/>
         </p:nvSpPr>
         <p:spPr>
           <a:xfrm>
-            <a:off x="731520" y="3474720"/>
-            <a:ext cx="4846320" cy="0"/>
+            <a:off x="7883957" y="2057400"/>
+            <a:ext cx="0" cy="3291840"/>
           </a:xfrm>
           <a:prstGeom prst="line">
             <a:avLst/>
@@ -3286,14 +3442,14 @@
       </p:sp>
       <p:sp>
         <p:nvSpPr>
-          <p:cNvPr id="8" name="Text 6"/>
-          <p:cNvSpPr txBox="1"/>
-          <p:nvPr/>
-        </p:nvSpPr>
-        <p:spPr>
-          <a:xfrm>
-            <a:off x="731520" y="3566160"/>
-            <a:ext cx="2103120" cy="1005840"/>
+          <p:cNvPr id="10" name="Text 8"/>
+          <p:cNvSpPr txBox="1"/>
+          <p:nvPr/>
+        </p:nvSpPr>
+        <p:spPr>
+          <a:xfrm>
+            <a:off x="8203997" y="2057400"/>
+            <a:ext cx="3119018" cy="411480"/>
           </a:xfrm>
           <a:prstGeom prst="rect">
             <a:avLst/>
@@ -3309,60 +3465,71 @@
               <a:buNone/>
             </a:pPr>
             <a:r>
-              <a:rPr lang="en-US" sz="5000" dirty="0">
+              <a:rPr lang="en-US" sz="2000" dirty="0">
                 <a:solidFill>
                   <a:srgbClr val="0E2F2B"/>
                 </a:solidFill>
-                <a:latin typeface="Segoe UI Light" pitchFamily="34" charset="0"/>
-                <a:ea typeface="Segoe UI Light" pitchFamily="34" charset="-122"/>
-                <a:cs typeface="Segoe UI Light" pitchFamily="34" charset="-120"/>
-              </a:rPr>
-              <a:t>260</a:t>
-            </a:r>
-            <a:endParaRPr lang="en-US" sz="5000" dirty="0"/>
-          </a:p>
-        </p:txBody>
-      </p:sp>
-      <p:sp>
-        <p:nvSpPr>
-          <p:cNvPr id="9" name="Text 7"/>
-          <p:cNvSpPr txBox="1"/>
-          <p:nvPr/>
-        </p:nvSpPr>
-        <p:spPr>
-          <a:xfrm>
-            <a:off x="2926080" y="3566160"/>
-            <a:ext cx="2651760" cy="1005840"/>
-          </a:xfrm>
-          <a:prstGeom prst="rect">
-            <a:avLst/>
-          </a:prstGeom>
-          <a:noFill/>
-          <a:ln/>
-        </p:spPr>
-        <p:txBody>
-          <a:bodyPr wrap="square" lIns="0" tIns="0" rIns="0" bIns="0" rtlCol="0" anchor="ctr"/>
-          <a:lstStyle/>
-          <a:p>
-            <a:pPr indent="0" marL="0">
-              <a:buNone/>
-            </a:pPr>
-            <a:r>
-              <a:rPr lang="en-US" sz="1300" b="1" dirty="0">
-                <a:solidFill>
-                  <a:srgbClr val="0E2F2B"/>
+                <a:latin typeface="Segoe UI Semibold" pitchFamily="34" charset="0"/>
+                <a:ea typeface="Segoe UI Semibold" pitchFamily="34" charset="-122"/>
+                <a:cs typeface="Segoe UI Semibold" pitchFamily="34" charset="-120"/>
+              </a:rPr>
+              <a:t>Who did what</a:t>
+            </a:r>
+            <a:endParaRPr lang="en-US" sz="2000" dirty="0"/>
+          </a:p>
+        </p:txBody>
+      </p:sp>
+      <p:sp>
+        <p:nvSpPr>
+          <p:cNvPr id="11" name="Text 9"/>
+          <p:cNvSpPr txBox="1"/>
+          <p:nvPr/>
+        </p:nvSpPr>
+        <p:spPr>
+          <a:xfrm>
+            <a:off x="8203997" y="2697480"/>
+            <a:ext cx="3027578" cy="3108960"/>
+          </a:xfrm>
+          <a:prstGeom prst="rect">
+            <a:avLst/>
+          </a:prstGeom>
+          <a:noFill/>
+          <a:ln/>
+        </p:spPr>
+        <p:txBody>
+          <a:bodyPr wrap="square" lIns="0" tIns="0" rIns="0" bIns="0" rtlCol="0" anchor="t"/>
+          <a:lstStyle/>
+          <a:p>
+            <a:pPr marL="177800" indent="-177800">
+              <a:spcAft>
+                <a:spcPts val="900"/>
+              </a:spcAft>
+              <a:buSzPct val="100000"/>
+              <a:buChar char="•"/>
+            </a:pPr>
+            <a:r>
+              <a:rPr lang="en-US" sz="1500" dirty="0">
+                <a:solidFill>
+                  <a:srgbClr val="2B403C"/>
                 </a:solidFill>
                 <a:latin typeface="Segoe UI" pitchFamily="34" charset="0"/>
                 <a:ea typeface="Segoe UI" pitchFamily="34" charset="-122"/>
                 <a:cs typeface="Segoe UI" pitchFamily="34" charset="-120"/>
               </a:rPr>
-              <a:t>of 260  </a:t>
-            </a:r>
-            <a:pPr indent="0" marL="0">
-              <a:buNone/>
-            </a:pPr>
-            <a:r>
-              <a:rPr lang="en-US" sz="1300" dirty="0">
+              <a:t>AI-assisted: sample manual, scaffolding, UI boilerplate</a:t>
+            </a:r>
+            <a:endParaRPr lang="en-US" sz="1500" dirty="0"/>
+          </a:p>
+          <a:p>
+            <a:pPr marL="177800" indent="-177800">
+              <a:spcAft>
+                <a:spcPts val="900"/>
+              </a:spcAft>
+              <a:buSzPct val="100000"/>
+              <a:buChar char="•"/>
+            </a:pPr>
+            <a:r>
+              <a:rPr lang="en-US" sz="1500" dirty="0">
                 <a:solidFill>
                   <a:srgbClr val="2B403C"/>
                 </a:solidFill>
@@ -3370,1012 +3537,30 @@
                 <a:ea typeface="Segoe UI" pitchFamily="34" charset="-122"/>
                 <a:cs typeface="Segoe UI" pitchFamily="34" charset="-120"/>
               </a:rPr>
-              <a:t>statements supported by a judge model</a:t>
-            </a:r>
-            <a:endParaRPr lang="en-US" sz="1300" dirty="0"/>
-          </a:p>
-        </p:txBody>
-      </p:sp>
-      <p:sp>
-        <p:nvSpPr>
-          <p:cNvPr id="10" name="Shape 8"/>
-          <p:cNvSpPr/>
-          <p:nvPr/>
-        </p:nvSpPr>
-        <p:spPr>
-          <a:xfrm>
-            <a:off x="731520" y="4846320"/>
-            <a:ext cx="4846320" cy="0"/>
-          </a:xfrm>
-          <a:prstGeom prst="line">
-            <a:avLst/>
-          </a:prstGeom>
-          <a:noFill/>
-          <a:ln w="9525">
-            <a:solidFill>
-              <a:srgbClr val="D8DFDB"/>
-            </a:solidFill>
-            <a:prstDash val="solid"/>
-          </a:ln>
-        </p:spPr>
-      </p:sp>
-      <p:sp>
-        <p:nvSpPr>
-          <p:cNvPr id="11" name="Text 9"/>
-          <p:cNvSpPr txBox="1"/>
-          <p:nvPr/>
-        </p:nvSpPr>
-        <p:spPr>
-          <a:xfrm>
-            <a:off x="731520" y="4937760"/>
-            <a:ext cx="2103120" cy="1005840"/>
-          </a:xfrm>
-          <a:prstGeom prst="rect">
-            <a:avLst/>
-          </a:prstGeom>
-          <a:noFill/>
-          <a:ln/>
-        </p:spPr>
-        <p:txBody>
-          <a:bodyPr wrap="square" lIns="0" tIns="0" rIns="0" bIns="0" rtlCol="0" anchor="ctr"/>
-          <a:lstStyle/>
-          <a:p>
-            <a:pPr indent="0" marL="0">
-              <a:buNone/>
-            </a:pPr>
-            <a:r>
-              <a:rPr lang="en-US" sz="5000" dirty="0">
-                <a:solidFill>
-                  <a:srgbClr val="0E2F2B"/>
-                </a:solidFill>
-                <a:latin typeface="Segoe UI Light" pitchFamily="34" charset="0"/>
-                <a:ea typeface="Segoe UI Light" pitchFamily="34" charset="-122"/>
-                <a:cs typeface="Segoe UI Light" pitchFamily="34" charset="-120"/>
-              </a:rPr>
-              <a:t>2.5 s</a:t>
-            </a:r>
-            <a:endParaRPr lang="en-US" sz="5000" dirty="0"/>
-          </a:p>
-        </p:txBody>
-      </p:sp>
-      <p:sp>
-        <p:nvSpPr>
-          <p:cNvPr id="12" name="Text 10"/>
-          <p:cNvSpPr txBox="1"/>
-          <p:nvPr/>
-        </p:nvSpPr>
-        <p:spPr>
-          <a:xfrm>
-            <a:off x="2926080" y="4937760"/>
-            <a:ext cx="2651760" cy="1005840"/>
-          </a:xfrm>
-          <a:prstGeom prst="rect">
-            <a:avLst/>
-          </a:prstGeom>
-          <a:noFill/>
-          <a:ln/>
-        </p:spPr>
-        <p:txBody>
-          <a:bodyPr wrap="square" lIns="0" tIns="0" rIns="0" bIns="0" rtlCol="0" anchor="ctr"/>
-          <a:lstStyle/>
-          <a:p>
-            <a:pPr indent="0" marL="0">
-              <a:buNone/>
-            </a:pPr>
-            <a:r>
-              <a:rPr lang="en-US" sz="1300" b="1" dirty="0">
-                <a:solidFill>
-                  <a:srgbClr val="0E2F2B"/>
+              <a:t>Mine: architecture, gate, validation, thresholds, test sets, prompt rules</a:t>
+            </a:r>
+            <a:endParaRPr lang="en-US" sz="1500" dirty="0"/>
+          </a:p>
+          <a:p>
+            <a:pPr marL="177800" indent="-177800">
+              <a:spcAft>
+                <a:spcPts val="900"/>
+              </a:spcAft>
+              <a:buSzPct val="100000"/>
+              <a:buChar char="•"/>
+            </a:pPr>
+            <a:r>
+              <a:rPr lang="en-US" sz="1500" dirty="0">
+                <a:solidFill>
+                  <a:srgbClr val="2B403C"/>
                 </a:solidFill>
                 <a:latin typeface="Segoe UI" pitchFamily="34" charset="0"/>
                 <a:ea typeface="Segoe UI" pitchFamily="34" charset="-122"/>
                 <a:cs typeface="Segoe UI" pitchFamily="34" charset="-120"/>
               </a:rPr>
-              <a:t>median  </a:t>
-            </a:r>
-            <a:pPr indent="0" marL="0">
-              <a:buNone/>
-            </a:pPr>
-            <a:r>
-              <a:rPr lang="en-US" sz="1300" dirty="0">
-                <a:solidFill>
-                  <a:srgbClr val="2B403C"/>
-                </a:solidFill>
-                <a:latin typeface="Segoe UI" pitchFamily="34" charset="0"/>
-                <a:ea typeface="Segoe UI" pitchFamily="34" charset="-122"/>
-                <a:cs typeface="Segoe UI" pitchFamily="34" charset="-120"/>
-              </a:rPr>
-              <a:t>to answer (6.9 s at the 95th percentile)</a:t>
-            </a:r>
-            <a:endParaRPr lang="en-US" sz="1300" dirty="0"/>
-          </a:p>
-        </p:txBody>
-      </p:sp>
-      <p:sp>
-        <p:nvSpPr>
-          <p:cNvPr id="13" name="Text 11"/>
-          <p:cNvSpPr txBox="1"/>
-          <p:nvPr/>
-        </p:nvSpPr>
-        <p:spPr>
-          <a:xfrm>
-            <a:off x="7818120" y="2057400"/>
-            <a:ext cx="3621024" cy="274320"/>
-          </a:xfrm>
-          <a:prstGeom prst="rect">
-            <a:avLst/>
-          </a:prstGeom>
-          <a:noFill/>
-          <a:ln/>
-        </p:spPr>
-        <p:txBody>
-          <a:bodyPr wrap="square" lIns="0" tIns="0" rIns="0" bIns="0" rtlCol="0" anchor="ctr"/>
-          <a:lstStyle/>
-          <a:p>
-            <a:pPr algn="ctr" indent="0" marL="0">
-              <a:buNone/>
-            </a:pPr>
-            <a:r>
-              <a:rPr lang="en-US" sz="1000" spc="200" kern="0" dirty="0">
-                <a:solidFill>
-                  <a:srgbClr val="6B7C78"/>
-                </a:solidFill>
-                <a:latin typeface="Segoe UI" pitchFamily="34" charset="0"/>
-                <a:ea typeface="Segoe UI" pitchFamily="34" charset="-122"/>
-                <a:cs typeface="Segoe UI" pitchFamily="34" charset="-120"/>
-              </a:rPr>
-              <a:t>WHAT IT DID</a:t>
-            </a:r>
-            <a:endParaRPr lang="en-US" sz="1000" dirty="0"/>
-          </a:p>
-        </p:txBody>
-      </p:sp>
-      <p:sp>
-        <p:nvSpPr>
-          <p:cNvPr id="14" name="Text 12"/>
-          <p:cNvSpPr txBox="1"/>
-          <p:nvPr/>
-        </p:nvSpPr>
-        <p:spPr>
-          <a:xfrm>
-            <a:off x="7818120" y="2286000"/>
-            <a:ext cx="1207008" cy="274320"/>
-          </a:xfrm>
-          <a:prstGeom prst="rect">
-            <a:avLst/>
-          </a:prstGeom>
-          <a:noFill/>
-          <a:ln/>
-        </p:spPr>
-        <p:txBody>
-          <a:bodyPr wrap="square" lIns="0" tIns="0" rIns="0" bIns="0" rtlCol="0" anchor="ctr"/>
-          <a:lstStyle/>
-          <a:p>
-            <a:pPr algn="ctr" indent="0" marL="0">
-              <a:buNone/>
-            </a:pPr>
-            <a:r>
-              <a:rPr lang="en-US" sz="1100" dirty="0">
-                <a:solidFill>
-                  <a:srgbClr val="2B403C"/>
-                </a:solidFill>
-                <a:latin typeface="Segoe UI" pitchFamily="34" charset="0"/>
-                <a:ea typeface="Segoe UI" pitchFamily="34" charset="-122"/>
-                <a:cs typeface="Segoe UI" pitchFamily="34" charset="-120"/>
-              </a:rPr>
-              <a:t>Answered</a:t>
-            </a:r>
-            <a:endParaRPr lang="en-US" sz="1100" dirty="0"/>
-          </a:p>
-        </p:txBody>
-      </p:sp>
-      <p:sp>
-        <p:nvSpPr>
-          <p:cNvPr id="15" name="Text 13"/>
-          <p:cNvSpPr txBox="1"/>
-          <p:nvPr/>
-        </p:nvSpPr>
-        <p:spPr>
-          <a:xfrm>
-            <a:off x="9025128" y="2286000"/>
-            <a:ext cx="1207008" cy="274320"/>
-          </a:xfrm>
-          <a:prstGeom prst="rect">
-            <a:avLst/>
-          </a:prstGeom>
-          <a:noFill/>
-          <a:ln/>
-        </p:spPr>
-        <p:txBody>
-          <a:bodyPr wrap="square" lIns="0" tIns="0" rIns="0" bIns="0" rtlCol="0" anchor="ctr"/>
-          <a:lstStyle/>
-          <a:p>
-            <a:pPr algn="ctr" indent="0" marL="0">
-              <a:buNone/>
-            </a:pPr>
-            <a:r>
-              <a:rPr lang="en-US" sz="1100" dirty="0">
-                <a:solidFill>
-                  <a:srgbClr val="2B403C"/>
-                </a:solidFill>
-                <a:latin typeface="Segoe UI" pitchFamily="34" charset="0"/>
-                <a:ea typeface="Segoe UI" pitchFamily="34" charset="-122"/>
-                <a:cs typeface="Segoe UI" pitchFamily="34" charset="-120"/>
-              </a:rPr>
-              <a:t>Asked</a:t>
-            </a:r>
-            <a:endParaRPr lang="en-US" sz="1100" dirty="0"/>
-          </a:p>
-        </p:txBody>
-      </p:sp>
-      <p:sp>
-        <p:nvSpPr>
-          <p:cNvPr id="16" name="Text 14"/>
-          <p:cNvSpPr txBox="1"/>
-          <p:nvPr/>
-        </p:nvSpPr>
-        <p:spPr>
-          <a:xfrm>
-            <a:off x="10232136" y="2286000"/>
-            <a:ext cx="1207008" cy="274320"/>
-          </a:xfrm>
-          <a:prstGeom prst="rect">
-            <a:avLst/>
-          </a:prstGeom>
-          <a:noFill/>
-          <a:ln/>
-        </p:spPr>
-        <p:txBody>
-          <a:bodyPr wrap="square" lIns="0" tIns="0" rIns="0" bIns="0" rtlCol="0" anchor="ctr"/>
-          <a:lstStyle/>
-          <a:p>
-            <a:pPr algn="ctr" indent="0" marL="0">
-              <a:buNone/>
-            </a:pPr>
-            <a:r>
-              <a:rPr lang="en-US" sz="1100" dirty="0">
-                <a:solidFill>
-                  <a:srgbClr val="2B403C"/>
-                </a:solidFill>
-                <a:latin typeface="Segoe UI" pitchFamily="34" charset="0"/>
-                <a:ea typeface="Segoe UI" pitchFamily="34" charset="-122"/>
-                <a:cs typeface="Segoe UI" pitchFamily="34" charset="-120"/>
-              </a:rPr>
-              <a:t>Refused</a:t>
-            </a:r>
-            <a:endParaRPr lang="en-US" sz="1100" dirty="0"/>
-          </a:p>
-        </p:txBody>
-      </p:sp>
-      <p:sp>
-        <p:nvSpPr>
-          <p:cNvPr id="17" name="Text 15"/>
-          <p:cNvSpPr txBox="1"/>
-          <p:nvPr/>
-        </p:nvSpPr>
-        <p:spPr>
-          <a:xfrm>
-            <a:off x="6492240" y="2606040"/>
-            <a:ext cx="1234440" cy="777240"/>
-          </a:xfrm>
-          <a:prstGeom prst="rect">
-            <a:avLst/>
-          </a:prstGeom>
-          <a:noFill/>
-          <a:ln/>
-        </p:spPr>
-        <p:txBody>
-          <a:bodyPr wrap="square" lIns="0" tIns="0" rIns="0" bIns="0" rtlCol="0" anchor="ctr"/>
-          <a:lstStyle/>
-          <a:p>
-            <a:pPr indent="0" marL="0">
-              <a:buNone/>
-            </a:pPr>
-            <a:r>
-              <a:rPr lang="en-US" sz="1100" dirty="0">
-                <a:solidFill>
-                  <a:srgbClr val="2B403C"/>
-                </a:solidFill>
-                <a:latin typeface="Segoe UI" pitchFamily="34" charset="0"/>
-                <a:ea typeface="Segoe UI" pitchFamily="34" charset="-122"/>
-                <a:cs typeface="Segoe UI" pitchFamily="34" charset="-120"/>
-              </a:rPr>
-              <a:t>Should answer (29)</a:t>
-            </a:r>
-            <a:endParaRPr lang="en-US" sz="1100" dirty="0"/>
-          </a:p>
-        </p:txBody>
-      </p:sp>
-      <p:sp>
-        <p:nvSpPr>
-          <p:cNvPr id="18" name="Shape 16"/>
-          <p:cNvSpPr/>
-          <p:nvPr/>
-        </p:nvSpPr>
-        <p:spPr>
-          <a:xfrm>
-            <a:off x="7818120" y="2606040"/>
-            <a:ext cx="1152144" cy="777240"/>
-          </a:xfrm>
-          <a:prstGeom prst="rect">
-            <a:avLst/>
-          </a:prstGeom>
-          <a:solidFill>
-            <a:srgbClr val="EEF7C9"/>
-          </a:solidFill>
-          <a:ln w="9525">
-            <a:solidFill>
-              <a:srgbClr val="D6F25C"/>
-            </a:solidFill>
-            <a:prstDash val="solid"/>
-          </a:ln>
-        </p:spPr>
-      </p:sp>
-      <p:sp>
-        <p:nvSpPr>
-          <p:cNvPr id="19" name="Text 17"/>
-          <p:cNvSpPr txBox="1"/>
-          <p:nvPr/>
-        </p:nvSpPr>
-        <p:spPr>
-          <a:xfrm>
-            <a:off x="7818120" y="2606040"/>
-            <a:ext cx="1152144" cy="777240"/>
-          </a:xfrm>
-          <a:prstGeom prst="rect">
-            <a:avLst/>
-          </a:prstGeom>
-          <a:noFill/>
-          <a:ln/>
-        </p:spPr>
-        <p:txBody>
-          <a:bodyPr wrap="square" lIns="0" tIns="0" rIns="0" bIns="0" rtlCol="0" anchor="ctr"/>
-          <a:lstStyle/>
-          <a:p>
-            <a:pPr algn="ctr" indent="0" marL="0">
-              <a:buNone/>
-            </a:pPr>
-            <a:r>
-              <a:rPr lang="en-US" sz="2800" dirty="0">
-                <a:solidFill>
-                  <a:srgbClr val="0E2F2B"/>
-                </a:solidFill>
-                <a:latin typeface="Segoe UI Semibold" pitchFamily="34" charset="0"/>
-                <a:ea typeface="Segoe UI Semibold" pitchFamily="34" charset="-122"/>
-                <a:cs typeface="Segoe UI Semibold" pitchFamily="34" charset="-120"/>
-              </a:rPr>
-              <a:t>27</a:t>
-            </a:r>
-            <a:endParaRPr lang="en-US" sz="2800" dirty="0"/>
-          </a:p>
-        </p:txBody>
-      </p:sp>
-      <p:sp>
-        <p:nvSpPr>
-          <p:cNvPr id="20" name="Shape 18"/>
-          <p:cNvSpPr/>
-          <p:nvPr/>
-        </p:nvSpPr>
-        <p:spPr>
-          <a:xfrm>
-            <a:off x="9025128" y="2606040"/>
-            <a:ext cx="1152144" cy="777240"/>
-          </a:xfrm>
-          <a:prstGeom prst="rect">
-            <a:avLst/>
-          </a:prstGeom>
-          <a:solidFill>
-            <a:srgbClr val="F7E3DE"/>
-          </a:solidFill>
-          <a:ln w="9525">
-            <a:solidFill>
-              <a:srgbClr val="E7B8AD"/>
-            </a:solidFill>
-            <a:prstDash val="solid"/>
-          </a:ln>
-        </p:spPr>
-      </p:sp>
-      <p:sp>
-        <p:nvSpPr>
-          <p:cNvPr id="21" name="Text 19"/>
-          <p:cNvSpPr txBox="1"/>
-          <p:nvPr/>
-        </p:nvSpPr>
-        <p:spPr>
-          <a:xfrm>
-            <a:off x="9025128" y="2606040"/>
-            <a:ext cx="1152144" cy="777240"/>
-          </a:xfrm>
-          <a:prstGeom prst="rect">
-            <a:avLst/>
-          </a:prstGeom>
-          <a:noFill/>
-          <a:ln/>
-        </p:spPr>
-        <p:txBody>
-          <a:bodyPr wrap="square" lIns="0" tIns="0" rIns="0" bIns="0" rtlCol="0" anchor="ctr"/>
-          <a:lstStyle/>
-          <a:p>
-            <a:pPr algn="ctr" indent="0" marL="0">
-              <a:buNone/>
-            </a:pPr>
-            <a:r>
-              <a:rPr lang="en-US" sz="2400" dirty="0">
-                <a:solidFill>
-                  <a:srgbClr val="B8452F"/>
-                </a:solidFill>
-                <a:latin typeface="Segoe UI Light" pitchFamily="34" charset="0"/>
-                <a:ea typeface="Segoe UI Light" pitchFamily="34" charset="-122"/>
-                <a:cs typeface="Segoe UI Light" pitchFamily="34" charset="-120"/>
-              </a:rPr>
-              <a:t>1</a:t>
-            </a:r>
-            <a:endParaRPr lang="en-US" sz="2400" dirty="0"/>
-          </a:p>
-        </p:txBody>
-      </p:sp>
-      <p:sp>
-        <p:nvSpPr>
-          <p:cNvPr id="22" name="Shape 20"/>
-          <p:cNvSpPr/>
-          <p:nvPr/>
-        </p:nvSpPr>
-        <p:spPr>
-          <a:xfrm>
-            <a:off x="10232136" y="2606040"/>
-            <a:ext cx="1152144" cy="777240"/>
-          </a:xfrm>
-          <a:prstGeom prst="rect">
-            <a:avLst/>
-          </a:prstGeom>
-          <a:solidFill>
-            <a:srgbClr val="F7E3DE"/>
-          </a:solidFill>
-          <a:ln w="9525">
-            <a:solidFill>
-              <a:srgbClr val="E7B8AD"/>
-            </a:solidFill>
-            <a:prstDash val="solid"/>
-          </a:ln>
-        </p:spPr>
-      </p:sp>
-      <p:sp>
-        <p:nvSpPr>
-          <p:cNvPr id="23" name="Text 21"/>
-          <p:cNvSpPr txBox="1"/>
-          <p:nvPr/>
-        </p:nvSpPr>
-        <p:spPr>
-          <a:xfrm>
-            <a:off x="10232136" y="2606040"/>
-            <a:ext cx="1152144" cy="777240"/>
-          </a:xfrm>
-          <a:prstGeom prst="rect">
-            <a:avLst/>
-          </a:prstGeom>
-          <a:noFill/>
-          <a:ln/>
-        </p:spPr>
-        <p:txBody>
-          <a:bodyPr wrap="square" lIns="0" tIns="0" rIns="0" bIns="0" rtlCol="0" anchor="ctr"/>
-          <a:lstStyle/>
-          <a:p>
-            <a:pPr algn="ctr" indent="0" marL="0">
-              <a:buNone/>
-            </a:pPr>
-            <a:r>
-              <a:rPr lang="en-US" sz="2400" dirty="0">
-                <a:solidFill>
-                  <a:srgbClr val="B8452F"/>
-                </a:solidFill>
-                <a:latin typeface="Segoe UI Light" pitchFamily="34" charset="0"/>
-                <a:ea typeface="Segoe UI Light" pitchFamily="34" charset="-122"/>
-                <a:cs typeface="Segoe UI Light" pitchFamily="34" charset="-120"/>
-              </a:rPr>
-              <a:t>1</a:t>
-            </a:r>
-            <a:endParaRPr lang="en-US" sz="2400" dirty="0"/>
-          </a:p>
-        </p:txBody>
-      </p:sp>
-      <p:sp>
-        <p:nvSpPr>
-          <p:cNvPr id="24" name="Text 22"/>
-          <p:cNvSpPr txBox="1"/>
-          <p:nvPr/>
-        </p:nvSpPr>
-        <p:spPr>
-          <a:xfrm>
-            <a:off x="6492240" y="3474720"/>
-            <a:ext cx="1234440" cy="777240"/>
-          </a:xfrm>
-          <a:prstGeom prst="rect">
-            <a:avLst/>
-          </a:prstGeom>
-          <a:noFill/>
-          <a:ln/>
-        </p:spPr>
-        <p:txBody>
-          <a:bodyPr wrap="square" lIns="0" tIns="0" rIns="0" bIns="0" rtlCol="0" anchor="ctr"/>
-          <a:lstStyle/>
-          <a:p>
-            <a:pPr indent="0" marL="0">
-              <a:buNone/>
-            </a:pPr>
-            <a:r>
-              <a:rPr lang="en-US" sz="1100" dirty="0">
-                <a:solidFill>
-                  <a:srgbClr val="2B403C"/>
-                </a:solidFill>
-                <a:latin typeface="Segoe UI" pitchFamily="34" charset="0"/>
-                <a:ea typeface="Segoe UI" pitchFamily="34" charset="-122"/>
-                <a:cs typeface="Segoe UI" pitchFamily="34" charset="-120"/>
-              </a:rPr>
-              <a:t>Should ask (5)</a:t>
-            </a:r>
-            <a:endParaRPr lang="en-US" sz="1100" dirty="0"/>
-          </a:p>
-        </p:txBody>
-      </p:sp>
-      <p:sp>
-        <p:nvSpPr>
-          <p:cNvPr id="25" name="Shape 23"/>
-          <p:cNvSpPr/>
-          <p:nvPr/>
-        </p:nvSpPr>
-        <p:spPr>
-          <a:xfrm>
-            <a:off x="7818120" y="3474720"/>
-            <a:ext cx="1152144" cy="777240"/>
-          </a:xfrm>
-          <a:prstGeom prst="rect">
-            <a:avLst/>
-          </a:prstGeom>
-          <a:solidFill>
-            <a:srgbClr val="FFFFFF"/>
-          </a:solidFill>
-          <a:ln w="9525">
-            <a:solidFill>
-              <a:srgbClr val="D8DFDB"/>
-            </a:solidFill>
-            <a:prstDash val="solid"/>
-          </a:ln>
-        </p:spPr>
-      </p:sp>
-      <p:sp>
-        <p:nvSpPr>
-          <p:cNvPr id="26" name="Text 24"/>
-          <p:cNvSpPr txBox="1"/>
-          <p:nvPr/>
-        </p:nvSpPr>
-        <p:spPr>
-          <a:xfrm>
-            <a:off x="7818120" y="3474720"/>
-            <a:ext cx="1152144" cy="777240"/>
-          </a:xfrm>
-          <a:prstGeom prst="rect">
-            <a:avLst/>
-          </a:prstGeom>
-          <a:noFill/>
-          <a:ln/>
-        </p:spPr>
-        <p:txBody>
-          <a:bodyPr wrap="square" lIns="0" tIns="0" rIns="0" bIns="0" rtlCol="0" anchor="ctr"/>
-          <a:lstStyle/>
-          <a:p>
-            <a:pPr algn="ctr" indent="0" marL="0">
-              <a:buNone/>
-            </a:pPr>
-            <a:r>
-              <a:rPr lang="en-US" sz="2400" dirty="0">
-                <a:solidFill>
-                  <a:srgbClr val="6B7C78"/>
-                </a:solidFill>
-                <a:latin typeface="Segoe UI Light" pitchFamily="34" charset="0"/>
-                <a:ea typeface="Segoe UI Light" pitchFamily="34" charset="-122"/>
-                <a:cs typeface="Segoe UI Light" pitchFamily="34" charset="-120"/>
-              </a:rPr>
-              <a:t>0</a:t>
-            </a:r>
-            <a:endParaRPr lang="en-US" sz="2400" dirty="0"/>
-          </a:p>
-        </p:txBody>
-      </p:sp>
-      <p:sp>
-        <p:nvSpPr>
-          <p:cNvPr id="27" name="Shape 25"/>
-          <p:cNvSpPr/>
-          <p:nvPr/>
-        </p:nvSpPr>
-        <p:spPr>
-          <a:xfrm>
-            <a:off x="9025128" y="3474720"/>
-            <a:ext cx="1152144" cy="777240"/>
-          </a:xfrm>
-          <a:prstGeom prst="rect">
-            <a:avLst/>
-          </a:prstGeom>
-          <a:solidFill>
-            <a:srgbClr val="EEF7C9"/>
-          </a:solidFill>
-          <a:ln w="9525">
-            <a:solidFill>
-              <a:srgbClr val="D6F25C"/>
-            </a:solidFill>
-            <a:prstDash val="solid"/>
-          </a:ln>
-        </p:spPr>
-      </p:sp>
-      <p:sp>
-        <p:nvSpPr>
-          <p:cNvPr id="28" name="Text 26"/>
-          <p:cNvSpPr txBox="1"/>
-          <p:nvPr/>
-        </p:nvSpPr>
-        <p:spPr>
-          <a:xfrm>
-            <a:off x="9025128" y="3474720"/>
-            <a:ext cx="1152144" cy="777240"/>
-          </a:xfrm>
-          <a:prstGeom prst="rect">
-            <a:avLst/>
-          </a:prstGeom>
-          <a:noFill/>
-          <a:ln/>
-        </p:spPr>
-        <p:txBody>
-          <a:bodyPr wrap="square" lIns="0" tIns="0" rIns="0" bIns="0" rtlCol="0" anchor="ctr"/>
-          <a:lstStyle/>
-          <a:p>
-            <a:pPr algn="ctr" indent="0" marL="0">
-              <a:buNone/>
-            </a:pPr>
-            <a:r>
-              <a:rPr lang="en-US" sz="2800" dirty="0">
-                <a:solidFill>
-                  <a:srgbClr val="0E2F2B"/>
-                </a:solidFill>
-                <a:latin typeface="Segoe UI Semibold" pitchFamily="34" charset="0"/>
-                <a:ea typeface="Segoe UI Semibold" pitchFamily="34" charset="-122"/>
-                <a:cs typeface="Segoe UI Semibold" pitchFamily="34" charset="-120"/>
-              </a:rPr>
-              <a:t>2</a:t>
-            </a:r>
-            <a:endParaRPr lang="en-US" sz="2800" dirty="0"/>
-          </a:p>
-        </p:txBody>
-      </p:sp>
-      <p:sp>
-        <p:nvSpPr>
-          <p:cNvPr id="29" name="Shape 27"/>
-          <p:cNvSpPr/>
-          <p:nvPr/>
-        </p:nvSpPr>
-        <p:spPr>
-          <a:xfrm>
-            <a:off x="10232136" y="3474720"/>
-            <a:ext cx="1152144" cy="777240"/>
-          </a:xfrm>
-          <a:prstGeom prst="rect">
-            <a:avLst/>
-          </a:prstGeom>
-          <a:solidFill>
-            <a:srgbClr val="F7E3DE"/>
-          </a:solidFill>
-          <a:ln w="9525">
-            <a:solidFill>
-              <a:srgbClr val="E7B8AD"/>
-            </a:solidFill>
-            <a:prstDash val="solid"/>
-          </a:ln>
-        </p:spPr>
-      </p:sp>
-      <p:sp>
-        <p:nvSpPr>
-          <p:cNvPr id="30" name="Text 28"/>
-          <p:cNvSpPr txBox="1"/>
-          <p:nvPr/>
-        </p:nvSpPr>
-        <p:spPr>
-          <a:xfrm>
-            <a:off x="10232136" y="3474720"/>
-            <a:ext cx="1152144" cy="777240"/>
-          </a:xfrm>
-          <a:prstGeom prst="rect">
-            <a:avLst/>
-          </a:prstGeom>
-          <a:noFill/>
-          <a:ln/>
-        </p:spPr>
-        <p:txBody>
-          <a:bodyPr wrap="square" lIns="0" tIns="0" rIns="0" bIns="0" rtlCol="0" anchor="ctr"/>
-          <a:lstStyle/>
-          <a:p>
-            <a:pPr algn="ctr" indent="0" marL="0">
-              <a:buNone/>
-            </a:pPr>
-            <a:r>
-              <a:rPr lang="en-US" sz="2400" dirty="0">
-                <a:solidFill>
-                  <a:srgbClr val="B8452F"/>
-                </a:solidFill>
-                <a:latin typeface="Segoe UI Light" pitchFamily="34" charset="0"/>
-                <a:ea typeface="Segoe UI Light" pitchFamily="34" charset="-122"/>
-                <a:cs typeface="Segoe UI Light" pitchFamily="34" charset="-120"/>
-              </a:rPr>
-              <a:t>3</a:t>
-            </a:r>
-            <a:endParaRPr lang="en-US" sz="2400" dirty="0"/>
-          </a:p>
-        </p:txBody>
-      </p:sp>
-      <p:sp>
-        <p:nvSpPr>
-          <p:cNvPr id="31" name="Text 29"/>
-          <p:cNvSpPr txBox="1"/>
-          <p:nvPr/>
-        </p:nvSpPr>
-        <p:spPr>
-          <a:xfrm>
-            <a:off x="6492240" y="4343400"/>
-            <a:ext cx="1234440" cy="777240"/>
-          </a:xfrm>
-          <a:prstGeom prst="rect">
-            <a:avLst/>
-          </a:prstGeom>
-          <a:noFill/>
-          <a:ln/>
-        </p:spPr>
-        <p:txBody>
-          <a:bodyPr wrap="square" lIns="0" tIns="0" rIns="0" bIns="0" rtlCol="0" anchor="ctr"/>
-          <a:lstStyle/>
-          <a:p>
-            <a:pPr indent="0" marL="0">
-              <a:buNone/>
-            </a:pPr>
-            <a:r>
-              <a:rPr lang="en-US" sz="1100" dirty="0">
-                <a:solidFill>
-                  <a:srgbClr val="2B403C"/>
-                </a:solidFill>
-                <a:latin typeface="Segoe UI" pitchFamily="34" charset="0"/>
-                <a:ea typeface="Segoe UI" pitchFamily="34" charset="-122"/>
-                <a:cs typeface="Segoe UI" pitchFamily="34" charset="-120"/>
-              </a:rPr>
-              <a:t>Should refuse (10)</a:t>
-            </a:r>
-            <a:endParaRPr lang="en-US" sz="1100" dirty="0"/>
-          </a:p>
-        </p:txBody>
-      </p:sp>
-      <p:sp>
-        <p:nvSpPr>
-          <p:cNvPr id="32" name="Shape 30"/>
-          <p:cNvSpPr/>
-          <p:nvPr/>
-        </p:nvSpPr>
-        <p:spPr>
-          <a:xfrm>
-            <a:off x="7818120" y="4343400"/>
-            <a:ext cx="1152144" cy="777240"/>
-          </a:xfrm>
-          <a:prstGeom prst="rect">
-            <a:avLst/>
-          </a:prstGeom>
-          <a:solidFill>
-            <a:srgbClr val="FFFFFF"/>
-          </a:solidFill>
-          <a:ln w="9525">
-            <a:solidFill>
-              <a:srgbClr val="D8DFDB"/>
-            </a:solidFill>
-            <a:prstDash val="solid"/>
-          </a:ln>
-        </p:spPr>
-      </p:sp>
-      <p:sp>
-        <p:nvSpPr>
-          <p:cNvPr id="33" name="Text 31"/>
-          <p:cNvSpPr txBox="1"/>
-          <p:nvPr/>
-        </p:nvSpPr>
-        <p:spPr>
-          <a:xfrm>
-            <a:off x="7818120" y="4343400"/>
-            <a:ext cx="1152144" cy="777240"/>
-          </a:xfrm>
-          <a:prstGeom prst="rect">
-            <a:avLst/>
-          </a:prstGeom>
-          <a:noFill/>
-          <a:ln/>
-        </p:spPr>
-        <p:txBody>
-          <a:bodyPr wrap="square" lIns="0" tIns="0" rIns="0" bIns="0" rtlCol="0" anchor="ctr"/>
-          <a:lstStyle/>
-          <a:p>
-            <a:pPr algn="ctr" indent="0" marL="0">
-              <a:buNone/>
-            </a:pPr>
-            <a:r>
-              <a:rPr lang="en-US" sz="2400" dirty="0">
-                <a:solidFill>
-                  <a:srgbClr val="6B7C78"/>
-                </a:solidFill>
-                <a:latin typeface="Segoe UI Light" pitchFamily="34" charset="0"/>
-                <a:ea typeface="Segoe UI Light" pitchFamily="34" charset="-122"/>
-                <a:cs typeface="Segoe UI Light" pitchFamily="34" charset="-120"/>
-              </a:rPr>
-              <a:t>0</a:t>
-            </a:r>
-            <a:endParaRPr lang="en-US" sz="2400" dirty="0"/>
-          </a:p>
-        </p:txBody>
-      </p:sp>
-      <p:sp>
-        <p:nvSpPr>
-          <p:cNvPr id="34" name="Shape 32"/>
-          <p:cNvSpPr/>
-          <p:nvPr/>
-        </p:nvSpPr>
-        <p:spPr>
-          <a:xfrm>
-            <a:off x="9025128" y="4343400"/>
-            <a:ext cx="1152144" cy="777240"/>
-          </a:xfrm>
-          <a:prstGeom prst="rect">
-            <a:avLst/>
-          </a:prstGeom>
-          <a:solidFill>
-            <a:srgbClr val="FFFFFF"/>
-          </a:solidFill>
-          <a:ln w="9525">
-            <a:solidFill>
-              <a:srgbClr val="D8DFDB"/>
-            </a:solidFill>
-            <a:prstDash val="solid"/>
-          </a:ln>
-        </p:spPr>
-      </p:sp>
-      <p:sp>
-        <p:nvSpPr>
-          <p:cNvPr id="35" name="Text 33"/>
-          <p:cNvSpPr txBox="1"/>
-          <p:nvPr/>
-        </p:nvSpPr>
-        <p:spPr>
-          <a:xfrm>
-            <a:off x="9025128" y="4343400"/>
-            <a:ext cx="1152144" cy="777240"/>
-          </a:xfrm>
-          <a:prstGeom prst="rect">
-            <a:avLst/>
-          </a:prstGeom>
-          <a:noFill/>
-          <a:ln/>
-        </p:spPr>
-        <p:txBody>
-          <a:bodyPr wrap="square" lIns="0" tIns="0" rIns="0" bIns="0" rtlCol="0" anchor="ctr"/>
-          <a:lstStyle/>
-          <a:p>
-            <a:pPr algn="ctr" indent="0" marL="0">
-              <a:buNone/>
-            </a:pPr>
-            <a:r>
-              <a:rPr lang="en-US" sz="2400" dirty="0">
-                <a:solidFill>
-                  <a:srgbClr val="6B7C78"/>
-                </a:solidFill>
-                <a:latin typeface="Segoe UI Light" pitchFamily="34" charset="0"/>
-                <a:ea typeface="Segoe UI Light" pitchFamily="34" charset="-122"/>
-                <a:cs typeface="Segoe UI Light" pitchFamily="34" charset="-120"/>
-              </a:rPr>
-              <a:t>0</a:t>
-            </a:r>
-            <a:endParaRPr lang="en-US" sz="2400" dirty="0"/>
-          </a:p>
-        </p:txBody>
-      </p:sp>
-      <p:sp>
-        <p:nvSpPr>
-          <p:cNvPr id="36" name="Shape 34"/>
-          <p:cNvSpPr/>
-          <p:nvPr/>
-        </p:nvSpPr>
-        <p:spPr>
-          <a:xfrm>
-            <a:off x="10232136" y="4343400"/>
-            <a:ext cx="1152144" cy="777240"/>
-          </a:xfrm>
-          <a:prstGeom prst="rect">
-            <a:avLst/>
-          </a:prstGeom>
-          <a:solidFill>
-            <a:srgbClr val="EEF7C9"/>
-          </a:solidFill>
-          <a:ln w="9525">
-            <a:solidFill>
-              <a:srgbClr val="D6F25C"/>
-            </a:solidFill>
-            <a:prstDash val="solid"/>
-          </a:ln>
-        </p:spPr>
-      </p:sp>
-      <p:sp>
-        <p:nvSpPr>
-          <p:cNvPr id="37" name="Text 35"/>
-          <p:cNvSpPr txBox="1"/>
-          <p:nvPr/>
-        </p:nvSpPr>
-        <p:spPr>
-          <a:xfrm>
-            <a:off x="10232136" y="4343400"/>
-            <a:ext cx="1152144" cy="777240"/>
-          </a:xfrm>
-          <a:prstGeom prst="rect">
-            <a:avLst/>
-          </a:prstGeom>
-          <a:noFill/>
-          <a:ln/>
-        </p:spPr>
-        <p:txBody>
-          <a:bodyPr wrap="square" lIns="0" tIns="0" rIns="0" bIns="0" rtlCol="0" anchor="ctr"/>
-          <a:lstStyle/>
-          <a:p>
-            <a:pPr algn="ctr" indent="0" marL="0">
-              <a:buNone/>
-            </a:pPr>
-            <a:r>
-              <a:rPr lang="en-US" sz="2800" dirty="0">
-                <a:solidFill>
-                  <a:srgbClr val="0E2F2B"/>
-                </a:solidFill>
-                <a:latin typeface="Segoe UI Semibold" pitchFamily="34" charset="0"/>
-                <a:ea typeface="Segoe UI Semibold" pitchFamily="34" charset="-122"/>
-                <a:cs typeface="Segoe UI Semibold" pitchFamily="34" charset="-120"/>
-              </a:rPr>
-              <a:t>10</a:t>
-            </a:r>
-            <a:endParaRPr lang="en-US" sz="2800" dirty="0"/>
-          </a:p>
-        </p:txBody>
-      </p:sp>
-      <p:sp>
-        <p:nvSpPr>
-          <p:cNvPr id="38" name="Text 36"/>
-          <p:cNvSpPr txBox="1"/>
-          <p:nvPr/>
-        </p:nvSpPr>
-        <p:spPr>
-          <a:xfrm>
-            <a:off x="6492240" y="5257800"/>
-            <a:ext cx="4946904" cy="822960"/>
-          </a:xfrm>
-          <a:prstGeom prst="rect">
-            <a:avLst/>
-          </a:prstGeom>
-          <a:noFill/>
-          <a:ln/>
-        </p:spPr>
-        <p:txBody>
-          <a:bodyPr wrap="square" lIns="0" tIns="0" rIns="0" bIns="0" rtlCol="0" anchor="t"/>
-          <a:lstStyle/>
-          <a:p>
-            <a:pPr indent="0" marL="0">
-              <a:buNone/>
-            </a:pPr>
-            <a:r>
-              <a:rPr lang="en-US" sz="1200" dirty="0">
-                <a:solidFill>
-                  <a:srgbClr val="2B403C"/>
-                </a:solidFill>
-                <a:latin typeface="Segoe UI" pitchFamily="34" charset="0"/>
-                <a:ea typeface="Segoe UI" pitchFamily="34" charset="-122"/>
-                <a:cs typeface="Segoe UI" pitchFamily="34" charset="-120"/>
-              </a:rPr>
-              <a:t>Five misses: three very short vague messages (“the system seems down”) were told “not in KB” instead of being asked what is wrong, one question got follow-ups, and one was over-refused.</a:t>
-            </a:r>
-            <a:endParaRPr lang="en-US" sz="1200" dirty="0"/>
+              <a:t>Reviewed every file</a:t>
+            </a:r>
+            <a:endParaRPr lang="en-US" sz="1500" dirty="0"/>
           </a:p>
         </p:txBody>
       </p:sp>
@@ -4454,14 +3639,14 @@
       </p:grpSpPr>
       <p:sp>
         <p:nvSpPr>
-          <p:cNvPr id="2" name="eyebrow"/>
-          <p:cNvSpPr txBox="1"/>
-          <p:nvPr/>
-        </p:nvSpPr>
-        <p:spPr>
-          <a:xfrm>
-            <a:off x="731520" y="411480"/>
-            <a:ext cx="7315200" cy="274320"/>
+          <p:cNvPr id="2" name="Text 0"/>
+          <p:cNvSpPr txBox="1"/>
+          <p:nvPr/>
+        </p:nvSpPr>
+        <p:spPr>
+          <a:xfrm>
+            <a:off x="731520" y="777240"/>
+            <a:ext cx="3657600" cy="274320"/>
           </a:xfrm>
           <a:prstGeom prst="rect">
             <a:avLst/>
@@ -4477,32 +3662,15 @@
               <a:buNone/>
             </a:pPr>
             <a:r>
-              <a:rPr lang="en-US" sz="1100" b="1" spc="200" kern="0" dirty="0">
-                <a:solidFill>
-                  <a:srgbClr val="0E2F2B"/>
-                </a:solidFill>
-                <a:highlight>
-                  <a:srgbClr val="D6F25C"/>
-                </a:highlight>
+              <a:rPr lang="en-US" sz="1100" spc="200" kern="0" dirty="0">
+                <a:solidFill>
+                  <a:srgbClr val="6B7C78"/>
+                </a:solidFill>
                 <a:latin typeface="Segoe UI" pitchFamily="34" charset="0"/>
                 <a:ea typeface="Segoe UI" pitchFamily="34" charset="-122"/>
                 <a:cs typeface="Segoe UI" pitchFamily="34" charset="-120"/>
               </a:rPr>
-              <a:t> 10 </a:t>
-            </a:r>
-            <a:pPr indent="0" marL="0">
-              <a:buNone/>
-            </a:pPr>
-            <a:r>
-              <a:rPr lang="en-US" sz="1100" spc="200" kern="0" dirty="0">
-                <a:solidFill>
-                  <a:srgbClr val="6B7C78"/>
-                </a:solidFill>
-                <a:latin typeface="Segoe UI" pitchFamily="34" charset="0"/>
-                <a:ea typeface="Segoe UI" pitchFamily="34" charset="-122"/>
-                <a:cs typeface="Segoe UI" pitchFamily="34" charset="-120"/>
-              </a:rPr>
-              <a:t>   LIMITS, NEXT, AND WHO DID WHAT</a:t>
+              <a:t>THANK YOU</a:t>
             </a:r>
             <a:endParaRPr lang="en-US" sz="1100" dirty="0"/>
           </a:p>
@@ -4510,16 +3678,14 @@
       </p:sp>
       <p:sp>
         <p:nvSpPr>
-          <p:cNvPr id="3" name="Text 1"/>
-          <p:cNvSpPr/>
-          <p:nvPr>
-            <p:ph idx="101" type="title" hasCustomPrompt="1"/>
-          </p:nvPr>
-        </p:nvSpPr>
-        <p:spPr>
-          <a:xfrm>
-            <a:off x="731520" y="804672"/>
-            <a:ext cx="10728655" cy="822960"/>
+          <p:cNvPr id="3" name="closing statement"/>
+          <p:cNvSpPr txBox="1"/>
+          <p:nvPr/>
+        </p:nvSpPr>
+        <p:spPr>
+          <a:xfrm>
+            <a:off x="731520" y="1691640"/>
+            <a:ext cx="6766560" cy="2926080"/>
           </a:xfrm>
           <a:prstGeom prst="rect">
             <a:avLst/>
@@ -4531,11 +3697,11 @@
           <a:bodyPr wrap="square" lIns="0" tIns="0" rIns="0" bIns="0" rtlCol="0" anchor="t"/>
           <a:lstStyle/>
           <a:p>
-            <a:pPr algn="l" indent="0" marL="0">
-              <a:buNone/>
-            </a:pPr>
-            <a:r>
-              <a:rPr lang="en-US" sz="3000" dirty="0">
+            <a:pPr indent="0" marL="0">
+              <a:buNone/>
+            </a:pPr>
+            <a:r>
+              <a:rPr lang="en-US" sz="4600" dirty="0">
                 <a:solidFill>
                   <a:srgbClr val="0E2F2B"/>
                 </a:solidFill>
@@ -4543,13 +3709,14 @@
                 <a:ea typeface="Segoe UI Semibold" pitchFamily="34" charset="-122"/>
                 <a:cs typeface="Segoe UI Semibold" pitchFamily="34" charset="-120"/>
               </a:rPr>
-              <a:t>Where it still breaks, and </a:t>
-            </a:r>
-            <a:pPr algn="l" indent="0" marL="0">
-              <a:buNone/>
-            </a:pPr>
-            <a:r>
-              <a:rPr lang="en-US" sz="3000" dirty="0">
+              <a:t>The AI writes the answer.
+</a:t>
+            </a:r>
+            <a:pPr indent="0" marL="0">
+              <a:buNone/>
+            </a:pPr>
+            <a:r>
+              <a:rPr lang="en-US" sz="4600" dirty="0">
                 <a:solidFill>
                   <a:srgbClr val="0E2F2B"/>
                 </a:solidFill>
@@ -4560,38 +3727,19 @@
                 <a:ea typeface="Segoe UI Semibold" pitchFamily="34" charset="-122"/>
                 <a:cs typeface="Segoe UI Semibold" pitchFamily="34" charset="-120"/>
               </a:rPr>
-              <a:t>what comes next.</a:t>
-            </a:r>
-            <a:endParaRPr lang="en-US" sz="3000" dirty="0"/>
-          </a:p>
-        </p:txBody>
-      </p:sp>
-      <p:sp>
-        <p:nvSpPr>
-          <p:cNvPr id="4" name="Text 2"/>
-          <p:cNvSpPr txBox="1"/>
-          <p:nvPr/>
-        </p:nvSpPr>
-        <p:spPr>
-          <a:xfrm>
-            <a:off x="731520" y="2057400"/>
-            <a:ext cx="3119018" cy="411480"/>
-          </a:xfrm>
-          <a:prstGeom prst="rect">
-            <a:avLst/>
-          </a:prstGeom>
-          <a:noFill/>
-          <a:ln/>
-        </p:spPr>
-        <p:txBody>
-          <a:bodyPr wrap="square" lIns="0" tIns="0" rIns="0" bIns="0" rtlCol="0" anchor="ctr"/>
-          <a:lstStyle/>
-          <a:p>
-            <a:pPr indent="0" marL="0">
-              <a:buNone/>
-            </a:pPr>
-            <a:r>
-              <a:rPr lang="en-US" sz="1800" dirty="0">
+              <a:t>It does not decide</a:t>
+            </a:r>
+            <a:pPr indent="0" marL="0">
+              <a:buNone/>
+            </a:pPr>
+            <a:endParaRPr lang="en-US" sz="4600" dirty="0"/>
+          </a:p>
+          <a:p>
+            <a:pPr indent="0" marL="0">
+              <a:buNone/>
+            </a:pPr>
+            <a:r>
+              <a:rPr lang="en-US" sz="4600" dirty="0">
                 <a:solidFill>
                   <a:srgbClr val="0E2F2B"/>
                 </a:solidFill>
@@ -4599,7 +3747,109 @@
                 <a:ea typeface="Segoe UI Semibold" pitchFamily="34" charset="-122"/>
                 <a:cs typeface="Segoe UI Semibold" pitchFamily="34" charset="-120"/>
               </a:rPr>
-              <a:t>Still breaks</a:t>
+              <a:t>what is true.</a:t>
+            </a:r>
+            <a:endParaRPr lang="en-US" sz="4600" dirty="0"/>
+          </a:p>
+        </p:txBody>
+      </p:sp>
+      <p:sp>
+        <p:nvSpPr>
+          <p:cNvPr id="4" name="Text 2"/>
+          <p:cNvSpPr txBox="1"/>
+          <p:nvPr/>
+        </p:nvSpPr>
+        <p:spPr>
+          <a:xfrm>
+            <a:off x="731520" y="4754880"/>
+            <a:ext cx="6035040" cy="548640"/>
+          </a:xfrm>
+          <a:prstGeom prst="rect">
+            <a:avLst/>
+          </a:prstGeom>
+          <a:noFill/>
+          <a:ln/>
+        </p:spPr>
+        <p:txBody>
+          <a:bodyPr wrap="square" lIns="0" tIns="0" rIns="0" bIns="0" rtlCol="0" anchor="t"/>
+          <a:lstStyle/>
+          <a:p>
+            <a:pPr indent="0" marL="0">
+              <a:buNone/>
+            </a:pPr>
+            <a:r>
+              <a:rPr lang="en-US" sz="2000" dirty="0">
+                <a:solidFill>
+                  <a:srgbClr val="2B403C"/>
+                </a:solidFill>
+                <a:latin typeface="Segoe UI Light" pitchFamily="34" charset="0"/>
+                <a:ea typeface="Segoe UI Light" pitchFamily="34" charset="-122"/>
+                <a:cs typeface="Segoe UI Light" pitchFamily="34" charset="-120"/>
+              </a:rPr>
+              <a:t>Code decides what the manual supports.</a:t>
+            </a:r>
+            <a:endParaRPr lang="en-US" sz="2000" dirty="0"/>
+          </a:p>
+        </p:txBody>
+      </p:sp>
+      <p:pic>
+        <p:nvPicPr>
+          <p:cNvPr id="5" name="Image 0" descr="QR code linking to the live demo">    </p:cNvPr>
+          <p:cNvPicPr>
+            <a:picLocks noChangeAspect="1"/>
+          </p:cNvPicPr>
+          <p:nvPr/>
+        </p:nvPicPr>
+        <p:blipFill>
+          <a:blip r:embed="rId1"/>
+          <a:stretch>
+            <a:fillRect/>
+          </a:stretch>
+        </p:blipFill>
+        <p:spPr>
+          <a:xfrm>
+            <a:off x="8092440" y="1600200"/>
+            <a:ext cx="2468880" cy="2468880"/>
+          </a:xfrm>
+          <a:prstGeom prst="rect">
+            <a:avLst/>
+          </a:prstGeom>
+        </p:spPr>
+      </p:pic>
+      <p:sp>
+        <p:nvSpPr>
+          <p:cNvPr id="6" name="Text 3"/>
+          <p:cNvSpPr txBox="1"/>
+          <p:nvPr/>
+        </p:nvSpPr>
+        <p:spPr>
+          <a:xfrm>
+            <a:off x="8092440" y="4206240"/>
+            <a:ext cx="2743200" cy="365760"/>
+          </a:xfrm>
+          <a:prstGeom prst="rect">
+            <a:avLst/>
+          </a:prstGeom>
+          <a:noFill/>
+          <a:ln/>
+        </p:spPr>
+        <p:txBody>
+          <a:bodyPr wrap="square" lIns="0" tIns="0" rIns="0" bIns="0" rtlCol="0" anchor="ctr"/>
+          <a:lstStyle/>
+          <a:p>
+            <a:pPr indent="0" marL="0">
+              <a:buNone/>
+            </a:pPr>
+            <a:r>
+              <a:rPr lang="en-US" sz="1800" dirty="0">
+                <a:solidFill>
+                  <a:srgbClr val="0E2F2B"/>
+                </a:solidFill>
+                <a:latin typeface="Segoe UI Semibold" pitchFamily="34" charset="0"/>
+                <a:ea typeface="Segoe UI Semibold" pitchFamily="34" charset="-122"/>
+                <a:cs typeface="Segoe UI Semibold" pitchFamily="34" charset="-120"/>
+              </a:rPr>
+              <a:t>Try it</a:t>
             </a:r>
             <a:endParaRPr lang="en-US" sz="1800" dirty="0"/>
           </a:p>
@@ -4607,470 +3857,136 @@
       </p:sp>
       <p:sp>
         <p:nvSpPr>
-          <p:cNvPr id="5" name="Text 3"/>
-          <p:cNvSpPr txBox="1"/>
-          <p:nvPr/>
-        </p:nvSpPr>
-        <p:spPr>
-          <a:xfrm>
-            <a:off x="731520" y="2606040"/>
-            <a:ext cx="3073298" cy="3474720"/>
-          </a:xfrm>
-          <a:prstGeom prst="rect">
-            <a:avLst/>
-          </a:prstGeom>
-          <a:noFill/>
-          <a:ln/>
-        </p:spPr>
-        <p:txBody>
-          <a:bodyPr wrap="square" lIns="0" tIns="0" rIns="0" bIns="0" rtlCol="0" anchor="t"/>
-          <a:lstStyle/>
-          <a:p>
-            <a:pPr marL="177800" indent="-177800">
-              <a:spcAft>
-                <a:spcPts val="1300"/>
-              </a:spcAft>
-              <a:buSzPct val="100000"/>
-              <a:buChar char="•"/>
-            </a:pPr>
-            <a:r>
-              <a:rPr lang="en-US" sz="1400" dirty="0">
-                <a:solidFill>
-                  <a:srgbClr val="2B403C"/>
+          <p:cNvPr id="7" name="Text 4">
+            <a:hlinkClick r:id="rId2" tooltip=""/>
+          </p:cNvPr>
+          <p:cNvSpPr txBox="1"/>
+          <p:nvPr/>
+        </p:nvSpPr>
+        <p:spPr>
+          <a:xfrm>
+            <a:off x="8092440" y="4617720"/>
+            <a:ext cx="3383280" cy="274320"/>
+          </a:xfrm>
+          <a:prstGeom prst="rect">
+            <a:avLst/>
+          </a:prstGeom>
+          <a:noFill/>
+          <a:ln/>
+        </p:spPr>
+        <p:txBody>
+          <a:bodyPr wrap="square" lIns="0" tIns="0" rIns="0" bIns="0" rtlCol="0" anchor="ctr"/>
+          <a:lstStyle/>
+          <a:p>
+            <a:pPr indent="0" marL="0">
+              <a:buNone/>
+            </a:pPr>
+            <a:r>
+              <a:rPr lang="en-US" sz="1200" u="sng" dirty="0">
+                <a:solidFill>
+                  <a:srgbClr val="1E6B58"/>
+                </a:solidFill>
+                <a:latin typeface="Consolas" pitchFamily="34" charset="0"/>
+                <a:ea typeface="Consolas" pitchFamily="34" charset="-122"/>
+                <a:cs typeface="Consolas" pitchFamily="34" charset="-120"/>
+                <a:hlinkClick r:id="rId2" invalidUrl="" action="" tgtFrame="" tooltip="" history="1" highlightClick="0" endSnd="0">
+                  <a:extLst>
+                    <a:ext uri="{A12FA001-AC4F-418D-AE19-62706E023703}">
+                      <ahyp:hlinkClr xmlns:ahyp="http://schemas.microsoft.com/office/drawing/2018/hyperlinkcolor" val="tx"/>
+                    </a:ext>
+                  </a:extLst>
+                </a:hlinkClick>
+              </a:rPr>
+              <a:t>triage-gpt-seven.vercel.app</a:t>
+            </a:r>
+            <a:endParaRPr lang="en-US" sz="1200" dirty="0"/>
+          </a:p>
+        </p:txBody>
+      </p:sp>
+      <p:sp>
+        <p:nvSpPr>
+          <p:cNvPr id="8" name="Text 5">
+            <a:hlinkClick r:id="rId3" tooltip=""/>
+          </p:cNvPr>
+          <p:cNvSpPr txBox="1"/>
+          <p:nvPr/>
+        </p:nvSpPr>
+        <p:spPr>
+          <a:xfrm>
+            <a:off x="8092440" y="4937760"/>
+            <a:ext cx="3931920" cy="274320"/>
+          </a:xfrm>
+          <a:prstGeom prst="rect">
+            <a:avLst/>
+          </a:prstGeom>
+          <a:noFill/>
+          <a:ln/>
+        </p:spPr>
+        <p:txBody>
+          <a:bodyPr wrap="square" lIns="0" tIns="0" rIns="0" bIns="0" rtlCol="0" anchor="ctr"/>
+          <a:lstStyle/>
+          <a:p>
+            <a:pPr indent="0" marL="0">
+              <a:buNone/>
+            </a:pPr>
+            <a:r>
+              <a:rPr lang="en-US" sz="900" u="sng" dirty="0">
+                <a:solidFill>
+                  <a:srgbClr val="6B7C78"/>
+                </a:solidFill>
+                <a:latin typeface="Consolas" pitchFamily="34" charset="0"/>
+                <a:ea typeface="Consolas" pitchFamily="34" charset="-122"/>
+                <a:cs typeface="Consolas" pitchFamily="34" charset="-120"/>
+                <a:hlinkClick r:id="rId3" invalidUrl="" action="" tgtFrame="" tooltip="" history="1" highlightClick="0" endSnd="0">
+                  <a:extLst>
+                    <a:ext uri="{A12FA001-AC4F-418D-AE19-62706E023703}">
+                      <ahyp:hlinkClr xmlns:ahyp="http://schemas.microsoft.com/office/drawing/2018/hyperlinkcolor" val="tx"/>
+                    </a:ext>
+                  </a:extLst>
+                </a:hlinkClick>
+              </a:rPr>
+              <a:t>github.com/ParthBiyani/AI-Troubleshooting-Assistant</a:t>
+            </a:r>
+            <a:endParaRPr lang="en-US" sz="900" dirty="0"/>
+          </a:p>
+        </p:txBody>
+      </p:sp>
+      <p:sp>
+        <p:nvSpPr>
+          <p:cNvPr id="9" name="Text 6"/>
+          <p:cNvSpPr txBox="1"/>
+          <p:nvPr/>
+        </p:nvSpPr>
+        <p:spPr>
+          <a:xfrm>
+            <a:off x="731520" y="6263640"/>
+            <a:ext cx="6400800" cy="274320"/>
+          </a:xfrm>
+          <a:prstGeom prst="rect">
+            <a:avLst/>
+          </a:prstGeom>
+          <a:noFill/>
+          <a:ln/>
+        </p:spPr>
+        <p:txBody>
+          <a:bodyPr wrap="square" lIns="0" tIns="0" rIns="0" bIns="0" rtlCol="0" anchor="ctr"/>
+          <a:lstStyle/>
+          <a:p>
+            <a:pPr indent="0" marL="0">
+              <a:buNone/>
+            </a:pPr>
+            <a:r>
+              <a:rPr lang="en-US" sz="1000" dirty="0">
+                <a:solidFill>
+                  <a:srgbClr val="6B7C78"/>
                 </a:solidFill>
                 <a:latin typeface="Segoe UI" pitchFamily="34" charset="0"/>
                 <a:ea typeface="Segoe UI" pitchFamily="34" charset="-122"/>
                 <a:cs typeface="Segoe UI" pitchFamily="34" charset="-120"/>
               </a:rPr>
-              <a:t>Very short vague messages are sometimes refused instead of questioned.</a:t>
-            </a:r>
-            <a:endParaRPr lang="en-US" sz="1400" dirty="0"/>
-          </a:p>
-          <a:p>
-            <a:pPr marL="177800" indent="-177800">
-              <a:spcAft>
-                <a:spcPts val="1300"/>
-              </a:spcAft>
-              <a:buSzPct val="100000"/>
-              <a:buChar char="•"/>
-            </a:pPr>
-            <a:r>
-              <a:rPr lang="en-US" sz="1400" dirty="0">
-                <a:solidFill>
-                  <a:srgbClr val="2B403C"/>
-                </a:solidFill>
-                <a:latin typeface="Segoe UI" pitchFamily="34" charset="0"/>
-                <a:ea typeface="Segoe UI" pitchFamily="34" charset="-122"/>
-                <a:cs typeface="Segoe UI" pitchFamily="34" charset="-120"/>
-              </a:rPr>
-              <a:t>The model can over-refuse a question the manual does cover.</a:t>
-            </a:r>
-            <a:endParaRPr lang="en-US" sz="1400" dirty="0"/>
-          </a:p>
-          <a:p>
-            <a:pPr marL="177800" indent="-177800">
-              <a:spcAft>
-                <a:spcPts val="1300"/>
-              </a:spcAft>
-              <a:buSzPct val="100000"/>
-              <a:buChar char="•"/>
-            </a:pPr>
-            <a:r>
-              <a:rPr lang="en-US" sz="1400" dirty="0">
-                <a:solidFill>
-                  <a:srgbClr val="2B403C"/>
-                </a:solidFill>
-                <a:latin typeface="Segoe UI" pitchFamily="34" charset="0"/>
-                <a:ea typeface="Segoe UI" pitchFamily="34" charset="-122"/>
-                <a:cs typeface="Segoe UI" pitchFamily="34" charset="-120"/>
-              </a:rPr>
-              <a:t>Small, one-author test sets. The sealed set is now spent.</a:t>
-            </a:r>
-            <a:endParaRPr lang="en-US" sz="1400" dirty="0"/>
-          </a:p>
-          <a:p>
-            <a:pPr marL="177800" indent="-177800">
-              <a:spcAft>
-                <a:spcPts val="1300"/>
-              </a:spcAft>
-              <a:buSzPct val="100000"/>
-              <a:buChar char="•"/>
-            </a:pPr>
-            <a:r>
-              <a:rPr lang="en-US" sz="1400" dirty="0">
-                <a:solidFill>
-                  <a:srgbClr val="2B403C"/>
-                </a:solidFill>
-                <a:latin typeface="Segoe UI" pitchFamily="34" charset="0"/>
-                <a:ea typeface="Segoe UI" pitchFamily="34" charset="-122"/>
-                <a:cs typeface="Segoe UI" pitchFamily="34" charset="-120"/>
-              </a:rPr>
-              <a:t>Free-tier daily limits ran out twice, so runs used different models.</a:t>
-            </a:r>
-            <a:endParaRPr lang="en-US" sz="1400" dirty="0"/>
-          </a:p>
-        </p:txBody>
-      </p:sp>
-      <p:sp>
-        <p:nvSpPr>
-          <p:cNvPr id="6" name="Shape 4"/>
-          <p:cNvSpPr/>
-          <p:nvPr/>
-        </p:nvSpPr>
-        <p:spPr>
-          <a:xfrm>
-            <a:off x="4307738" y="2057400"/>
-            <a:ext cx="0" cy="4023360"/>
-          </a:xfrm>
-          <a:prstGeom prst="line">
-            <a:avLst/>
-          </a:prstGeom>
-          <a:noFill/>
-          <a:ln w="9525">
-            <a:solidFill>
-              <a:srgbClr val="D8DFDB"/>
-            </a:solidFill>
-            <a:prstDash val="solid"/>
-          </a:ln>
-        </p:spPr>
-      </p:sp>
-      <p:sp>
-        <p:nvSpPr>
-          <p:cNvPr id="7" name="Text 5"/>
-          <p:cNvSpPr txBox="1"/>
-          <p:nvPr/>
-        </p:nvSpPr>
-        <p:spPr>
-          <a:xfrm>
-            <a:off x="4627778" y="2057400"/>
-            <a:ext cx="3119018" cy="411480"/>
-          </a:xfrm>
-          <a:prstGeom prst="rect">
-            <a:avLst/>
-          </a:prstGeom>
-          <a:noFill/>
-          <a:ln/>
-        </p:spPr>
-        <p:txBody>
-          <a:bodyPr wrap="square" lIns="0" tIns="0" rIns="0" bIns="0" rtlCol="0" anchor="ctr"/>
-          <a:lstStyle/>
-          <a:p>
-            <a:pPr indent="0" marL="0">
-              <a:buNone/>
-            </a:pPr>
-            <a:r>
-              <a:rPr lang="en-US" sz="1800" dirty="0">
-                <a:solidFill>
-                  <a:srgbClr val="0E2F2B"/>
-                </a:solidFill>
-                <a:latin typeface="Segoe UI Semibold" pitchFamily="34" charset="0"/>
-                <a:ea typeface="Segoe UI Semibold" pitchFamily="34" charset="-122"/>
-                <a:cs typeface="Segoe UI Semibold" pitchFamily="34" charset="-120"/>
-              </a:rPr>
-              <a:t>Next</a:t>
-            </a:r>
-            <a:endParaRPr lang="en-US" sz="1800" dirty="0"/>
-          </a:p>
-        </p:txBody>
-      </p:sp>
-      <p:sp>
-        <p:nvSpPr>
-          <p:cNvPr id="8" name="Text 6"/>
-          <p:cNvSpPr txBox="1"/>
-          <p:nvPr/>
-        </p:nvSpPr>
-        <p:spPr>
-          <a:xfrm>
-            <a:off x="4627778" y="2606040"/>
-            <a:ext cx="3073298" cy="3474720"/>
-          </a:xfrm>
-          <a:prstGeom prst="rect">
-            <a:avLst/>
-          </a:prstGeom>
-          <a:noFill/>
-          <a:ln/>
-        </p:spPr>
-        <p:txBody>
-          <a:bodyPr wrap="square" lIns="0" tIns="0" rIns="0" bIns="0" rtlCol="0" anchor="t"/>
-          <a:lstStyle/>
-          <a:p>
-            <a:pPr marL="177800" indent="-177800">
-              <a:spcAft>
-                <a:spcPts val="1300"/>
-              </a:spcAft>
-              <a:buSzPct val="100000"/>
-              <a:buChar char="•"/>
-            </a:pPr>
-            <a:r>
-              <a:rPr lang="en-US" sz="1400" dirty="0">
-                <a:solidFill>
-                  <a:srgbClr val="2B403C"/>
-                </a:solidFill>
-                <a:latin typeface="Segoe UI" pitchFamily="34" charset="0"/>
-                <a:ea typeface="Segoe UI" pitchFamily="34" charset="-122"/>
-                <a:cs typeface="Segoe UI" pitchFamily="34" charset="-120"/>
-              </a:rPr>
-              <a:t>A cross-encoder re-ranker for the short, vague messages.</a:t>
-            </a:r>
-            <a:endParaRPr lang="en-US" sz="1400" dirty="0"/>
-          </a:p>
-          <a:p>
-            <a:pPr marL="177800" indent="-177800">
-              <a:spcAft>
-                <a:spcPts val="1300"/>
-              </a:spcAft>
-              <a:buSzPct val="100000"/>
-              <a:buChar char="•"/>
-            </a:pPr>
-            <a:r>
-              <a:rPr lang="en-US" sz="1400" dirty="0">
-                <a:solidFill>
-                  <a:srgbClr val="2B403C"/>
-                </a:solidFill>
-                <a:latin typeface="Segoe UI" pitchFamily="34" charset="0"/>
-                <a:ea typeface="Segoe UI" pitchFamily="34" charset="-122"/>
-                <a:cs typeface="Segoe UI" pitchFamily="34" charset="-120"/>
-              </a:rPr>
-              <a:t>A bigger labelled set with a proper train and test split.</a:t>
-            </a:r>
-            <a:endParaRPr lang="en-US" sz="1400" dirty="0"/>
-          </a:p>
-          <a:p>
-            <a:pPr marL="177800" indent="-177800">
-              <a:spcAft>
-                <a:spcPts val="1300"/>
-              </a:spcAft>
-              <a:buSzPct val="100000"/>
-              <a:buChar char="•"/>
-            </a:pPr>
-            <a:r>
-              <a:rPr lang="en-US" sz="1400" dirty="0">
-                <a:solidFill>
-                  <a:srgbClr val="2B403C"/>
-                </a:solidFill>
-                <a:latin typeface="Segoe UI" pitchFamily="34" charset="0"/>
-                <a:ea typeface="Segoe UI" pitchFamily="34" charset="-122"/>
-                <a:cs typeface="Segoe UI" pitchFamily="34" charset="-120"/>
-              </a:rPr>
-              <a:t>A feedback button that files a ticket against the cited entry.</a:t>
-            </a:r>
-            <a:endParaRPr lang="en-US" sz="1400" dirty="0"/>
-          </a:p>
-          <a:p>
-            <a:pPr marL="177800" indent="-177800">
-              <a:spcAft>
-                <a:spcPts val="1300"/>
-              </a:spcAft>
-              <a:buSzPct val="100000"/>
-              <a:buChar char="•"/>
-            </a:pPr>
-            <a:r>
-              <a:rPr lang="en-US" sz="1400" dirty="0">
-                <a:solidFill>
-                  <a:srgbClr val="2B403C"/>
-                </a:solidFill>
-                <a:latin typeface="Segoe UI" pitchFamily="34" charset="0"/>
-                <a:ea typeface="Segoe UI" pitchFamily="34" charset="-122"/>
-                <a:cs typeface="Segoe UI" pitchFamily="34" charset="-120"/>
-              </a:rPr>
-              <a:t>Signed-in, server-side chat history for teams.</a:t>
-            </a:r>
-            <a:endParaRPr lang="en-US" sz="1400" dirty="0"/>
-          </a:p>
-        </p:txBody>
-      </p:sp>
-      <p:sp>
-        <p:nvSpPr>
-          <p:cNvPr id="9" name="Shape 7"/>
-          <p:cNvSpPr/>
-          <p:nvPr/>
-        </p:nvSpPr>
-        <p:spPr>
-          <a:xfrm>
-            <a:off x="7883957" y="2057400"/>
-            <a:ext cx="0" cy="4023360"/>
-          </a:xfrm>
-          <a:prstGeom prst="line">
-            <a:avLst/>
-          </a:prstGeom>
-          <a:noFill/>
-          <a:ln w="9525">
-            <a:solidFill>
-              <a:srgbClr val="D8DFDB"/>
-            </a:solidFill>
-            <a:prstDash val="solid"/>
-          </a:ln>
-        </p:spPr>
-      </p:sp>
-      <p:sp>
-        <p:nvSpPr>
-          <p:cNvPr id="10" name="Text 8"/>
-          <p:cNvSpPr txBox="1"/>
-          <p:nvPr/>
-        </p:nvSpPr>
-        <p:spPr>
-          <a:xfrm>
-            <a:off x="8203997" y="2057400"/>
-            <a:ext cx="3119018" cy="411480"/>
-          </a:xfrm>
-          <a:prstGeom prst="rect">
-            <a:avLst/>
-          </a:prstGeom>
-          <a:noFill/>
-          <a:ln/>
-        </p:spPr>
-        <p:txBody>
-          <a:bodyPr wrap="square" lIns="0" tIns="0" rIns="0" bIns="0" rtlCol="0" anchor="ctr"/>
-          <a:lstStyle/>
-          <a:p>
-            <a:pPr indent="0" marL="0">
-              <a:buNone/>
-            </a:pPr>
-            <a:r>
-              <a:rPr lang="en-US" sz="1800" dirty="0">
-                <a:solidFill>
-                  <a:srgbClr val="0E2F2B"/>
-                </a:solidFill>
-                <a:latin typeface="Segoe UI Semibold" pitchFamily="34" charset="0"/>
-                <a:ea typeface="Segoe UI Semibold" pitchFamily="34" charset="-122"/>
-                <a:cs typeface="Segoe UI Semibold" pitchFamily="34" charset="-120"/>
-              </a:rPr>
-              <a:t>Who did what</a:t>
-            </a:r>
-            <a:endParaRPr lang="en-US" sz="1800" dirty="0"/>
-          </a:p>
-        </p:txBody>
-      </p:sp>
-      <p:sp>
-        <p:nvSpPr>
-          <p:cNvPr id="11" name="Text 9"/>
-          <p:cNvSpPr txBox="1"/>
-          <p:nvPr/>
-        </p:nvSpPr>
-        <p:spPr>
-          <a:xfrm>
-            <a:off x="8203997" y="2606040"/>
-            <a:ext cx="3073298" cy="3474720"/>
-          </a:xfrm>
-          <a:prstGeom prst="rect">
-            <a:avLst/>
-          </a:prstGeom>
-          <a:noFill/>
-          <a:ln/>
-        </p:spPr>
-        <p:txBody>
-          <a:bodyPr wrap="square" lIns="0" tIns="0" rIns="0" bIns="0" rtlCol="0" anchor="t"/>
-          <a:lstStyle/>
-          <a:p>
-            <a:pPr marL="177800" indent="-177800">
-              <a:spcAft>
-                <a:spcPts val="1300"/>
-              </a:spcAft>
-              <a:buSzPct val="100000"/>
-              <a:buChar char="•"/>
-            </a:pPr>
-            <a:r>
-              <a:rPr lang="en-US" sz="1400" dirty="0">
-                <a:solidFill>
-                  <a:srgbClr val="2B403C"/>
-                </a:solidFill>
-                <a:latin typeface="Segoe UI" pitchFamily="34" charset="0"/>
-                <a:ea typeface="Segoe UI" pitchFamily="34" charset="-122"/>
-                <a:cs typeface="Segoe UI" pitchFamily="34" charset="-120"/>
-              </a:rPr>
-              <a:t>AI-assisted: drafting the sample manual, scaffolding, boilerplate, UI code.</a:t>
-            </a:r>
-            <a:endParaRPr lang="en-US" sz="1400" dirty="0"/>
-          </a:p>
-          <a:p>
-            <a:pPr marL="177800" indent="-177800">
-              <a:spcAft>
-                <a:spcPts val="1300"/>
-              </a:spcAft>
-              <a:buSzPct val="100000"/>
-              <a:buChar char="•"/>
-            </a:pPr>
-            <a:r>
-              <a:rPr lang="en-US" sz="1400" dirty="0">
-                <a:solidFill>
-                  <a:srgbClr val="2B403C"/>
-                </a:solidFill>
-                <a:latin typeface="Segoe UI" pitchFamily="34" charset="0"/>
-                <a:ea typeface="Segoe UI" pitchFamily="34" charset="-122"/>
-                <a:cs typeface="Segoe UI" pitchFamily="34" charset="-120"/>
-              </a:rPr>
-              <a:t>Mine: the architecture, the gate before the model, validation in code, thresholds, the three test sets, prompt rules, and review of every file.</a:t>
-            </a:r>
-            <a:endParaRPr lang="en-US" sz="1400" dirty="0"/>
-          </a:p>
-          <a:p>
-            <a:pPr marL="177800" indent="-177800">
-              <a:spcAft>
-                <a:spcPts val="1300"/>
-              </a:spcAft>
-              <a:buSzPct val="100000"/>
-              <a:buChar char="•"/>
-            </a:pPr>
-            <a:r>
-              <a:rPr lang="en-US" sz="1400" dirty="0">
-                <a:solidFill>
-                  <a:srgbClr val="2B403C"/>
-                </a:solidFill>
-                <a:latin typeface="Segoe UI" pitchFamily="34" charset="0"/>
-                <a:ea typeface="Segoe UI" pitchFamily="34" charset="-122"/>
-                <a:cs typeface="Segoe UI" pitchFamily="34" charset="-120"/>
-              </a:rPr>
-              <a:t>Every number here comes from an evaluation report committed in the repository.</a:t>
-            </a:r>
-            <a:endParaRPr lang="en-US" sz="1400" dirty="0"/>
-          </a:p>
-        </p:txBody>
-      </p:sp>
-      <p:sp>
-        <p:nvSpPr>
-          <p:cNvPr id="25" name="Slide Number Placeholder 0"/>
-          <p:cNvSpPr>
-            <a:spLocks noGrp="1"/>
-          </p:cNvSpPr>
-          <p:nvPr>
-            <p:ph type="sldNum" sz="quarter" idx="4294967295"/>
-          </p:nvPr>
-        </p:nvSpPr>
-        <p:spPr>
-          <a:xfrm>
-            <a:off x="10835640" y="6419088"/>
-            <a:ext cx="640080" cy="274320"/>
-          </a:xfrm>
-          <a:prstGeom prst="rect">
-            <a:avLst/>
-          </a:prstGeom>
-          <a:extLst>
-            <a:ext uri="{C572A759-6A51-4108-AA02-DFA0A04FC94B}">
-              <ma14:wrappingTextBoxFlag xmlns:ma14="http://schemas.microsoft.com/office/mac/drawingml/2011/main" val="0"/>
-            </a:ext>
-          </a:extLst>
-        </p:spPr>
-        <p:txBody>
-          <a:bodyPr/>
-          <a:lstStyle>
-            <a:lvl1pPr>
-              <a:defRPr sz="1000">
-                <a:solidFill>
-                  <a:srgbClr val="6B7C78"/>
-                </a:solidFill>
-                <a:latin typeface="Segoe UI"/>
-                <a:ea typeface="Segoe UI"/>
-                <a:cs typeface="Segoe UI"/>
-              </a:defRPr>
-            </a:lvl1pPr>
-          </a:lstStyle>
-          <a:p>
-            <a:pPr algn="r"/>
-            <a:fld id="{F7021451-1387-4CA6-816F-3879F97B5CBC}" type="slidenum">
-              <a:rPr b="0" lang="en-US"/>
-              <a:t>11</a:t>
-            </a:fld>
-            <a:endParaRPr lang="en-US"/>
+              <a:t>Sample data: Northwind Payments is a fictional company.</a:t>
+            </a:r>
+            <a:endParaRPr lang="en-US" sz="1000" dirty="0"/>
           </a:p>
         </p:txBody>
       </p:sp>
@@ -5107,8 +4023,8 @@
         </p:nvSpPr>
         <p:spPr>
           <a:xfrm>
-            <a:off x="731520" y="777240"/>
-            <a:ext cx="3657600" cy="274320"/>
+            <a:off x="731520" y="411480"/>
+            <a:ext cx="7315200" cy="274320"/>
           </a:xfrm>
           <a:prstGeom prst="rect">
             <a:avLst/>
@@ -5124,15 +4040,32 @@
               <a:buNone/>
             </a:pPr>
             <a:r>
-              <a:rPr lang="en-US" sz="1100" spc="200" kern="0" dirty="0">
-                <a:solidFill>
-                  <a:srgbClr val="6B7C78"/>
-                </a:solidFill>
+              <a:rPr lang="en-US" sz="1100" b="1" spc="200" kern="0" dirty="0">
+                <a:solidFill>
+                  <a:srgbClr val="0E2F2B"/>
+                </a:solidFill>
+                <a:highlight>
+                  <a:srgbClr val="D6F25C"/>
+                </a:highlight>
                 <a:latin typeface="Segoe UI" pitchFamily="34" charset="0"/>
                 <a:ea typeface="Segoe UI" pitchFamily="34" charset="-122"/>
                 <a:cs typeface="Segoe UI" pitchFamily="34" charset="-120"/>
               </a:rPr>
-              <a:t>THANK YOU</a:t>
+              <a:t> A </a:t>
+            </a:r>
+            <a:pPr indent="0" marL="0">
+              <a:buNone/>
+            </a:pPr>
+            <a:r>
+              <a:rPr lang="en-US" sz="1100" spc="200" kern="0" dirty="0">
+                <a:solidFill>
+                  <a:srgbClr val="6B7C78"/>
+                </a:solidFill>
+                <a:latin typeface="Segoe UI" pitchFamily="34" charset="0"/>
+                <a:ea typeface="Segoe UI" pitchFamily="34" charset="-122"/>
+                <a:cs typeface="Segoe UI" pitchFamily="34" charset="-120"/>
+              </a:rPr>
+              <a:t>   APPENDIX  ·  ONE LIVE QUESTION</a:t>
             </a:r>
             <a:endParaRPr lang="en-US" sz="1100" dirty="0"/>
           </a:p>
@@ -5140,14 +4073,16 @@
       </p:sp>
       <p:sp>
         <p:nvSpPr>
-          <p:cNvPr id="3" name="closing statement"/>
-          <p:cNvSpPr txBox="1"/>
-          <p:nvPr/>
-        </p:nvSpPr>
-        <p:spPr>
-          <a:xfrm>
-            <a:off x="731520" y="1691640"/>
-            <a:ext cx="6766560" cy="2926080"/>
+          <p:cNvPr id="3" name="Text 1"/>
+          <p:cNvSpPr/>
+          <p:nvPr>
+            <p:ph idx="101" type="title" hasCustomPrompt="1"/>
+          </p:nvPr>
+        </p:nvSpPr>
+        <p:spPr>
+          <a:xfrm>
+            <a:off x="731520" y="804672"/>
+            <a:ext cx="10728655" cy="822960"/>
           </a:xfrm>
           <a:prstGeom prst="rect">
             <a:avLst/>
@@ -5159,11 +4094,11 @@
           <a:bodyPr wrap="square" lIns="0" tIns="0" rIns="0" bIns="0" rtlCol="0" anchor="t"/>
           <a:lstStyle/>
           <a:p>
-            <a:pPr indent="0" marL="0">
-              <a:buNone/>
-            </a:pPr>
-            <a:r>
-              <a:rPr lang="en-US" sz="4600" dirty="0">
+            <a:pPr algn="l" indent="0" marL="0">
+              <a:buNone/>
+            </a:pPr>
+            <a:r>
+              <a:rPr lang="en-US" sz="3000" dirty="0">
                 <a:solidFill>
                   <a:srgbClr val="0E2F2B"/>
                 </a:solidFill>
@@ -5171,14 +4106,13 @@
                 <a:ea typeface="Segoe UI Semibold" pitchFamily="34" charset="-122"/>
                 <a:cs typeface="Segoe UI Semibold" pitchFamily="34" charset="-120"/>
               </a:rPr>
-              <a:t>The AI writes the answer.
-</a:t>
-            </a:r>
-            <a:pPr indent="0" marL="0">
-              <a:buNone/>
-            </a:pPr>
-            <a:r>
-              <a:rPr lang="en-US" sz="4600" dirty="0">
+              <a:t>Three faults a single question </a:t>
+            </a:r>
+            <a:pPr algn="l" indent="0" marL="0">
+              <a:buNone/>
+            </a:pPr>
+            <a:r>
+              <a:rPr lang="en-US" sz="3000" dirty="0">
                 <a:solidFill>
                   <a:srgbClr val="0E2F2B"/>
                 </a:solidFill>
@@ -5189,42 +4123,181 @@
                 <a:ea typeface="Segoe UI Semibold" pitchFamily="34" charset="-122"/>
                 <a:cs typeface="Segoe UI Semibold" pitchFamily="34" charset="-120"/>
               </a:rPr>
-              <a:t>It does not decide</a:t>
-            </a:r>
-            <a:pPr indent="0" marL="0">
-              <a:buNone/>
-            </a:pPr>
-            <a:endParaRPr lang="en-US" sz="4600" dirty="0"/>
-          </a:p>
-          <a:p>
-            <a:pPr indent="0" marL="0">
-              <a:buNone/>
-            </a:pPr>
-            <a:r>
-              <a:rPr lang="en-US" sz="4600" dirty="0">
+              <a:t>made visible.</a:t>
+            </a:r>
+            <a:endParaRPr lang="en-US" sz="3000" dirty="0"/>
+          </a:p>
+        </p:txBody>
+      </p:sp>
+      <p:sp>
+        <p:nvSpPr>
+          <p:cNvPr id="4" name="Text 2"/>
+          <p:cNvSpPr txBox="1"/>
+          <p:nvPr/>
+        </p:nvSpPr>
+        <p:spPr>
+          <a:xfrm>
+            <a:off x="4892040" y="1600200"/>
+            <a:ext cx="1828800" cy="256032"/>
+          </a:xfrm>
+          <a:prstGeom prst="rect">
+            <a:avLst/>
+          </a:prstGeom>
+          <a:noFill/>
+          <a:ln/>
+        </p:spPr>
+        <p:txBody>
+          <a:bodyPr wrap="square" lIns="0" tIns="0" rIns="0" bIns="0" rtlCol="0" anchor="ctr"/>
+          <a:lstStyle/>
+          <a:p>
+            <a:pPr indent="0" marL="0">
+              <a:buNone/>
+            </a:pPr>
+            <a:r>
+              <a:rPr lang="en-US" sz="1100" b="1" spc="200" kern="0" dirty="0">
+                <a:solidFill>
+                  <a:srgbClr val="B8452F"/>
+                </a:solidFill>
+                <a:latin typeface="Segoe UI" pitchFamily="34" charset="0"/>
+                <a:ea typeface="Segoe UI" pitchFamily="34" charset="-122"/>
+                <a:cs typeface="Segoe UI" pitchFamily="34" charset="-120"/>
+              </a:rPr>
+              <a:t>BEFORE</a:t>
+            </a:r>
+            <a:endParaRPr lang="en-US" sz="1100" dirty="0"/>
+          </a:p>
+        </p:txBody>
+      </p:sp>
+      <p:sp>
+        <p:nvSpPr>
+          <p:cNvPr id="5" name="Text 3"/>
+          <p:cNvSpPr txBox="1"/>
+          <p:nvPr/>
+        </p:nvSpPr>
+        <p:spPr>
+          <a:xfrm>
+            <a:off x="8412480" y="1600200"/>
+            <a:ext cx="1828800" cy="256032"/>
+          </a:xfrm>
+          <a:prstGeom prst="rect">
+            <a:avLst/>
+          </a:prstGeom>
+          <a:noFill/>
+          <a:ln/>
+        </p:spPr>
+        <p:txBody>
+          <a:bodyPr wrap="square" lIns="0" tIns="0" rIns="0" bIns="0" rtlCol="0" anchor="ctr"/>
+          <a:lstStyle/>
+          <a:p>
+            <a:pPr indent="0" marL="0">
+              <a:buNone/>
+            </a:pPr>
+            <a:r>
+              <a:rPr lang="en-US" sz="1100" b="1" spc="200" kern="0" dirty="0">
+                <a:solidFill>
+                  <a:srgbClr val="1E6B58"/>
+                </a:solidFill>
+                <a:latin typeface="Segoe UI" pitchFamily="34" charset="0"/>
+                <a:ea typeface="Segoe UI" pitchFamily="34" charset="-122"/>
+                <a:cs typeface="Segoe UI" pitchFamily="34" charset="-120"/>
+              </a:rPr>
+              <a:t>AFTER</a:t>
+            </a:r>
+            <a:endParaRPr lang="en-US" sz="1100" dirty="0"/>
+          </a:p>
+        </p:txBody>
+      </p:sp>
+      <p:sp>
+        <p:nvSpPr>
+          <p:cNvPr id="6" name="Text 4"/>
+          <p:cNvSpPr txBox="1"/>
+          <p:nvPr/>
+        </p:nvSpPr>
+        <p:spPr>
+          <a:xfrm>
+            <a:off x="731520" y="1965960"/>
+            <a:ext cx="320040" cy="329184"/>
+          </a:xfrm>
+          <a:prstGeom prst="rect">
+            <a:avLst/>
+          </a:prstGeom>
+          <a:noFill/>
+          <a:ln/>
+        </p:spPr>
+        <p:txBody>
+          <a:bodyPr wrap="square" lIns="0" tIns="0" rIns="0" bIns="0" rtlCol="0" anchor="ctr"/>
+          <a:lstStyle/>
+          <a:p>
+            <a:pPr indent="0" marL="0">
+              <a:buNone/>
+            </a:pPr>
+            <a:r>
+              <a:rPr lang="en-US" sz="1400" dirty="0">
                 <a:solidFill>
                   <a:srgbClr val="0E2F2B"/>
                 </a:solidFill>
+                <a:highlight>
+                  <a:srgbClr val="D6F25C"/>
+                </a:highlight>
                 <a:latin typeface="Segoe UI Semibold" pitchFamily="34" charset="0"/>
                 <a:ea typeface="Segoe UI Semibold" pitchFamily="34" charset="-122"/>
                 <a:cs typeface="Segoe UI Semibold" pitchFamily="34" charset="-120"/>
               </a:rPr>
-              <a:t>what is true.</a:t>
-            </a:r>
-            <a:endParaRPr lang="en-US" sz="4600" dirty="0"/>
-          </a:p>
-        </p:txBody>
-      </p:sp>
-      <p:sp>
-        <p:nvSpPr>
-          <p:cNvPr id="4" name="Text 2"/>
-          <p:cNvSpPr txBox="1"/>
-          <p:nvPr/>
-        </p:nvSpPr>
-        <p:spPr>
-          <a:xfrm>
-            <a:off x="731520" y="4754880"/>
-            <a:ext cx="6035040" cy="822960"/>
+              <a:t>1</a:t>
+            </a:r>
+            <a:endParaRPr lang="en-US" sz="1400" dirty="0"/>
+          </a:p>
+        </p:txBody>
+      </p:sp>
+      <p:sp>
+        <p:nvSpPr>
+          <p:cNvPr id="7" name="Text 5"/>
+          <p:cNvSpPr txBox="1"/>
+          <p:nvPr/>
+        </p:nvSpPr>
+        <p:spPr>
+          <a:xfrm>
+            <a:off x="1188720" y="1920240"/>
+            <a:ext cx="3520440" cy="411480"/>
+          </a:xfrm>
+          <a:prstGeom prst="rect">
+            <a:avLst/>
+          </a:prstGeom>
+          <a:noFill/>
+          <a:ln/>
+        </p:spPr>
+        <p:txBody>
+          <a:bodyPr wrap="square" lIns="0" tIns="0" rIns="0" bIns="0" rtlCol="0" anchor="ctr"/>
+          <a:lstStyle/>
+          <a:p>
+            <a:pPr indent="0" marL="0">
+              <a:buNone/>
+            </a:pPr>
+            <a:r>
+              <a:rPr lang="en-US" sz="1500" dirty="0">
+                <a:solidFill>
+                  <a:srgbClr val="0E2F2B"/>
+                </a:solidFill>
+                <a:latin typeface="Segoe UI Semibold" pitchFamily="34" charset="0"/>
+                <a:ea typeface="Segoe UI Semibold" pitchFamily="34" charset="-122"/>
+                <a:cs typeface="Segoe UI Semibold" pitchFamily="34" charset="-120"/>
+              </a:rPr>
+              <a:t>Wrong entry's score</a:t>
+            </a:r>
+            <a:endParaRPr lang="en-US" sz="1500" dirty="0"/>
+          </a:p>
+        </p:txBody>
+      </p:sp>
+      <p:sp>
+        <p:nvSpPr>
+          <p:cNvPr id="8" name="Text 6"/>
+          <p:cNvSpPr txBox="1"/>
+          <p:nvPr/>
+        </p:nvSpPr>
+        <p:spPr>
+          <a:xfrm>
+            <a:off x="1188720" y="2377440"/>
+            <a:ext cx="3520440" cy="731520"/>
           </a:xfrm>
           <a:prstGeom prst="rect">
             <a:avLst/>
@@ -5240,7 +4313,357 @@
               <a:buNone/>
             </a:pPr>
             <a:r>
-              <a:rPr lang="en-US" sz="1800" dirty="0">
+              <a:rPr lang="en-US" sz="1250" dirty="0">
+                <a:solidFill>
+                  <a:srgbClr val="6B7C78"/>
+                </a:solidFill>
+                <a:latin typeface="Segoe UI" pitchFamily="34" charset="0"/>
+                <a:ea typeface="Segoe UI" pitchFamily="34" charset="-122"/>
+                <a:cs typeface="Segoe UI" pitchFamily="34" charset="-120"/>
+              </a:rPr>
+              <a:t>0.707 from an unrelated entry, not 0.675 from the right one</a:t>
+            </a:r>
+            <a:endParaRPr lang="en-US" sz="1250" dirty="0"/>
+          </a:p>
+        </p:txBody>
+      </p:sp>
+      <p:sp>
+        <p:nvSpPr>
+          <p:cNvPr id="9" name="Shape 7"/>
+          <p:cNvSpPr/>
+          <p:nvPr/>
+        </p:nvSpPr>
+        <p:spPr>
+          <a:xfrm>
+            <a:off x="731520" y="3108960"/>
+            <a:ext cx="10728655" cy="0"/>
+          </a:xfrm>
+          <a:prstGeom prst="line">
+            <a:avLst/>
+          </a:prstGeom>
+          <a:noFill/>
+          <a:ln w="9525">
+            <a:solidFill>
+              <a:srgbClr val="D8DFDB"/>
+            </a:solidFill>
+            <a:prstDash val="solid"/>
+          </a:ln>
+        </p:spPr>
+      </p:sp>
+      <p:sp>
+        <p:nvSpPr>
+          <p:cNvPr id="10" name="Text 8"/>
+          <p:cNvSpPr txBox="1"/>
+          <p:nvPr/>
+        </p:nvSpPr>
+        <p:spPr>
+          <a:xfrm>
+            <a:off x="731520" y="3246120"/>
+            <a:ext cx="320040" cy="329184"/>
+          </a:xfrm>
+          <a:prstGeom prst="rect">
+            <a:avLst/>
+          </a:prstGeom>
+          <a:noFill/>
+          <a:ln/>
+        </p:spPr>
+        <p:txBody>
+          <a:bodyPr wrap="square" lIns="0" tIns="0" rIns="0" bIns="0" rtlCol="0" anchor="ctr"/>
+          <a:lstStyle/>
+          <a:p>
+            <a:pPr indent="0" marL="0">
+              <a:buNone/>
+            </a:pPr>
+            <a:r>
+              <a:rPr lang="en-US" sz="1400" dirty="0">
+                <a:solidFill>
+                  <a:srgbClr val="0E2F2B"/>
+                </a:solidFill>
+                <a:highlight>
+                  <a:srgbClr val="D6F25C"/>
+                </a:highlight>
+                <a:latin typeface="Segoe UI Semibold" pitchFamily="34" charset="0"/>
+                <a:ea typeface="Segoe UI Semibold" pitchFamily="34" charset="-122"/>
+                <a:cs typeface="Segoe UI Semibold" pitchFamily="34" charset="-120"/>
+              </a:rPr>
+              <a:t>2</a:t>
+            </a:r>
+            <a:endParaRPr lang="en-US" sz="1400" dirty="0"/>
+          </a:p>
+        </p:txBody>
+      </p:sp>
+      <p:sp>
+        <p:nvSpPr>
+          <p:cNvPr id="11" name="Text 9"/>
+          <p:cNvSpPr txBox="1"/>
+          <p:nvPr/>
+        </p:nvSpPr>
+        <p:spPr>
+          <a:xfrm>
+            <a:off x="1188720" y="3200400"/>
+            <a:ext cx="3520440" cy="411480"/>
+          </a:xfrm>
+          <a:prstGeom prst="rect">
+            <a:avLst/>
+          </a:prstGeom>
+          <a:noFill/>
+          <a:ln/>
+        </p:spPr>
+        <p:txBody>
+          <a:bodyPr wrap="square" lIns="0" tIns="0" rIns="0" bIns="0" rtlCol="0" anchor="ctr"/>
+          <a:lstStyle/>
+          <a:p>
+            <a:pPr indent="0" marL="0">
+              <a:buNone/>
+            </a:pPr>
+            <a:r>
+              <a:rPr lang="en-US" sz="1500" dirty="0">
+                <a:solidFill>
+                  <a:srgbClr val="0E2F2B"/>
+                </a:solidFill>
+                <a:latin typeface="Segoe UI Semibold" pitchFamily="34" charset="0"/>
+                <a:ea typeface="Segoe UI Semibold" pitchFamily="34" charset="-122"/>
+                <a:cs typeface="Segoe UI Semibold" pitchFamily="34" charset="-120"/>
+              </a:rPr>
+              <a:t>Badge contradicted the answer</a:t>
+            </a:r>
+            <a:endParaRPr lang="en-US" sz="1500" dirty="0"/>
+          </a:p>
+        </p:txBody>
+      </p:sp>
+      <p:sp>
+        <p:nvSpPr>
+          <p:cNvPr id="12" name="Text 10"/>
+          <p:cNvSpPr txBox="1"/>
+          <p:nvPr/>
+        </p:nvSpPr>
+        <p:spPr>
+          <a:xfrm>
+            <a:off x="1188720" y="3657600"/>
+            <a:ext cx="3520440" cy="731520"/>
+          </a:xfrm>
+          <a:prstGeom prst="rect">
+            <a:avLst/>
+          </a:prstGeom>
+          <a:noFill/>
+          <a:ln/>
+        </p:spPr>
+        <p:txBody>
+          <a:bodyPr wrap="square" lIns="0" tIns="0" rIns="0" bIns="0" rtlCol="0" anchor="t"/>
+          <a:lstStyle/>
+          <a:p>
+            <a:pPr indent="0" marL="0">
+              <a:buNone/>
+            </a:pPr>
+            <a:r>
+              <a:rPr lang="en-US" sz="1250" dirty="0">
+                <a:solidFill>
+                  <a:srgbClr val="6B7C78"/>
+                </a:solidFill>
+                <a:latin typeface="Segoe UI" pitchFamily="34" charset="0"/>
+                <a:ea typeface="Segoe UI" pitchFamily="34" charset="-122"/>
+                <a:cs typeface="Segoe UI" pitchFamily="34" charset="-120"/>
+              </a:rPr>
+              <a:t>Label came from the gate, not the validated output</a:t>
+            </a:r>
+            <a:endParaRPr lang="en-US" sz="1250" dirty="0"/>
+          </a:p>
+        </p:txBody>
+      </p:sp>
+      <p:sp>
+        <p:nvSpPr>
+          <p:cNvPr id="13" name="Shape 11"/>
+          <p:cNvSpPr/>
+          <p:nvPr/>
+        </p:nvSpPr>
+        <p:spPr>
+          <a:xfrm>
+            <a:off x="731520" y="4389120"/>
+            <a:ext cx="10728655" cy="0"/>
+          </a:xfrm>
+          <a:prstGeom prst="line">
+            <a:avLst/>
+          </a:prstGeom>
+          <a:noFill/>
+          <a:ln w="9525">
+            <a:solidFill>
+              <a:srgbClr val="D8DFDB"/>
+            </a:solidFill>
+            <a:prstDash val="solid"/>
+          </a:ln>
+        </p:spPr>
+      </p:sp>
+      <p:sp>
+        <p:nvSpPr>
+          <p:cNvPr id="14" name="Text 12"/>
+          <p:cNvSpPr txBox="1"/>
+          <p:nvPr/>
+        </p:nvSpPr>
+        <p:spPr>
+          <a:xfrm>
+            <a:off x="731520" y="4526280"/>
+            <a:ext cx="320040" cy="329184"/>
+          </a:xfrm>
+          <a:prstGeom prst="rect">
+            <a:avLst/>
+          </a:prstGeom>
+          <a:noFill/>
+          <a:ln/>
+        </p:spPr>
+        <p:txBody>
+          <a:bodyPr wrap="square" lIns="0" tIns="0" rIns="0" bIns="0" rtlCol="0" anchor="ctr"/>
+          <a:lstStyle/>
+          <a:p>
+            <a:pPr indent="0" marL="0">
+              <a:buNone/>
+            </a:pPr>
+            <a:r>
+              <a:rPr lang="en-US" sz="1400" dirty="0">
+                <a:solidFill>
+                  <a:srgbClr val="0E2F2B"/>
+                </a:solidFill>
+                <a:highlight>
+                  <a:srgbClr val="D6F25C"/>
+                </a:highlight>
+                <a:latin typeface="Segoe UI Semibold" pitchFamily="34" charset="0"/>
+                <a:ea typeface="Segoe UI Semibold" pitchFamily="34" charset="-122"/>
+                <a:cs typeface="Segoe UI Semibold" pitchFamily="34" charset="-120"/>
+              </a:rPr>
+              <a:t>3</a:t>
+            </a:r>
+            <a:endParaRPr lang="en-US" sz="1400" dirty="0"/>
+          </a:p>
+        </p:txBody>
+      </p:sp>
+      <p:sp>
+        <p:nvSpPr>
+          <p:cNvPr id="15" name="Text 13"/>
+          <p:cNvSpPr txBox="1"/>
+          <p:nvPr/>
+        </p:nvSpPr>
+        <p:spPr>
+          <a:xfrm>
+            <a:off x="1188720" y="4480560"/>
+            <a:ext cx="3520440" cy="411480"/>
+          </a:xfrm>
+          <a:prstGeom prst="rect">
+            <a:avLst/>
+          </a:prstGeom>
+          <a:noFill/>
+          <a:ln/>
+        </p:spPr>
+        <p:txBody>
+          <a:bodyPr wrap="square" lIns="0" tIns="0" rIns="0" bIns="0" rtlCol="0" anchor="ctr"/>
+          <a:lstStyle/>
+          <a:p>
+            <a:pPr indent="0" marL="0">
+              <a:buNone/>
+            </a:pPr>
+            <a:r>
+              <a:rPr lang="en-US" sz="1500" dirty="0">
+                <a:solidFill>
+                  <a:srgbClr val="0E2F2B"/>
+                </a:solidFill>
+                <a:latin typeface="Segoe UI Semibold" pitchFamily="34" charset="0"/>
+                <a:ea typeface="Segoe UI Semibold" pitchFamily="34" charset="-122"/>
+                <a:cs typeface="Segoe UI Semibold" pitchFamily="34" charset="-120"/>
+              </a:rPr>
+              <a:t>One of four teams shown</a:t>
+            </a:r>
+            <a:endParaRPr lang="en-US" sz="1500" dirty="0"/>
+          </a:p>
+        </p:txBody>
+      </p:sp>
+      <p:sp>
+        <p:nvSpPr>
+          <p:cNvPr id="16" name="Text 14"/>
+          <p:cNvSpPr txBox="1"/>
+          <p:nvPr/>
+        </p:nvSpPr>
+        <p:spPr>
+          <a:xfrm>
+            <a:off x="1188720" y="4937760"/>
+            <a:ext cx="3520440" cy="731520"/>
+          </a:xfrm>
+          <a:prstGeom prst="rect">
+            <a:avLst/>
+          </a:prstGeom>
+          <a:noFill/>
+          <a:ln/>
+        </p:spPr>
+        <p:txBody>
+          <a:bodyPr wrap="square" lIns="0" tIns="0" rIns="0" bIns="0" rtlCol="0" anchor="t"/>
+          <a:lstStyle/>
+          <a:p>
+            <a:pPr indent="0" marL="0">
+              <a:buNone/>
+            </a:pPr>
+            <a:r>
+              <a:rPr lang="en-US" sz="1250" dirty="0">
+                <a:solidFill>
+                  <a:srgbClr val="6B7C78"/>
+                </a:solidFill>
+                <a:latin typeface="Segoe UI" pitchFamily="34" charset="0"/>
+                <a:ea typeface="Segoe UI" pitchFamily="34" charset="-122"/>
+                <a:cs typeface="Segoe UI" pitchFamily="34" charset="-120"/>
+              </a:rPr>
+              <a:t>Entry lists PPE, ABP, DBRE, SRE</a:t>
+            </a:r>
+            <a:endParaRPr lang="en-US" sz="1250" dirty="0"/>
+          </a:p>
+        </p:txBody>
+      </p:sp>
+      <p:sp>
+        <p:nvSpPr>
+          <p:cNvPr id="17" name="Shape 15"/>
+          <p:cNvSpPr/>
+          <p:nvPr/>
+        </p:nvSpPr>
+        <p:spPr>
+          <a:xfrm>
+            <a:off x="4892040" y="2011680"/>
+            <a:ext cx="3200400" cy="914400"/>
+          </a:xfrm>
+          <a:prstGeom prst="rect">
+            <a:avLst/>
+          </a:prstGeom>
+          <a:solidFill>
+            <a:srgbClr val="F4F6F1"/>
+          </a:solidFill>
+          <a:ln w="12700">
+            <a:solidFill>
+              <a:srgbClr val="F4F6F1"/>
+            </a:solidFill>
+            <a:prstDash val="solid"/>
+          </a:ln>
+        </p:spPr>
+      </p:sp>
+      <p:sp>
+        <p:nvSpPr>
+          <p:cNvPr id="18" name="Text 16"/>
+          <p:cNvSpPr txBox="1"/>
+          <p:nvPr/>
+        </p:nvSpPr>
+        <p:spPr>
+          <a:xfrm>
+            <a:off x="5074920" y="2057400"/>
+            <a:ext cx="1280160" cy="822960"/>
+          </a:xfrm>
+          <a:prstGeom prst="rect">
+            <a:avLst/>
+          </a:prstGeom>
+          <a:noFill/>
+          <a:ln/>
+        </p:spPr>
+        <p:txBody>
+          <a:bodyPr wrap="square" lIns="0" tIns="0" rIns="0" bIns="0" rtlCol="0" anchor="ctr"/>
+          <a:lstStyle/>
+          <a:p>
+            <a:pPr indent="0" marL="0">
+              <a:buNone/>
+            </a:pPr>
+            <a:r>
+              <a:rPr lang="en-US" sz="3200" dirty="0">
                 <a:solidFill>
                   <a:srgbClr val="2B403C"/>
                 </a:solidFill>
@@ -5248,15 +4671,189 @@
                 <a:ea typeface="Segoe UI Light" pitchFamily="34" charset="-122"/>
                 <a:cs typeface="Segoe UI Light" pitchFamily="34" charset="-120"/>
               </a:rPr>
-              <a:t>Retrieval and code decide what the manual supports. The model writes it up, and code checks the result.</a:t>
-            </a:r>
-            <a:endParaRPr lang="en-US" sz="1800" dirty="0"/>
-          </a:p>
-        </p:txBody>
+              <a:t>0.707</a:t>
+            </a:r>
+            <a:endParaRPr lang="en-US" sz="3200" dirty="0"/>
+          </a:p>
+        </p:txBody>
+      </p:sp>
+      <p:sp>
+        <p:nvSpPr>
+          <p:cNvPr id="19" name="Text 17"/>
+          <p:cNvSpPr txBox="1"/>
+          <p:nvPr/>
+        </p:nvSpPr>
+        <p:spPr>
+          <a:xfrm>
+            <a:off x="6355080" y="2057400"/>
+            <a:ext cx="1600200" cy="822960"/>
+          </a:xfrm>
+          <a:prstGeom prst="rect">
+            <a:avLst/>
+          </a:prstGeom>
+          <a:noFill/>
+          <a:ln/>
+        </p:spPr>
+        <p:txBody>
+          <a:bodyPr wrap="square" lIns="0" tIns="0" rIns="0" bIns="0" rtlCol="0" anchor="ctr"/>
+          <a:lstStyle/>
+          <a:p>
+            <a:pPr indent="0" marL="0">
+              <a:buNone/>
+            </a:pPr>
+            <a:r>
+              <a:rPr lang="en-US" sz="1050" dirty="0">
+                <a:solidFill>
+                  <a:srgbClr val="2B403C"/>
+                </a:solidFill>
+                <a:latin typeface="Consolas" pitchFamily="34" charset="0"/>
+                <a:ea typeface="Consolas" pitchFamily="34" charset="-122"/>
+                <a:cs typeface="Consolas" pitchFamily="34" charset="-120"/>
+              </a:rPr>
+              <a:t>KB-PAY-005, unrelated</a:t>
+            </a:r>
+            <a:endParaRPr lang="en-US" sz="1050" dirty="0"/>
+          </a:p>
+        </p:txBody>
+      </p:sp>
+      <p:sp>
+        <p:nvSpPr>
+          <p:cNvPr id="20" name="Shape 18"/>
+          <p:cNvSpPr/>
+          <p:nvPr/>
+        </p:nvSpPr>
+        <p:spPr>
+          <a:xfrm>
+            <a:off x="8412480" y="2011680"/>
+            <a:ext cx="3200400" cy="914400"/>
+          </a:xfrm>
+          <a:prstGeom prst="rect">
+            <a:avLst/>
+          </a:prstGeom>
+          <a:solidFill>
+            <a:srgbClr val="EEF7C9"/>
+          </a:solidFill>
+          <a:ln w="12700">
+            <a:solidFill>
+              <a:srgbClr val="EEF7C9"/>
+            </a:solidFill>
+            <a:prstDash val="solid"/>
+          </a:ln>
+        </p:spPr>
+      </p:sp>
+      <p:sp>
+        <p:nvSpPr>
+          <p:cNvPr id="21" name="Text 19"/>
+          <p:cNvSpPr txBox="1"/>
+          <p:nvPr/>
+        </p:nvSpPr>
+        <p:spPr>
+          <a:xfrm>
+            <a:off x="8595360" y="2057400"/>
+            <a:ext cx="1280160" cy="822960"/>
+          </a:xfrm>
+          <a:prstGeom prst="rect">
+            <a:avLst/>
+          </a:prstGeom>
+          <a:noFill/>
+          <a:ln/>
+        </p:spPr>
+        <p:txBody>
+          <a:bodyPr wrap="square" lIns="0" tIns="0" rIns="0" bIns="0" rtlCol="0" anchor="ctr"/>
+          <a:lstStyle/>
+          <a:p>
+            <a:pPr indent="0" marL="0">
+              <a:buNone/>
+            </a:pPr>
+            <a:r>
+              <a:rPr lang="en-US" sz="3200" dirty="0">
+                <a:solidFill>
+                  <a:srgbClr val="0E2F2B"/>
+                </a:solidFill>
+                <a:latin typeface="Segoe UI Light" pitchFamily="34" charset="0"/>
+                <a:ea typeface="Segoe UI Light" pitchFamily="34" charset="-122"/>
+                <a:cs typeface="Segoe UI Light" pitchFamily="34" charset="-120"/>
+              </a:rPr>
+              <a:t>0.675</a:t>
+            </a:r>
+            <a:endParaRPr lang="en-US" sz="3200" dirty="0"/>
+          </a:p>
+        </p:txBody>
+      </p:sp>
+      <p:sp>
+        <p:nvSpPr>
+          <p:cNvPr id="22" name="Text 20"/>
+          <p:cNvSpPr txBox="1"/>
+          <p:nvPr/>
+        </p:nvSpPr>
+        <p:spPr>
+          <a:xfrm>
+            <a:off x="9875520" y="2057400"/>
+            <a:ext cx="1600200" cy="822960"/>
+          </a:xfrm>
+          <a:prstGeom prst="rect">
+            <a:avLst/>
+          </a:prstGeom>
+          <a:noFill/>
+          <a:ln/>
+        </p:spPr>
+        <p:txBody>
+          <a:bodyPr wrap="square" lIns="0" tIns="0" rIns="0" bIns="0" rtlCol="0" anchor="ctr"/>
+          <a:lstStyle/>
+          <a:p>
+            <a:pPr indent="0" marL="0">
+              <a:buNone/>
+            </a:pPr>
+            <a:r>
+              <a:rPr lang="en-US" sz="1050" dirty="0">
+                <a:solidFill>
+                  <a:srgbClr val="0E2F2B"/>
+                </a:solidFill>
+                <a:latin typeface="Consolas" pitchFamily="34" charset="0"/>
+                <a:ea typeface="Consolas" pitchFamily="34" charset="-122"/>
+                <a:cs typeface="Consolas" pitchFamily="34" charset="-120"/>
+              </a:rPr>
+              <a:t>KB-PAY-002, ranked first</a:t>
+            </a:r>
+            <a:endParaRPr lang="en-US" sz="1050" dirty="0"/>
+          </a:p>
+        </p:txBody>
+      </p:sp>
+      <p:sp>
+        <p:nvSpPr>
+          <p:cNvPr id="23" name="before: badge says Need more info-frame"/>
+          <p:cNvSpPr/>
+          <p:nvPr/>
+        </p:nvSpPr>
+        <p:spPr>
+          <a:xfrm>
+            <a:off x="4892040" y="3429000"/>
+            <a:ext cx="3200400" cy="381000"/>
+          </a:xfrm>
+          <a:prstGeom prst="rect">
+            <a:avLst/>
+          </a:prstGeom>
+          <a:solidFill>
+            <a:srgbClr val="FFFFFF"/>
+          </a:solidFill>
+          <a:ln w="9525">
+            <a:solidFill>
+              <a:srgbClr val="D8DFDB"/>
+            </a:solidFill>
+            <a:prstDash val="solid"/>
+          </a:ln>
+          <a:effectLst>
+            <a:outerShdw sx="100000" sy="100000" kx="0" ky="0" algn="bl" rotWithShape="0" blurRad="177800" dist="38100" dir="5400000">
+              <a:srgbClr val="0E2F2B">
+                <a:alpha val="16000"/>
+              </a:srgbClr>
+            </a:outerShdw>
+          </a:effectLst>
+        </p:spPr>
       </p:sp>
       <p:pic>
         <p:nvPicPr>
-          <p:cNvPr id="5" name="Image 0" descr="QR code linking to the live demo">    </p:cNvPr>
+          <p:cNvPr id="24" name="before: badge says Need more info" descr="before: badge says Need more info">    </p:cNvPr>
           <p:cNvPicPr>
             <a:picLocks noChangeAspect="1"/>
           </p:cNvPicPr>
@@ -5270,8 +4867,8 @@
         </p:blipFill>
         <p:spPr>
           <a:xfrm>
-            <a:off x="8092440" y="1600200"/>
-            <a:ext cx="2468880" cy="2468880"/>
+            <a:off x="4892040" y="3429000"/>
+            <a:ext cx="3200400" cy="381000"/>
           </a:xfrm>
           <a:prstGeom prst="rect">
             <a:avLst/>
@@ -5280,175 +4877,217 @@
       </p:pic>
       <p:sp>
         <p:nvSpPr>
-          <p:cNvPr id="6" name="Text 3"/>
-          <p:cNvSpPr txBox="1"/>
-          <p:nvPr/>
-        </p:nvSpPr>
-        <p:spPr>
-          <a:xfrm>
-            <a:off x="8092440" y="4206240"/>
-            <a:ext cx="2743200" cy="365760"/>
-          </a:xfrm>
-          <a:prstGeom prst="rect">
-            <a:avLst/>
-          </a:prstGeom>
-          <a:noFill/>
-          <a:ln/>
-        </p:spPr>
-        <p:txBody>
-          <a:bodyPr wrap="square" lIns="0" tIns="0" rIns="0" bIns="0" rtlCol="0" anchor="ctr"/>
-          <a:lstStyle/>
-          <a:p>
-            <a:pPr indent="0" marL="0">
-              <a:buNone/>
-            </a:pPr>
-            <a:r>
-              <a:rPr lang="en-US" sz="1800" dirty="0">
-                <a:solidFill>
-                  <a:srgbClr val="0E2F2B"/>
-                </a:solidFill>
-                <a:latin typeface="Segoe UI Semibold" pitchFamily="34" charset="0"/>
-                <a:ea typeface="Segoe UI Semibold" pitchFamily="34" charset="-122"/>
-                <a:cs typeface="Segoe UI Semibold" pitchFamily="34" charset="-120"/>
-              </a:rPr>
-              <a:t>Try it</a:t>
-            </a:r>
-            <a:endParaRPr lang="en-US" sz="1800" dirty="0"/>
-          </a:p>
-        </p:txBody>
-      </p:sp>
-      <p:sp>
-        <p:nvSpPr>
-          <p:cNvPr id="7" name="Text 4">
-            <a:hlinkClick r:id="rId2" tooltip=""/>
-          </p:cNvPr>
-          <p:cNvSpPr txBox="1"/>
-          <p:nvPr/>
-        </p:nvSpPr>
-        <p:spPr>
-          <a:xfrm>
-            <a:off x="8092440" y="4617720"/>
-            <a:ext cx="3383280" cy="274320"/>
-          </a:xfrm>
-          <a:prstGeom prst="rect">
-            <a:avLst/>
-          </a:prstGeom>
-          <a:noFill/>
-          <a:ln/>
-        </p:spPr>
-        <p:txBody>
-          <a:bodyPr wrap="square" lIns="0" tIns="0" rIns="0" bIns="0" rtlCol="0" anchor="ctr"/>
-          <a:lstStyle/>
-          <a:p>
-            <a:pPr indent="0" marL="0">
-              <a:buNone/>
-            </a:pPr>
-            <a:r>
-              <a:rPr lang="en-US" sz="1200" u="sng" dirty="0">
-                <a:solidFill>
-                  <a:srgbClr val="1E6B58"/>
-                </a:solidFill>
-                <a:latin typeface="Consolas" pitchFamily="34" charset="0"/>
-                <a:ea typeface="Consolas" pitchFamily="34" charset="-122"/>
-                <a:cs typeface="Consolas" pitchFamily="34" charset="-120"/>
-                <a:hlinkClick r:id="rId2" invalidUrl="" action="" tgtFrame="" tooltip="" history="1" highlightClick="0" endSnd="0">
-                  <a:extLst>
-                    <a:ext uri="{A12FA001-AC4F-418D-AE19-62706E023703}">
-                      <ahyp:hlinkClr xmlns:ahyp="http://schemas.microsoft.com/office/drawing/2018/hyperlinkcolor" val="tx"/>
-                    </a:ext>
-                  </a:extLst>
-                </a:hlinkClick>
-              </a:rPr>
-              <a:t>triage-gpt-seven.vercel.app</a:t>
-            </a:r>
-            <a:endParaRPr lang="en-US" sz="1200" dirty="0"/>
-          </a:p>
-        </p:txBody>
-      </p:sp>
-      <p:sp>
-        <p:nvSpPr>
-          <p:cNvPr id="8" name="Text 5">
-            <a:hlinkClick r:id="rId3" tooltip=""/>
-          </p:cNvPr>
-          <p:cNvSpPr txBox="1"/>
-          <p:nvPr/>
-        </p:nvSpPr>
-        <p:spPr>
-          <a:xfrm>
-            <a:off x="8092440" y="4937760"/>
-            <a:ext cx="3931920" cy="274320"/>
-          </a:xfrm>
-          <a:prstGeom prst="rect">
-            <a:avLst/>
-          </a:prstGeom>
-          <a:noFill/>
-          <a:ln/>
-        </p:spPr>
-        <p:txBody>
-          <a:bodyPr wrap="square" lIns="0" tIns="0" rIns="0" bIns="0" rtlCol="0" anchor="ctr"/>
-          <a:lstStyle/>
-          <a:p>
-            <a:pPr indent="0" marL="0">
-              <a:buNone/>
-            </a:pPr>
-            <a:r>
-              <a:rPr lang="en-US" sz="900" u="sng" dirty="0">
+          <p:cNvPr id="25" name="after: badge says Answer from KB-frame"/>
+          <p:cNvSpPr/>
+          <p:nvPr/>
+        </p:nvSpPr>
+        <p:spPr>
+          <a:xfrm>
+            <a:off x="8412480" y="3429000"/>
+            <a:ext cx="3200400" cy="381000"/>
+          </a:xfrm>
+          <a:prstGeom prst="rect">
+            <a:avLst/>
+          </a:prstGeom>
+          <a:solidFill>
+            <a:srgbClr val="FFFFFF"/>
+          </a:solidFill>
+          <a:ln w="9525">
+            <a:solidFill>
+              <a:srgbClr val="D8DFDB"/>
+            </a:solidFill>
+            <a:prstDash val="solid"/>
+          </a:ln>
+          <a:effectLst>
+            <a:outerShdw sx="100000" sy="100000" kx="0" ky="0" algn="bl" rotWithShape="0" blurRad="177800" dist="38100" dir="5400000">
+              <a:srgbClr val="0E2F2B">
+                <a:alpha val="16000"/>
+              </a:srgbClr>
+            </a:outerShdw>
+          </a:effectLst>
+        </p:spPr>
+      </p:sp>
+      <p:pic>
+        <p:nvPicPr>
+          <p:cNvPr id="26" name="after: badge says Answer from KB" descr="after: badge says Answer from KB">    </p:cNvPr>
+          <p:cNvPicPr>
+            <a:picLocks noChangeAspect="1"/>
+          </p:cNvPicPr>
+          <p:nvPr/>
+        </p:nvPicPr>
+        <p:blipFill>
+          <a:blip r:embed="rId2"/>
+          <a:stretch>
+            <a:fillRect/>
+          </a:stretch>
+        </p:blipFill>
+        <p:spPr>
+          <a:xfrm>
+            <a:off x="8412480" y="3429000"/>
+            <a:ext cx="3200400" cy="381000"/>
+          </a:xfrm>
+          <a:prstGeom prst="rect">
+            <a:avLst/>
+          </a:prstGeom>
+        </p:spPr>
+      </p:pic>
+      <p:sp>
+        <p:nvSpPr>
+          <p:cNvPr id="27" name="before: one escalation team-frame"/>
+          <p:cNvSpPr/>
+          <p:nvPr/>
+        </p:nvSpPr>
+        <p:spPr>
+          <a:xfrm>
+            <a:off x="4892040" y="4663440"/>
+            <a:ext cx="3200400" cy="385011"/>
+          </a:xfrm>
+          <a:prstGeom prst="rect">
+            <a:avLst/>
+          </a:prstGeom>
+          <a:solidFill>
+            <a:srgbClr val="FFFFFF"/>
+          </a:solidFill>
+          <a:ln w="9525">
+            <a:solidFill>
+              <a:srgbClr val="D8DFDB"/>
+            </a:solidFill>
+            <a:prstDash val="solid"/>
+          </a:ln>
+          <a:effectLst>
+            <a:outerShdw sx="100000" sy="100000" kx="0" ky="0" algn="bl" rotWithShape="0" blurRad="177800" dist="38100" dir="5400000">
+              <a:srgbClr val="0E2F2B">
+                <a:alpha val="16000"/>
+              </a:srgbClr>
+            </a:outerShdw>
+          </a:effectLst>
+        </p:spPr>
+      </p:sp>
+      <p:pic>
+        <p:nvPicPr>
+          <p:cNvPr id="28" name="before: one escalation team" descr="before: one escalation team">    </p:cNvPr>
+          <p:cNvPicPr>
+            <a:picLocks noChangeAspect="1"/>
+          </p:cNvPicPr>
+          <p:nvPr/>
+        </p:nvPicPr>
+        <p:blipFill>
+          <a:blip r:embed="rId3"/>
+          <a:stretch>
+            <a:fillRect/>
+          </a:stretch>
+        </p:blipFill>
+        <p:spPr>
+          <a:xfrm>
+            <a:off x="4892040" y="4663440"/>
+            <a:ext cx="3200400" cy="385011"/>
+          </a:xfrm>
+          <a:prstGeom prst="rect">
+            <a:avLst/>
+          </a:prstGeom>
+        </p:spPr>
+      </p:pic>
+      <p:sp>
+        <p:nvSpPr>
+          <p:cNvPr id="29" name="after: four escalation teams-frame"/>
+          <p:cNvSpPr/>
+          <p:nvPr/>
+        </p:nvSpPr>
+        <p:spPr>
+          <a:xfrm>
+            <a:off x="8412480" y="4663440"/>
+            <a:ext cx="3200400" cy="1395663"/>
+          </a:xfrm>
+          <a:prstGeom prst="rect">
+            <a:avLst/>
+          </a:prstGeom>
+          <a:solidFill>
+            <a:srgbClr val="FFFFFF"/>
+          </a:solidFill>
+          <a:ln w="9525">
+            <a:solidFill>
+              <a:srgbClr val="D8DFDB"/>
+            </a:solidFill>
+            <a:prstDash val="solid"/>
+          </a:ln>
+          <a:effectLst>
+            <a:outerShdw sx="100000" sy="100000" kx="0" ky="0" algn="bl" rotWithShape="0" blurRad="177800" dist="38100" dir="5400000">
+              <a:srgbClr val="0E2F2B">
+                <a:alpha val="16000"/>
+              </a:srgbClr>
+            </a:outerShdw>
+          </a:effectLst>
+        </p:spPr>
+      </p:sp>
+      <p:pic>
+        <p:nvPicPr>
+          <p:cNvPr id="30" name="after: four escalation teams" descr="after: four escalation teams">    </p:cNvPr>
+          <p:cNvPicPr>
+            <a:picLocks noChangeAspect="1"/>
+          </p:cNvPicPr>
+          <p:nvPr/>
+        </p:nvPicPr>
+        <p:blipFill>
+          <a:blip r:embed="rId4"/>
+          <a:stretch>
+            <a:fillRect/>
+          </a:stretch>
+        </p:blipFill>
+        <p:spPr>
+          <a:xfrm>
+            <a:off x="8412480" y="4663440"/>
+            <a:ext cx="3200400" cy="1395663"/>
+          </a:xfrm>
+          <a:prstGeom prst="rect">
+            <a:avLst/>
+          </a:prstGeom>
+        </p:spPr>
+      </p:pic>
+      <p:sp>
+        <p:nvSpPr>
+          <p:cNvPr id="25" name="Slide Number Placeholder 0"/>
+          <p:cNvSpPr>
+            <a:spLocks noGrp="1"/>
+          </p:cNvSpPr>
+          <p:nvPr>
+            <p:ph type="sldNum" sz="quarter" idx="4294967295"/>
+          </p:nvPr>
+        </p:nvSpPr>
+        <p:spPr>
+          <a:xfrm>
+            <a:off x="10835640" y="6419088"/>
+            <a:ext cx="640080" cy="274320"/>
+          </a:xfrm>
+          <a:prstGeom prst="rect">
+            <a:avLst/>
+          </a:prstGeom>
+          <a:extLst>
+            <a:ext uri="{C572A759-6A51-4108-AA02-DFA0A04FC94B}">
+              <ma14:wrappingTextBoxFlag xmlns:ma14="http://schemas.microsoft.com/office/mac/drawingml/2011/main" val="0"/>
+            </a:ext>
+          </a:extLst>
+        </p:spPr>
+        <p:txBody>
+          <a:bodyPr/>
+          <a:lstStyle>
+            <a:lvl1pPr>
+              <a:defRPr sz="1000">
                 <a:solidFill>
                   <a:srgbClr val="6B7C78"/>
                 </a:solidFill>
-                <a:latin typeface="Consolas" pitchFamily="34" charset="0"/>
-                <a:ea typeface="Consolas" pitchFamily="34" charset="-122"/>
-                <a:cs typeface="Consolas" pitchFamily="34" charset="-120"/>
-                <a:hlinkClick r:id="rId3" invalidUrl="" action="" tgtFrame="" tooltip="" history="1" highlightClick="0" endSnd="0">
-                  <a:extLst>
-                    <a:ext uri="{A12FA001-AC4F-418D-AE19-62706E023703}">
-                      <ahyp:hlinkClr xmlns:ahyp="http://schemas.microsoft.com/office/drawing/2018/hyperlinkcolor" val="tx"/>
-                    </a:ext>
-                  </a:extLst>
-                </a:hlinkClick>
-              </a:rPr>
-              <a:t>github.com/ParthBiyani/AI-Troubleshooting-Assistant</a:t>
-            </a:r>
-            <a:endParaRPr lang="en-US" sz="900" dirty="0"/>
-          </a:p>
-        </p:txBody>
-      </p:sp>
-      <p:sp>
-        <p:nvSpPr>
-          <p:cNvPr id="9" name="Text 6"/>
-          <p:cNvSpPr txBox="1"/>
-          <p:nvPr/>
-        </p:nvSpPr>
-        <p:spPr>
-          <a:xfrm>
-            <a:off x="731520" y="6263640"/>
-            <a:ext cx="6400800" cy="274320"/>
-          </a:xfrm>
-          <a:prstGeom prst="rect">
-            <a:avLst/>
-          </a:prstGeom>
-          <a:noFill/>
-          <a:ln/>
-        </p:spPr>
-        <p:txBody>
-          <a:bodyPr wrap="square" lIns="0" tIns="0" rIns="0" bIns="0" rtlCol="0" anchor="ctr"/>
-          <a:lstStyle/>
-          <a:p>
-            <a:pPr indent="0" marL="0">
-              <a:buNone/>
-            </a:pPr>
-            <a:r>
-              <a:rPr lang="en-US" sz="1000" dirty="0">
-                <a:solidFill>
-                  <a:srgbClr val="6B7C78"/>
-                </a:solidFill>
-                <a:latin typeface="Segoe UI" pitchFamily="34" charset="0"/>
-                <a:ea typeface="Segoe UI" pitchFamily="34" charset="-122"/>
-                <a:cs typeface="Segoe UI" pitchFamily="34" charset="-120"/>
-              </a:rPr>
-              <a:t>Sample data: Northwind Payments is a fictional company.</a:t>
-            </a:r>
-            <a:endParaRPr lang="en-US" sz="1000" dirty="0"/>
+                <a:latin typeface="Segoe UI"/>
+                <a:ea typeface="Segoe UI"/>
+                <a:cs typeface="Segoe UI"/>
+              </a:defRPr>
+            </a:lvl1pPr>
+          </a:lstStyle>
+          <a:p>
+            <a:pPr algn="r"/>
+            <a:fld id="{F7021451-1387-4CA6-816F-3879F97B5CBC}" type="slidenum">
+              <a:rPr b="0" lang="en-US"/>
+              <a:t>12</a:t>
+            </a:fld>
+            <a:endParaRPr lang="en-US"/>
           </a:p>
         </p:txBody>
       </p:sp>
@@ -5616,7 +5255,7 @@
         <p:spPr>
           <a:xfrm>
             <a:off x="7955280" y="2103120"/>
-            <a:ext cx="3474720" cy="457200"/>
+            <a:ext cx="3474720" cy="365760"/>
           </a:xfrm>
           <a:prstGeom prst="rect">
             <a:avLst/>
@@ -5640,7 +5279,7 @@
                 <a:ea typeface="Segoe UI" pitchFamily="34" charset="-122"/>
                 <a:cs typeface="Segoe UI" pitchFamily="34" charset="-120"/>
               </a:rPr>
-              <a:t>Measured on the 37 answerable questions of the first set.</a:t>
+              <a:t>37 answerable questions, first set</a:t>
             </a:r>
             <a:endParaRPr lang="en-US" sz="1200" dirty="0"/>
           </a:p>
@@ -5655,7 +5294,7 @@
         <p:spPr>
           <a:xfrm>
             <a:off x="7955280" y="2651760"/>
-            <a:ext cx="3566160" cy="2926080"/>
+            <a:ext cx="3566160" cy="2743200"/>
           </a:xfrm>
           <a:prstGeom prst="rect">
             <a:avLst/>
@@ -5669,13 +5308,13 @@
           <a:p>
             <a:pPr marL="177800" indent="-177800">
               <a:spcAft>
-                <a:spcPts val="1000"/>
+                <a:spcPts val="900"/>
               </a:spcAft>
               <a:buSzPct val="100000"/>
               <a:buChar char="•"/>
             </a:pPr>
             <a:r>
-              <a:rPr lang="en-US" sz="1300" dirty="0">
+              <a:rPr lang="en-US" sz="1400" dirty="0">
                 <a:solidFill>
                   <a:srgbClr val="2B403C"/>
                 </a:solidFill>
@@ -5683,20 +5322,20 @@
                 <a:ea typeface="Segoe UI" pitchFamily="34" charset="-122"/>
                 <a:cs typeface="Segoe UI" pitchFamily="34" charset="-120"/>
               </a:rPr>
-              <a:t>Semantic search alone found the right entry first most often.</a:t>
-            </a:r>
-            <a:endParaRPr lang="en-US" sz="1300" dirty="0"/>
+              <a:t>Semantic alone: best at rank one</a:t>
+            </a:r>
+            <a:endParaRPr lang="en-US" sz="1400" dirty="0"/>
           </a:p>
           <a:p>
             <a:pPr marL="177800" indent="-177800">
               <a:spcAft>
-                <a:spcPts val="1000"/>
+                <a:spcPts val="900"/>
               </a:spcAft>
               <a:buSzPct val="100000"/>
               <a:buChar char="•"/>
             </a:pPr>
             <a:r>
-              <a:rPr lang="en-US" sz="1300" dirty="0">
+              <a:rPr lang="en-US" sz="1400" dirty="0">
                 <a:solidFill>
                   <a:srgbClr val="2B403C"/>
                 </a:solidFill>
@@ -5704,17 +5343,20 @@
                 <a:ea typeface="Segoe UI" pitchFamily="34" charset="-122"/>
                 <a:cs typeface="Segoe UI" pitchFamily="34" charset="-120"/>
               </a:rPr>
-              <a:t>Hybrid was the only one to reach 100% in the top five.</a:t>
-            </a:r>
-            <a:endParaRPr lang="en-US" sz="1300" dirty="0"/>
+              <a:t>Hybrid: only one at 100% in the top five</a:t>
+            </a:r>
+            <a:endParaRPr lang="en-US" sz="1400" dirty="0"/>
           </a:p>
           <a:p>
             <a:pPr marL="177800" indent="-177800">
+              <a:spcAft>
+                <a:spcPts val="900"/>
+              </a:spcAft>
               <a:buSzPct val="100000"/>
               <a:buChar char="•"/>
             </a:pPr>
             <a:r>
-              <a:rPr lang="en-US" sz="1300" dirty="0">
+              <a:rPr lang="en-US" sz="1400" dirty="0">
                 <a:solidFill>
                   <a:srgbClr val="2B403C"/>
                 </a:solidFill>
@@ -5722,9 +5364,9 @@
                 <a:ea typeface="Segoe UI" pitchFamily="34" charset="-122"/>
                 <a:cs typeface="Segoe UI" pitchFamily="34" charset="-120"/>
               </a:rPr>
-              <a:t>I kept hybrid for exact codes such as RC 91 and 504, but I did not measure it to be better at rank one.</a:t>
-            </a:r>
-            <a:endParaRPr lang="en-US" sz="1300" dirty="0"/>
+              <a:t>Hybrid kept for exact codes like RC 91</a:t>
+            </a:r>
+            <a:endParaRPr lang="en-US" sz="1400" dirty="0"/>
           </a:p>
         </p:txBody>
       </p:sp>
@@ -6127,7 +5769,7 @@
                 <a:ea typeface="Segoe UI" pitchFamily="34" charset="-122"/>
                 <a:cs typeface="Segoe UI" pitchFamily="34" charset="-120"/>
               </a:rPr>
-              <a:t>Groq gpt-oss-120b, then qwen3.8-27b, gpt-oss-20b, then Gemini 3.5 Flash-Lite</a:t>
+              <a:t>Groq gpt-oss-120b, qwen3.8-27b, gpt-oss-20b, then Gemini 3.5 Flash-Lite</a:t>
             </a:r>
             <a:endParaRPr lang="en-US" sz="1150" dirty="0"/>
           </a:p>
@@ -6166,7 +5808,7 @@
                 <a:ea typeface="Segoe UI" pitchFamily="34" charset="-122"/>
                 <a:cs typeface="Segoe UI" pitchFamily="34" charset="-120"/>
               </a:rPr>
-              <a:t>Free tier. A 429, an error or an empty answer moves to the next model.</a:t>
+              <a:t>A 429, an error or an empty answer falls through</a:t>
             </a:r>
             <a:endParaRPr lang="en-US" sz="1150" dirty="0"/>
           </a:p>
@@ -6267,7 +5909,7 @@
                 <a:ea typeface="Segoe UI" pitchFamily="34" charset="-122"/>
                 <a:cs typeface="Segoe UI" pitchFamily="34" charset="-120"/>
               </a:rPr>
-              <a:t>Regex heuristics, then Groq Prompt Guard (blocks at 0.98)</a:t>
+              <a:t>Regex heuristics, then Groq Prompt Guard at 0.98</a:t>
             </a:r>
             <a:endParaRPr lang="en-US" sz="1150" dirty="0"/>
           </a:p>
@@ -6306,7 +5948,7 @@
                 <a:ea typeface="Segoe UI" pitchFamily="34" charset="-122"/>
                 <a:cs typeface="Segoe UI" pitchFamily="34" charset="-120"/>
               </a:rPr>
-              <a:t>Cheap and fast. The margin is thin, so it is defence in depth.</a:t>
+              <a:t>Defence in depth</a:t>
             </a:r>
             <a:endParaRPr lang="en-US" sz="1150" dirty="0"/>
           </a:p>
@@ -6407,7 +6049,7 @@
                 <a:ea typeface="Segoe UI" pitchFamily="34" charset="-122"/>
                 <a:cs typeface="Segoe UI" pitchFamily="34" charset="-120"/>
               </a:rPr>
-              <a:t>bge-small-en-v1.5, quantised, run inside the app</a:t>
+              <a:t>bge-small-en-v1.5, quantised, bundled with the app</a:t>
             </a:r>
             <a:endParaRPr lang="en-US" sz="1150" dirty="0"/>
           </a:p>
@@ -6446,7 +6088,7 @@
                 <a:ea typeface="Segoe UI" pitchFamily="34" charset="-122"/>
                 <a:cs typeface="Segoe UI" pitchFamily="34" charset="-120"/>
               </a:rPr>
-              <a:t>No embeddings API needed; the model is bundled with the deployment.</a:t>
+              <a:t>No embeddings API</a:t>
             </a:r>
             <a:endParaRPr lang="en-US" sz="1150" dirty="0"/>
           </a:p>
@@ -6547,7 +6189,7 @@
                 <a:ea typeface="Segoe UI" pitchFamily="34" charset="-122"/>
                 <a:cs typeface="Segoe UI" pitchFamily="34" charset="-120"/>
               </a:rPr>
-              <a:t>MiniSearch (keyword) plus cosine similarity, fused by RRF</a:t>
+              <a:t>MiniSearch keyword + cosine similarity, fused by RRF</a:t>
             </a:r>
             <a:endParaRPr lang="en-US" sz="1150" dirty="0"/>
           </a:p>
@@ -6586,7 +6228,7 @@
                 <a:ea typeface="Segoe UI" pitchFamily="34" charset="-122"/>
                 <a:cs typeface="Segoe UI" pitchFamily="34" charset="-120"/>
               </a:rPr>
-              <a:t>67 entries need no vector database.</a:t>
+              <a:t>No vector database for 67 entries</a:t>
             </a:r>
             <a:endParaRPr lang="en-US" sz="1150" dirty="0"/>
           </a:p>
@@ -6687,7 +6329,7 @@
                 <a:ea typeface="Segoe UI" pitchFamily="34" charset="-122"/>
                 <a:cs typeface="Segoe UI" pitchFamily="34" charset="-120"/>
               </a:rPr>
-              <a:t>Next.js, TypeScript, deployed on Vercel from GitHub</a:t>
+              <a:t>Next.js, TypeScript, Vercel from GitHub</a:t>
             </a:r>
             <a:endParaRPr lang="en-US" sz="1150" dirty="0"/>
           </a:p>
@@ -6726,7 +6368,7 @@
                 <a:ea typeface="Segoe UI" pitchFamily="34" charset="-122"/>
                 <a:cs typeface="Segoe UI" pitchFamily="34" charset="-120"/>
               </a:rPr>
-              <a:t>Pull requests with CI: lint, types, tests, build, evaluation gate.</a:t>
+              <a:t>PRs with lint, types, tests, build, eval gate</a:t>
             </a:r>
             <a:endParaRPr lang="en-US" sz="1150" dirty="0"/>
           </a:p>
@@ -6866,7 +6508,7 @@
                 <a:ea typeface="Segoe UI" pitchFamily="34" charset="-122"/>
                 <a:cs typeface="Segoe UI" pitchFamily="34" charset="-120"/>
               </a:rPr>
-              <a:t>No server-side log of anyone's questions.</a:t>
+              <a:t>No server-side log of questions</a:t>
             </a:r>
             <a:endParaRPr lang="en-US" sz="1150" dirty="0"/>
           </a:p>
@@ -7053,7 +6695,7 @@
                 <a:ea typeface="Segoe UI Semibold" pitchFamily="34" charset="-122"/>
                 <a:cs typeface="Segoe UI Semibold" pitchFamily="34" charset="-120"/>
               </a:rPr>
-              <a:t>including the ones that flatter me.</a:t>
+              <a:t>by set and design.</a:t>
             </a:r>
             <a:endParaRPr lang="en-US" sz="3000" dirty="0"/>
           </a:p>
@@ -7083,8 +6725,8 @@
               <a:tblPr/>
               <a:tblGrid>
                 <a:gridCol w="1737360"/>
-                <a:gridCol w="1463040"/>
-                <a:gridCol w="2926080"/>
+                <a:gridCol w="1188720"/>
+                <a:gridCol w="3200400"/>
                 <a:gridCol w="1645920"/>
                 <a:gridCol w="1691640"/>
                 <a:gridCol w="1261872"/>
@@ -7995,7 +7637,7 @@
                           <a:ea typeface="Segoe UI" pitchFamily="34" charset="-122"/>
                           <a:cs typeface="Segoe UI" pitchFamily="34" charset="-120"/>
                         </a:rPr>
-                        <a:t>24 held-out</a:t>
+                        <a:t>24 fresh</a:t>
                       </a:r>
                       <a:endParaRPr lang="en-US" sz="1200" dirty="0">
                         <a:latin typeface="Segoe UI" charset="0"/>
@@ -8297,7 +7939,7 @@
                           <a:ea typeface="Segoe UI" pitchFamily="34" charset="-122"/>
                           <a:cs typeface="Segoe UI" pitchFamily="34" charset="-120"/>
                         </a:rPr>
-                        <a:t>24 held-out</a:t>
+                        <a:t>24 fresh, re-run</a:t>
                       </a:r>
                       <a:endParaRPr lang="en-US" sz="1200" dirty="0">
                         <a:latin typeface="Segoe UI" charset="0"/>
@@ -8347,7 +7989,7 @@
                           <a:ea typeface="Segoe UI" pitchFamily="34" charset="-122"/>
                           <a:cs typeface="Segoe UI" pitchFamily="34" charset="-120"/>
                         </a:rPr>
-                        <a:t>Second (dev data)</a:t>
+                        <a:t>Second</a:t>
                       </a:r>
                       <a:endParaRPr lang="en-US" sz="1200" dirty="0">
                         <a:latin typeface="Segoe UI" charset="0"/>
@@ -8896,7 +8538,7 @@
         <p:spPr>
           <a:xfrm>
             <a:off x="731520" y="5486400"/>
-            <a:ext cx="9631375" cy="777240"/>
+            <a:ext cx="9631375" cy="640080"/>
           </a:xfrm>
           <a:prstGeom prst="rect">
             <a:avLst/>
@@ -8920,7 +8562,7 @@
                 <a:ea typeface="Segoe UI" pitchFamily="34" charset="-122"/>
                 <a:cs typeface="Segoe UI" pitchFamily="34" charset="-120"/>
               </a:rPr>
-              <a:t>Writers differed between runs because Groq's free daily token limit ran out mid-evaluation. “Design” is the gate and prompt version: the second design scores the entry fused ranking put first, lets the model arbitrate the uncertain band, and returns every escalation route.</a:t>
+              <a:t>Writers differed because Groq's free daily token limit ran out mid-evaluation. The 24 fresh questions were inspected after their first run, so their re-run is development data.</a:t>
             </a:r>
             <a:endParaRPr lang="en-US" sz="1150" dirty="0"/>
           </a:p>
@@ -9200,7 +8842,7 @@
               <a:buNone/>
             </a:pPr>
             <a:r>
-              <a:rPr lang="en-US" sz="1500" dirty="0">
+              <a:rPr lang="en-US" sz="1600" dirty="0">
                 <a:solidFill>
                   <a:srgbClr val="2B403C"/>
                 </a:solidFill>
@@ -9208,9 +8850,9 @@
                 <a:ea typeface="Segoe UI" pitchFamily="34" charset="-122"/>
                 <a:cs typeface="Segoe UI" pitchFamily="34" charset="-120"/>
               </a:rPr>
-              <a:t>pages in the support manual this is built on</a:t>
-            </a:r>
-            <a:endParaRPr lang="en-US" sz="1500" dirty="0"/>
+              <a:t>pages in the support manual</a:t>
+            </a:r>
+            <a:endParaRPr lang="en-US" sz="1600" dirty="0"/>
           </a:p>
         </p:txBody>
       </p:sp>
@@ -9301,7 +8943,7 @@
               <a:buNone/>
             </a:pPr>
             <a:r>
-              <a:rPr lang="en-US" sz="1500" dirty="0">
+              <a:rPr lang="en-US" sz="1600" dirty="0">
                 <a:solidFill>
                   <a:srgbClr val="2B403C"/>
                 </a:solidFill>
@@ -9309,9 +8951,9 @@
                 <a:ea typeface="Segoe UI" pitchFamily="34" charset="-122"/>
                 <a:cs typeface="Segoe UI" pitchFamily="34" charset="-120"/>
               </a:rPr>
-              <a:t>entries, each with symptoms, checks, a resolution and an escalation</a:t>
-            </a:r>
-            <a:endParaRPr lang="en-US" sz="1500" dirty="0"/>
+              <a:t>entries to choose between</a:t>
+            </a:r>
+            <a:endParaRPr lang="en-US" sz="1600" dirty="0"/>
           </a:p>
         </p:txBody>
       </p:sp>
@@ -9402,7 +9044,7 @@
               <a:buNone/>
             </a:pPr>
             <a:r>
-              <a:rPr lang="en-US" sz="1500" dirty="0">
+              <a:rPr lang="en-US" sz="1600" dirty="0">
                 <a:solidFill>
                   <a:srgbClr val="2B403C"/>
                 </a:solidFill>
@@ -9410,9 +9052,9 @@
                 <a:ea typeface="Segoe UI" pitchFamily="34" charset="-122"/>
                 <a:cs typeface="Segoe UI" pitchFamily="34" charset="-120"/>
               </a:rPr>
-              <a:t>teams a problem might need to be routed to</a:t>
-            </a:r>
-            <a:endParaRPr lang="en-US" sz="1500" dirty="0"/>
+              <a:t>teams it might need to reach</a:t>
+            </a:r>
+            <a:endParaRPr lang="en-US" sz="1600" dirty="0"/>
           </a:p>
         </p:txBody>
       </p:sp>
@@ -9564,8 +9206,8 @@
         </p:nvSpPr>
         <p:spPr>
           <a:xfrm>
-            <a:off x="6720840" y="4846320"/>
-            <a:ext cx="4754880" cy="1188720"/>
+            <a:off x="6720840" y="4937760"/>
+            <a:ext cx="4754880" cy="731520"/>
           </a:xfrm>
           <a:prstGeom prst="rect">
             <a:avLst/>
@@ -9581,7 +9223,7 @@
               <a:buNone/>
             </a:pPr>
             <a:r>
-              <a:rPr lang="en-US" sz="1500" dirty="0">
+              <a:rPr lang="en-US" sz="1800" dirty="0">
                 <a:solidFill>
                   <a:srgbClr val="2B403C"/>
                 </a:solidFill>
@@ -9589,13 +9231,13 @@
                 <a:ea typeface="Segoe UI" pitchFamily="34" charset="-122"/>
                 <a:cs typeface="Segoe UI" pitchFamily="34" charset="-120"/>
               </a:rPr>
-              <a:t>The risk is not a slow answer. It is a </a:t>
-            </a:r>
-            <a:pPr indent="0" marL="0">
-              <a:buNone/>
-            </a:pPr>
-            <a:r>
-              <a:rPr lang="en-US" sz="1500" b="1" dirty="0">
+              <a:t>The risk is a </a:t>
+            </a:r>
+            <a:pPr indent="0" marL="0">
+              <a:buNone/>
+            </a:pPr>
+            <a:r>
+              <a:rPr lang="en-US" sz="1800" b="1" dirty="0">
                 <a:solidFill>
                   <a:srgbClr val="2B403C"/>
                 </a:solidFill>
@@ -9606,23 +9248,9 @@
                 <a:ea typeface="Segoe UI" pitchFamily="34" charset="-122"/>
                 <a:cs typeface="Segoe UI" pitchFamily="34" charset="-120"/>
               </a:rPr>
-              <a:t>confident wrong one:</a:t>
-            </a:r>
-            <a:pPr indent="0" marL="0">
-              <a:buNone/>
-            </a:pPr>
-            <a:r>
-              <a:rPr lang="en-US" sz="1500" dirty="0">
-                <a:solidFill>
-                  <a:srgbClr val="2B403C"/>
-                </a:solidFill>
-                <a:latin typeface="Segoe UI" pitchFamily="34" charset="0"/>
-                <a:ea typeface="Segoe UI" pitchFamily="34" charset="-122"/>
-                <a:cs typeface="Segoe UI" pitchFamily="34" charset="-120"/>
-              </a:rPr>
-              <a:t> a fix that was never in the manual, or an escalation to the wrong team.</a:t>
-            </a:r>
-            <a:endParaRPr lang="en-US" sz="1500" dirty="0"/>
+              <a:t>confident wrong answer.</a:t>
+            </a:r>
+            <a:endParaRPr lang="en-US" sz="1800" dirty="0"/>
           </a:p>
         </p:txBody>
       </p:sp>
@@ -9821,7 +9449,7 @@
         </p:nvSpPr>
         <p:spPr>
           <a:xfrm>
-            <a:off x="731520" y="2221992"/>
+            <a:off x="731520" y="2359152"/>
             <a:ext cx="329184" cy="329184"/>
           </a:xfrm>
           <a:prstGeom prst="ellipse">
@@ -9846,7 +9474,7 @@
         </p:nvSpPr>
         <p:spPr>
           <a:xfrm>
-            <a:off x="731520" y="2221992"/>
+            <a:off x="731520" y="2359152"/>
             <a:ext cx="329184" cy="329184"/>
           </a:xfrm>
           <a:prstGeom prst="rect">
@@ -9885,8 +9513,8 @@
         </p:nvSpPr>
         <p:spPr>
           <a:xfrm>
-            <a:off x="1234440" y="2194560"/>
-            <a:ext cx="2651760" cy="365760"/>
+            <a:off x="1234440" y="2331720"/>
+            <a:ext cx="2743200" cy="365760"/>
           </a:xfrm>
           <a:prstGeom prst="rect">
             <a:avLst/>
@@ -9902,7 +9530,7 @@
               <a:buNone/>
             </a:pPr>
             <a:r>
-              <a:rPr lang="en-US" sz="1500" dirty="0">
+              <a:rPr lang="en-US" sz="1600" dirty="0">
                 <a:solidFill>
                   <a:srgbClr val="0E2F2B"/>
                 </a:solidFill>
@@ -9912,7 +9540,7 @@
               </a:rPr>
               <a:t>Mode and priority</a:t>
             </a:r>
-            <a:endParaRPr lang="en-US" sz="1500" dirty="0"/>
+            <a:endParaRPr lang="en-US" sz="1600" dirty="0"/>
           </a:p>
         </p:txBody>
       </p:sp>
@@ -9924,8 +9552,8 @@
         </p:nvSpPr>
         <p:spPr>
           <a:xfrm>
-            <a:off x="1234440" y="2578608"/>
-            <a:ext cx="2651760" cy="822960"/>
+            <a:off x="1234440" y="2743200"/>
+            <a:ext cx="2743200" cy="457200"/>
           </a:xfrm>
           <a:prstGeom prst="rect">
             <a:avLst/>
@@ -9941,17 +9569,17 @@
               <a:buNone/>
             </a:pPr>
             <a:r>
-              <a:rPr lang="en-US" sz="1200" dirty="0">
-                <a:solidFill>
-                  <a:srgbClr val="2B403C"/>
+              <a:rPr lang="en-US" sz="1300" dirty="0">
+                <a:solidFill>
+                  <a:srgbClr val="6B7C78"/>
                 </a:solidFill>
                 <a:latin typeface="Segoe UI" pitchFamily="34" charset="0"/>
                 <a:ea typeface="Segoe UI" pitchFamily="34" charset="-122"/>
                 <a:cs typeface="Segoe UI" pitchFamily="34" charset="-120"/>
               </a:rPr>
-              <a:t>It says whether it is answering, asking, or refusing, and how urgent the entry is.</a:t>
-            </a:r>
-            <a:endParaRPr lang="en-US" sz="1200" dirty="0"/>
+              <a:t>Answering, asking, or refusing</a:t>
+            </a:r>
+            <a:endParaRPr lang="en-US" sz="1300" dirty="0"/>
           </a:p>
         </p:txBody>
       </p:sp>
@@ -9963,7 +9591,7 @@
         </p:nvSpPr>
         <p:spPr>
           <a:xfrm>
-            <a:off x="731520" y="3593592"/>
+            <a:off x="731520" y="3730752"/>
             <a:ext cx="329184" cy="329184"/>
           </a:xfrm>
           <a:prstGeom prst="ellipse">
@@ -9988,7 +9616,7 @@
         </p:nvSpPr>
         <p:spPr>
           <a:xfrm>
-            <a:off x="731520" y="3593592"/>
+            <a:off x="731520" y="3730752"/>
             <a:ext cx="329184" cy="329184"/>
           </a:xfrm>
           <a:prstGeom prst="rect">
@@ -10027,8 +9655,8 @@
         </p:nvSpPr>
         <p:spPr>
           <a:xfrm>
-            <a:off x="1234440" y="3566160"/>
-            <a:ext cx="2651760" cy="365760"/>
+            <a:off x="1234440" y="3703320"/>
+            <a:ext cx="2743200" cy="365760"/>
           </a:xfrm>
           <a:prstGeom prst="rect">
             <a:avLst/>
@@ -10044,7 +9672,7 @@
               <a:buNone/>
             </a:pPr>
             <a:r>
-              <a:rPr lang="en-US" sz="1500" dirty="0">
+              <a:rPr lang="en-US" sz="1600" dirty="0">
                 <a:solidFill>
                   <a:srgbClr val="0E2F2B"/>
                 </a:solidFill>
@@ -10054,7 +9682,7 @@
               </a:rPr>
               <a:t>Checks, in order</a:t>
             </a:r>
-            <a:endParaRPr lang="en-US" sz="1500" dirty="0"/>
+            <a:endParaRPr lang="en-US" sz="1600" dirty="0"/>
           </a:p>
         </p:txBody>
       </p:sp>
@@ -10066,8 +9694,8 @@
         </p:nvSpPr>
         <p:spPr>
           <a:xfrm>
-            <a:off x="1234440" y="3950208"/>
-            <a:ext cx="2651760" cy="822960"/>
+            <a:off x="1234440" y="4114800"/>
+            <a:ext cx="2743200" cy="457200"/>
           </a:xfrm>
           <a:prstGeom prst="rect">
             <a:avLst/>
@@ -10083,17 +9711,17 @@
               <a:buNone/>
             </a:pPr>
             <a:r>
-              <a:rPr lang="en-US" sz="1200" dirty="0">
-                <a:solidFill>
-                  <a:srgbClr val="2B403C"/>
+              <a:rPr lang="en-US" sz="1300" dirty="0">
+                <a:solidFill>
+                  <a:srgbClr val="6B7C78"/>
                 </a:solidFill>
                 <a:latin typeface="Segoe UI" pitchFamily="34" charset="0"/>
                 <a:ea typeface="Segoe UI" pitchFamily="34" charset="-122"/>
                 <a:cs typeface="Segoe UI" pitchFamily="34" charset="-120"/>
               </a:rPr>
-              <a:t>L1 and L2 steps as the manual tags them, each citing the entry it came from.</a:t>
-            </a:r>
-            <a:endParaRPr lang="en-US" sz="1200" dirty="0"/>
+              <a:t>L1 and L2 steps, each cited</a:t>
+            </a:r>
+            <a:endParaRPr lang="en-US" sz="1300" dirty="0"/>
           </a:p>
         </p:txBody>
       </p:sp>
@@ -10105,7 +9733,7 @@
         </p:nvSpPr>
         <p:spPr>
           <a:xfrm>
-            <a:off x="731520" y="4965192"/>
+            <a:off x="731520" y="5102352"/>
             <a:ext cx="329184" cy="329184"/>
           </a:xfrm>
           <a:prstGeom prst="ellipse">
@@ -10130,7 +9758,7 @@
         </p:nvSpPr>
         <p:spPr>
           <a:xfrm>
-            <a:off x="731520" y="4965192"/>
+            <a:off x="731520" y="5102352"/>
             <a:ext cx="329184" cy="329184"/>
           </a:xfrm>
           <a:prstGeom prst="rect">
@@ -10169,8 +9797,8 @@
         </p:nvSpPr>
         <p:spPr>
           <a:xfrm>
-            <a:off x="1234440" y="4937760"/>
-            <a:ext cx="2651760" cy="365760"/>
+            <a:off x="1234440" y="5074920"/>
+            <a:ext cx="2743200" cy="365760"/>
           </a:xfrm>
           <a:prstGeom prst="rect">
             <a:avLst/>
@@ -10186,7 +9814,7 @@
               <a:buNone/>
             </a:pPr>
             <a:r>
-              <a:rPr lang="en-US" sz="1500" dirty="0">
+              <a:rPr lang="en-US" sz="1600" dirty="0">
                 <a:solidFill>
                   <a:srgbClr val="0E2F2B"/>
                 </a:solidFill>
@@ -10196,7 +9824,7 @@
               </a:rPr>
               <a:t>Sources, with scores</a:t>
             </a:r>
-            <a:endParaRPr lang="en-US" sz="1500" dirty="0"/>
+            <a:endParaRPr lang="en-US" sz="1600" dirty="0"/>
           </a:p>
         </p:txBody>
       </p:sp>
@@ -10208,8 +9836,8 @@
         </p:nvSpPr>
         <p:spPr>
           <a:xfrm>
-            <a:off x="1234440" y="5321808"/>
-            <a:ext cx="2651760" cy="822960"/>
+            <a:off x="1234440" y="5486400"/>
+            <a:ext cx="2743200" cy="457200"/>
           </a:xfrm>
           <a:prstGeom prst="rect">
             <a:avLst/>
@@ -10225,17 +9853,17 @@
               <a:buNone/>
             </a:pPr>
             <a:r>
-              <a:rPr lang="en-US" sz="1200" dirty="0">
-                <a:solidFill>
-                  <a:srgbClr val="2B403C"/>
+              <a:rPr lang="en-US" sz="1300" dirty="0">
+                <a:solidFill>
+                  <a:srgbClr val="6B7C78"/>
                 </a:solidFill>
                 <a:latin typeface="Segoe UI" pitchFamily="34" charset="0"/>
                 <a:ea typeface="Segoe UI" pitchFamily="34" charset="-122"/>
                 <a:cs typeface="Segoe UI" pitchFamily="34" charset="-120"/>
               </a:rPr>
-              <a:t>The retrieved entries with keyword and semantic scores, so you can check the search.</a:t>
-            </a:r>
-            <a:endParaRPr lang="en-US" sz="1200" dirty="0"/>
+              <a:t>Keyword and semantic, visible</a:t>
+            </a:r>
+            <a:endParaRPr lang="en-US" sz="1300" dirty="0"/>
           </a:p>
         </p:txBody>
       </p:sp>
@@ -10898,7 +10526,7 @@
         <p:spPr>
           <a:xfrm>
             <a:off x="731520" y="5669280"/>
-            <a:ext cx="3362858" cy="640080"/>
+            <a:ext cx="3362858" cy="457200"/>
           </a:xfrm>
           <a:prstGeom prst="rect">
             <a:avLst/>
@@ -10914,7 +10542,7 @@
               <a:buNone/>
             </a:pPr>
             <a:r>
-              <a:rPr lang="en-US" sz="1300" dirty="0">
+              <a:rPr lang="en-US" sz="1400" dirty="0">
                 <a:solidFill>
                   <a:srgbClr val="2B403C"/>
                 </a:solidFill>
@@ -10922,9 +10550,9 @@
                 <a:ea typeface="Segoe UI" pitchFamily="34" charset="-122"/>
                 <a:cs typeface="Segoe UI" pitchFamily="34" charset="-120"/>
               </a:rPr>
-              <a:t>Cited, checked, and routed to the right team.</a:t>
-            </a:r>
-            <a:endParaRPr lang="en-US" sz="1300" dirty="0"/>
+              <a:t>Cited, checked, routed</a:t>
+            </a:r>
+            <a:endParaRPr lang="en-US" sz="1400" dirty="0"/>
           </a:p>
         </p:txBody>
       </p:sp>
@@ -11096,7 +10724,7 @@
         <p:spPr>
           <a:xfrm>
             <a:off x="4414418" y="5669280"/>
-            <a:ext cx="3362858" cy="640080"/>
+            <a:ext cx="3362858" cy="457200"/>
           </a:xfrm>
           <a:prstGeom prst="rect">
             <a:avLst/>
@@ -11112,7 +10740,7 @@
               <a:buNone/>
             </a:pPr>
             <a:r>
-              <a:rPr lang="en-US" sz="1300" dirty="0">
+              <a:rPr lang="en-US" sz="1400" dirty="0">
                 <a:solidFill>
                   <a:srgbClr val="2B403C"/>
                 </a:solidFill>
@@ -11120,9 +10748,9 @@
                 <a:ea typeface="Segoe UI" pitchFamily="34" charset="-122"/>
                 <a:cs typeface="Segoe UI" pitchFamily="34" charset="-120"/>
               </a:rPr>
-              <a:t>Asks the questions that tell the candidate entries apart.</a:t>
-            </a:r>
-            <a:endParaRPr lang="en-US" sz="1300" dirty="0"/>
+              <a:t>Asks what tells entries apart</a:t>
+            </a:r>
+            <a:endParaRPr lang="en-US" sz="1400" dirty="0"/>
           </a:p>
         </p:txBody>
       </p:sp>
@@ -11294,7 +10922,7 @@
         <p:spPr>
           <a:xfrm>
             <a:off x="8097317" y="5669280"/>
-            <a:ext cx="3362858" cy="640080"/>
+            <a:ext cx="3362858" cy="457200"/>
           </a:xfrm>
           <a:prstGeom prst="rect">
             <a:avLst/>
@@ -11310,7 +10938,7 @@
               <a:buNone/>
             </a:pPr>
             <a:r>
-              <a:rPr lang="en-US" sz="1300" dirty="0">
+              <a:rPr lang="en-US" sz="1400" dirty="0">
                 <a:solidFill>
                   <a:srgbClr val="2B403C"/>
                 </a:solidFill>
@@ -11318,9 +10946,9 @@
                 <a:ea typeface="Segoe UI" pitchFamily="34" charset="-122"/>
                 <a:cs typeface="Segoe UI" pitchFamily="34" charset="-120"/>
               </a:rPr>
-              <a:t>Says the manual does not cover it. No invented steps.</a:t>
-            </a:r>
-            <a:endParaRPr lang="en-US" sz="1300" dirty="0"/>
+              <a:t>Says so. No invented steps</a:t>
+            </a:r>
+            <a:endParaRPr lang="en-US" sz="1400" dirty="0"/>
           </a:p>
         </p:txBody>
       </p:sp>
@@ -11519,7 +11147,7 @@
         </p:nvSpPr>
         <p:spPr>
           <a:xfrm>
-            <a:off x="923544" y="2432304"/>
+            <a:off x="923544" y="2660904"/>
             <a:ext cx="8940546" cy="0"/>
           </a:xfrm>
           <a:prstGeom prst="line">
@@ -11542,7 +11170,7 @@
         </p:nvSpPr>
         <p:spPr>
           <a:xfrm>
-            <a:off x="731520" y="2240280"/>
+            <a:off x="731520" y="2468880"/>
             <a:ext cx="384048" cy="384048"/>
           </a:xfrm>
           <a:prstGeom prst="ellipse">
@@ -11567,7 +11195,7 @@
         </p:nvSpPr>
         <p:spPr>
           <a:xfrm>
-            <a:off x="731520" y="2240280"/>
+            <a:off x="731520" y="2468880"/>
             <a:ext cx="384048" cy="384048"/>
           </a:xfrm>
           <a:prstGeom prst="rect">
@@ -11606,7 +11234,7 @@
         </p:nvSpPr>
         <p:spPr>
           <a:xfrm>
-            <a:off x="731520" y="2807208"/>
+            <a:off x="731520" y="3035808"/>
             <a:ext cx="1605229" cy="365760"/>
           </a:xfrm>
           <a:prstGeom prst="rect">
@@ -11623,7 +11251,7 @@
               <a:buNone/>
             </a:pPr>
             <a:r>
-              <a:rPr lang="en-US" sz="1700" dirty="0">
+              <a:rPr lang="en-US" sz="1800" dirty="0">
                 <a:solidFill>
                   <a:srgbClr val="0E2F2B"/>
                 </a:solidFill>
@@ -11633,7 +11261,7 @@
               </a:rPr>
               <a:t>Guard</a:t>
             </a:r>
-            <a:endParaRPr lang="en-US" sz="1700" dirty="0"/>
+            <a:endParaRPr lang="en-US" sz="1800" dirty="0"/>
           </a:p>
         </p:txBody>
       </p:sp>
@@ -11645,8 +11273,8 @@
         </p:nvSpPr>
         <p:spPr>
           <a:xfrm>
-            <a:off x="731520" y="3200400"/>
-            <a:ext cx="1559509" cy="1371600"/>
+            <a:off x="731520" y="3474720"/>
+            <a:ext cx="1513789" cy="914400"/>
           </a:xfrm>
           <a:prstGeom prst="rect">
             <a:avLst/>
@@ -11662,7 +11290,7 @@
               <a:buNone/>
             </a:pPr>
             <a:r>
-              <a:rPr lang="en-US" sz="1200" dirty="0">
+              <a:rPr lang="en-US" sz="1300" dirty="0">
                 <a:solidFill>
                   <a:srgbClr val="2B403C"/>
                 </a:solidFill>
@@ -11670,9 +11298,9 @@
                 <a:ea typeface="Segoe UI" pitchFamily="34" charset="-122"/>
                 <a:cs typeface="Segoe UI" pitchFamily="34" charset="-120"/>
               </a:rPr>
-              <a:t>Mask card numbers, OTPs and CVVs. Block injection attempts.</a:t>
-            </a:r>
-            <a:endParaRPr lang="en-US" sz="1200" dirty="0"/>
+              <a:t>Mask card data. Block injection.</a:t>
+            </a:r>
+            <a:endParaRPr lang="en-US" sz="1300" dirty="0"/>
           </a:p>
         </p:txBody>
       </p:sp>
@@ -11684,7 +11312,7 @@
         </p:nvSpPr>
         <p:spPr>
           <a:xfrm>
-            <a:off x="731520" y="4251960"/>
+            <a:off x="731520" y="4480560"/>
             <a:ext cx="731520" cy="256032"/>
           </a:xfrm>
           <a:prstGeom prst="rect">
@@ -11723,7 +11351,7 @@
         </p:nvSpPr>
         <p:spPr>
           <a:xfrm>
-            <a:off x="2519629" y="2240280"/>
+            <a:off x="2519629" y="2468880"/>
             <a:ext cx="384048" cy="384048"/>
           </a:xfrm>
           <a:prstGeom prst="ellipse">
@@ -11748,7 +11376,7 @@
         </p:nvSpPr>
         <p:spPr>
           <a:xfrm>
-            <a:off x="2519629" y="2240280"/>
+            <a:off x="2519629" y="2468880"/>
             <a:ext cx="384048" cy="384048"/>
           </a:xfrm>
           <a:prstGeom prst="rect">
@@ -11787,7 +11415,7 @@
         </p:nvSpPr>
         <p:spPr>
           <a:xfrm>
-            <a:off x="2519629" y="2807208"/>
+            <a:off x="2519629" y="3035808"/>
             <a:ext cx="1605229" cy="365760"/>
           </a:xfrm>
           <a:prstGeom prst="rect">
@@ -11804,7 +11432,7 @@
               <a:buNone/>
             </a:pPr>
             <a:r>
-              <a:rPr lang="en-US" sz="1700" dirty="0">
+              <a:rPr lang="en-US" sz="1800" dirty="0">
                 <a:solidFill>
                   <a:srgbClr val="0E2F2B"/>
                 </a:solidFill>
@@ -11814,7 +11442,7 @@
               </a:rPr>
               <a:t>Retrieve</a:t>
             </a:r>
-            <a:endParaRPr lang="en-US" sz="1700" dirty="0"/>
+            <a:endParaRPr lang="en-US" sz="1800" dirty="0"/>
           </a:p>
         </p:txBody>
       </p:sp>
@@ -11826,8 +11454,8 @@
         </p:nvSpPr>
         <p:spPr>
           <a:xfrm>
-            <a:off x="2519629" y="3200400"/>
-            <a:ext cx="1559509" cy="1371600"/>
+            <a:off x="2519629" y="3474720"/>
+            <a:ext cx="1513789" cy="914400"/>
           </a:xfrm>
           <a:prstGeom prst="rect">
             <a:avLst/>
@@ -11843,7 +11471,7 @@
               <a:buNone/>
             </a:pPr>
             <a:r>
-              <a:rPr lang="en-US" sz="1200" dirty="0">
+              <a:rPr lang="en-US" sz="1300" dirty="0">
                 <a:solidFill>
                   <a:srgbClr val="2B403C"/>
                 </a:solidFill>
@@ -11851,9 +11479,9 @@
                 <a:ea typeface="Segoe UI" pitchFamily="34" charset="-122"/>
                 <a:cs typeface="Segoe UI" pitchFamily="34" charset="-120"/>
               </a:rPr>
-              <a:t>Keyword and semantic search over the 67 entries, fused into one ranking.</a:t>
-            </a:r>
-            <a:endParaRPr lang="en-US" sz="1200" dirty="0"/>
+              <a:t>Keyword and semantic search, fused.</a:t>
+            </a:r>
+            <a:endParaRPr lang="en-US" sz="1300" dirty="0"/>
           </a:p>
         </p:txBody>
       </p:sp>
@@ -11865,7 +11493,7 @@
         </p:nvSpPr>
         <p:spPr>
           <a:xfrm>
-            <a:off x="2519629" y="4251960"/>
+            <a:off x="2519629" y="4480560"/>
             <a:ext cx="731520" cy="256032"/>
           </a:xfrm>
           <a:prstGeom prst="rect">
@@ -11904,7 +11532,7 @@
         </p:nvSpPr>
         <p:spPr>
           <a:xfrm>
-            <a:off x="4307738" y="2240280"/>
+            <a:off x="4307738" y="2468880"/>
             <a:ext cx="384048" cy="384048"/>
           </a:xfrm>
           <a:prstGeom prst="ellipse">
@@ -11929,7 +11557,7 @@
         </p:nvSpPr>
         <p:spPr>
           <a:xfrm>
-            <a:off x="4307738" y="2240280"/>
+            <a:off x="4307738" y="2468880"/>
             <a:ext cx="384048" cy="384048"/>
           </a:xfrm>
           <a:prstGeom prst="rect">
@@ -11968,7 +11596,7 @@
         </p:nvSpPr>
         <p:spPr>
           <a:xfrm>
-            <a:off x="4307738" y="2807208"/>
+            <a:off x="4307738" y="3035808"/>
             <a:ext cx="1605229" cy="365760"/>
           </a:xfrm>
           <a:prstGeom prst="rect">
@@ -11985,7 +11613,7 @@
               <a:buNone/>
             </a:pPr>
             <a:r>
-              <a:rPr lang="en-US" sz="1700" dirty="0">
+              <a:rPr lang="en-US" sz="1800" dirty="0">
                 <a:solidFill>
                   <a:srgbClr val="0E2F2B"/>
                 </a:solidFill>
@@ -11995,7 +11623,7 @@
               </a:rPr>
               <a:t>Gate</a:t>
             </a:r>
-            <a:endParaRPr lang="en-US" sz="1700" dirty="0"/>
+            <a:endParaRPr lang="en-US" sz="1800" dirty="0"/>
           </a:p>
         </p:txBody>
       </p:sp>
@@ -12007,8 +11635,8 @@
         </p:nvSpPr>
         <p:spPr>
           <a:xfrm>
-            <a:off x="4307738" y="3200400"/>
-            <a:ext cx="1559509" cy="1371600"/>
+            <a:off x="4307738" y="3474720"/>
+            <a:ext cx="1513789" cy="914400"/>
           </a:xfrm>
           <a:prstGeom prst="rect">
             <a:avLst/>
@@ -12024,7 +11652,7 @@
               <a:buNone/>
             </a:pPr>
             <a:r>
-              <a:rPr lang="en-US" sz="1200" dirty="0">
+              <a:rPr lang="en-US" sz="1300" dirty="0">
                 <a:solidFill>
                   <a:srgbClr val="2B403C"/>
                 </a:solidFill>
@@ -12032,9 +11660,9 @@
                 <a:ea typeface="Segoe UI" pitchFamily="34" charset="-122"/>
                 <a:cs typeface="Segoe UI" pitchFamily="34" charset="-120"/>
               </a:rPr>
-              <a:t>Nothing close to the question? Refuse here. The model is never called.</a:t>
-            </a:r>
-            <a:endParaRPr lang="en-US" sz="1200" dirty="0"/>
+              <a:t>Nothing close? Refuse. No model call.</a:t>
+            </a:r>
+            <a:endParaRPr lang="en-US" sz="1300" dirty="0"/>
           </a:p>
         </p:txBody>
       </p:sp>
@@ -12046,7 +11674,7 @@
         </p:nvSpPr>
         <p:spPr>
           <a:xfrm>
-            <a:off x="4307738" y="4251960"/>
+            <a:off x="4307738" y="4480560"/>
             <a:ext cx="731520" cy="256032"/>
           </a:xfrm>
           <a:prstGeom prst="rect">
@@ -12085,7 +11713,7 @@
         </p:nvSpPr>
         <p:spPr>
           <a:xfrm>
-            <a:off x="6095848" y="2240280"/>
+            <a:off x="6095848" y="2468880"/>
             <a:ext cx="384048" cy="384048"/>
           </a:xfrm>
           <a:prstGeom prst="ellipse">
@@ -12110,7 +11738,7 @@
         </p:nvSpPr>
         <p:spPr>
           <a:xfrm>
-            <a:off x="6095848" y="2240280"/>
+            <a:off x="6095848" y="2468880"/>
             <a:ext cx="384048" cy="384048"/>
           </a:xfrm>
           <a:prstGeom prst="rect">
@@ -12149,7 +11777,7 @@
         </p:nvSpPr>
         <p:spPr>
           <a:xfrm>
-            <a:off x="6095848" y="2807208"/>
+            <a:off x="6095848" y="3035808"/>
             <a:ext cx="1605229" cy="365760"/>
           </a:xfrm>
           <a:prstGeom prst="rect">
@@ -12166,7 +11794,7 @@
               <a:buNone/>
             </a:pPr>
             <a:r>
-              <a:rPr lang="en-US" sz="1700" dirty="0">
+              <a:rPr lang="en-US" sz="1800" dirty="0">
                 <a:solidFill>
                   <a:srgbClr val="0E2F2B"/>
                 </a:solidFill>
@@ -12176,7 +11804,7 @@
               </a:rPr>
               <a:t>Write</a:t>
             </a:r>
-            <a:endParaRPr lang="en-US" sz="1700" dirty="0"/>
+            <a:endParaRPr lang="en-US" sz="1800" dirty="0"/>
           </a:p>
         </p:txBody>
       </p:sp>
@@ -12188,8 +11816,8 @@
         </p:nvSpPr>
         <p:spPr>
           <a:xfrm>
-            <a:off x="6095848" y="3200400"/>
-            <a:ext cx="1559509" cy="1371600"/>
+            <a:off x="6095848" y="3474720"/>
+            <a:ext cx="1513789" cy="914400"/>
           </a:xfrm>
           <a:prstGeom prst="rect">
             <a:avLst/>
@@ -12205,7 +11833,7 @@
               <a:buNone/>
             </a:pPr>
             <a:r>
-              <a:rPr lang="en-US" sz="1200" dirty="0">
+              <a:rPr lang="en-US" sz="1300" dirty="0">
                 <a:solidFill>
                   <a:srgbClr val="2B403C"/>
                 </a:solidFill>
@@ -12213,9 +11841,9 @@
                 <a:ea typeface="Segoe UI" pitchFamily="34" charset="-122"/>
                 <a:cs typeface="Segoe UI" pitchFamily="34" charset="-120"/>
               </a:rPr>
-              <a:t>The model sees the top three entries and writes JSON, every statement cited.</a:t>
-            </a:r>
-            <a:endParaRPr lang="en-US" sz="1200" dirty="0"/>
+              <a:t>Top 3 entries in, cited JSON out.</a:t>
+            </a:r>
+            <a:endParaRPr lang="en-US" sz="1300" dirty="0"/>
           </a:p>
         </p:txBody>
       </p:sp>
@@ -12227,7 +11855,7 @@
         </p:nvSpPr>
         <p:spPr>
           <a:xfrm>
-            <a:off x="6095848" y="4251960"/>
+            <a:off x="6095848" y="4480560"/>
             <a:ext cx="731520" cy="256032"/>
           </a:xfrm>
           <a:prstGeom prst="rect">
@@ -12269,7 +11897,7 @@
         </p:nvSpPr>
         <p:spPr>
           <a:xfrm>
-            <a:off x="7883957" y="2240280"/>
+            <a:off x="7883957" y="2468880"/>
             <a:ext cx="384048" cy="384048"/>
           </a:xfrm>
           <a:prstGeom prst="ellipse">
@@ -12294,7 +11922,7 @@
         </p:nvSpPr>
         <p:spPr>
           <a:xfrm>
-            <a:off x="7883957" y="2240280"/>
+            <a:off x="7883957" y="2468880"/>
             <a:ext cx="384048" cy="384048"/>
           </a:xfrm>
           <a:prstGeom prst="rect">
@@ -12333,7 +11961,7 @@
         </p:nvSpPr>
         <p:spPr>
           <a:xfrm>
-            <a:off x="7883957" y="2807208"/>
+            <a:off x="7883957" y="3035808"/>
             <a:ext cx="1605229" cy="365760"/>
           </a:xfrm>
           <a:prstGeom prst="rect">
@@ -12350,7 +11978,7 @@
               <a:buNone/>
             </a:pPr>
             <a:r>
-              <a:rPr lang="en-US" sz="1700" dirty="0">
+              <a:rPr lang="en-US" sz="1800" dirty="0">
                 <a:solidFill>
                   <a:srgbClr val="0E2F2B"/>
                 </a:solidFill>
@@ -12360,7 +11988,7 @@
               </a:rPr>
               <a:t>Validate</a:t>
             </a:r>
-            <a:endParaRPr lang="en-US" sz="1700" dirty="0"/>
+            <a:endParaRPr lang="en-US" sz="1800" dirty="0"/>
           </a:p>
         </p:txBody>
       </p:sp>
@@ -12372,8 +12000,8 @@
         </p:nvSpPr>
         <p:spPr>
           <a:xfrm>
-            <a:off x="7883957" y="3200400"/>
-            <a:ext cx="1559509" cy="1371600"/>
+            <a:off x="7883957" y="3474720"/>
+            <a:ext cx="1513789" cy="914400"/>
           </a:xfrm>
           <a:prstGeom prst="rect">
             <a:avLst/>
@@ -12389,7 +12017,7 @@
               <a:buNone/>
             </a:pPr>
             <a:r>
-              <a:rPr lang="en-US" sz="1200" dirty="0">
+              <a:rPr lang="en-US" sz="1300" dirty="0">
                 <a:solidFill>
                   <a:srgbClr val="2B403C"/>
                 </a:solidFill>
@@ -12397,9 +12025,9 @@
                 <a:ea typeface="Segoe UI" pitchFamily="34" charset="-122"/>
                 <a:cs typeface="Segoe UI" pitchFamily="34" charset="-120"/>
               </a:rPr>
-              <a:t>Drop any citation not retrieved and any team not in the directory.</a:t>
-            </a:r>
-            <a:endParaRPr lang="en-US" sz="1200" dirty="0"/>
+              <a:t>Drop uncited claims and unknown teams.</a:t>
+            </a:r>
+            <a:endParaRPr lang="en-US" sz="1300" dirty="0"/>
           </a:p>
         </p:txBody>
       </p:sp>
@@ -12411,7 +12039,7 @@
         </p:nvSpPr>
         <p:spPr>
           <a:xfrm>
-            <a:off x="7883957" y="4251960"/>
+            <a:off x="7883957" y="4480560"/>
             <a:ext cx="731520" cy="256032"/>
           </a:xfrm>
           <a:prstGeom prst="rect">
@@ -12450,7 +12078,7 @@
         </p:nvSpPr>
         <p:spPr>
           <a:xfrm>
-            <a:off x="9672066" y="2240280"/>
+            <a:off x="9672066" y="2468880"/>
             <a:ext cx="384048" cy="384048"/>
           </a:xfrm>
           <a:prstGeom prst="ellipse">
@@ -12475,7 +12103,7 @@
         </p:nvSpPr>
         <p:spPr>
           <a:xfrm>
-            <a:off x="9672066" y="2240280"/>
+            <a:off x="9672066" y="2468880"/>
             <a:ext cx="384048" cy="384048"/>
           </a:xfrm>
           <a:prstGeom prst="rect">
@@ -12514,7 +12142,7 @@
         </p:nvSpPr>
         <p:spPr>
           <a:xfrm>
-            <a:off x="9672066" y="2807208"/>
+            <a:off x="9672066" y="3035808"/>
             <a:ext cx="1605229" cy="365760"/>
           </a:xfrm>
           <a:prstGeom prst="rect">
@@ -12531,7 +12159,7 @@
               <a:buNone/>
             </a:pPr>
             <a:r>
-              <a:rPr lang="en-US" sz="1700" dirty="0">
+              <a:rPr lang="en-US" sz="1800" dirty="0">
                 <a:solidFill>
                   <a:srgbClr val="0E2F2B"/>
                 </a:solidFill>
@@ -12541,7 +12169,7 @@
               </a:rPr>
               <a:t>Respond</a:t>
             </a:r>
-            <a:endParaRPr lang="en-US" sz="1700" dirty="0"/>
+            <a:endParaRPr lang="en-US" sz="1800" dirty="0"/>
           </a:p>
         </p:txBody>
       </p:sp>
@@ -12553,8 +12181,8 @@
         </p:nvSpPr>
         <p:spPr>
           <a:xfrm>
-            <a:off x="9672066" y="3200400"/>
-            <a:ext cx="1559509" cy="1371600"/>
+            <a:off x="9672066" y="3474720"/>
+            <a:ext cx="1513789" cy="914400"/>
           </a:xfrm>
           <a:prstGeom prst="rect">
             <a:avLst/>
@@ -12570,7 +12198,7 @@
               <a:buNone/>
             </a:pPr>
             <a:r>
-              <a:rPr lang="en-US" sz="1200" dirty="0">
+              <a:rPr lang="en-US" sz="1300" dirty="0">
                 <a:solidFill>
                   <a:srgbClr val="2B403C"/>
                 </a:solidFill>
@@ -12578,9 +12206,9 @@
                 <a:ea typeface="Segoe UI" pitchFamily="34" charset="-122"/>
                 <a:cs typeface="Segoe UI" pitchFamily="34" charset="-120"/>
               </a:rPr>
-              <a:t>Answer, scores and sources, shown together.</a:t>
-            </a:r>
-            <a:endParaRPr lang="en-US" sz="1200" dirty="0"/>
+              <a:t>Answer, scores and sources together.</a:t>
+            </a:r>
+            <a:endParaRPr lang="en-US" sz="1300" dirty="0"/>
           </a:p>
         </p:txBody>
       </p:sp>
@@ -12592,7 +12220,7 @@
         </p:nvSpPr>
         <p:spPr>
           <a:xfrm>
-            <a:off x="9672066" y="4251960"/>
+            <a:off x="9672066" y="4480560"/>
             <a:ext cx="731520" cy="256032"/>
           </a:xfrm>
           <a:prstGeom prst="rect">
@@ -12631,7 +12259,7 @@
         </p:nvSpPr>
         <p:spPr>
           <a:xfrm>
-            <a:off x="731520" y="4892040"/>
+            <a:off x="731520" y="5257800"/>
             <a:ext cx="10728655" cy="0"/>
           </a:xfrm>
           <a:prstGeom prst="line">
@@ -12654,8 +12282,8 @@
         </p:nvSpPr>
         <p:spPr>
           <a:xfrm>
-            <a:off x="731520" y="5074920"/>
-            <a:ext cx="10728655" cy="640080"/>
+            <a:off x="731520" y="5440680"/>
+            <a:ext cx="10728655" cy="457200"/>
           </a:xfrm>
           <a:prstGeom prst="rect">
             <a:avLst/>
@@ -12671,7 +12299,7 @@
               <a:buNone/>
             </a:pPr>
             <a:r>
-              <a:rPr lang="en-US" sz="1500" dirty="0">
+              <a:rPr lang="en-US" sz="1800" dirty="0">
                 <a:solidFill>
                   <a:srgbClr val="2B403C"/>
                 </a:solidFill>
@@ -12679,13 +12307,13 @@
                 <a:ea typeface="Segoe UI" pitchFamily="34" charset="-122"/>
                 <a:cs typeface="Segoe UI" pitchFamily="34" charset="-120"/>
               </a:rPr>
-              <a:t>Refusing is a decision </a:t>
-            </a:r>
-            <a:pPr indent="0" marL="0">
-              <a:buNone/>
-            </a:pPr>
-            <a:r>
-              <a:rPr lang="en-US" sz="1500" b="1" dirty="0">
+              <a:t>Refusing is </a:t>
+            </a:r>
+            <a:pPr indent="0" marL="0">
+              <a:buNone/>
+            </a:pPr>
+            <a:r>
+              <a:rPr lang="en-US" sz="1800" b="1" dirty="0">
                 <a:solidFill>
                   <a:srgbClr val="2B403C"/>
                 </a:solidFill>
@@ -12696,13 +12324,13 @@
                 <a:ea typeface="Segoe UI" pitchFamily="34" charset="-122"/>
                 <a:cs typeface="Segoe UI" pitchFamily="34" charset="-120"/>
               </a:rPr>
-              <a:t>made by code</a:t>
-            </a:r>
-            <a:pPr indent="0" marL="0">
-              <a:buNone/>
-            </a:pPr>
-            <a:r>
-              <a:rPr lang="en-US" sz="1500" dirty="0">
+              <a:t>decided by code,</a:t>
+            </a:r>
+            <a:pPr indent="0" marL="0">
+              <a:buNone/>
+            </a:pPr>
+            <a:r>
+              <a:rPr lang="en-US" sz="1800" dirty="0">
                 <a:solidFill>
                   <a:srgbClr val="2B403C"/>
                 </a:solidFill>
@@ -12710,9 +12338,9 @@
                 <a:ea typeface="Segoe UI" pitchFamily="34" charset="-122"/>
                 <a:cs typeface="Segoe UI" pitchFamily="34" charset="-120"/>
               </a:rPr>
-              <a:t>, so it does not depend on a prompt being obeyed. The model can be more cautious than the gate, never less.</a:t>
-            </a:r>
-            <a:endParaRPr lang="en-US" sz="1500" dirty="0"/>
+              <a:t> not by a prompt.</a:t>
+            </a:r>
+            <a:endParaRPr lang="en-US" sz="1800" dirty="0"/>
           </a:p>
         </p:txBody>
       </p:sp>
@@ -12934,7 +12562,7 @@
         </p:nvSpPr>
         <p:spPr>
           <a:xfrm>
-            <a:off x="731520" y="2176272"/>
+            <a:off x="731520" y="2212848"/>
             <a:ext cx="3108960" cy="411480"/>
           </a:xfrm>
           <a:prstGeom prst="rect">
@@ -12973,8 +12601,8 @@
         </p:nvSpPr>
         <p:spPr>
           <a:xfrm>
-            <a:off x="731520" y="2606040"/>
-            <a:ext cx="3108960" cy="777240"/>
+            <a:off x="731520" y="2670048"/>
+            <a:ext cx="3108960" cy="365760"/>
           </a:xfrm>
           <a:prstGeom prst="rect">
             <a:avLst/>
@@ -12990,7 +12618,7 @@
               <a:buNone/>
             </a:pPr>
             <a:r>
-              <a:rPr lang="en-US" sz="1150" dirty="0">
+              <a:rPr lang="en-US" sz="1250" dirty="0">
                 <a:solidFill>
                   <a:srgbClr val="6B7C78"/>
                 </a:solidFill>
@@ -12998,9 +12626,9 @@
                 <a:ea typeface="Segoe UI" pitchFamily="34" charset="-122"/>
                 <a:cs typeface="Segoe UI" pitchFamily="34" charset="-120"/>
               </a:rPr>
-              <a:t>Card numbers (Luhn-checked), OTPs and CVVs are masked before anything is saved, cached or sent to a model.</a:t>
-            </a:r>
-            <a:endParaRPr lang="en-US" sz="1150" dirty="0"/>
+              <a:t>Masked before saving or sending</a:t>
+            </a:r>
+            <a:endParaRPr lang="en-US" sz="1250" dirty="0"/>
           </a:p>
         </p:txBody>
       </p:sp>
@@ -13280,7 +12908,7 @@
         </p:nvSpPr>
         <p:spPr>
           <a:xfrm>
-            <a:off x="731520" y="3611880"/>
+            <a:off x="731520" y="3648456"/>
             <a:ext cx="3108960" cy="411480"/>
           </a:xfrm>
           <a:prstGeom prst="rect">
@@ -13319,8 +12947,8 @@
         </p:nvSpPr>
         <p:spPr>
           <a:xfrm>
-            <a:off x="731520" y="4041648"/>
-            <a:ext cx="3108960" cy="777240"/>
+            <a:off x="731520" y="4105656"/>
+            <a:ext cx="3108960" cy="365760"/>
           </a:xfrm>
           <a:prstGeom prst="rect">
             <a:avLst/>
@@ -13336,7 +12964,7 @@
               <a:buNone/>
             </a:pPr>
             <a:r>
-              <a:rPr lang="en-US" sz="1150" dirty="0">
+              <a:rPr lang="en-US" sz="1250" dirty="0">
                 <a:solidFill>
                   <a:srgbClr val="6B7C78"/>
                 </a:solidFill>
@@ -13344,9 +12972,9 @@
                 <a:ea typeface="Segoe UI" pitchFamily="34" charset="-122"/>
                 <a:cs typeface="Segoe UI" pitchFamily="34" charset="-120"/>
               </a:rPr>
-              <a:t>A question that tries to rewrite the assistant's rules is stopped before retrieval, with no model call.</a:t>
-            </a:r>
-            <a:endParaRPr lang="en-US" sz="1150" dirty="0"/>
+              <a:t>Stopped before retrieval</a:t>
+            </a:r>
+            <a:endParaRPr lang="en-US" sz="1250" dirty="0"/>
           </a:p>
         </p:txBody>
       </p:sp>
@@ -13550,7 +13178,7 @@
                 <a:ea typeface="Consolas" pitchFamily="34" charset="-122"/>
                 <a:cs typeface="Consolas" pitchFamily="34" charset="-120"/>
               </a:rPr>
-              <a:t>Refuses. 0 entries retrieved. Nothing sent to a model.</a:t>
+              <a:t>Refuses. 0 entries retrieved. No model call.</a:t>
             </a:r>
             <a:endParaRPr lang="en-US" sz="1200" dirty="0"/>
           </a:p>
@@ -13626,7 +13254,7 @@
         </p:nvSpPr>
         <p:spPr>
           <a:xfrm>
-            <a:off x="731520" y="5047488"/>
+            <a:off x="731520" y="5084064"/>
             <a:ext cx="3108960" cy="411480"/>
           </a:xfrm>
           <a:prstGeom prst="rect">
@@ -13665,8 +13293,8 @@
         </p:nvSpPr>
         <p:spPr>
           <a:xfrm>
-            <a:off x="731520" y="5477256"/>
-            <a:ext cx="3108960" cy="777240"/>
+            <a:off x="731520" y="5541264"/>
+            <a:ext cx="3108960" cy="365760"/>
           </a:xfrm>
           <a:prstGeom prst="rect">
             <a:avLst/>
@@ -13682,7 +13310,7 @@
               <a:buNone/>
             </a:pPr>
             <a:r>
-              <a:rPr lang="en-US" sz="1150" dirty="0">
+              <a:rPr lang="en-US" sz="1250" dirty="0">
                 <a:solidFill>
                   <a:srgbClr val="6B7C78"/>
                 </a:solidFill>
@@ -13690,9 +13318,9 @@
                 <a:ea typeface="Segoe UI" pitchFamily="34" charset="-122"/>
                 <a:cs typeface="Segoe UI" pitchFamily="34" charset="-120"/>
               </a:rPr>
-              <a:t>Every statement must cite an entry that was retrieved, and every team must exist in the directory.</a:t>
-            </a:r>
-            <a:endParaRPr lang="en-US" sz="1150" dirty="0"/>
+              <a:t>Dropped in code, not by prompt</a:t>
+            </a:r>
+            <a:endParaRPr lang="en-US" sz="1250" dirty="0"/>
           </a:p>
         </p:txBody>
       </p:sp>
@@ -13896,7 +13524,7 @@
                 <a:ea typeface="Consolas" pitchFamily="34" charset="-122"/>
                 <a:cs typeface="Consolas" pitchFamily="34" charset="-120"/>
               </a:rPr>
-              <a:t>Drops the statement. If nothing grounded is left, shows the raw entries.</a:t>
+              <a:t>Drops it. If nothing is left, shows the raw entries.</a:t>
             </a:r>
             <a:endParaRPr lang="en-US" sz="1200" dirty="0"/>
           </a:p>
@@ -14064,7 +13692,7 @@
                 <a:ea typeface="Segoe UI" pitchFamily="34" charset="-122"/>
                 <a:cs typeface="Segoe UI" pitchFamily="34" charset="-120"/>
               </a:rPr>
-              <a:t>   HOW I TESTED</a:t>
+              <a:t>   THE MEASUREMENT</a:t>
             </a:r>
             <a:endParaRPr lang="en-US" sz="1100" dirty="0"/>
           </a:p>
@@ -14105,7 +13733,7 @@
                 <a:ea typeface="Segoe UI Semibold" pitchFamily="34" charset="-122"/>
                 <a:cs typeface="Segoe UI Semibold" pitchFamily="34" charset="-120"/>
               </a:rPr>
-              <a:t>I tested three times and </a:t>
+              <a:t>94% only proved </a:t>
             </a:r>
             <a:pPr algn="l" indent="0" marL="0">
               <a:buNone/>
@@ -14122,7 +13750,7 @@
                 <a:ea typeface="Segoe UI Semibold" pitchFamily="34" charset="-122"/>
                 <a:cs typeface="Segoe UI Semibold" pitchFamily="34" charset="-120"/>
               </a:rPr>
-              <a:t>trusted only the last.</a:t>
+              <a:t>I had tuned it well.</a:t>
             </a:r>
             <a:endParaRPr lang="en-US" sz="3000" dirty="0"/>
           </a:p>
@@ -14136,7 +13764,7 @@
         </p:nvSpPr>
         <p:spPr>
           <a:xfrm>
-            <a:off x="731520" y="2148840"/>
+            <a:off x="731520" y="2103120"/>
             <a:ext cx="3119018" cy="365760"/>
           </a:xfrm>
           <a:prstGeom prst="rect">
@@ -14189,7 +13817,7 @@
         </p:nvSpPr>
         <p:spPr>
           <a:xfrm>
-            <a:off x="731520" y="2560320"/>
+            <a:off x="731520" y="2514600"/>
             <a:ext cx="3119018" cy="365760"/>
           </a:xfrm>
           <a:prstGeom prst="rect">
@@ -14206,7 +13834,7 @@
               <a:buNone/>
             </a:pPr>
             <a:r>
-              <a:rPr lang="en-US" sz="1700" dirty="0">
+              <a:rPr lang="en-US" sz="1800" dirty="0">
                 <a:solidFill>
                   <a:srgbClr val="0E2F2B"/>
                 </a:solidFill>
@@ -14214,9 +13842,9 @@
                 <a:ea typeface="Segoe UI Semibold" pitchFamily="34" charset="-122"/>
                 <a:cs typeface="Segoe UI Semibold" pitchFamily="34" charset="-120"/>
               </a:rPr>
-              <a:t>Used while building</a:t>
-            </a:r>
-            <a:endParaRPr lang="en-US" sz="1700" dirty="0"/>
+              <a:t>Tuned on these</a:t>
+            </a:r>
+            <a:endParaRPr lang="en-US" sz="1800" dirty="0"/>
           </a:p>
         </p:txBody>
       </p:sp>
@@ -14228,7 +13856,7 @@
         </p:nvSpPr>
         <p:spPr>
           <a:xfrm>
-            <a:off x="731520" y="3017520"/>
+            <a:off x="731520" y="2971800"/>
             <a:ext cx="3119018" cy="1188720"/>
           </a:xfrm>
           <a:prstGeom prst="rect">
@@ -14267,63 +13895,49 @@
         </p:nvSpPr>
         <p:spPr>
           <a:xfrm>
-            <a:off x="731520" y="4206240"/>
-            <a:ext cx="3119018" cy="274320"/>
-          </a:xfrm>
-          <a:prstGeom prst="rect">
-            <a:avLst/>
-          </a:prstGeom>
-          <a:noFill/>
-          <a:ln/>
-        </p:spPr>
-        <p:txBody>
-          <a:bodyPr wrap="square" lIns="0" tIns="0" rIns="0" bIns="0" rtlCol="0" anchor="ctr"/>
-          <a:lstStyle/>
-          <a:p>
-            <a:pPr indent="0" marL="0">
-              <a:buNone/>
-            </a:pPr>
-            <a:r>
-              <a:rPr lang="en-US" sz="1200" dirty="0">
-                <a:solidFill>
-                  <a:srgbClr val="6B7C78"/>
+            <a:off x="731520" y="4343400"/>
+            <a:ext cx="3027578" cy="1371600"/>
+          </a:xfrm>
+          <a:prstGeom prst="rect">
+            <a:avLst/>
+          </a:prstGeom>
+          <a:noFill/>
+          <a:ln/>
+        </p:spPr>
+        <p:txBody>
+          <a:bodyPr wrap="square" lIns="0" tIns="0" rIns="0" bIns="0" rtlCol="0" anchor="t"/>
+          <a:lstStyle/>
+          <a:p>
+            <a:pPr marL="177800" indent="-177800">
+              <a:spcAft>
+                <a:spcPts val="900"/>
+              </a:spcAft>
+              <a:buSzPct val="100000"/>
+              <a:buChar char="•"/>
+            </a:pPr>
+            <a:r>
+              <a:rPr lang="en-US" sz="1400" dirty="0">
+                <a:solidFill>
+                  <a:srgbClr val="2B403C"/>
                 </a:solidFill>
                 <a:latin typeface="Segoe UI" pitchFamily="34" charset="0"/>
                 <a:ea typeface="Segoe UI" pitchFamily="34" charset="-122"/>
                 <a:cs typeface="Segoe UI" pitchFamily="34" charset="-120"/>
               </a:rPr>
-              <a:t>decisions correct</a:t>
-            </a:r>
-            <a:endParaRPr lang="en-US" sz="1200" dirty="0"/>
-          </a:p>
-        </p:txBody>
-      </p:sp>
-      <p:sp>
-        <p:nvSpPr>
-          <p:cNvPr id="8" name="Text 6"/>
-          <p:cNvSpPr txBox="1"/>
-          <p:nvPr/>
-        </p:nvSpPr>
-        <p:spPr>
-          <a:xfrm>
-            <a:off x="731520" y="4663440"/>
-            <a:ext cx="3027578" cy="868680"/>
-          </a:xfrm>
-          <a:prstGeom prst="rect">
-            <a:avLst/>
-          </a:prstGeom>
-          <a:noFill/>
-          <a:ln/>
-        </p:spPr>
-        <p:txBody>
-          <a:bodyPr wrap="square" lIns="0" tIns="0" rIns="0" bIns="0" rtlCol="0" anchor="t"/>
-          <a:lstStyle/>
-          <a:p>
-            <a:pPr indent="0" marL="0">
-              <a:buNone/>
-            </a:pPr>
-            <a:r>
-              <a:rPr lang="en-US" sz="1250" dirty="0">
+              <a:t>Thresholds set from these scores</a:t>
+            </a:r>
+            <a:endParaRPr lang="en-US" sz="1400" dirty="0"/>
+          </a:p>
+          <a:p>
+            <a:pPr marL="177800" indent="-177800">
+              <a:spcAft>
+                <a:spcPts val="900"/>
+              </a:spcAft>
+              <a:buSzPct val="100000"/>
+              <a:buChar char="•"/>
+            </a:pPr>
+            <a:r>
+              <a:rPr lang="en-US" sz="1400" dirty="0">
                 <a:solidFill>
                   <a:srgbClr val="2B403C"/>
                 </a:solidFill>
@@ -14331,22 +13945,22 @@
                 <a:ea typeface="Segoe UI" pitchFamily="34" charset="-122"/>
                 <a:cs typeface="Segoe UI" pitchFamily="34" charset="-120"/>
               </a:rPr>
-              <a:t>I chose the thresholds by reading scores off these. Flattering, and not evidence.</a:t>
-            </a:r>
-            <a:endParaRPr lang="en-US" sz="1250" dirty="0"/>
-          </a:p>
-        </p:txBody>
-      </p:sp>
-      <p:sp>
-        <p:nvSpPr>
-          <p:cNvPr id="9" name="Shape 7"/>
+              <a:t>Measures fit, not skill</a:t>
+            </a:r>
+            <a:endParaRPr lang="en-US" sz="1400" dirty="0"/>
+          </a:p>
+        </p:txBody>
+      </p:sp>
+      <p:sp>
+        <p:nvSpPr>
+          <p:cNvPr id="8" name="Shape 6"/>
           <p:cNvSpPr/>
           <p:nvPr/>
         </p:nvSpPr>
         <p:spPr>
           <a:xfrm>
-            <a:off x="4307738" y="2148840"/>
-            <a:ext cx="0" cy="3337560"/>
+            <a:off x="4307738" y="2103120"/>
+            <a:ext cx="0" cy="3566160"/>
           </a:xfrm>
           <a:prstGeom prst="line">
             <a:avLst/>
@@ -14362,13 +13976,13 @@
       </p:sp>
       <p:sp>
         <p:nvSpPr>
-          <p:cNvPr id="10" name="Text 8"/>
-          <p:cNvSpPr txBox="1"/>
-          <p:nvPr/>
-        </p:nvSpPr>
-        <p:spPr>
-          <a:xfrm>
-            <a:off x="4673498" y="2148840"/>
+          <p:cNvPr id="9" name="Text 7"/>
+          <p:cNvSpPr txBox="1"/>
+          <p:nvPr/>
+        </p:nvSpPr>
+        <p:spPr>
+          <a:xfrm>
+            <a:off x="4673498" y="2103120"/>
             <a:ext cx="3119018" cy="365760"/>
           </a:xfrm>
           <a:prstGeom prst="rect">
@@ -14415,13 +14029,13 @@
       </p:sp>
       <p:sp>
         <p:nvSpPr>
-          <p:cNvPr id="11" name="Text 9"/>
-          <p:cNvSpPr txBox="1"/>
-          <p:nvPr/>
-        </p:nvSpPr>
-        <p:spPr>
-          <a:xfrm>
-            <a:off x="4673498" y="2560320"/>
+          <p:cNvPr id="10" name="Text 8"/>
+          <p:cNvSpPr txBox="1"/>
+          <p:nvPr/>
+        </p:nvSpPr>
+        <p:spPr>
+          <a:xfrm>
+            <a:off x="4673498" y="2514600"/>
             <a:ext cx="3119018" cy="365760"/>
           </a:xfrm>
           <a:prstGeom prst="rect">
@@ -14438,7 +14052,7 @@
               <a:buNone/>
             </a:pPr>
             <a:r>
-              <a:rPr lang="en-US" sz="1700" dirty="0">
+              <a:rPr lang="en-US" sz="1800" dirty="0">
                 <a:solidFill>
                   <a:srgbClr val="0E2F2B"/>
                 </a:solidFill>
@@ -14446,21 +14060,21 @@
                 <a:ea typeface="Segoe UI Semibold" pitchFamily="34" charset="-122"/>
                 <a:cs typeface="Segoe UI Semibold" pitchFamily="34" charset="-120"/>
               </a:rPr>
-              <a:t>Written afterwards</a:t>
-            </a:r>
-            <a:endParaRPr lang="en-US" sz="1700" dirty="0"/>
-          </a:p>
-        </p:txBody>
-      </p:sp>
-      <p:sp>
-        <p:nvSpPr>
-          <p:cNvPr id="12" name="Text 10"/>
-          <p:cNvSpPr txBox="1"/>
-          <p:nvPr/>
-        </p:nvSpPr>
-        <p:spPr>
-          <a:xfrm>
-            <a:off x="4673498" y="3017520"/>
+              <a:t>Fresh, never seen</a:t>
+            </a:r>
+            <a:endParaRPr lang="en-US" sz="1800" dirty="0"/>
+          </a:p>
+        </p:txBody>
+      </p:sp>
+      <p:sp>
+        <p:nvSpPr>
+          <p:cNvPr id="11" name="Text 9"/>
+          <p:cNvSpPr txBox="1"/>
+          <p:nvPr/>
+        </p:nvSpPr>
+        <p:spPr>
+          <a:xfrm>
+            <a:off x="4673498" y="2971800"/>
             <a:ext cx="3119018" cy="1188720"/>
           </a:xfrm>
           <a:prstGeom prst="rect">
@@ -14493,69 +14107,55 @@
       </p:sp>
       <p:sp>
         <p:nvSpPr>
-          <p:cNvPr id="13" name="Text 11"/>
-          <p:cNvSpPr txBox="1"/>
-          <p:nvPr/>
-        </p:nvSpPr>
-        <p:spPr>
-          <a:xfrm>
-            <a:off x="4673498" y="4206240"/>
-            <a:ext cx="3119018" cy="274320"/>
-          </a:xfrm>
-          <a:prstGeom prst="rect">
-            <a:avLst/>
-          </a:prstGeom>
-          <a:noFill/>
-          <a:ln/>
-        </p:spPr>
-        <p:txBody>
-          <a:bodyPr wrap="square" lIns="0" tIns="0" rIns="0" bIns="0" rtlCol="0" anchor="ctr"/>
-          <a:lstStyle/>
-          <a:p>
-            <a:pPr indent="0" marL="0">
-              <a:buNone/>
-            </a:pPr>
-            <a:r>
-              <a:rPr lang="en-US" sz="1200" dirty="0">
-                <a:solidFill>
-                  <a:srgbClr val="6B7C78"/>
+          <p:cNvPr id="12" name="Text 10"/>
+          <p:cNvSpPr txBox="1"/>
+          <p:nvPr/>
+        </p:nvSpPr>
+        <p:spPr>
+          <a:xfrm>
+            <a:off x="4673498" y="4343400"/>
+            <a:ext cx="3027578" cy="1371600"/>
+          </a:xfrm>
+          <a:prstGeom prst="rect">
+            <a:avLst/>
+          </a:prstGeom>
+          <a:noFill/>
+          <a:ln/>
+        </p:spPr>
+        <p:txBody>
+          <a:bodyPr wrap="square" lIns="0" tIns="0" rIns="0" bIns="0" rtlCol="0" anchor="t"/>
+          <a:lstStyle/>
+          <a:p>
+            <a:pPr marL="177800" indent="-177800">
+              <a:spcAft>
+                <a:spcPts val="900"/>
+              </a:spcAft>
+              <a:buSzPct val="100000"/>
+              <a:buChar char="•"/>
+            </a:pPr>
+            <a:r>
+              <a:rPr lang="en-US" sz="1400" dirty="0">
+                <a:solidFill>
+                  <a:srgbClr val="2B403C"/>
                 </a:solidFill>
                 <a:latin typeface="Segoe UI" pitchFamily="34" charset="0"/>
                 <a:ea typeface="Segoe UI" pitchFamily="34" charset="-122"/>
                 <a:cs typeface="Segoe UI" pitchFamily="34" charset="-120"/>
               </a:rPr>
-              <a:t>decisions correct</a:t>
-            </a:r>
-            <a:endParaRPr lang="en-US" sz="1200" dirty="0"/>
-          </a:p>
-        </p:txBody>
-      </p:sp>
-      <p:sp>
-        <p:nvSpPr>
-          <p:cNvPr id="14" name="Text 12"/>
-          <p:cNvSpPr txBox="1"/>
-          <p:nvPr/>
-        </p:nvSpPr>
-        <p:spPr>
-          <a:xfrm>
-            <a:off x="4673498" y="4663440"/>
-            <a:ext cx="3027578" cy="868680"/>
-          </a:xfrm>
-          <a:prstGeom prst="rect">
-            <a:avLst/>
-          </a:prstGeom>
-          <a:noFill/>
-          <a:ln/>
-        </p:spPr>
-        <p:txBody>
-          <a:bodyPr wrap="square" lIns="0" tIns="0" rIns="0" bIns="0" rtlCol="0" anchor="t"/>
-          <a:lstStyle/>
-          <a:p>
-            <a:pPr indent="0" marL="0">
-              <a:buNone/>
-            </a:pPr>
-            <a:r>
-              <a:rPr lang="en-US" sz="1250" dirty="0">
+              <a:t>The real baseline</a:t>
+            </a:r>
+            <a:endParaRPr lang="en-US" sz="1400" dirty="0"/>
+          </a:p>
+          <a:p>
+            <a:pPr marL="177800" indent="-177800">
+              <a:spcAft>
+                <a:spcPts val="900"/>
+              </a:spcAft>
+              <a:buSzPct val="100000"/>
+              <a:buChar char="•"/>
+            </a:pPr>
+            <a:r>
+              <a:rPr lang="en-US" sz="1400" dirty="0">
                 <a:solidFill>
                   <a:srgbClr val="2B403C"/>
                 </a:solidFill>
@@ -14563,22 +14163,43 @@
                 <a:ea typeface="Segoe UI" pitchFamily="34" charset="-122"/>
                 <a:cs typeface="Segoe UI" pitchFamily="34" charset="-120"/>
               </a:rPr>
-              <a:t>The first honest number. Its six misses became my to-do list (next slide), so it is development data too.</a:t>
-            </a:r>
-            <a:endParaRPr lang="en-US" sz="1250" dirty="0"/>
-          </a:p>
-        </p:txBody>
-      </p:sp>
-      <p:sp>
-        <p:nvSpPr>
-          <p:cNvPr id="15" name="Shape 13"/>
+              <a:t>Retrieval right: 13 of 14</a:t>
+            </a:r>
+            <a:endParaRPr lang="en-US" sz="1400" dirty="0"/>
+          </a:p>
+          <a:p>
+            <a:pPr marL="177800" indent="-177800">
+              <a:spcAft>
+                <a:spcPts val="900"/>
+              </a:spcAft>
+              <a:buSzPct val="100000"/>
+              <a:buChar char="•"/>
+            </a:pPr>
+            <a:r>
+              <a:rPr lang="en-US" sz="1400" dirty="0">
+                <a:solidFill>
+                  <a:srgbClr val="2B403C"/>
+                </a:solidFill>
+                <a:latin typeface="Segoe UI" pitchFamily="34" charset="0"/>
+                <a:ea typeface="Segoe UI" pitchFamily="34" charset="-122"/>
+                <a:cs typeface="Segoe UI" pitchFamily="34" charset="-120"/>
+              </a:rPr>
+              <a:t>So the gap was in the decision layer</a:t>
+            </a:r>
+            <a:endParaRPr lang="en-US" sz="1400" dirty="0"/>
+          </a:p>
+        </p:txBody>
+      </p:sp>
+      <p:sp>
+        <p:nvSpPr>
+          <p:cNvPr id="13" name="Shape 11"/>
           <p:cNvSpPr/>
           <p:nvPr/>
         </p:nvSpPr>
         <p:spPr>
           <a:xfrm>
-            <a:off x="7883957" y="2148840"/>
-            <a:ext cx="0" cy="3337560"/>
+            <a:off x="7883957" y="2103120"/>
+            <a:ext cx="0" cy="3566160"/>
           </a:xfrm>
           <a:prstGeom prst="line">
             <a:avLst/>
@@ -14594,13 +14215,13 @@
       </p:sp>
       <p:sp>
         <p:nvSpPr>
-          <p:cNvPr id="16" name="Text 14"/>
-          <p:cNvSpPr txBox="1"/>
-          <p:nvPr/>
-        </p:nvSpPr>
-        <p:spPr>
-          <a:xfrm>
-            <a:off x="8249717" y="2148840"/>
+          <p:cNvPr id="14" name="Text 12"/>
+          <p:cNvSpPr txBox="1"/>
+          <p:nvPr/>
+        </p:nvSpPr>
+        <p:spPr>
+          <a:xfrm>
+            <a:off x="8249717" y="2103120"/>
             <a:ext cx="3119018" cy="365760"/>
           </a:xfrm>
           <a:prstGeom prst="rect">
@@ -14647,13 +14268,13 @@
       </p:sp>
       <p:sp>
         <p:nvSpPr>
-          <p:cNvPr id="17" name="Text 15"/>
-          <p:cNvSpPr txBox="1"/>
-          <p:nvPr/>
-        </p:nvSpPr>
-        <p:spPr>
-          <a:xfrm>
-            <a:off x="8249717" y="2560320"/>
+          <p:cNvPr id="15" name="Text 13"/>
+          <p:cNvSpPr txBox="1"/>
+          <p:nvPr/>
+        </p:nvSpPr>
+        <p:spPr>
+          <a:xfrm>
+            <a:off x="8249717" y="2514600"/>
             <a:ext cx="3119018" cy="365760"/>
           </a:xfrm>
           <a:prstGeom prst="rect">
@@ -14670,7 +14291,7 @@
               <a:buNone/>
             </a:pPr>
             <a:r>
-              <a:rPr lang="en-US" sz="1700" dirty="0">
+              <a:rPr lang="en-US" sz="1800" dirty="0">
                 <a:solidFill>
                   <a:srgbClr val="0E2F2B"/>
                 </a:solidFill>
@@ -14680,19 +14301,19 @@
               </a:rPr>
               <a:t>Sealed, run once</a:t>
             </a:r>
-            <a:endParaRPr lang="en-US" sz="1700" dirty="0"/>
-          </a:p>
-        </p:txBody>
-      </p:sp>
-      <p:sp>
-        <p:nvSpPr>
-          <p:cNvPr id="18" name="Text 16"/>
-          <p:cNvSpPr txBox="1"/>
-          <p:nvPr/>
-        </p:nvSpPr>
-        <p:spPr>
-          <a:xfrm>
-            <a:off x="8249717" y="3017520"/>
+            <a:endParaRPr lang="en-US" sz="1800" dirty="0"/>
+          </a:p>
+        </p:txBody>
+      </p:sp>
+      <p:sp>
+        <p:nvSpPr>
+          <p:cNvPr id="16" name="Text 14"/>
+          <p:cNvSpPr txBox="1"/>
+          <p:nvPr/>
+        </p:nvSpPr>
+        <p:spPr>
+          <a:xfrm>
+            <a:off x="8249717" y="2971800"/>
             <a:ext cx="3119018" cy="1188720"/>
           </a:xfrm>
           <a:prstGeom prst="rect">
@@ -14728,69 +14349,55 @@
       </p:sp>
       <p:sp>
         <p:nvSpPr>
-          <p:cNvPr id="19" name="Text 17"/>
-          <p:cNvSpPr txBox="1"/>
-          <p:nvPr/>
-        </p:nvSpPr>
-        <p:spPr>
-          <a:xfrm>
-            <a:off x="8249717" y="4206240"/>
-            <a:ext cx="3119018" cy="274320"/>
-          </a:xfrm>
-          <a:prstGeom prst="rect">
-            <a:avLst/>
-          </a:prstGeom>
-          <a:noFill/>
-          <a:ln/>
-        </p:spPr>
-        <p:txBody>
-          <a:bodyPr wrap="square" lIns="0" tIns="0" rIns="0" bIns="0" rtlCol="0" anchor="ctr"/>
-          <a:lstStyle/>
-          <a:p>
-            <a:pPr indent="0" marL="0">
-              <a:buNone/>
-            </a:pPr>
-            <a:r>
-              <a:rPr lang="en-US" sz="1200" dirty="0">
-                <a:solidFill>
-                  <a:srgbClr val="6B7C78"/>
+          <p:cNvPr id="17" name="Text 15"/>
+          <p:cNvSpPr txBox="1"/>
+          <p:nvPr/>
+        </p:nvSpPr>
+        <p:spPr>
+          <a:xfrm>
+            <a:off x="8249717" y="4343400"/>
+            <a:ext cx="3027578" cy="1371600"/>
+          </a:xfrm>
+          <a:prstGeom prst="rect">
+            <a:avLst/>
+          </a:prstGeom>
+          <a:noFill/>
+          <a:ln/>
+        </p:spPr>
+        <p:txBody>
+          <a:bodyPr wrap="square" lIns="0" tIns="0" rIns="0" bIns="0" rtlCol="0" anchor="t"/>
+          <a:lstStyle/>
+          <a:p>
+            <a:pPr marL="177800" indent="-177800">
+              <a:spcAft>
+                <a:spcPts val="900"/>
+              </a:spcAft>
+              <a:buSzPct val="100000"/>
+              <a:buChar char="•"/>
+            </a:pPr>
+            <a:r>
+              <a:rPr lang="en-US" sz="1400" dirty="0">
+                <a:solidFill>
+                  <a:srgbClr val="2B403C"/>
                 </a:solidFill>
                 <a:latin typeface="Segoe UI" pitchFamily="34" charset="0"/>
                 <a:ea typeface="Segoe UI" pitchFamily="34" charset="-122"/>
                 <a:cs typeface="Segoe UI" pitchFamily="34" charset="-120"/>
               </a:rPr>
-              <a:t>decisions correct</a:t>
-            </a:r>
-            <a:endParaRPr lang="en-US" sz="1200" dirty="0"/>
-          </a:p>
-        </p:txBody>
-      </p:sp>
-      <p:sp>
-        <p:nvSpPr>
-          <p:cNvPr id="20" name="Text 18"/>
-          <p:cNvSpPr txBox="1"/>
-          <p:nvPr/>
-        </p:nvSpPr>
-        <p:spPr>
-          <a:xfrm>
-            <a:off x="8249717" y="4663440"/>
-            <a:ext cx="3027578" cy="868680"/>
-          </a:xfrm>
-          <a:prstGeom prst="rect">
-            <a:avLst/>
-          </a:prstGeom>
-          <a:noFill/>
-          <a:ln/>
-        </p:spPr>
-        <p:txBody>
-          <a:bodyPr wrap="square" lIns="0" tIns="0" rIns="0" bIns="0" rtlCol="0" anchor="t"/>
-          <a:lstStyle/>
-          <a:p>
-            <a:pPr indent="0" marL="0">
-              <a:buNone/>
-            </a:pPr>
-            <a:r>
-              <a:rPr lang="en-US" sz="1250" dirty="0">
+              <a:t>Committed before the fixes</a:t>
+            </a:r>
+            <a:endParaRPr lang="en-US" sz="1400" dirty="0"/>
+          </a:p>
+          <a:p>
+            <a:pPr marL="177800" indent="-177800">
+              <a:spcAft>
+                <a:spcPts val="900"/>
+              </a:spcAft>
+              <a:buSzPct val="100000"/>
+              <a:buChar char="•"/>
+            </a:pPr>
+            <a:r>
+              <a:rPr lang="en-US" sz="1400" dirty="0">
                 <a:solidFill>
                   <a:srgbClr val="2B403C"/>
                 </a:solidFill>
@@ -14798,22 +14405,22 @@
                 <a:ea typeface="Segoe UI" pitchFamily="34" charset="-122"/>
                 <a:cs typeface="Segoe UI" pitchFamily="34" charset="-120"/>
               </a:rPr>
-              <a:t>Written and committed before the fixes. The code was frozen, and the set was run one time.</a:t>
-            </a:r>
-            <a:endParaRPr lang="en-US" sz="1250" dirty="0"/>
-          </a:p>
-        </p:txBody>
-      </p:sp>
-      <p:sp>
-        <p:nvSpPr>
-          <p:cNvPr id="21" name="Text 19"/>
-          <p:cNvSpPr txBox="1"/>
-          <p:nvPr/>
-        </p:nvSpPr>
-        <p:spPr>
-          <a:xfrm>
-            <a:off x="731520" y="5852160"/>
-            <a:ext cx="10728655" cy="365760"/>
+              <a:t>Code frozen, then run</a:t>
+            </a:r>
+            <a:endParaRPr lang="en-US" sz="1400" dirty="0"/>
+          </a:p>
+        </p:txBody>
+      </p:sp>
+      <p:sp>
+        <p:nvSpPr>
+          <p:cNvPr id="18" name="Text 16"/>
+          <p:cNvSpPr txBox="1"/>
+          <p:nvPr/>
+        </p:nvSpPr>
+        <p:spPr>
+          <a:xfrm>
+            <a:off x="731520" y="5943600"/>
+            <a:ext cx="10728655" cy="274320"/>
           </a:xfrm>
           <a:prstGeom prst="rect">
             <a:avLst/>
@@ -14837,7 +14444,7 @@
                 <a:ea typeface="Segoe UI" pitchFamily="34" charset="-122"/>
                 <a:cs typeface="Segoe UI" pitchFamily="34" charset="-120"/>
               </a:rPr>
-              <a:t>Decisions: answer, ask, or refuse. The three sets are different sizes and contents, so this is a trend, not a like-for-like comparison.</a:t>
+              <a:t>Different sets, so a trend rather than a like-for-like comparison.</a:t>
             </a:r>
             <a:endParaRPr lang="en-US" sz="1100" dirty="0"/>
           </a:p>
@@ -14966,7 +14573,7 @@
                 <a:ea typeface="Segoe UI" pitchFamily="34" charset="-122"/>
                 <a:cs typeface="Segoe UI" pitchFamily="34" charset="-120"/>
               </a:rPr>
-              <a:t>   WHAT THE 75% TOLD ME</a:t>
+              <a:t>   75% TO 88.6%</a:t>
             </a:r>
             <a:endParaRPr lang="en-US" sz="1100" dirty="0"/>
           </a:p>
@@ -15007,7 +14614,7 @@
                 <a:ea typeface="Segoe UI Semibold" pitchFamily="34" charset="-122"/>
                 <a:cs typeface="Segoe UI Semibold" pitchFamily="34" charset="-120"/>
               </a:rPr>
-              <a:t>The 75% pointed at four causes. </a:t>
+              <a:t>I isolated the weak layer, fixed it, and </a:t>
             </a:r>
             <a:pPr algn="l" indent="0" marL="0">
               <a:buNone/>
@@ -15024,7 +14631,7 @@
                 <a:ea typeface="Segoe UI Semibold" pitchFamily="34" charset="-122"/>
                 <a:cs typeface="Segoe UI Semibold" pitchFamily="34" charset="-120"/>
               </a:rPr>
-              <a:t>I fixed each one.</a:t>
+              <a:t>proved it.</a:t>
             </a:r>
             <a:endParaRPr lang="en-US" sz="3000" dirty="0"/>
           </a:p>
@@ -15032,170 +14639,14 @@
       </p:sp>
       <p:sp>
         <p:nvSpPr>
-          <p:cNvPr id="4" name="Text 2"/>
-          <p:cNvSpPr txBox="1"/>
-          <p:nvPr/>
-        </p:nvSpPr>
-        <p:spPr>
-          <a:xfrm>
-            <a:off x="731520" y="1737360"/>
-            <a:ext cx="2606040" cy="256032"/>
-          </a:xfrm>
-          <a:prstGeom prst="rect">
-            <a:avLst/>
-          </a:prstGeom>
-          <a:noFill/>
-          <a:ln/>
-        </p:spPr>
-        <p:txBody>
-          <a:bodyPr wrap="square" lIns="0" tIns="0" rIns="0" bIns="0" rtlCol="0" anchor="ctr"/>
-          <a:lstStyle/>
-          <a:p>
-            <a:pPr indent="0" marL="0">
-              <a:buNone/>
-            </a:pPr>
-            <a:r>
-              <a:rPr lang="en-US" sz="1000" spc="200" kern="0" dirty="0">
-                <a:solidFill>
-                  <a:srgbClr val="6B7C78"/>
-                </a:solidFill>
-                <a:latin typeface="Segoe UI" pitchFamily="34" charset="0"/>
-                <a:ea typeface="Segoe UI" pitchFamily="34" charset="-122"/>
-                <a:cs typeface="Segoe UI" pitchFamily="34" charset="-120"/>
-              </a:rPr>
-              <a:t>WHAT I SAW</a:t>
-            </a:r>
-            <a:endParaRPr lang="en-US" sz="1000" dirty="0"/>
-          </a:p>
-        </p:txBody>
-      </p:sp>
-      <p:sp>
-        <p:nvSpPr>
-          <p:cNvPr id="5" name="Text 3"/>
-          <p:cNvSpPr txBox="1"/>
-          <p:nvPr/>
-        </p:nvSpPr>
-        <p:spPr>
-          <a:xfrm>
-            <a:off x="3474720" y="1737360"/>
-            <a:ext cx="2468880" cy="256032"/>
-          </a:xfrm>
-          <a:prstGeom prst="rect">
-            <a:avLst/>
-          </a:prstGeom>
-          <a:noFill/>
-          <a:ln/>
-        </p:spPr>
-        <p:txBody>
-          <a:bodyPr wrap="square" lIns="0" tIns="0" rIns="0" bIns="0" rtlCol="0" anchor="ctr"/>
-          <a:lstStyle/>
-          <a:p>
-            <a:pPr indent="0" marL="0">
-              <a:buNone/>
-            </a:pPr>
-            <a:r>
-              <a:rPr lang="en-US" sz="1000" spc="200" kern="0" dirty="0">
-                <a:solidFill>
-                  <a:srgbClr val="6B7C78"/>
-                </a:solidFill>
-                <a:latin typeface="Segoe UI" pitchFamily="34" charset="0"/>
-                <a:ea typeface="Segoe UI" pitchFamily="34" charset="-122"/>
-                <a:cs typeface="Segoe UI" pitchFamily="34" charset="-120"/>
-              </a:rPr>
-              <a:t>ROOT CAUSE</a:t>
-            </a:r>
-            <a:endParaRPr lang="en-US" sz="1000" dirty="0"/>
-          </a:p>
-        </p:txBody>
-      </p:sp>
-      <p:sp>
-        <p:nvSpPr>
-          <p:cNvPr id="6" name="Text 4"/>
-          <p:cNvSpPr txBox="1"/>
-          <p:nvPr/>
-        </p:nvSpPr>
-        <p:spPr>
-          <a:xfrm>
-            <a:off x="6080760" y="1737360"/>
-            <a:ext cx="2788920" cy="256032"/>
-          </a:xfrm>
-          <a:prstGeom prst="rect">
-            <a:avLst/>
-          </a:prstGeom>
-          <a:noFill/>
-          <a:ln/>
-        </p:spPr>
-        <p:txBody>
-          <a:bodyPr wrap="square" lIns="0" tIns="0" rIns="0" bIns="0" rtlCol="0" anchor="ctr"/>
-          <a:lstStyle/>
-          <a:p>
-            <a:pPr indent="0" marL="0">
-              <a:buNone/>
-            </a:pPr>
-            <a:r>
-              <a:rPr lang="en-US" sz="1000" spc="200" kern="0" dirty="0">
-                <a:solidFill>
-                  <a:srgbClr val="6B7C78"/>
-                </a:solidFill>
-                <a:latin typeface="Segoe UI" pitchFamily="34" charset="0"/>
-                <a:ea typeface="Segoe UI" pitchFamily="34" charset="-122"/>
-                <a:cs typeface="Segoe UI" pitchFamily="34" charset="-120"/>
-              </a:rPr>
-              <a:t>THE FIX</a:t>
-            </a:r>
-            <a:endParaRPr lang="en-US" sz="1000" dirty="0"/>
-          </a:p>
-        </p:txBody>
-      </p:sp>
-      <p:sp>
-        <p:nvSpPr>
-          <p:cNvPr id="7" name="Text 5"/>
-          <p:cNvSpPr txBox="1"/>
-          <p:nvPr/>
-        </p:nvSpPr>
-        <p:spPr>
-          <a:xfrm>
-            <a:off x="9006840" y="1737360"/>
-            <a:ext cx="2450592" cy="256032"/>
-          </a:xfrm>
-          <a:prstGeom prst="rect">
-            <a:avLst/>
-          </a:prstGeom>
-          <a:noFill/>
-          <a:ln/>
-        </p:spPr>
-        <p:txBody>
-          <a:bodyPr wrap="square" lIns="0" tIns="0" rIns="0" bIns="0" rtlCol="0" anchor="ctr"/>
-          <a:lstStyle/>
-          <a:p>
-            <a:pPr indent="0" marL="0">
-              <a:buNone/>
-            </a:pPr>
-            <a:r>
-              <a:rPr lang="en-US" sz="1000" spc="200" kern="0" dirty="0">
-                <a:solidFill>
-                  <a:srgbClr val="6B7C78"/>
-                </a:solidFill>
-                <a:latin typeface="Segoe UI" pitchFamily="34" charset="0"/>
-                <a:ea typeface="Segoe UI" pitchFamily="34" charset="-122"/>
-                <a:cs typeface="Segoe UI" pitchFamily="34" charset="-120"/>
-              </a:rPr>
-              <a:t>EVIDENCE</a:t>
-            </a:r>
-            <a:endParaRPr lang="en-US" sz="1000" dirty="0"/>
-          </a:p>
-        </p:txBody>
-      </p:sp>
-      <p:sp>
-        <p:nvSpPr>
-          <p:cNvPr id="8" name="Shape 6"/>
+          <p:cNvPr id="4" name="Shape 2"/>
           <p:cNvSpPr/>
           <p:nvPr/>
         </p:nvSpPr>
         <p:spPr>
           <a:xfrm>
-            <a:off x="731520" y="2011680"/>
-            <a:ext cx="10728655" cy="0"/>
+            <a:off x="731520" y="2103120"/>
+            <a:ext cx="3271418" cy="0"/>
           </a:xfrm>
           <a:prstGeom prst="line">
             <a:avLst/>
@@ -15211,14 +14662,95 @@
       </p:sp>
       <p:sp>
         <p:nvSpPr>
-          <p:cNvPr id="9" name="Text 7"/>
-          <p:cNvSpPr txBox="1"/>
-          <p:nvPr/>
-        </p:nvSpPr>
-        <p:spPr>
-          <a:xfrm>
-            <a:off x="731520" y="2103120"/>
-            <a:ext cx="2606040" cy="758952"/>
+          <p:cNvPr id="5" name="Text 3"/>
+          <p:cNvSpPr txBox="1"/>
+          <p:nvPr/>
+        </p:nvSpPr>
+        <p:spPr>
+          <a:xfrm>
+            <a:off x="731520" y="2240280"/>
+            <a:ext cx="548640" cy="731520"/>
+          </a:xfrm>
+          <a:prstGeom prst="rect">
+            <a:avLst/>
+          </a:prstGeom>
+          <a:noFill/>
+          <a:ln/>
+        </p:spPr>
+        <p:txBody>
+          <a:bodyPr wrap="square" lIns="0" tIns="0" rIns="0" bIns="0" rtlCol="0" anchor="ctr"/>
+          <a:lstStyle/>
+          <a:p>
+            <a:pPr indent="0" marL="0">
+              <a:buNone/>
+            </a:pPr>
+            <a:r>
+              <a:rPr lang="en-US" sz="4000" dirty="0">
+                <a:solidFill>
+                  <a:srgbClr val="0E2F2B"/>
+                </a:solidFill>
+                <a:highlight>
+                  <a:srgbClr val="D6F25C"/>
+                </a:highlight>
+                <a:latin typeface="Segoe UI Light" pitchFamily="34" charset="0"/>
+                <a:ea typeface="Segoe UI Light" pitchFamily="34" charset="-122"/>
+                <a:cs typeface="Segoe UI Light" pitchFamily="34" charset="-120"/>
+              </a:rPr>
+              <a:t>1</a:t>
+            </a:r>
+            <a:endParaRPr lang="en-US" sz="4000" dirty="0"/>
+          </a:p>
+        </p:txBody>
+      </p:sp>
+      <p:sp>
+        <p:nvSpPr>
+          <p:cNvPr id="6" name="Text 4"/>
+          <p:cNvSpPr txBox="1"/>
+          <p:nvPr/>
+        </p:nvSpPr>
+        <p:spPr>
+          <a:xfrm>
+            <a:off x="1463040" y="2240280"/>
+            <a:ext cx="2539898" cy="731520"/>
+          </a:xfrm>
+          <a:prstGeom prst="rect">
+            <a:avLst/>
+          </a:prstGeom>
+          <a:noFill/>
+          <a:ln/>
+        </p:spPr>
+        <p:txBody>
+          <a:bodyPr wrap="square" lIns="0" tIns="0" rIns="0" bIns="0" rtlCol="0" anchor="ctr"/>
+          <a:lstStyle/>
+          <a:p>
+            <a:pPr indent="0" marL="0">
+              <a:buNone/>
+            </a:pPr>
+            <a:r>
+              <a:rPr lang="en-US" sz="2400" dirty="0">
+                <a:solidFill>
+                  <a:srgbClr val="0E2F2B"/>
+                </a:solidFill>
+                <a:latin typeface="Segoe UI Semibold" pitchFamily="34" charset="0"/>
+                <a:ea typeface="Segoe UI Semibold" pitchFamily="34" charset="-122"/>
+                <a:cs typeface="Segoe UI Semibold" pitchFamily="34" charset="-120"/>
+              </a:rPr>
+              <a:t>Diagnose</a:t>
+            </a:r>
+            <a:endParaRPr lang="en-US" sz="2400" dirty="0"/>
+          </a:p>
+        </p:txBody>
+      </p:sp>
+      <p:sp>
+        <p:nvSpPr>
+          <p:cNvPr id="7" name="Text 5"/>
+          <p:cNvSpPr txBox="1"/>
+          <p:nvPr/>
+        </p:nvSpPr>
+        <p:spPr>
+          <a:xfrm>
+            <a:off x="731520" y="3200400"/>
+            <a:ext cx="3179978" cy="2011680"/>
           </a:xfrm>
           <a:prstGeom prst="rect">
             <a:avLst/>
@@ -15230,50 +14762,36 @@
           <a:bodyPr wrap="square" lIns="0" tIns="0" rIns="0" bIns="0" rtlCol="0" anchor="t"/>
           <a:lstStyle/>
           <a:p>
-            <a:pPr indent="0" marL="0">
-              <a:buNone/>
-            </a:pPr>
-            <a:r>
-              <a:rPr lang="en-US" sz="1150" dirty="0">
-                <a:solidFill>
-                  <a:srgbClr val="0E2F2B"/>
+            <a:pPr marL="177800" indent="-177800">
+              <a:spcAft>
+                <a:spcPts val="900"/>
+              </a:spcAft>
+              <a:buSzPct val="100000"/>
+              <a:buChar char="•"/>
+            </a:pPr>
+            <a:r>
+              <a:rPr lang="en-US" sz="1500" dirty="0">
+                <a:solidFill>
+                  <a:srgbClr val="2B403C"/>
                 </a:solidFill>
                 <a:latin typeface="Segoe UI" pitchFamily="34" charset="0"/>
                 <a:ea typeface="Segoe UI" pitchFamily="34" charset="-122"/>
                 <a:cs typeface="Segoe UI" pitchFamily="34" charset="-120"/>
               </a:rPr>
-              <a:t>Right entry ranked first in 13 of 14 answerable questions, yet 4 got “need more info” or “not in KB”.</a:t>
-            </a:r>
-            <a:endParaRPr lang="en-US" sz="1150" dirty="0"/>
-          </a:p>
-        </p:txBody>
-      </p:sp>
-      <p:sp>
-        <p:nvSpPr>
-          <p:cNvPr id="10" name="Text 8"/>
-          <p:cNvSpPr txBox="1"/>
-          <p:nvPr/>
-        </p:nvSpPr>
-        <p:spPr>
-          <a:xfrm>
-            <a:off x="3474720" y="2103120"/>
-            <a:ext cx="2468880" cy="758952"/>
-          </a:xfrm>
-          <a:prstGeom prst="rect">
-            <a:avLst/>
-          </a:prstGeom>
-          <a:noFill/>
-          <a:ln/>
-        </p:spPr>
-        <p:txBody>
-          <a:bodyPr wrap="square" lIns="0" tIns="0" rIns="0" bIns="0" rtlCol="0" anchor="t"/>
-          <a:lstStyle/>
-          <a:p>
-            <a:pPr indent="0" marL="0">
-              <a:buNone/>
-            </a:pPr>
-            <a:r>
-              <a:rPr lang="en-US" sz="1150" dirty="0">
+              <a:t>Split the pipeline into layers</a:t>
+            </a:r>
+            <a:endParaRPr lang="en-US" sz="1500" dirty="0"/>
+          </a:p>
+          <a:p>
+            <a:pPr marL="177800" indent="-177800">
+              <a:spcAft>
+                <a:spcPts val="900"/>
+              </a:spcAft>
+              <a:buSzPct val="100000"/>
+              <a:buChar char="•"/>
+            </a:pPr>
+            <a:r>
+              <a:rPr lang="en-US" sz="1500" dirty="0">
                 <a:solidFill>
                   <a:srgbClr val="2B403C"/>
                 </a:solidFill>
@@ -15281,38 +14799,20 @@
                 <a:ea typeface="Segoe UI" pitchFamily="34" charset="-122"/>
                 <a:cs typeface="Segoe UI" pitchFamily="34" charset="-120"/>
               </a:rPr>
-              <a:t>The gate read the best semantic score of any entry, not the top-ranked one's, and trusted a squeezed score band.</a:t>
-            </a:r>
-            <a:endParaRPr lang="en-US" sz="1150" dirty="0"/>
-          </a:p>
-        </p:txBody>
-      </p:sp>
-      <p:sp>
-        <p:nvSpPr>
-          <p:cNvPr id="11" name="Text 9"/>
-          <p:cNvSpPr txBox="1"/>
-          <p:nvPr/>
-        </p:nvSpPr>
-        <p:spPr>
-          <a:xfrm>
-            <a:off x="6080760" y="2103120"/>
-            <a:ext cx="2788920" cy="758952"/>
-          </a:xfrm>
-          <a:prstGeom prst="rect">
-            <a:avLst/>
-          </a:prstGeom>
-          <a:noFill/>
-          <a:ln/>
-        </p:spPr>
-        <p:txBody>
-          <a:bodyPr wrap="square" lIns="0" tIns="0" rIns="0" bIns="0" rtlCol="0" anchor="t"/>
-          <a:lstStyle/>
-          <a:p>
-            <a:pPr indent="0" marL="0">
-              <a:buNone/>
-            </a:pPr>
-            <a:r>
-              <a:rPr lang="en-US" sz="1150" dirty="0">
+              <a:t>Retrieval: right entry first, 13 of 14</a:t>
+            </a:r>
+            <a:endParaRPr lang="en-US" sz="1500" dirty="0"/>
+          </a:p>
+          <a:p>
+            <a:pPr marL="177800" indent="-177800">
+              <a:spcAft>
+                <a:spcPts val="900"/>
+              </a:spcAft>
+              <a:buSzPct val="100000"/>
+              <a:buChar char="•"/>
+            </a:pPr>
+            <a:r>
+              <a:rPr lang="en-US" sz="1500" dirty="0">
                 <a:solidFill>
                   <a:srgbClr val="2B403C"/>
                 </a:solidFill>
@@ -15320,60 +14820,477 @@
                 <a:ea typeface="Segoe UI" pitchFamily="34" charset="-122"/>
                 <a:cs typeface="Segoe UI" pitchFamily="34" charset="-120"/>
               </a:rPr>
-              <a:t>Score the top-ranked entry plus a keyword floor. The model decides the uncertain band, and the label follows its output.</a:t>
-            </a:r>
-            <a:endParaRPr lang="en-US" sz="1150" dirty="0"/>
-          </a:p>
-        </p:txBody>
-      </p:sp>
-      <p:sp>
-        <p:nvSpPr>
-          <p:cNvPr id="12" name="Text 10"/>
-          <p:cNvSpPr txBox="1"/>
-          <p:nvPr/>
-        </p:nvSpPr>
-        <p:spPr>
-          <a:xfrm>
-            <a:off x="9006840" y="2103120"/>
-            <a:ext cx="2450592" cy="758952"/>
-          </a:xfrm>
-          <a:prstGeom prst="rect">
-            <a:avLst/>
-          </a:prstGeom>
-          <a:noFill/>
-          <a:ln/>
-        </p:spPr>
-        <p:txBody>
-          <a:bodyPr wrap="square" lIns="0" tIns="0" rIns="0" bIns="0" rtlCol="0" anchor="t"/>
-          <a:lstStyle/>
-          <a:p>
-            <a:pPr indent="0" marL="0">
-              <a:buNone/>
-            </a:pPr>
-            <a:r>
-              <a:rPr lang="en-US" sz="1150" dirty="0">
-                <a:solidFill>
-                  <a:srgbClr val="1E6B58"/>
+              <a:t>Fault isolated to the gate</a:t>
+            </a:r>
+            <a:endParaRPr lang="en-US" sz="1500" dirty="0"/>
+          </a:p>
+        </p:txBody>
+      </p:sp>
+      <p:sp>
+        <p:nvSpPr>
+          <p:cNvPr id="8" name="Text 6"/>
+          <p:cNvSpPr txBox="1"/>
+          <p:nvPr/>
+        </p:nvSpPr>
+        <p:spPr>
+          <a:xfrm>
+            <a:off x="4048658" y="2240280"/>
+            <a:ext cx="365760" cy="731520"/>
+          </a:xfrm>
+          <a:prstGeom prst="rect">
+            <a:avLst/>
+          </a:prstGeom>
+          <a:noFill/>
+          <a:ln/>
+        </p:spPr>
+        <p:txBody>
+          <a:bodyPr wrap="square" lIns="0" tIns="0" rIns="0" bIns="0" rtlCol="0" anchor="ctr"/>
+          <a:lstStyle/>
+          <a:p>
+            <a:pPr algn="ctr" indent="0" marL="0">
+              <a:buNone/>
+            </a:pPr>
+            <a:r>
+              <a:rPr lang="en-US" sz="2200" dirty="0">
+                <a:solidFill>
+                  <a:srgbClr val="6B7C78"/>
+                </a:solidFill>
+                <a:latin typeface="Segoe UI" pitchFamily="34" charset="0"/>
+                <a:ea typeface="Segoe UI" pitchFamily="34" charset="-122"/>
+                <a:cs typeface="Segoe UI" pitchFamily="34" charset="-120"/>
+              </a:rPr>
+              <a:t>→</a:t>
+            </a:r>
+            <a:endParaRPr lang="en-US" sz="2200" dirty="0"/>
+          </a:p>
+        </p:txBody>
+      </p:sp>
+      <p:sp>
+        <p:nvSpPr>
+          <p:cNvPr id="9" name="Shape 7"/>
+          <p:cNvSpPr/>
+          <p:nvPr/>
+        </p:nvSpPr>
+        <p:spPr>
+          <a:xfrm>
+            <a:off x="4460138" y="2103120"/>
+            <a:ext cx="3271418" cy="0"/>
+          </a:xfrm>
+          <a:prstGeom prst="line">
+            <a:avLst/>
+          </a:prstGeom>
+          <a:noFill/>
+          <a:ln w="12700">
+            <a:solidFill>
+              <a:srgbClr val="0E2F2B"/>
+            </a:solidFill>
+            <a:prstDash val="solid"/>
+          </a:ln>
+        </p:spPr>
+      </p:sp>
+      <p:sp>
+        <p:nvSpPr>
+          <p:cNvPr id="10" name="Text 8"/>
+          <p:cNvSpPr txBox="1"/>
+          <p:nvPr/>
+        </p:nvSpPr>
+        <p:spPr>
+          <a:xfrm>
+            <a:off x="4460138" y="2240280"/>
+            <a:ext cx="548640" cy="731520"/>
+          </a:xfrm>
+          <a:prstGeom prst="rect">
+            <a:avLst/>
+          </a:prstGeom>
+          <a:noFill/>
+          <a:ln/>
+        </p:spPr>
+        <p:txBody>
+          <a:bodyPr wrap="square" lIns="0" tIns="0" rIns="0" bIns="0" rtlCol="0" anchor="ctr"/>
+          <a:lstStyle/>
+          <a:p>
+            <a:pPr indent="0" marL="0">
+              <a:buNone/>
+            </a:pPr>
+            <a:r>
+              <a:rPr lang="en-US" sz="4000" dirty="0">
+                <a:solidFill>
+                  <a:srgbClr val="0E2F2B"/>
+                </a:solidFill>
+                <a:highlight>
+                  <a:srgbClr val="D6F25C"/>
+                </a:highlight>
+                <a:latin typeface="Segoe UI Light" pitchFamily="34" charset="0"/>
+                <a:ea typeface="Segoe UI Light" pitchFamily="34" charset="-122"/>
+                <a:cs typeface="Segoe UI Light" pitchFamily="34" charset="-120"/>
+              </a:rPr>
+              <a:t>2</a:t>
+            </a:r>
+            <a:endParaRPr lang="en-US" sz="4000" dirty="0"/>
+          </a:p>
+        </p:txBody>
+      </p:sp>
+      <p:sp>
+        <p:nvSpPr>
+          <p:cNvPr id="11" name="Text 9"/>
+          <p:cNvSpPr txBox="1"/>
+          <p:nvPr/>
+        </p:nvSpPr>
+        <p:spPr>
+          <a:xfrm>
+            <a:off x="5191658" y="2240280"/>
+            <a:ext cx="2539898" cy="731520"/>
+          </a:xfrm>
+          <a:prstGeom prst="rect">
+            <a:avLst/>
+          </a:prstGeom>
+          <a:noFill/>
+          <a:ln/>
+        </p:spPr>
+        <p:txBody>
+          <a:bodyPr wrap="square" lIns="0" tIns="0" rIns="0" bIns="0" rtlCol="0" anchor="ctr"/>
+          <a:lstStyle/>
+          <a:p>
+            <a:pPr indent="0" marL="0">
+              <a:buNone/>
+            </a:pPr>
+            <a:r>
+              <a:rPr lang="en-US" sz="2400" dirty="0">
+                <a:solidFill>
+                  <a:srgbClr val="0E2F2B"/>
                 </a:solidFill>
                 <a:latin typeface="Segoe UI Semibold" pitchFamily="34" charset="0"/>
                 <a:ea typeface="Segoe UI Semibold" pitchFamily="34" charset="-122"/>
                 <a:cs typeface="Segoe UI Semibold" pitchFamily="34" charset="-120"/>
               </a:rPr>
-              <a:t>Same 24 questions: 75% to 87.5%. Unseen 44 questions: 88.6%.</a:t>
-            </a:r>
-            <a:endParaRPr lang="en-US" sz="1150" dirty="0"/>
-          </a:p>
-        </p:txBody>
-      </p:sp>
-      <p:sp>
-        <p:nvSpPr>
-          <p:cNvPr id="13" name="Shape 11"/>
+              <a:t>Fix</a:t>
+            </a:r>
+            <a:endParaRPr lang="en-US" sz="2400" dirty="0"/>
+          </a:p>
+        </p:txBody>
+      </p:sp>
+      <p:sp>
+        <p:nvSpPr>
+          <p:cNvPr id="12" name="Text 10"/>
+          <p:cNvSpPr txBox="1"/>
+          <p:nvPr/>
+        </p:nvSpPr>
+        <p:spPr>
+          <a:xfrm>
+            <a:off x="4460138" y="3200400"/>
+            <a:ext cx="3179978" cy="2011680"/>
+          </a:xfrm>
+          <a:prstGeom prst="rect">
+            <a:avLst/>
+          </a:prstGeom>
+          <a:noFill/>
+          <a:ln/>
+        </p:spPr>
+        <p:txBody>
+          <a:bodyPr wrap="square" lIns="0" tIns="0" rIns="0" bIns="0" rtlCol="0" anchor="t"/>
+          <a:lstStyle/>
+          <a:p>
+            <a:pPr marL="177800" indent="-177800">
+              <a:spcAft>
+                <a:spcPts val="900"/>
+              </a:spcAft>
+              <a:buSzPct val="100000"/>
+              <a:buChar char="•"/>
+            </a:pPr>
+            <a:r>
+              <a:rPr lang="en-US" sz="1500" dirty="0">
+                <a:solidFill>
+                  <a:srgbClr val="2B403C"/>
+                </a:solidFill>
+                <a:latin typeface="Segoe UI" pitchFamily="34" charset="0"/>
+                <a:ea typeface="Segoe UI" pitchFamily="34" charset="-122"/>
+                <a:cs typeface="Segoe UI" pitchFamily="34" charset="-120"/>
+              </a:rPr>
+              <a:t>Gate scores the top-ranked entry</a:t>
+            </a:r>
+            <a:endParaRPr lang="en-US" sz="1500" dirty="0"/>
+          </a:p>
+          <a:p>
+            <a:pPr marL="177800" indent="-177800">
+              <a:spcAft>
+                <a:spcPts val="900"/>
+              </a:spcAft>
+              <a:buSzPct val="100000"/>
+              <a:buChar char="•"/>
+            </a:pPr>
+            <a:r>
+              <a:rPr lang="en-US" sz="1500" dirty="0">
+                <a:solidFill>
+                  <a:srgbClr val="2B403C"/>
+                </a:solidFill>
+                <a:latin typeface="Segoe UI" pitchFamily="34" charset="0"/>
+                <a:ea typeface="Segoe UI" pitchFamily="34" charset="-122"/>
+                <a:cs typeface="Segoe UI" pitchFamily="34" charset="-120"/>
+              </a:rPr>
+              <a:t>Model decides the uncertain zone</a:t>
+            </a:r>
+            <a:endParaRPr lang="en-US" sz="1500" dirty="0"/>
+          </a:p>
+          <a:p>
+            <a:pPr marL="177800" indent="-177800">
+              <a:spcAft>
+                <a:spcPts val="900"/>
+              </a:spcAft>
+              <a:buSzPct val="100000"/>
+              <a:buChar char="•"/>
+            </a:pPr>
+            <a:r>
+              <a:rPr lang="en-US" sz="1500" dirty="0">
+                <a:solidFill>
+                  <a:srgbClr val="2B403C"/>
+                </a:solidFill>
+                <a:latin typeface="Segoe UI" pitchFamily="34" charset="0"/>
+                <a:ea typeface="Segoe UI" pitchFamily="34" charset="-122"/>
+                <a:cs typeface="Segoe UI" pitchFamily="34" charset="-120"/>
+              </a:rPr>
+              <a:t>Guard cut-off from a 76-question score gap</a:t>
+            </a:r>
+            <a:endParaRPr lang="en-US" sz="1500" dirty="0"/>
+          </a:p>
+        </p:txBody>
+      </p:sp>
+      <p:sp>
+        <p:nvSpPr>
+          <p:cNvPr id="13" name="Text 11"/>
+          <p:cNvSpPr txBox="1"/>
+          <p:nvPr/>
+        </p:nvSpPr>
+        <p:spPr>
+          <a:xfrm>
+            <a:off x="7777277" y="2240280"/>
+            <a:ext cx="365760" cy="731520"/>
+          </a:xfrm>
+          <a:prstGeom prst="rect">
+            <a:avLst/>
+          </a:prstGeom>
+          <a:noFill/>
+          <a:ln/>
+        </p:spPr>
+        <p:txBody>
+          <a:bodyPr wrap="square" lIns="0" tIns="0" rIns="0" bIns="0" rtlCol="0" anchor="ctr"/>
+          <a:lstStyle/>
+          <a:p>
+            <a:pPr algn="ctr" indent="0" marL="0">
+              <a:buNone/>
+            </a:pPr>
+            <a:r>
+              <a:rPr lang="en-US" sz="2200" dirty="0">
+                <a:solidFill>
+                  <a:srgbClr val="6B7C78"/>
+                </a:solidFill>
+                <a:latin typeface="Segoe UI" pitchFamily="34" charset="0"/>
+                <a:ea typeface="Segoe UI" pitchFamily="34" charset="-122"/>
+                <a:cs typeface="Segoe UI" pitchFamily="34" charset="-120"/>
+              </a:rPr>
+              <a:t>→</a:t>
+            </a:r>
+            <a:endParaRPr lang="en-US" sz="2200" dirty="0"/>
+          </a:p>
+        </p:txBody>
+      </p:sp>
+      <p:sp>
+        <p:nvSpPr>
+          <p:cNvPr id="14" name="Shape 12"/>
           <p:cNvSpPr/>
           <p:nvPr/>
         </p:nvSpPr>
         <p:spPr>
           <a:xfrm>
-            <a:off x="731520" y="2907792"/>
+            <a:off x="8188757" y="2103120"/>
+            <a:ext cx="3271418" cy="0"/>
+          </a:xfrm>
+          <a:prstGeom prst="line">
+            <a:avLst/>
+          </a:prstGeom>
+          <a:noFill/>
+          <a:ln w="12700">
+            <a:solidFill>
+              <a:srgbClr val="0E2F2B"/>
+            </a:solidFill>
+            <a:prstDash val="solid"/>
+          </a:ln>
+        </p:spPr>
+      </p:sp>
+      <p:sp>
+        <p:nvSpPr>
+          <p:cNvPr id="15" name="Text 13"/>
+          <p:cNvSpPr txBox="1"/>
+          <p:nvPr/>
+        </p:nvSpPr>
+        <p:spPr>
+          <a:xfrm>
+            <a:off x="8188757" y="2240280"/>
+            <a:ext cx="548640" cy="731520"/>
+          </a:xfrm>
+          <a:prstGeom prst="rect">
+            <a:avLst/>
+          </a:prstGeom>
+          <a:noFill/>
+          <a:ln/>
+        </p:spPr>
+        <p:txBody>
+          <a:bodyPr wrap="square" lIns="0" tIns="0" rIns="0" bIns="0" rtlCol="0" anchor="ctr"/>
+          <a:lstStyle/>
+          <a:p>
+            <a:pPr indent="0" marL="0">
+              <a:buNone/>
+            </a:pPr>
+            <a:r>
+              <a:rPr lang="en-US" sz="4000" dirty="0">
+                <a:solidFill>
+                  <a:srgbClr val="0E2F2B"/>
+                </a:solidFill>
+                <a:highlight>
+                  <a:srgbClr val="D6F25C"/>
+                </a:highlight>
+                <a:latin typeface="Segoe UI Light" pitchFamily="34" charset="0"/>
+                <a:ea typeface="Segoe UI Light" pitchFamily="34" charset="-122"/>
+                <a:cs typeface="Segoe UI Light" pitchFamily="34" charset="-120"/>
+              </a:rPr>
+              <a:t>3</a:t>
+            </a:r>
+            <a:endParaRPr lang="en-US" sz="4000" dirty="0"/>
+          </a:p>
+        </p:txBody>
+      </p:sp>
+      <p:sp>
+        <p:nvSpPr>
+          <p:cNvPr id="16" name="Text 14"/>
+          <p:cNvSpPr txBox="1"/>
+          <p:nvPr/>
+        </p:nvSpPr>
+        <p:spPr>
+          <a:xfrm>
+            <a:off x="8920277" y="2240280"/>
+            <a:ext cx="2539898" cy="731520"/>
+          </a:xfrm>
+          <a:prstGeom prst="rect">
+            <a:avLst/>
+          </a:prstGeom>
+          <a:noFill/>
+          <a:ln/>
+        </p:spPr>
+        <p:txBody>
+          <a:bodyPr wrap="square" lIns="0" tIns="0" rIns="0" bIns="0" rtlCol="0" anchor="ctr"/>
+          <a:lstStyle/>
+          <a:p>
+            <a:pPr indent="0" marL="0">
+              <a:buNone/>
+            </a:pPr>
+            <a:r>
+              <a:rPr lang="en-US" sz="2400" dirty="0">
+                <a:solidFill>
+                  <a:srgbClr val="0E2F2B"/>
+                </a:solidFill>
+                <a:latin typeface="Segoe UI Semibold" pitchFamily="34" charset="0"/>
+                <a:ea typeface="Segoe UI Semibold" pitchFamily="34" charset="-122"/>
+                <a:cs typeface="Segoe UI Semibold" pitchFamily="34" charset="-120"/>
+              </a:rPr>
+              <a:t>Prove</a:t>
+            </a:r>
+            <a:endParaRPr lang="en-US" sz="2400" dirty="0"/>
+          </a:p>
+        </p:txBody>
+      </p:sp>
+      <p:sp>
+        <p:nvSpPr>
+          <p:cNvPr id="17" name="Text 15"/>
+          <p:cNvSpPr txBox="1"/>
+          <p:nvPr/>
+        </p:nvSpPr>
+        <p:spPr>
+          <a:xfrm>
+            <a:off x="8188757" y="3200400"/>
+            <a:ext cx="3179978" cy="2011680"/>
+          </a:xfrm>
+          <a:prstGeom prst="rect">
+            <a:avLst/>
+          </a:prstGeom>
+          <a:noFill/>
+          <a:ln/>
+        </p:spPr>
+        <p:txBody>
+          <a:bodyPr wrap="square" lIns="0" tIns="0" rIns="0" bIns="0" rtlCol="0" anchor="t"/>
+          <a:lstStyle/>
+          <a:p>
+            <a:pPr marL="177800" indent="-177800">
+              <a:spcAft>
+                <a:spcPts val="900"/>
+              </a:spcAft>
+              <a:buSzPct val="100000"/>
+              <a:buChar char="•"/>
+            </a:pPr>
+            <a:r>
+              <a:rPr lang="en-US" sz="1500" dirty="0">
+                <a:solidFill>
+                  <a:srgbClr val="2B403C"/>
+                </a:solidFill>
+                <a:latin typeface="Segoe UI" pitchFamily="34" charset="0"/>
+                <a:ea typeface="Segoe UI" pitchFamily="34" charset="-122"/>
+                <a:cs typeface="Segoe UI" pitchFamily="34" charset="-120"/>
+              </a:rPr>
+              <a:t>44 fresh questions, committed first</a:t>
+            </a:r>
+            <a:endParaRPr lang="en-US" sz="1500" dirty="0"/>
+          </a:p>
+          <a:p>
+            <a:pPr marL="177800" indent="-177800">
+              <a:spcAft>
+                <a:spcPts val="900"/>
+              </a:spcAft>
+              <a:buSzPct val="100000"/>
+              <a:buChar char="•"/>
+            </a:pPr>
+            <a:r>
+              <a:rPr lang="en-US" sz="1500" dirty="0">
+                <a:solidFill>
+                  <a:srgbClr val="2B403C"/>
+                </a:solidFill>
+                <a:latin typeface="Segoe UI" pitchFamily="34" charset="0"/>
+                <a:ea typeface="Segoe UI" pitchFamily="34" charset="-122"/>
+                <a:cs typeface="Segoe UI" pitchFamily="34" charset="-120"/>
+              </a:rPr>
+              <a:t>Code frozen, run once</a:t>
+            </a:r>
+            <a:endParaRPr lang="en-US" sz="1500" dirty="0"/>
+          </a:p>
+          <a:p>
+            <a:pPr marL="177800" indent="-177800">
+              <a:spcAft>
+                <a:spcPts val="900"/>
+              </a:spcAft>
+              <a:buSzPct val="100000"/>
+              <a:buChar char="•"/>
+            </a:pPr>
+            <a:r>
+              <a:rPr lang="en-US" sz="1500" dirty="0">
+                <a:solidFill>
+                  <a:srgbClr val="2B403C"/>
+                </a:solidFill>
+                <a:latin typeface="Segoe UI" pitchFamily="34" charset="0"/>
+                <a:ea typeface="Segoe UI" pitchFamily="34" charset="-122"/>
+                <a:cs typeface="Segoe UI" pitchFamily="34" charset="-120"/>
+              </a:rPr>
+              <a:t>88.6%, no dangerous answers</a:t>
+            </a:r>
+            <a:endParaRPr lang="en-US" sz="1500" dirty="0"/>
+          </a:p>
+        </p:txBody>
+      </p:sp>
+      <p:sp>
+        <p:nvSpPr>
+          <p:cNvPr id="18" name="Shape 16"/>
+          <p:cNvSpPr/>
+          <p:nvPr/>
+        </p:nvSpPr>
+        <p:spPr>
+          <a:xfrm>
+            <a:off x="731520" y="4983480"/>
             <a:ext cx="10728655" cy="0"/>
           </a:xfrm>
           <a:prstGeom prst="line">
@@ -15390,14 +15307,14 @@
       </p:sp>
       <p:sp>
         <p:nvSpPr>
-          <p:cNvPr id="14" name="Text 12"/>
-          <p:cNvSpPr txBox="1"/>
-          <p:nvPr/>
-        </p:nvSpPr>
-        <p:spPr>
-          <a:xfrm>
-            <a:off x="731520" y="2999232"/>
-            <a:ext cx="2606040" cy="758952"/>
+          <p:cNvPr id="19" name="Text 17"/>
+          <p:cNvSpPr txBox="1"/>
+          <p:nvPr/>
+        </p:nvSpPr>
+        <p:spPr>
+          <a:xfrm>
+            <a:off x="731520" y="5212080"/>
+            <a:ext cx="10728655" cy="457200"/>
           </a:xfrm>
           <a:prstGeom prst="rect">
             <a:avLst/>
@@ -15413,558 +15330,21 @@
               <a:buNone/>
             </a:pPr>
             <a:r>
-              <a:rPr lang="en-US" sz="1150" dirty="0">
-                <a:solidFill>
-                  <a:srgbClr val="0E2F2B"/>
+              <a:rPr lang="en-US" sz="1800" dirty="0">
+                <a:solidFill>
+                  <a:srgbClr val="2B403C"/>
                 </a:solidFill>
                 <a:latin typeface="Segoe UI" pitchFamily="34" charset="0"/>
                 <a:ea typeface="Segoe UI" pitchFamily="34" charset="-122"/>
                 <a:cs typeface="Segoe UI" pitchFamily="34" charset="-120"/>
               </a:rPr>
-              <a:t>A real question, “CrashLoopBackOff on the payments pods”, was blocked as an attack.</a:t>
-            </a:r>
-            <a:endParaRPr lang="en-US" sz="1150" dirty="0"/>
-          </a:p>
-        </p:txBody>
-      </p:sp>
-      <p:sp>
-        <p:nvSpPr>
-          <p:cNvPr id="15" name="Text 13"/>
-          <p:cNvSpPr txBox="1"/>
-          <p:nvPr/>
-        </p:nvSpPr>
-        <p:spPr>
-          <a:xfrm>
-            <a:off x="3474720" y="2999232"/>
-            <a:ext cx="2468880" cy="758952"/>
-          </a:xfrm>
-          <a:prstGeom prst="rect">
-            <a:avLst/>
-          </a:prstGeom>
-          <a:noFill/>
-          <a:ln/>
-        </p:spPr>
-        <p:txBody>
-          <a:bodyPr wrap="square" lIns="0" tIns="0" rIns="0" bIns="0" rtlCol="0" anchor="t"/>
-          <a:lstStyle/>
-          <a:p>
-            <a:pPr indent="0" marL="0">
-              <a:buNone/>
-            </a:pPr>
-            <a:r>
-              <a:rPr lang="en-US" sz="1150" dirty="0">
-                <a:solidFill>
-                  <a:srgbClr val="2B403C"/>
-                </a:solidFill>
-                <a:latin typeface="Segoe UI" pitchFamily="34" charset="0"/>
-                <a:ea typeface="Segoe UI" pitchFamily="34" charset="-122"/>
-                <a:cs typeface="Segoe UI" pitchFamily="34" charset="-120"/>
-              </a:rPr>
-              <a:t>Prompt Guard scores jargon-only text at 0.975. My cut-off was 0.5.</a:t>
-            </a:r>
-            <a:endParaRPr lang="en-US" sz="1150" dirty="0"/>
-          </a:p>
-        </p:txBody>
-      </p:sp>
-      <p:sp>
-        <p:nvSpPr>
-          <p:cNvPr id="16" name="Text 14"/>
-          <p:cNvSpPr txBox="1"/>
-          <p:nvPr/>
-        </p:nvSpPr>
-        <p:spPr>
-          <a:xfrm>
-            <a:off x="6080760" y="2999232"/>
-            <a:ext cx="2788920" cy="758952"/>
-          </a:xfrm>
-          <a:prstGeom prst="rect">
-            <a:avLst/>
-          </a:prstGeom>
-          <a:noFill/>
-          <a:ln/>
-        </p:spPr>
-        <p:txBody>
-          <a:bodyPr wrap="square" lIns="0" tIns="0" rIns="0" bIns="0" rtlCol="0" anchor="t"/>
-          <a:lstStyle/>
-          <a:p>
-            <a:pPr indent="0" marL="0">
-              <a:buNone/>
-            </a:pPr>
-            <a:r>
-              <a:rPr lang="en-US" sz="1150" dirty="0">
-                <a:solidFill>
-                  <a:srgbClr val="2B403C"/>
-                </a:solidFill>
-                <a:latin typeface="Segoe UI" pitchFamily="34" charset="0"/>
-                <a:ea typeface="Segoe UI" pitchFamily="34" charset="-122"/>
-                <a:cs typeface="Segoe UI" pitchFamily="34" charset="-120"/>
-              </a:rPr>
-              <a:t>Scored all 76 questions, moved the cut-off to 0.98, added tests.</a:t>
-            </a:r>
-            <a:endParaRPr lang="en-US" sz="1150" dirty="0"/>
-          </a:p>
-        </p:txBody>
-      </p:sp>
-      <p:sp>
-        <p:nvSpPr>
-          <p:cNvPr id="17" name="Text 15"/>
-          <p:cNvSpPr txBox="1"/>
-          <p:nvPr/>
-        </p:nvSpPr>
-        <p:spPr>
-          <a:xfrm>
-            <a:off x="9006840" y="2999232"/>
-            <a:ext cx="2450592" cy="758952"/>
-          </a:xfrm>
-          <a:prstGeom prst="rect">
-            <a:avLst/>
-          </a:prstGeom>
-          <a:noFill/>
-          <a:ln/>
-        </p:spPr>
-        <p:txBody>
-          <a:bodyPr wrap="square" lIns="0" tIns="0" rIns="0" bIns="0" rtlCol="0" anchor="t"/>
-          <a:lstStyle/>
-          <a:p>
-            <a:pPr indent="0" marL="0">
-              <a:buNone/>
-            </a:pPr>
-            <a:r>
-              <a:rPr lang="en-US" sz="1150" dirty="0">
-                <a:solidFill>
-                  <a:srgbClr val="1E6B58"/>
-                </a:solidFill>
-                <a:latin typeface="Segoe UI Semibold" pitchFamily="34" charset="0"/>
-                <a:ea typeface="Segoe UI Semibold" pitchFamily="34" charset="-122"/>
-                <a:cs typeface="Segoe UI Semibold" pitchFamily="34" charset="-120"/>
-              </a:rPr>
-              <a:t>Real attacks still score 0.99+. 3 of 3 sealed attacks refused.</a:t>
-            </a:r>
-            <a:endParaRPr lang="en-US" sz="1150" dirty="0"/>
-          </a:p>
-        </p:txBody>
-      </p:sp>
-      <p:sp>
-        <p:nvSpPr>
-          <p:cNvPr id="18" name="Shape 16"/>
-          <p:cNvSpPr/>
-          <p:nvPr/>
-        </p:nvSpPr>
-        <p:spPr>
-          <a:xfrm>
-            <a:off x="731520" y="3803904"/>
-            <a:ext cx="10728655" cy="0"/>
-          </a:xfrm>
-          <a:prstGeom prst="line">
-            <a:avLst/>
-          </a:prstGeom>
-          <a:noFill/>
-          <a:ln w="9525">
-            <a:solidFill>
-              <a:srgbClr val="D8DFDB"/>
-            </a:solidFill>
-            <a:prstDash val="solid"/>
-          </a:ln>
-        </p:spPr>
-      </p:sp>
-      <p:sp>
-        <p:nvSpPr>
-          <p:cNvPr id="19" name="Text 17"/>
-          <p:cNvSpPr txBox="1"/>
-          <p:nvPr/>
-        </p:nvSpPr>
-        <p:spPr>
-          <a:xfrm>
-            <a:off x="731520" y="3895344"/>
-            <a:ext cx="2606040" cy="758952"/>
-          </a:xfrm>
-          <a:prstGeom prst="rect">
-            <a:avLst/>
-          </a:prstGeom>
-          <a:noFill/>
-          <a:ln/>
-        </p:spPr>
-        <p:txBody>
-          <a:bodyPr wrap="square" lIns="0" tIns="0" rIns="0" bIns="0" rtlCol="0" anchor="t"/>
-          <a:lstStyle/>
-          <a:p>
-            <a:pPr indent="0" marL="0">
-              <a:buNone/>
-            </a:pPr>
-            <a:r>
-              <a:rPr lang="en-US" sz="1150" dirty="0">
-                <a:solidFill>
-                  <a:srgbClr val="0E2F2B"/>
-                </a:solidFill>
-                <a:latin typeface="Segoe UI" pitchFamily="34" charset="0"/>
-                <a:ea typeface="Segoe UI" pitchFamily="34" charset="-122"/>
-                <a:cs typeface="Segoe UI" pitchFamily="34" charset="-120"/>
-              </a:rPr>
-              <a:t>The card said “Need more info” above a complete answer.</a:t>
-            </a:r>
-            <a:endParaRPr lang="en-US" sz="1150" dirty="0"/>
-          </a:p>
-        </p:txBody>
-      </p:sp>
-      <p:sp>
-        <p:nvSpPr>
-          <p:cNvPr id="20" name="Text 18"/>
-          <p:cNvSpPr txBox="1"/>
-          <p:nvPr/>
-        </p:nvSpPr>
-        <p:spPr>
-          <a:xfrm>
-            <a:off x="3474720" y="3895344"/>
-            <a:ext cx="2468880" cy="758952"/>
-          </a:xfrm>
-          <a:prstGeom prst="rect">
-            <a:avLst/>
-          </a:prstGeom>
-          <a:noFill/>
-          <a:ln/>
-        </p:spPr>
-        <p:txBody>
-          <a:bodyPr wrap="square" lIns="0" tIns="0" rIns="0" bIns="0" rtlCol="0" anchor="t"/>
-          <a:lstStyle/>
-          <a:p>
-            <a:pPr indent="0" marL="0">
-              <a:buNone/>
-            </a:pPr>
-            <a:r>
-              <a:rPr lang="en-US" sz="1150" dirty="0">
-                <a:solidFill>
-                  <a:srgbClr val="2B403C"/>
-                </a:solidFill>
-                <a:latin typeface="Segoe UI" pitchFamily="34" charset="0"/>
-                <a:ea typeface="Segoe UI" pitchFamily="34" charset="-122"/>
-                <a:cs typeface="Segoe UI" pitchFamily="34" charset="-120"/>
-              </a:rPr>
-              <a:t>The badge came from the gate, not from the validated model output.</a:t>
-            </a:r>
-            <a:endParaRPr lang="en-US" sz="1150" dirty="0"/>
-          </a:p>
-        </p:txBody>
-      </p:sp>
-      <p:sp>
-        <p:nvSpPr>
-          <p:cNvPr id="21" name="Text 19"/>
-          <p:cNvSpPr txBox="1"/>
-          <p:nvPr/>
-        </p:nvSpPr>
-        <p:spPr>
-          <a:xfrm>
-            <a:off x="6080760" y="3895344"/>
-            <a:ext cx="2788920" cy="758952"/>
-          </a:xfrm>
-          <a:prstGeom prst="rect">
-            <a:avLst/>
-          </a:prstGeom>
-          <a:noFill/>
-          <a:ln/>
-        </p:spPr>
-        <p:txBody>
-          <a:bodyPr wrap="square" lIns="0" tIns="0" rIns="0" bIns="0" rtlCol="0" anchor="t"/>
-          <a:lstStyle/>
-          <a:p>
-            <a:pPr indent="0" marL="0">
-              <a:buNone/>
-            </a:pPr>
-            <a:r>
-              <a:rPr lang="en-US" sz="1150" dirty="0">
-                <a:solidFill>
-                  <a:srgbClr val="2B403C"/>
-                </a:solidFill>
-                <a:latin typeface="Segoe UI" pitchFamily="34" charset="0"/>
-                <a:ea typeface="Segoe UI" pitchFamily="34" charset="-122"/>
-                <a:cs typeface="Segoe UI" pitchFamily="34" charset="-120"/>
-              </a:rPr>
-              <a:t>The badge follows the validated output. A gate refusal stays final.</a:t>
-            </a:r>
-            <a:endParaRPr lang="en-US" sz="1150" dirty="0"/>
-          </a:p>
-        </p:txBody>
-      </p:sp>
-      <p:sp>
-        <p:nvSpPr>
-          <p:cNvPr id="22" name="Text 20"/>
-          <p:cNvSpPr txBox="1"/>
-          <p:nvPr/>
-        </p:nvSpPr>
-        <p:spPr>
-          <a:xfrm>
-            <a:off x="9006840" y="3895344"/>
-            <a:ext cx="2450592" cy="758952"/>
-          </a:xfrm>
-          <a:prstGeom prst="rect">
-            <a:avLst/>
-          </a:prstGeom>
-          <a:noFill/>
-          <a:ln/>
-        </p:spPr>
-        <p:txBody>
-          <a:bodyPr wrap="square" lIns="0" tIns="0" rIns="0" bIns="0" rtlCol="0" anchor="t"/>
-          <a:lstStyle/>
-          <a:p>
-            <a:pPr indent="0" marL="0">
-              <a:buNone/>
-            </a:pPr>
-            <a:r>
-              <a:rPr lang="en-US" sz="1150" dirty="0">
-                <a:solidFill>
-                  <a:srgbClr val="1E6B58"/>
-                </a:solidFill>
-                <a:latin typeface="Segoe UI Semibold" pitchFamily="34" charset="0"/>
-                <a:ea typeface="Segoe UI Semibold" pitchFamily="34" charset="-122"/>
-                <a:cs typeface="Segoe UI Semibold" pitchFamily="34" charset="-120"/>
-              </a:rPr>
-              <a:t>Tests for both directions. Slide 9 shows it.</a:t>
-            </a:r>
-            <a:endParaRPr lang="en-US" sz="1150" dirty="0"/>
-          </a:p>
-        </p:txBody>
-      </p:sp>
-      <p:sp>
-        <p:nvSpPr>
-          <p:cNvPr id="23" name="Shape 21"/>
-          <p:cNvSpPr/>
-          <p:nvPr/>
-        </p:nvSpPr>
-        <p:spPr>
-          <a:xfrm>
-            <a:off x="731520" y="4700016"/>
-            <a:ext cx="10728655" cy="0"/>
-          </a:xfrm>
-          <a:prstGeom prst="line">
-            <a:avLst/>
-          </a:prstGeom>
-          <a:noFill/>
-          <a:ln w="9525">
-            <a:solidFill>
-              <a:srgbClr val="D8DFDB"/>
-            </a:solidFill>
-            <a:prstDash val="solid"/>
-          </a:ln>
-        </p:spPr>
-      </p:sp>
-      <p:sp>
-        <p:nvSpPr>
-          <p:cNvPr id="24" name="Text 22"/>
-          <p:cNvSpPr txBox="1"/>
-          <p:nvPr/>
-        </p:nvSpPr>
-        <p:spPr>
-          <a:xfrm>
-            <a:off x="731520" y="4791456"/>
-            <a:ext cx="2606040" cy="758952"/>
-          </a:xfrm>
-          <a:prstGeom prst="rect">
-            <a:avLst/>
-          </a:prstGeom>
-          <a:noFill/>
-          <a:ln/>
-        </p:spPr>
-        <p:txBody>
-          <a:bodyPr wrap="square" lIns="0" tIns="0" rIns="0" bIns="0" rtlCol="0" anchor="t"/>
-          <a:lstStyle/>
-          <a:p>
-            <a:pPr indent="0" marL="0">
-              <a:buNone/>
-            </a:pPr>
-            <a:r>
-              <a:rPr lang="en-US" sz="1150" dirty="0">
-                <a:solidFill>
-                  <a:srgbClr val="0E2F2B"/>
-                </a:solidFill>
-                <a:latin typeface="Segoe UI" pitchFamily="34" charset="0"/>
-                <a:ea typeface="Segoe UI" pitchFamily="34" charset="-122"/>
-                <a:cs typeface="Segoe UI" pitchFamily="34" charset="-120"/>
-              </a:rPr>
-              <a:t>One escalation team shown where the entry lists four. Attach list empty.</a:t>
-            </a:r>
-            <a:endParaRPr lang="en-US" sz="1150" dirty="0"/>
-          </a:p>
-        </p:txBody>
-      </p:sp>
-      <p:sp>
-        <p:nvSpPr>
-          <p:cNvPr id="25" name="Text 23"/>
-          <p:cNvSpPr txBox="1"/>
-          <p:nvPr/>
-        </p:nvSpPr>
-        <p:spPr>
-          <a:xfrm>
-            <a:off x="3474720" y="4791456"/>
-            <a:ext cx="2468880" cy="758952"/>
-          </a:xfrm>
-          <a:prstGeom prst="rect">
-            <a:avLst/>
-          </a:prstGeom>
-          <a:noFill/>
-          <a:ln/>
-        </p:spPr>
-        <p:txBody>
-          <a:bodyPr wrap="square" lIns="0" tIns="0" rIns="0" bIns="0" rtlCol="0" anchor="t"/>
-          <a:lstStyle/>
-          <a:p>
-            <a:pPr indent="0" marL="0">
-              <a:buNone/>
-            </a:pPr>
-            <a:r>
-              <a:rPr lang="en-US" sz="1150" dirty="0">
-                <a:solidFill>
-                  <a:srgbClr val="2B403C"/>
-                </a:solidFill>
-                <a:latin typeface="Segoe UI" pitchFamily="34" charset="0"/>
-                <a:ea typeface="Segoe UI" pitchFamily="34" charset="-122"/>
-                <a:cs typeface="Segoe UI" pitchFamily="34" charset="-120"/>
-              </a:rPr>
-              <a:t>The output schema allowed only a single escalation.</a:t>
-            </a:r>
-            <a:endParaRPr lang="en-US" sz="1150" dirty="0"/>
-          </a:p>
-        </p:txBody>
-      </p:sp>
-      <p:sp>
-        <p:nvSpPr>
-          <p:cNvPr id="26" name="Text 24"/>
-          <p:cNvSpPr txBox="1"/>
-          <p:nvPr/>
-        </p:nvSpPr>
-        <p:spPr>
-          <a:xfrm>
-            <a:off x="6080760" y="4791456"/>
-            <a:ext cx="2788920" cy="758952"/>
-          </a:xfrm>
-          <a:prstGeom prst="rect">
-            <a:avLst/>
-          </a:prstGeom>
-          <a:noFill/>
-          <a:ln/>
-        </p:spPr>
-        <p:txBody>
-          <a:bodyPr wrap="square" lIns="0" tIns="0" rIns="0" bIns="0" rtlCol="0" anchor="t"/>
-          <a:lstStyle/>
-          <a:p>
-            <a:pPr indent="0" marL="0">
-              <a:buNone/>
-            </a:pPr>
-            <a:r>
-              <a:rPr lang="en-US" sz="1150" dirty="0">
-                <a:solidFill>
-                  <a:srgbClr val="2B403C"/>
-                </a:solidFill>
-                <a:latin typeface="Segoe UI" pitchFamily="34" charset="0"/>
-                <a:ea typeface="Segoe UI" pitchFamily="34" charset="-122"/>
-                <a:cs typeface="Segoe UI" pitchFamily="34" charset="-120"/>
-              </a:rPr>
-              <a:t>The schema returns every route and the attach list. Prompt v1.2 asks for both.</a:t>
-            </a:r>
-            <a:endParaRPr lang="en-US" sz="1150" dirty="0"/>
-          </a:p>
-        </p:txBody>
-      </p:sp>
-      <p:sp>
-        <p:nvSpPr>
-          <p:cNvPr id="27" name="Text 25"/>
-          <p:cNvSpPr txBox="1"/>
-          <p:nvPr/>
-        </p:nvSpPr>
-        <p:spPr>
-          <a:xfrm>
-            <a:off x="9006840" y="4791456"/>
-            <a:ext cx="2450592" cy="758952"/>
-          </a:xfrm>
-          <a:prstGeom prst="rect">
-            <a:avLst/>
-          </a:prstGeom>
-          <a:noFill/>
-          <a:ln/>
-        </p:spPr>
-        <p:txBody>
-          <a:bodyPr wrap="square" lIns="0" tIns="0" rIns="0" bIns="0" rtlCol="0" anchor="t"/>
-          <a:lstStyle/>
-          <a:p>
-            <a:pPr indent="0" marL="0">
-              <a:buNone/>
-            </a:pPr>
-            <a:r>
-              <a:rPr lang="en-US" sz="1150" dirty="0">
-                <a:solidFill>
-                  <a:srgbClr val="1E6B58"/>
-                </a:solidFill>
-                <a:latin typeface="Segoe UI Semibold" pitchFamily="34" charset="0"/>
-                <a:ea typeface="Segoe UI Semibold" pitchFamily="34" charset="-122"/>
-                <a:cs typeface="Segoe UI Semibold" pitchFamily="34" charset="-120"/>
-              </a:rPr>
-              <a:t>The 504 answer now lists PPE, ABP, DBRE and SRE.</a:t>
-            </a:r>
-            <a:endParaRPr lang="en-US" sz="1150" dirty="0"/>
-          </a:p>
-        </p:txBody>
-      </p:sp>
-      <p:sp>
-        <p:nvSpPr>
-          <p:cNvPr id="28" name="Shape 26"/>
-          <p:cNvSpPr/>
-          <p:nvPr/>
-        </p:nvSpPr>
-        <p:spPr>
-          <a:xfrm>
-            <a:off x="731520" y="5596128"/>
-            <a:ext cx="10728655" cy="0"/>
-          </a:xfrm>
-          <a:prstGeom prst="line">
-            <a:avLst/>
-          </a:prstGeom>
-          <a:noFill/>
-          <a:ln w="9525">
-            <a:solidFill>
-              <a:srgbClr val="D8DFDB"/>
-            </a:solidFill>
-            <a:prstDash val="solid"/>
-          </a:ln>
-        </p:spPr>
-      </p:sp>
-      <p:sp>
-        <p:nvSpPr>
-          <p:cNvPr id="29" name="Text 27"/>
-          <p:cNvSpPr txBox="1"/>
-          <p:nvPr/>
-        </p:nvSpPr>
-        <p:spPr>
-          <a:xfrm>
-            <a:off x="731520" y="5733288"/>
-            <a:ext cx="10728655" cy="548640"/>
-          </a:xfrm>
-          <a:prstGeom prst="rect">
-            <a:avLst/>
-          </a:prstGeom>
-          <a:noFill/>
-          <a:ln/>
-        </p:spPr>
-        <p:txBody>
-          <a:bodyPr wrap="square" lIns="0" tIns="0" rIns="0" bIns="0" rtlCol="0" anchor="t"/>
-          <a:lstStyle/>
-          <a:p>
-            <a:pPr indent="0" marL="0">
-              <a:buNone/>
-            </a:pPr>
-            <a:r>
-              <a:rPr lang="en-US" sz="1250" dirty="0">
-                <a:solidFill>
-                  <a:srgbClr val="2B403C"/>
-                </a:solidFill>
-                <a:latin typeface="Segoe UI" pitchFamily="34" charset="0"/>
-                <a:ea typeface="Segoe UI" pitchFamily="34" charset="-122"/>
-                <a:cs typeface="Segoe UI" pitchFamily="34" charset="-120"/>
-              </a:rPr>
-              <a:t>On the same 24 questions: </a:t>
-            </a:r>
-            <a:pPr indent="0" marL="0">
-              <a:buNone/>
-            </a:pPr>
-            <a:r>
-              <a:rPr lang="en-US" sz="1250" b="1" dirty="0">
+              <a:t>Re-run on the same 24:  </a:t>
+            </a:r>
+            <a:pPr indent="0" marL="0">
+              <a:buNone/>
+            </a:pPr>
+            <a:r>
+              <a:rPr lang="en-US" sz="1800" b="1" dirty="0">
                 <a:solidFill>
                   <a:srgbClr val="0E2F2B"/>
                 </a:solidFill>
@@ -15975,13 +15355,13 @@
                 <a:ea typeface="Segoe UI" pitchFamily="34" charset="-122"/>
                 <a:cs typeface="Segoe UI" pitchFamily="34" charset="-120"/>
               </a:rPr>
-              <a:t>4 of the 6 misses were fixed, 1 new miss appeared, 2 remain.</a:t>
-            </a:r>
-            <a:pPr indent="0" marL="0">
-              <a:buNone/>
-            </a:pPr>
-            <a:r>
-              <a:rPr lang="en-US" sz="1250" dirty="0">
+              <a:t>75% → 87.5%</a:t>
+            </a:r>
+            <a:pPr indent="0" marL="0">
+              <a:buNone/>
+            </a:pPr>
+            <a:r>
+              <a:rPr lang="en-US" sz="1800" dirty="0">
                 <a:solidFill>
                   <a:srgbClr val="2B403C"/>
                 </a:solidFill>
@@ -15989,9 +15369,26 @@
                 <a:ea typeface="Segoe UI" pitchFamily="34" charset="-122"/>
                 <a:cs typeface="Segoe UI" pitchFamily="34" charset="-120"/>
               </a:rPr>
-              <a:t> Those 24 are now development data, so the 44 unseen questions are the fair measure.</a:t>
-            </a:r>
-            <a:endParaRPr lang="en-US" sz="1250" dirty="0"/>
+              <a:t>      Unseen 44:  </a:t>
+            </a:r>
+            <a:pPr indent="0" marL="0">
+              <a:buNone/>
+            </a:pPr>
+            <a:r>
+              <a:rPr lang="en-US" sz="1800" b="1" dirty="0">
+                <a:solidFill>
+                  <a:srgbClr val="0E2F2B"/>
+                </a:solidFill>
+                <a:highlight>
+                  <a:srgbClr val="D6F25C"/>
+                </a:highlight>
+                <a:latin typeface="Segoe UI" pitchFamily="34" charset="0"/>
+                <a:ea typeface="Segoe UI" pitchFamily="34" charset="-122"/>
+                <a:cs typeface="Segoe UI" pitchFamily="34" charset="-120"/>
+              </a:rPr>
+              <a:t>88.6%</a:t>
+            </a:r>
+            <a:endParaRPr lang="en-US" sz="1800" dirty="0"/>
           </a:p>
         </p:txBody>
       </p:sp>
@@ -16118,7 +15515,7 @@
                 <a:ea typeface="Segoe UI" pitchFamily="34" charset="-122"/>
                 <a:cs typeface="Segoe UI" pitchFamily="34" charset="-120"/>
               </a:rPr>
-              <a:t>   HOW I FOUND IT</a:t>
+              <a:t>   RESULTS</a:t>
             </a:r>
             <a:endParaRPr lang="en-US" sz="1100" dirty="0"/>
           </a:p>
@@ -16159,7 +15556,7 @@
                 <a:ea typeface="Segoe UI Semibold" pitchFamily="34" charset="-122"/>
                 <a:cs typeface="Segoe UI Semibold" pitchFamily="34" charset="-120"/>
               </a:rPr>
-              <a:t>One live question </a:t>
+              <a:t>88.6% on unseen questions, and </a:t>
             </a:r>
             <a:pPr algn="l" indent="0" marL="0">
               <a:buNone/>
@@ -16176,7 +15573,7 @@
                 <a:ea typeface="Segoe UI Semibold" pitchFamily="34" charset="-122"/>
                 <a:cs typeface="Segoe UI Semibold" pitchFamily="34" charset="-120"/>
               </a:rPr>
-              <a:t>showed me three of them.</a:t>
+              <a:t>no dangerous answers.</a:t>
             </a:r>
             <a:endParaRPr lang="en-US" sz="3000" dirty="0"/>
           </a:p>
@@ -16184,212 +15581,14 @@
       </p:sp>
       <p:sp>
         <p:nvSpPr>
-          <p:cNvPr id="4" name="Text 2"/>
-          <p:cNvSpPr txBox="1"/>
-          <p:nvPr/>
-        </p:nvSpPr>
-        <p:spPr>
-          <a:xfrm>
-            <a:off x="4892040" y="1600200"/>
-            <a:ext cx="1828800" cy="256032"/>
-          </a:xfrm>
-          <a:prstGeom prst="rect">
-            <a:avLst/>
-          </a:prstGeom>
-          <a:noFill/>
-          <a:ln/>
-        </p:spPr>
-        <p:txBody>
-          <a:bodyPr wrap="square" lIns="0" tIns="0" rIns="0" bIns="0" rtlCol="0" anchor="ctr"/>
-          <a:lstStyle/>
-          <a:p>
-            <a:pPr indent="0" marL="0">
-              <a:buNone/>
-            </a:pPr>
-            <a:r>
-              <a:rPr lang="en-US" sz="1100" b="1" spc="200" kern="0" dirty="0">
-                <a:solidFill>
-                  <a:srgbClr val="B8452F"/>
-                </a:solidFill>
-                <a:latin typeface="Segoe UI" pitchFamily="34" charset="0"/>
-                <a:ea typeface="Segoe UI" pitchFamily="34" charset="-122"/>
-                <a:cs typeface="Segoe UI" pitchFamily="34" charset="-120"/>
-              </a:rPr>
-              <a:t>BEFORE</a:t>
-            </a:r>
-            <a:endParaRPr lang="en-US" sz="1100" dirty="0"/>
-          </a:p>
-        </p:txBody>
-      </p:sp>
-      <p:sp>
-        <p:nvSpPr>
-          <p:cNvPr id="5" name="Text 3"/>
-          <p:cNvSpPr txBox="1"/>
-          <p:nvPr/>
-        </p:nvSpPr>
-        <p:spPr>
-          <a:xfrm>
-            <a:off x="8412480" y="1600200"/>
-            <a:ext cx="1828800" cy="256032"/>
-          </a:xfrm>
-          <a:prstGeom prst="rect">
-            <a:avLst/>
-          </a:prstGeom>
-          <a:noFill/>
-          <a:ln/>
-        </p:spPr>
-        <p:txBody>
-          <a:bodyPr wrap="square" lIns="0" tIns="0" rIns="0" bIns="0" rtlCol="0" anchor="ctr"/>
-          <a:lstStyle/>
-          <a:p>
-            <a:pPr indent="0" marL="0">
-              <a:buNone/>
-            </a:pPr>
-            <a:r>
-              <a:rPr lang="en-US" sz="1100" b="1" spc="200" kern="0" dirty="0">
-                <a:solidFill>
-                  <a:srgbClr val="1E6B58"/>
-                </a:solidFill>
-                <a:latin typeface="Segoe UI" pitchFamily="34" charset="0"/>
-                <a:ea typeface="Segoe UI" pitchFamily="34" charset="-122"/>
-                <a:cs typeface="Segoe UI" pitchFamily="34" charset="-120"/>
-              </a:rPr>
-              <a:t>AFTER</a:t>
-            </a:r>
-            <a:endParaRPr lang="en-US" sz="1100" dirty="0"/>
-          </a:p>
-        </p:txBody>
-      </p:sp>
-      <p:sp>
-        <p:nvSpPr>
-          <p:cNvPr id="6" name="Text 4"/>
-          <p:cNvSpPr txBox="1"/>
-          <p:nvPr/>
-        </p:nvSpPr>
-        <p:spPr>
-          <a:xfrm>
-            <a:off x="731520" y="1965960"/>
-            <a:ext cx="320040" cy="329184"/>
-          </a:xfrm>
-          <a:prstGeom prst="rect">
-            <a:avLst/>
-          </a:prstGeom>
-          <a:noFill/>
-          <a:ln/>
-        </p:spPr>
-        <p:txBody>
-          <a:bodyPr wrap="square" lIns="0" tIns="0" rIns="0" bIns="0" rtlCol="0" anchor="ctr"/>
-          <a:lstStyle/>
-          <a:p>
-            <a:pPr indent="0" marL="0">
-              <a:buNone/>
-            </a:pPr>
-            <a:r>
-              <a:rPr lang="en-US" sz="1400" dirty="0">
-                <a:solidFill>
-                  <a:srgbClr val="0E2F2B"/>
-                </a:solidFill>
-                <a:highlight>
-                  <a:srgbClr val="D6F25C"/>
-                </a:highlight>
-                <a:latin typeface="Segoe UI Semibold" pitchFamily="34" charset="0"/>
-                <a:ea typeface="Segoe UI Semibold" pitchFamily="34" charset="-122"/>
-                <a:cs typeface="Segoe UI Semibold" pitchFamily="34" charset="-120"/>
-              </a:rPr>
-              <a:t>1</a:t>
-            </a:r>
-            <a:endParaRPr lang="en-US" sz="1400" dirty="0"/>
-          </a:p>
-        </p:txBody>
-      </p:sp>
-      <p:sp>
-        <p:nvSpPr>
-          <p:cNvPr id="7" name="Text 5"/>
-          <p:cNvSpPr txBox="1"/>
-          <p:nvPr/>
-        </p:nvSpPr>
-        <p:spPr>
-          <a:xfrm>
-            <a:off x="1188720" y="1920240"/>
-            <a:ext cx="3520440" cy="411480"/>
-          </a:xfrm>
-          <a:prstGeom prst="rect">
-            <a:avLst/>
-          </a:prstGeom>
-          <a:noFill/>
-          <a:ln/>
-        </p:spPr>
-        <p:txBody>
-          <a:bodyPr wrap="square" lIns="0" tIns="0" rIns="0" bIns="0" rtlCol="0" anchor="ctr"/>
-          <a:lstStyle/>
-          <a:p>
-            <a:pPr indent="0" marL="0">
-              <a:buNone/>
-            </a:pPr>
-            <a:r>
-              <a:rPr lang="en-US" sz="1500" dirty="0">
-                <a:solidFill>
-                  <a:srgbClr val="0E2F2B"/>
-                </a:solidFill>
-                <a:latin typeface="Segoe UI Semibold" pitchFamily="34" charset="0"/>
-                <a:ea typeface="Segoe UI Semibold" pitchFamily="34" charset="-122"/>
-                <a:cs typeface="Segoe UI Semibold" pitchFamily="34" charset="-120"/>
-              </a:rPr>
-              <a:t>The gate read the wrong entry's score</a:t>
-            </a:r>
-            <a:endParaRPr lang="en-US" sz="1500" dirty="0"/>
-          </a:p>
-        </p:txBody>
-      </p:sp>
-      <p:sp>
-        <p:nvSpPr>
-          <p:cNvPr id="8" name="Text 6"/>
-          <p:cNvSpPr txBox="1"/>
-          <p:nvPr/>
-        </p:nvSpPr>
-        <p:spPr>
-          <a:xfrm>
-            <a:off x="1188720" y="2377440"/>
-            <a:ext cx="3520440" cy="822960"/>
-          </a:xfrm>
-          <a:prstGeom prst="rect">
-            <a:avLst/>
-          </a:prstGeom>
-          <a:noFill/>
-          <a:ln/>
-        </p:spPr>
-        <p:txBody>
-          <a:bodyPr wrap="square" lIns="0" tIns="0" rIns="0" bIns="0" rtlCol="0" anchor="t"/>
-          <a:lstStyle/>
-          <a:p>
-            <a:pPr indent="0" marL="0">
-              <a:buNone/>
-            </a:pPr>
-            <a:r>
-              <a:rPr lang="en-US" sz="1200" dirty="0">
-                <a:solidFill>
-                  <a:srgbClr val="2B403C"/>
-                </a:solidFill>
-                <a:latin typeface="Segoe UI" pitchFamily="34" charset="0"/>
-                <a:ea typeface="Segoe UI" pitchFamily="34" charset="-122"/>
-                <a:cs typeface="Segoe UI" pitchFamily="34" charset="-120"/>
-              </a:rPr>
-              <a:t>It took 0.707 from an unrelated entry instead of 0.675 from the entry ranked first.</a:t>
-            </a:r>
-            <a:endParaRPr lang="en-US" sz="1200" dirty="0"/>
-          </a:p>
-        </p:txBody>
-      </p:sp>
-      <p:sp>
-        <p:nvSpPr>
-          <p:cNvPr id="9" name="Shape 7"/>
+          <p:cNvPr id="4" name="Shape 2"/>
           <p:cNvSpPr/>
           <p:nvPr/>
         </p:nvSpPr>
         <p:spPr>
           <a:xfrm>
-            <a:off x="731520" y="3108960"/>
-            <a:ext cx="10728655" cy="0"/>
+            <a:off x="731520" y="2103120"/>
+            <a:ext cx="4846320" cy="0"/>
           </a:xfrm>
           <a:prstGeom prst="line">
             <a:avLst/>
@@ -16405,14 +15604,14 @@
       </p:sp>
       <p:sp>
         <p:nvSpPr>
-          <p:cNvPr id="10" name="Text 8"/>
-          <p:cNvSpPr txBox="1"/>
-          <p:nvPr/>
-        </p:nvSpPr>
-        <p:spPr>
-          <a:xfrm>
-            <a:off x="731520" y="3246120"/>
-            <a:ext cx="320040" cy="329184"/>
+          <p:cNvPr id="5" name="Text 3"/>
+          <p:cNvSpPr txBox="1"/>
+          <p:nvPr/>
+        </p:nvSpPr>
+        <p:spPr>
+          <a:xfrm>
+            <a:off x="731520" y="2194560"/>
+            <a:ext cx="2103120" cy="1005840"/>
           </a:xfrm>
           <a:prstGeom prst="rect">
             <a:avLst/>
@@ -16428,33 +15627,30 @@
               <a:buNone/>
             </a:pPr>
             <a:r>
-              <a:rPr lang="en-US" sz="1400" dirty="0">
+              <a:rPr lang="en-US" sz="5000" dirty="0">
                 <a:solidFill>
                   <a:srgbClr val="0E2F2B"/>
                 </a:solidFill>
-                <a:highlight>
-                  <a:srgbClr val="D6F25C"/>
-                </a:highlight>
-                <a:latin typeface="Segoe UI Semibold" pitchFamily="34" charset="0"/>
-                <a:ea typeface="Segoe UI Semibold" pitchFamily="34" charset="-122"/>
-                <a:cs typeface="Segoe UI Semibold" pitchFamily="34" charset="-120"/>
-              </a:rPr>
-              <a:t>2</a:t>
-            </a:r>
-            <a:endParaRPr lang="en-US" sz="1400" dirty="0"/>
-          </a:p>
-        </p:txBody>
-      </p:sp>
-      <p:sp>
-        <p:nvSpPr>
-          <p:cNvPr id="11" name="Text 9"/>
-          <p:cNvSpPr txBox="1"/>
-          <p:nvPr/>
-        </p:nvSpPr>
-        <p:spPr>
-          <a:xfrm>
-            <a:off x="1188720" y="3200400"/>
-            <a:ext cx="3520440" cy="411480"/>
+                <a:latin typeface="Segoe UI Light" pitchFamily="34" charset="0"/>
+                <a:ea typeface="Segoe UI Light" pitchFamily="34" charset="-122"/>
+                <a:cs typeface="Segoe UI Light" pitchFamily="34" charset="-120"/>
+              </a:rPr>
+              <a:t>0</a:t>
+            </a:r>
+            <a:endParaRPr lang="en-US" sz="5000" dirty="0"/>
+          </a:p>
+        </p:txBody>
+      </p:sp>
+      <p:sp>
+        <p:nvSpPr>
+          <p:cNvPr id="6" name="Text 4"/>
+          <p:cNvSpPr txBox="1"/>
+          <p:nvPr/>
+        </p:nvSpPr>
+        <p:spPr>
+          <a:xfrm>
+            <a:off x="2926080" y="2194560"/>
+            <a:ext cx="2651760" cy="1005840"/>
           </a:xfrm>
           <a:prstGeom prst="rect">
             <a:avLst/>
@@ -16470,69 +15666,44 @@
               <a:buNone/>
             </a:pPr>
             <a:r>
-              <a:rPr lang="en-US" sz="1500" dirty="0">
+              <a:rPr lang="en-US" sz="1500" b="1" dirty="0">
                 <a:solidFill>
                   <a:srgbClr val="0E2F2B"/>
-                </a:solidFill>
-                <a:latin typeface="Segoe UI Semibold" pitchFamily="34" charset="0"/>
-                <a:ea typeface="Segoe UI Semibold" pitchFamily="34" charset="-122"/>
-                <a:cs typeface="Segoe UI Semibold" pitchFamily="34" charset="-120"/>
-              </a:rPr>
-              <a:t>The badge contradicted the answer</a:t>
-            </a:r>
-            <a:endParaRPr lang="en-US" sz="1500" dirty="0"/>
-          </a:p>
-        </p:txBody>
-      </p:sp>
-      <p:sp>
-        <p:nvSpPr>
-          <p:cNvPr id="12" name="Text 10"/>
-          <p:cNvSpPr txBox="1"/>
-          <p:nvPr/>
-        </p:nvSpPr>
-        <p:spPr>
-          <a:xfrm>
-            <a:off x="1188720" y="3657600"/>
-            <a:ext cx="3520440" cy="822960"/>
-          </a:xfrm>
-          <a:prstGeom prst="rect">
-            <a:avLst/>
-          </a:prstGeom>
-          <a:noFill/>
-          <a:ln/>
-        </p:spPr>
-        <p:txBody>
-          <a:bodyPr wrap="square" lIns="0" tIns="0" rIns="0" bIns="0" rtlCol="0" anchor="t"/>
-          <a:lstStyle/>
-          <a:p>
-            <a:pPr indent="0" marL="0">
-              <a:buNone/>
-            </a:pPr>
-            <a:r>
-              <a:rPr lang="en-US" sz="1200" dirty="0">
-                <a:solidFill>
-                  <a:srgbClr val="2B403C"/>
                 </a:solidFill>
                 <a:latin typeface="Segoe UI" pitchFamily="34" charset="0"/>
                 <a:ea typeface="Segoe UI" pitchFamily="34" charset="-122"/>
                 <a:cs typeface="Segoe UI" pitchFamily="34" charset="-120"/>
               </a:rPr>
-              <a:t>“Need more info” sat above a complete answer: the label came from the gate, not from the model's output.</a:t>
-            </a:r>
-            <a:endParaRPr lang="en-US" sz="1200" dirty="0"/>
-          </a:p>
-        </p:txBody>
-      </p:sp>
-      <p:sp>
-        <p:nvSpPr>
-          <p:cNvPr id="13" name="Shape 11"/>
+              <a:t>of 10  </a:t>
+            </a:r>
+            <a:pPr indent="0" marL="0">
+              <a:buNone/>
+            </a:pPr>
+            <a:r>
+              <a:rPr lang="en-US" sz="1500" dirty="0">
+                <a:solidFill>
+                  <a:srgbClr val="2B403C"/>
+                </a:solidFill>
+                <a:latin typeface="Segoe UI" pitchFamily="34" charset="0"/>
+                <a:ea typeface="Segoe UI" pitchFamily="34" charset="-122"/>
+                <a:cs typeface="Segoe UI" pitchFamily="34" charset="-120"/>
+              </a:rPr>
+              <a:t>out-of-scope questions answered</a:t>
+            </a:r>
+            <a:endParaRPr lang="en-US" sz="1500" dirty="0"/>
+          </a:p>
+        </p:txBody>
+      </p:sp>
+      <p:sp>
+        <p:nvSpPr>
+          <p:cNvPr id="7" name="Shape 5"/>
           <p:cNvSpPr/>
           <p:nvPr/>
         </p:nvSpPr>
         <p:spPr>
           <a:xfrm>
-            <a:off x="731520" y="4389120"/>
-            <a:ext cx="10728655" cy="0"/>
+            <a:off x="731520" y="3474720"/>
+            <a:ext cx="4846320" cy="0"/>
           </a:xfrm>
           <a:prstGeom prst="line">
             <a:avLst/>
@@ -16548,14 +15719,260 @@
       </p:sp>
       <p:sp>
         <p:nvSpPr>
+          <p:cNvPr id="8" name="Text 6"/>
+          <p:cNvSpPr txBox="1"/>
+          <p:nvPr/>
+        </p:nvSpPr>
+        <p:spPr>
+          <a:xfrm>
+            <a:off x="731520" y="3566160"/>
+            <a:ext cx="2103120" cy="1005840"/>
+          </a:xfrm>
+          <a:prstGeom prst="rect">
+            <a:avLst/>
+          </a:prstGeom>
+          <a:noFill/>
+          <a:ln/>
+        </p:spPr>
+        <p:txBody>
+          <a:bodyPr wrap="square" lIns="0" tIns="0" rIns="0" bIns="0" rtlCol="0" anchor="ctr"/>
+          <a:lstStyle/>
+          <a:p>
+            <a:pPr indent="0" marL="0">
+              <a:buNone/>
+            </a:pPr>
+            <a:r>
+              <a:rPr lang="en-US" sz="5000" dirty="0">
+                <a:solidFill>
+                  <a:srgbClr val="0E2F2B"/>
+                </a:solidFill>
+                <a:latin typeface="Segoe UI Light" pitchFamily="34" charset="0"/>
+                <a:ea typeface="Segoe UI Light" pitchFamily="34" charset="-122"/>
+                <a:cs typeface="Segoe UI Light" pitchFamily="34" charset="-120"/>
+              </a:rPr>
+              <a:t>260</a:t>
+            </a:r>
+            <a:endParaRPr lang="en-US" sz="5000" dirty="0"/>
+          </a:p>
+        </p:txBody>
+      </p:sp>
+      <p:sp>
+        <p:nvSpPr>
+          <p:cNvPr id="9" name="Text 7"/>
+          <p:cNvSpPr txBox="1"/>
+          <p:nvPr/>
+        </p:nvSpPr>
+        <p:spPr>
+          <a:xfrm>
+            <a:off x="2926080" y="3566160"/>
+            <a:ext cx="2651760" cy="1005840"/>
+          </a:xfrm>
+          <a:prstGeom prst="rect">
+            <a:avLst/>
+          </a:prstGeom>
+          <a:noFill/>
+          <a:ln/>
+        </p:spPr>
+        <p:txBody>
+          <a:bodyPr wrap="square" lIns="0" tIns="0" rIns="0" bIns="0" rtlCol="0" anchor="ctr"/>
+          <a:lstStyle/>
+          <a:p>
+            <a:pPr indent="0" marL="0">
+              <a:buNone/>
+            </a:pPr>
+            <a:r>
+              <a:rPr lang="en-US" sz="1500" b="1" dirty="0">
+                <a:solidFill>
+                  <a:srgbClr val="0E2F2B"/>
+                </a:solidFill>
+                <a:latin typeface="Segoe UI" pitchFamily="34" charset="0"/>
+                <a:ea typeface="Segoe UI" pitchFamily="34" charset="-122"/>
+                <a:cs typeface="Segoe UI" pitchFamily="34" charset="-120"/>
+              </a:rPr>
+              <a:t>of 260  </a:t>
+            </a:r>
+            <a:pPr indent="0" marL="0">
+              <a:buNone/>
+            </a:pPr>
+            <a:r>
+              <a:rPr lang="en-US" sz="1500" dirty="0">
+                <a:solidFill>
+                  <a:srgbClr val="2B403C"/>
+                </a:solidFill>
+                <a:latin typeface="Segoe UI" pitchFamily="34" charset="0"/>
+                <a:ea typeface="Segoe UI" pitchFamily="34" charset="-122"/>
+                <a:cs typeface="Segoe UI" pitchFamily="34" charset="-120"/>
+              </a:rPr>
+              <a:t>statements supported</a:t>
+            </a:r>
+            <a:endParaRPr lang="en-US" sz="1500" dirty="0"/>
+          </a:p>
+        </p:txBody>
+      </p:sp>
+      <p:sp>
+        <p:nvSpPr>
+          <p:cNvPr id="10" name="Shape 8"/>
+          <p:cNvSpPr/>
+          <p:nvPr/>
+        </p:nvSpPr>
+        <p:spPr>
+          <a:xfrm>
+            <a:off x="731520" y="4846320"/>
+            <a:ext cx="4846320" cy="0"/>
+          </a:xfrm>
+          <a:prstGeom prst="line">
+            <a:avLst/>
+          </a:prstGeom>
+          <a:noFill/>
+          <a:ln w="9525">
+            <a:solidFill>
+              <a:srgbClr val="D8DFDB"/>
+            </a:solidFill>
+            <a:prstDash val="solid"/>
+          </a:ln>
+        </p:spPr>
+      </p:sp>
+      <p:sp>
+        <p:nvSpPr>
+          <p:cNvPr id="11" name="Text 9"/>
+          <p:cNvSpPr txBox="1"/>
+          <p:nvPr/>
+        </p:nvSpPr>
+        <p:spPr>
+          <a:xfrm>
+            <a:off x="731520" y="4937760"/>
+            <a:ext cx="2103120" cy="1005840"/>
+          </a:xfrm>
+          <a:prstGeom prst="rect">
+            <a:avLst/>
+          </a:prstGeom>
+          <a:noFill/>
+          <a:ln/>
+        </p:spPr>
+        <p:txBody>
+          <a:bodyPr wrap="square" lIns="0" tIns="0" rIns="0" bIns="0" rtlCol="0" anchor="ctr"/>
+          <a:lstStyle/>
+          <a:p>
+            <a:pPr indent="0" marL="0">
+              <a:buNone/>
+            </a:pPr>
+            <a:r>
+              <a:rPr lang="en-US" sz="5000" dirty="0">
+                <a:solidFill>
+                  <a:srgbClr val="0E2F2B"/>
+                </a:solidFill>
+                <a:latin typeface="Segoe UI Light" pitchFamily="34" charset="0"/>
+                <a:ea typeface="Segoe UI Light" pitchFamily="34" charset="-122"/>
+                <a:cs typeface="Segoe UI Light" pitchFamily="34" charset="-120"/>
+              </a:rPr>
+              <a:t>2.5 s</a:t>
+            </a:r>
+            <a:endParaRPr lang="en-US" sz="5000" dirty="0"/>
+          </a:p>
+        </p:txBody>
+      </p:sp>
+      <p:sp>
+        <p:nvSpPr>
+          <p:cNvPr id="12" name="Text 10"/>
+          <p:cNvSpPr txBox="1"/>
+          <p:nvPr/>
+        </p:nvSpPr>
+        <p:spPr>
+          <a:xfrm>
+            <a:off x="2926080" y="4937760"/>
+            <a:ext cx="2651760" cy="1005840"/>
+          </a:xfrm>
+          <a:prstGeom prst="rect">
+            <a:avLst/>
+          </a:prstGeom>
+          <a:noFill/>
+          <a:ln/>
+        </p:spPr>
+        <p:txBody>
+          <a:bodyPr wrap="square" lIns="0" tIns="0" rIns="0" bIns="0" rtlCol="0" anchor="ctr"/>
+          <a:lstStyle/>
+          <a:p>
+            <a:pPr indent="0" marL="0">
+              <a:buNone/>
+            </a:pPr>
+            <a:r>
+              <a:rPr lang="en-US" sz="1500" b="1" dirty="0">
+                <a:solidFill>
+                  <a:srgbClr val="0E2F2B"/>
+                </a:solidFill>
+                <a:latin typeface="Segoe UI" pitchFamily="34" charset="0"/>
+                <a:ea typeface="Segoe UI" pitchFamily="34" charset="-122"/>
+                <a:cs typeface="Segoe UI" pitchFamily="34" charset="-120"/>
+              </a:rPr>
+              <a:t>median  </a:t>
+            </a:r>
+            <a:pPr indent="0" marL="0">
+              <a:buNone/>
+            </a:pPr>
+            <a:r>
+              <a:rPr lang="en-US" sz="1500" dirty="0">
+                <a:solidFill>
+                  <a:srgbClr val="2B403C"/>
+                </a:solidFill>
+                <a:latin typeface="Segoe UI" pitchFamily="34" charset="0"/>
+                <a:ea typeface="Segoe UI" pitchFamily="34" charset="-122"/>
+                <a:cs typeface="Segoe UI" pitchFamily="34" charset="-120"/>
+              </a:rPr>
+              <a:t>time to answer</a:t>
+            </a:r>
+            <a:endParaRPr lang="en-US" sz="1500" dirty="0"/>
+          </a:p>
+        </p:txBody>
+      </p:sp>
+      <p:sp>
+        <p:nvSpPr>
+          <p:cNvPr id="13" name="Text 11"/>
+          <p:cNvSpPr txBox="1"/>
+          <p:nvPr/>
+        </p:nvSpPr>
+        <p:spPr>
+          <a:xfrm>
+            <a:off x="7818120" y="2057400"/>
+            <a:ext cx="3621024" cy="274320"/>
+          </a:xfrm>
+          <a:prstGeom prst="rect">
+            <a:avLst/>
+          </a:prstGeom>
+          <a:noFill/>
+          <a:ln/>
+        </p:spPr>
+        <p:txBody>
+          <a:bodyPr wrap="square" lIns="0" tIns="0" rIns="0" bIns="0" rtlCol="0" anchor="ctr"/>
+          <a:lstStyle/>
+          <a:p>
+            <a:pPr algn="ctr" indent="0" marL="0">
+              <a:buNone/>
+            </a:pPr>
+            <a:r>
+              <a:rPr lang="en-US" sz="1000" spc="200" kern="0" dirty="0">
+                <a:solidFill>
+                  <a:srgbClr val="6B7C78"/>
+                </a:solidFill>
+                <a:latin typeface="Segoe UI" pitchFamily="34" charset="0"/>
+                <a:ea typeface="Segoe UI" pitchFamily="34" charset="-122"/>
+                <a:cs typeface="Segoe UI" pitchFamily="34" charset="-120"/>
+              </a:rPr>
+              <a:t>WHAT IT DID</a:t>
+            </a:r>
+            <a:endParaRPr lang="en-US" sz="1000" dirty="0"/>
+          </a:p>
+        </p:txBody>
+      </p:sp>
+      <p:sp>
+        <p:nvSpPr>
           <p:cNvPr id="14" name="Text 12"/>
           <p:cNvSpPr txBox="1"/>
           <p:nvPr/>
         </p:nvSpPr>
         <p:spPr>
           <a:xfrm>
-            <a:off x="731520" y="4526280"/>
-            <a:ext cx="320040" cy="329184"/>
+            <a:off x="7818120" y="2286000"/>
+            <a:ext cx="1207008" cy="274320"/>
           </a:xfrm>
           <a:prstGeom prst="rect">
             <a:avLst/>
@@ -16567,37 +15984,240 @@
           <a:bodyPr wrap="square" lIns="0" tIns="0" rIns="0" bIns="0" rtlCol="0" anchor="ctr"/>
           <a:lstStyle/>
           <a:p>
-            <a:pPr indent="0" marL="0">
-              <a:buNone/>
-            </a:pPr>
-            <a:r>
-              <a:rPr lang="en-US" sz="1400" dirty="0">
+            <a:pPr algn="ctr" indent="0" marL="0">
+              <a:buNone/>
+            </a:pPr>
+            <a:r>
+              <a:rPr lang="en-US" sz="1100" dirty="0">
+                <a:solidFill>
+                  <a:srgbClr val="2B403C"/>
+                </a:solidFill>
+                <a:latin typeface="Segoe UI" pitchFamily="34" charset="0"/>
+                <a:ea typeface="Segoe UI" pitchFamily="34" charset="-122"/>
+                <a:cs typeface="Segoe UI" pitchFamily="34" charset="-120"/>
+              </a:rPr>
+              <a:t>Answered</a:t>
+            </a:r>
+            <a:endParaRPr lang="en-US" sz="1100" dirty="0"/>
+          </a:p>
+        </p:txBody>
+      </p:sp>
+      <p:sp>
+        <p:nvSpPr>
+          <p:cNvPr id="15" name="Text 13"/>
+          <p:cNvSpPr txBox="1"/>
+          <p:nvPr/>
+        </p:nvSpPr>
+        <p:spPr>
+          <a:xfrm>
+            <a:off x="9025128" y="2286000"/>
+            <a:ext cx="1207008" cy="274320"/>
+          </a:xfrm>
+          <a:prstGeom prst="rect">
+            <a:avLst/>
+          </a:prstGeom>
+          <a:noFill/>
+          <a:ln/>
+        </p:spPr>
+        <p:txBody>
+          <a:bodyPr wrap="square" lIns="0" tIns="0" rIns="0" bIns="0" rtlCol="0" anchor="ctr"/>
+          <a:lstStyle/>
+          <a:p>
+            <a:pPr algn="ctr" indent="0" marL="0">
+              <a:buNone/>
+            </a:pPr>
+            <a:r>
+              <a:rPr lang="en-US" sz="1100" dirty="0">
+                <a:solidFill>
+                  <a:srgbClr val="2B403C"/>
+                </a:solidFill>
+                <a:latin typeface="Segoe UI" pitchFamily="34" charset="0"/>
+                <a:ea typeface="Segoe UI" pitchFamily="34" charset="-122"/>
+                <a:cs typeface="Segoe UI" pitchFamily="34" charset="-120"/>
+              </a:rPr>
+              <a:t>Asked</a:t>
+            </a:r>
+            <a:endParaRPr lang="en-US" sz="1100" dirty="0"/>
+          </a:p>
+        </p:txBody>
+      </p:sp>
+      <p:sp>
+        <p:nvSpPr>
+          <p:cNvPr id="16" name="Text 14"/>
+          <p:cNvSpPr txBox="1"/>
+          <p:nvPr/>
+        </p:nvSpPr>
+        <p:spPr>
+          <a:xfrm>
+            <a:off x="10232136" y="2286000"/>
+            <a:ext cx="1207008" cy="274320"/>
+          </a:xfrm>
+          <a:prstGeom prst="rect">
+            <a:avLst/>
+          </a:prstGeom>
+          <a:noFill/>
+          <a:ln/>
+        </p:spPr>
+        <p:txBody>
+          <a:bodyPr wrap="square" lIns="0" tIns="0" rIns="0" bIns="0" rtlCol="0" anchor="ctr"/>
+          <a:lstStyle/>
+          <a:p>
+            <a:pPr algn="ctr" indent="0" marL="0">
+              <a:buNone/>
+            </a:pPr>
+            <a:r>
+              <a:rPr lang="en-US" sz="1100" dirty="0">
+                <a:solidFill>
+                  <a:srgbClr val="2B403C"/>
+                </a:solidFill>
+                <a:latin typeface="Segoe UI" pitchFamily="34" charset="0"/>
+                <a:ea typeface="Segoe UI" pitchFamily="34" charset="-122"/>
+                <a:cs typeface="Segoe UI" pitchFamily="34" charset="-120"/>
+              </a:rPr>
+              <a:t>Refused</a:t>
+            </a:r>
+            <a:endParaRPr lang="en-US" sz="1100" dirty="0"/>
+          </a:p>
+        </p:txBody>
+      </p:sp>
+      <p:sp>
+        <p:nvSpPr>
+          <p:cNvPr id="17" name="Text 15"/>
+          <p:cNvSpPr txBox="1"/>
+          <p:nvPr/>
+        </p:nvSpPr>
+        <p:spPr>
+          <a:xfrm>
+            <a:off x="6492240" y="2606040"/>
+            <a:ext cx="1234440" cy="777240"/>
+          </a:xfrm>
+          <a:prstGeom prst="rect">
+            <a:avLst/>
+          </a:prstGeom>
+          <a:noFill/>
+          <a:ln/>
+        </p:spPr>
+        <p:txBody>
+          <a:bodyPr wrap="square" lIns="0" tIns="0" rIns="0" bIns="0" rtlCol="0" anchor="ctr"/>
+          <a:lstStyle/>
+          <a:p>
+            <a:pPr indent="0" marL="0">
+              <a:buNone/>
+            </a:pPr>
+            <a:r>
+              <a:rPr lang="en-US" sz="1100" dirty="0">
+                <a:solidFill>
+                  <a:srgbClr val="2B403C"/>
+                </a:solidFill>
+                <a:latin typeface="Segoe UI" pitchFamily="34" charset="0"/>
+                <a:ea typeface="Segoe UI" pitchFamily="34" charset="-122"/>
+                <a:cs typeface="Segoe UI" pitchFamily="34" charset="-120"/>
+              </a:rPr>
+              <a:t>Should answer (29)</a:t>
+            </a:r>
+            <a:endParaRPr lang="en-US" sz="1100" dirty="0"/>
+          </a:p>
+        </p:txBody>
+      </p:sp>
+      <p:sp>
+        <p:nvSpPr>
+          <p:cNvPr id="18" name="Shape 16"/>
+          <p:cNvSpPr/>
+          <p:nvPr/>
+        </p:nvSpPr>
+        <p:spPr>
+          <a:xfrm>
+            <a:off x="7818120" y="2606040"/>
+            <a:ext cx="1152144" cy="777240"/>
+          </a:xfrm>
+          <a:prstGeom prst="rect">
+            <a:avLst/>
+          </a:prstGeom>
+          <a:solidFill>
+            <a:srgbClr val="EEF7C9"/>
+          </a:solidFill>
+          <a:ln w="9525">
+            <a:solidFill>
+              <a:srgbClr val="D6F25C"/>
+            </a:solidFill>
+            <a:prstDash val="solid"/>
+          </a:ln>
+        </p:spPr>
+      </p:sp>
+      <p:sp>
+        <p:nvSpPr>
+          <p:cNvPr id="19" name="Text 17"/>
+          <p:cNvSpPr txBox="1"/>
+          <p:nvPr/>
+        </p:nvSpPr>
+        <p:spPr>
+          <a:xfrm>
+            <a:off x="7818120" y="2606040"/>
+            <a:ext cx="1152144" cy="777240"/>
+          </a:xfrm>
+          <a:prstGeom prst="rect">
+            <a:avLst/>
+          </a:prstGeom>
+          <a:noFill/>
+          <a:ln/>
+        </p:spPr>
+        <p:txBody>
+          <a:bodyPr wrap="square" lIns="0" tIns="0" rIns="0" bIns="0" rtlCol="0" anchor="ctr"/>
+          <a:lstStyle/>
+          <a:p>
+            <a:pPr algn="ctr" indent="0" marL="0">
+              <a:buNone/>
+            </a:pPr>
+            <a:r>
+              <a:rPr lang="en-US" sz="2800" dirty="0">
                 <a:solidFill>
                   <a:srgbClr val="0E2F2B"/>
                 </a:solidFill>
-                <a:highlight>
-                  <a:srgbClr val="D6F25C"/>
-                </a:highlight>
                 <a:latin typeface="Segoe UI Semibold" pitchFamily="34" charset="0"/>
                 <a:ea typeface="Segoe UI Semibold" pitchFamily="34" charset="-122"/>
                 <a:cs typeface="Segoe UI Semibold" pitchFamily="34" charset="-120"/>
               </a:rPr>
-              <a:t>3</a:t>
-            </a:r>
-            <a:endParaRPr lang="en-US" sz="1400" dirty="0"/>
-          </a:p>
-        </p:txBody>
-      </p:sp>
-      <p:sp>
-        <p:nvSpPr>
-          <p:cNvPr id="15" name="Text 13"/>
-          <p:cNvSpPr txBox="1"/>
-          <p:nvPr/>
-        </p:nvSpPr>
-        <p:spPr>
-          <a:xfrm>
-            <a:off x="1188720" y="4480560"/>
-            <a:ext cx="3520440" cy="411480"/>
+              <a:t>27</a:t>
+            </a:r>
+            <a:endParaRPr lang="en-US" sz="2800" dirty="0"/>
+          </a:p>
+        </p:txBody>
+      </p:sp>
+      <p:sp>
+        <p:nvSpPr>
+          <p:cNvPr id="20" name="Shape 18"/>
+          <p:cNvSpPr/>
+          <p:nvPr/>
+        </p:nvSpPr>
+        <p:spPr>
+          <a:xfrm>
+            <a:off x="9025128" y="2606040"/>
+            <a:ext cx="1152144" cy="777240"/>
+          </a:xfrm>
+          <a:prstGeom prst="rect">
+            <a:avLst/>
+          </a:prstGeom>
+          <a:solidFill>
+            <a:srgbClr val="F7E3DE"/>
+          </a:solidFill>
+          <a:ln w="9525">
+            <a:solidFill>
+              <a:srgbClr val="E7B8AD"/>
+            </a:solidFill>
+            <a:prstDash val="solid"/>
+          </a:ln>
+        </p:spPr>
+      </p:sp>
+      <p:sp>
+        <p:nvSpPr>
+          <p:cNvPr id="21" name="Text 19"/>
+          <p:cNvSpPr txBox="1"/>
+          <p:nvPr/>
+        </p:nvSpPr>
+        <p:spPr>
+          <a:xfrm>
+            <a:off x="9025128" y="2606040"/>
+            <a:ext cx="1152144" cy="777240"/>
           </a:xfrm>
           <a:prstGeom prst="rect">
             <a:avLst/>
@@ -16609,50 +16229,114 @@
           <a:bodyPr wrap="square" lIns="0" tIns="0" rIns="0" bIns="0" rtlCol="0" anchor="ctr"/>
           <a:lstStyle/>
           <a:p>
-            <a:pPr indent="0" marL="0">
-              <a:buNone/>
-            </a:pPr>
-            <a:r>
-              <a:rPr lang="en-US" sz="1500" dirty="0">
-                <a:solidFill>
-                  <a:srgbClr val="0E2F2B"/>
-                </a:solidFill>
-                <a:latin typeface="Segoe UI Semibold" pitchFamily="34" charset="0"/>
-                <a:ea typeface="Segoe UI Semibold" pitchFamily="34" charset="-122"/>
-                <a:cs typeface="Segoe UI Semibold" pitchFamily="34" charset="-120"/>
-              </a:rPr>
-              <a:t>Only one of four teams was shown</a:t>
-            </a:r>
-            <a:endParaRPr lang="en-US" sz="1500" dirty="0"/>
-          </a:p>
-        </p:txBody>
-      </p:sp>
-      <p:sp>
-        <p:nvSpPr>
-          <p:cNvPr id="16" name="Text 14"/>
-          <p:cNvSpPr txBox="1"/>
-          <p:nvPr/>
-        </p:nvSpPr>
-        <p:spPr>
-          <a:xfrm>
-            <a:off x="1188720" y="4937760"/>
-            <a:ext cx="3520440" cy="822960"/>
-          </a:xfrm>
-          <a:prstGeom prst="rect">
-            <a:avLst/>
-          </a:prstGeom>
-          <a:noFill/>
-          <a:ln/>
-        </p:spPr>
-        <p:txBody>
-          <a:bodyPr wrap="square" lIns="0" tIns="0" rIns="0" bIns="0" rtlCol="0" anchor="t"/>
-          <a:lstStyle/>
-          <a:p>
-            <a:pPr indent="0" marL="0">
-              <a:buNone/>
-            </a:pPr>
-            <a:r>
-              <a:rPr lang="en-US" sz="1200" dirty="0">
+            <a:pPr algn="ctr" indent="0" marL="0">
+              <a:buNone/>
+            </a:pPr>
+            <a:r>
+              <a:rPr lang="en-US" sz="2400" dirty="0">
+                <a:solidFill>
+                  <a:srgbClr val="B8452F"/>
+                </a:solidFill>
+                <a:latin typeface="Segoe UI Light" pitchFamily="34" charset="0"/>
+                <a:ea typeface="Segoe UI Light" pitchFamily="34" charset="-122"/>
+                <a:cs typeface="Segoe UI Light" pitchFamily="34" charset="-120"/>
+              </a:rPr>
+              <a:t>1</a:t>
+            </a:r>
+            <a:endParaRPr lang="en-US" sz="2400" dirty="0"/>
+          </a:p>
+        </p:txBody>
+      </p:sp>
+      <p:sp>
+        <p:nvSpPr>
+          <p:cNvPr id="22" name="Shape 20"/>
+          <p:cNvSpPr/>
+          <p:nvPr/>
+        </p:nvSpPr>
+        <p:spPr>
+          <a:xfrm>
+            <a:off x="10232136" y="2606040"/>
+            <a:ext cx="1152144" cy="777240"/>
+          </a:xfrm>
+          <a:prstGeom prst="rect">
+            <a:avLst/>
+          </a:prstGeom>
+          <a:solidFill>
+            <a:srgbClr val="F7E3DE"/>
+          </a:solidFill>
+          <a:ln w="9525">
+            <a:solidFill>
+              <a:srgbClr val="E7B8AD"/>
+            </a:solidFill>
+            <a:prstDash val="solid"/>
+          </a:ln>
+        </p:spPr>
+      </p:sp>
+      <p:sp>
+        <p:nvSpPr>
+          <p:cNvPr id="23" name="Text 21"/>
+          <p:cNvSpPr txBox="1"/>
+          <p:nvPr/>
+        </p:nvSpPr>
+        <p:spPr>
+          <a:xfrm>
+            <a:off x="10232136" y="2606040"/>
+            <a:ext cx="1152144" cy="777240"/>
+          </a:xfrm>
+          <a:prstGeom prst="rect">
+            <a:avLst/>
+          </a:prstGeom>
+          <a:noFill/>
+          <a:ln/>
+        </p:spPr>
+        <p:txBody>
+          <a:bodyPr wrap="square" lIns="0" tIns="0" rIns="0" bIns="0" rtlCol="0" anchor="ctr"/>
+          <a:lstStyle/>
+          <a:p>
+            <a:pPr algn="ctr" indent="0" marL="0">
+              <a:buNone/>
+            </a:pPr>
+            <a:r>
+              <a:rPr lang="en-US" sz="2400" dirty="0">
+                <a:solidFill>
+                  <a:srgbClr val="B8452F"/>
+                </a:solidFill>
+                <a:latin typeface="Segoe UI Light" pitchFamily="34" charset="0"/>
+                <a:ea typeface="Segoe UI Light" pitchFamily="34" charset="-122"/>
+                <a:cs typeface="Segoe UI Light" pitchFamily="34" charset="-120"/>
+              </a:rPr>
+              <a:t>1</a:t>
+            </a:r>
+            <a:endParaRPr lang="en-US" sz="2400" dirty="0"/>
+          </a:p>
+        </p:txBody>
+      </p:sp>
+      <p:sp>
+        <p:nvSpPr>
+          <p:cNvPr id="24" name="Text 22"/>
+          <p:cNvSpPr txBox="1"/>
+          <p:nvPr/>
+        </p:nvSpPr>
+        <p:spPr>
+          <a:xfrm>
+            <a:off x="6492240" y="3474720"/>
+            <a:ext cx="1234440" cy="777240"/>
+          </a:xfrm>
+          <a:prstGeom prst="rect">
+            <a:avLst/>
+          </a:prstGeom>
+          <a:noFill/>
+          <a:ln/>
+        </p:spPr>
+        <p:txBody>
+          <a:bodyPr wrap="square" lIns="0" tIns="0" rIns="0" bIns="0" rtlCol="0" anchor="ctr"/>
+          <a:lstStyle/>
+          <a:p>
+            <a:pPr indent="0" marL="0">
+              <a:buNone/>
+            </a:pPr>
+            <a:r>
+              <a:rPr lang="en-US" sz="1100" dirty="0">
                 <a:solidFill>
                   <a:srgbClr val="2B403C"/>
                 </a:solidFill>
@@ -16660,228 +16344,22 @@
                 <a:ea typeface="Segoe UI" pitchFamily="34" charset="-122"/>
                 <a:cs typeface="Segoe UI" pitchFamily="34" charset="-120"/>
               </a:rPr>
-              <a:t>The entry lists PPE, ABP, DBRE and SRE. The answer named one.</a:t>
-            </a:r>
-            <a:endParaRPr lang="en-US" sz="1200" dirty="0"/>
-          </a:p>
-        </p:txBody>
-      </p:sp>
-      <p:sp>
-        <p:nvSpPr>
-          <p:cNvPr id="17" name="Shape 15"/>
+              <a:t>Should ask (5)</a:t>
+            </a:r>
+            <a:endParaRPr lang="en-US" sz="1100" dirty="0"/>
+          </a:p>
+        </p:txBody>
+      </p:sp>
+      <p:sp>
+        <p:nvSpPr>
+          <p:cNvPr id="25" name="Shape 23"/>
           <p:cNvSpPr/>
           <p:nvPr/>
         </p:nvSpPr>
         <p:spPr>
           <a:xfrm>
-            <a:off x="4892040" y="2011680"/>
-            <a:ext cx="3200400" cy="914400"/>
-          </a:xfrm>
-          <a:prstGeom prst="rect">
-            <a:avLst/>
-          </a:prstGeom>
-          <a:solidFill>
-            <a:srgbClr val="F4F6F1"/>
-          </a:solidFill>
-          <a:ln w="12700">
-            <a:solidFill>
-              <a:srgbClr val="F4F6F1"/>
-            </a:solidFill>
-            <a:prstDash val="solid"/>
-          </a:ln>
-        </p:spPr>
-      </p:sp>
-      <p:sp>
-        <p:nvSpPr>
-          <p:cNvPr id="18" name="Text 16"/>
-          <p:cNvSpPr txBox="1"/>
-          <p:nvPr/>
-        </p:nvSpPr>
-        <p:spPr>
-          <a:xfrm>
-            <a:off x="5074920" y="2057400"/>
-            <a:ext cx="1280160" cy="822960"/>
-          </a:xfrm>
-          <a:prstGeom prst="rect">
-            <a:avLst/>
-          </a:prstGeom>
-          <a:noFill/>
-          <a:ln/>
-        </p:spPr>
-        <p:txBody>
-          <a:bodyPr wrap="square" lIns="0" tIns="0" rIns="0" bIns="0" rtlCol="0" anchor="ctr"/>
-          <a:lstStyle/>
-          <a:p>
-            <a:pPr indent="0" marL="0">
-              <a:buNone/>
-            </a:pPr>
-            <a:r>
-              <a:rPr lang="en-US" sz="3200" dirty="0">
-                <a:solidFill>
-                  <a:srgbClr val="2B403C"/>
-                </a:solidFill>
-                <a:latin typeface="Segoe UI Light" pitchFamily="34" charset="0"/>
-                <a:ea typeface="Segoe UI Light" pitchFamily="34" charset="-122"/>
-                <a:cs typeface="Segoe UI Light" pitchFamily="34" charset="-120"/>
-              </a:rPr>
-              <a:t>0.707</a:t>
-            </a:r>
-            <a:endParaRPr lang="en-US" sz="3200" dirty="0"/>
-          </a:p>
-        </p:txBody>
-      </p:sp>
-      <p:sp>
-        <p:nvSpPr>
-          <p:cNvPr id="19" name="Text 17"/>
-          <p:cNvSpPr txBox="1"/>
-          <p:nvPr/>
-        </p:nvSpPr>
-        <p:spPr>
-          <a:xfrm>
-            <a:off x="6355080" y="2057400"/>
-            <a:ext cx="1600200" cy="822960"/>
-          </a:xfrm>
-          <a:prstGeom prst="rect">
-            <a:avLst/>
-          </a:prstGeom>
-          <a:noFill/>
-          <a:ln/>
-        </p:spPr>
-        <p:txBody>
-          <a:bodyPr wrap="square" lIns="0" tIns="0" rIns="0" bIns="0" rtlCol="0" anchor="ctr"/>
-          <a:lstStyle/>
-          <a:p>
-            <a:pPr indent="0" marL="0">
-              <a:buNone/>
-            </a:pPr>
-            <a:r>
-              <a:rPr lang="en-US" sz="1050" dirty="0">
-                <a:solidFill>
-                  <a:srgbClr val="2B403C"/>
-                </a:solidFill>
-                <a:latin typeface="Consolas" pitchFamily="34" charset="0"/>
-                <a:ea typeface="Consolas" pitchFamily="34" charset="-122"/>
-                <a:cs typeface="Consolas" pitchFamily="34" charset="-120"/>
-              </a:rPr>
-              <a:t>KB-PAY-005, an unrelated entry</a:t>
-            </a:r>
-            <a:endParaRPr lang="en-US" sz="1050" dirty="0"/>
-          </a:p>
-        </p:txBody>
-      </p:sp>
-      <p:sp>
-        <p:nvSpPr>
-          <p:cNvPr id="20" name="Shape 18"/>
-          <p:cNvSpPr/>
-          <p:nvPr/>
-        </p:nvSpPr>
-        <p:spPr>
-          <a:xfrm>
-            <a:off x="8412480" y="2011680"/>
-            <a:ext cx="3200400" cy="914400"/>
-          </a:xfrm>
-          <a:prstGeom prst="rect">
-            <a:avLst/>
-          </a:prstGeom>
-          <a:solidFill>
-            <a:srgbClr val="EEF7C9"/>
-          </a:solidFill>
-          <a:ln w="12700">
-            <a:solidFill>
-              <a:srgbClr val="EEF7C9"/>
-            </a:solidFill>
-            <a:prstDash val="solid"/>
-          </a:ln>
-        </p:spPr>
-      </p:sp>
-      <p:sp>
-        <p:nvSpPr>
-          <p:cNvPr id="21" name="Text 19"/>
-          <p:cNvSpPr txBox="1"/>
-          <p:nvPr/>
-        </p:nvSpPr>
-        <p:spPr>
-          <a:xfrm>
-            <a:off x="8595360" y="2057400"/>
-            <a:ext cx="1280160" cy="822960"/>
-          </a:xfrm>
-          <a:prstGeom prst="rect">
-            <a:avLst/>
-          </a:prstGeom>
-          <a:noFill/>
-          <a:ln/>
-        </p:spPr>
-        <p:txBody>
-          <a:bodyPr wrap="square" lIns="0" tIns="0" rIns="0" bIns="0" rtlCol="0" anchor="ctr"/>
-          <a:lstStyle/>
-          <a:p>
-            <a:pPr indent="0" marL="0">
-              <a:buNone/>
-            </a:pPr>
-            <a:r>
-              <a:rPr lang="en-US" sz="3200" dirty="0">
-                <a:solidFill>
-                  <a:srgbClr val="0E2F2B"/>
-                </a:solidFill>
-                <a:latin typeface="Segoe UI Light" pitchFamily="34" charset="0"/>
-                <a:ea typeface="Segoe UI Light" pitchFamily="34" charset="-122"/>
-                <a:cs typeface="Segoe UI Light" pitchFamily="34" charset="-120"/>
-              </a:rPr>
-              <a:t>0.675</a:t>
-            </a:r>
-            <a:endParaRPr lang="en-US" sz="3200" dirty="0"/>
-          </a:p>
-        </p:txBody>
-      </p:sp>
-      <p:sp>
-        <p:nvSpPr>
-          <p:cNvPr id="22" name="Text 20"/>
-          <p:cNvSpPr txBox="1"/>
-          <p:nvPr/>
-        </p:nvSpPr>
-        <p:spPr>
-          <a:xfrm>
-            <a:off x="9875520" y="2057400"/>
-            <a:ext cx="1600200" cy="822960"/>
-          </a:xfrm>
-          <a:prstGeom prst="rect">
-            <a:avLst/>
-          </a:prstGeom>
-          <a:noFill/>
-          <a:ln/>
-        </p:spPr>
-        <p:txBody>
-          <a:bodyPr wrap="square" lIns="0" tIns="0" rIns="0" bIns="0" rtlCol="0" anchor="ctr"/>
-          <a:lstStyle/>
-          <a:p>
-            <a:pPr indent="0" marL="0">
-              <a:buNone/>
-            </a:pPr>
-            <a:r>
-              <a:rPr lang="en-US" sz="1050" dirty="0">
-                <a:solidFill>
-                  <a:srgbClr val="0E2F2B"/>
-                </a:solidFill>
-                <a:latin typeface="Consolas" pitchFamily="34" charset="0"/>
-                <a:ea typeface="Consolas" pitchFamily="34" charset="-122"/>
-                <a:cs typeface="Consolas" pitchFamily="34" charset="-120"/>
-              </a:rPr>
-              <a:t>KB-PAY-002, the entry ranked first</a:t>
-            </a:r>
-            <a:endParaRPr lang="en-US" sz="1050" dirty="0"/>
-          </a:p>
-        </p:txBody>
-      </p:sp>
-      <p:sp>
-        <p:nvSpPr>
-          <p:cNvPr id="23" name="before: badge says Need more info-frame"/>
-          <p:cNvSpPr/>
-          <p:nvPr/>
-        </p:nvSpPr>
-        <p:spPr>
-          <a:xfrm>
-            <a:off x="4892040" y="3429000"/>
-            <a:ext cx="3200400" cy="381000"/>
+            <a:off x="7818120" y="3474720"/>
+            <a:ext cx="1152144" cy="777240"/>
           </a:xfrm>
           <a:prstGeom prst="rect">
             <a:avLst/>
@@ -16895,49 +16373,224 @@
             </a:solidFill>
             <a:prstDash val="solid"/>
           </a:ln>
-          <a:effectLst>
-            <a:outerShdw sx="100000" sy="100000" kx="0" ky="0" algn="bl" rotWithShape="0" blurRad="177800" dist="38100" dir="5400000">
-              <a:srgbClr val="0E2F2B">
-                <a:alpha val="16000"/>
-              </a:srgbClr>
-            </a:outerShdw>
-          </a:effectLst>
-        </p:spPr>
-      </p:sp>
-      <p:pic>
-        <p:nvPicPr>
-          <p:cNvPr id="24" name="before: badge says Need more info" descr="before: badge says Need more info">    </p:cNvPr>
-          <p:cNvPicPr>
-            <a:picLocks noChangeAspect="1"/>
-          </p:cNvPicPr>
-          <p:nvPr/>
-        </p:nvPicPr>
-        <p:blipFill>
-          <a:blip r:embed="rId1"/>
-          <a:stretch>
-            <a:fillRect/>
-          </a:stretch>
-        </p:blipFill>
-        <p:spPr>
-          <a:xfrm>
-            <a:off x="4892040" y="3429000"/>
-            <a:ext cx="3200400" cy="381000"/>
-          </a:xfrm>
-          <a:prstGeom prst="rect">
-            <a:avLst/>
-          </a:prstGeom>
-        </p:spPr>
-      </p:pic>
-      <p:sp>
-        <p:nvSpPr>
-          <p:cNvPr id="25" name="after: badge says Answer from KB-frame"/>
+        </p:spPr>
+      </p:sp>
+      <p:sp>
+        <p:nvSpPr>
+          <p:cNvPr id="26" name="Text 24"/>
+          <p:cNvSpPr txBox="1"/>
+          <p:nvPr/>
+        </p:nvSpPr>
+        <p:spPr>
+          <a:xfrm>
+            <a:off x="7818120" y="3474720"/>
+            <a:ext cx="1152144" cy="777240"/>
+          </a:xfrm>
+          <a:prstGeom prst="rect">
+            <a:avLst/>
+          </a:prstGeom>
+          <a:noFill/>
+          <a:ln/>
+        </p:spPr>
+        <p:txBody>
+          <a:bodyPr wrap="square" lIns="0" tIns="0" rIns="0" bIns="0" rtlCol="0" anchor="ctr"/>
+          <a:lstStyle/>
+          <a:p>
+            <a:pPr algn="ctr" indent="0" marL="0">
+              <a:buNone/>
+            </a:pPr>
+            <a:r>
+              <a:rPr lang="en-US" sz="2400" dirty="0">
+                <a:solidFill>
+                  <a:srgbClr val="6B7C78"/>
+                </a:solidFill>
+                <a:latin typeface="Segoe UI Light" pitchFamily="34" charset="0"/>
+                <a:ea typeface="Segoe UI Light" pitchFamily="34" charset="-122"/>
+                <a:cs typeface="Segoe UI Light" pitchFamily="34" charset="-120"/>
+              </a:rPr>
+              <a:t>0</a:t>
+            </a:r>
+            <a:endParaRPr lang="en-US" sz="2400" dirty="0"/>
+          </a:p>
+        </p:txBody>
+      </p:sp>
+      <p:sp>
+        <p:nvSpPr>
+          <p:cNvPr id="27" name="Shape 25"/>
           <p:cNvSpPr/>
           <p:nvPr/>
         </p:nvSpPr>
         <p:spPr>
           <a:xfrm>
-            <a:off x="8412480" y="3429000"/>
-            <a:ext cx="3200400" cy="381000"/>
+            <a:off x="9025128" y="3474720"/>
+            <a:ext cx="1152144" cy="777240"/>
+          </a:xfrm>
+          <a:prstGeom prst="rect">
+            <a:avLst/>
+          </a:prstGeom>
+          <a:solidFill>
+            <a:srgbClr val="EEF7C9"/>
+          </a:solidFill>
+          <a:ln w="9525">
+            <a:solidFill>
+              <a:srgbClr val="D6F25C"/>
+            </a:solidFill>
+            <a:prstDash val="solid"/>
+          </a:ln>
+        </p:spPr>
+      </p:sp>
+      <p:sp>
+        <p:nvSpPr>
+          <p:cNvPr id="28" name="Text 26"/>
+          <p:cNvSpPr txBox="1"/>
+          <p:nvPr/>
+        </p:nvSpPr>
+        <p:spPr>
+          <a:xfrm>
+            <a:off x="9025128" y="3474720"/>
+            <a:ext cx="1152144" cy="777240"/>
+          </a:xfrm>
+          <a:prstGeom prst="rect">
+            <a:avLst/>
+          </a:prstGeom>
+          <a:noFill/>
+          <a:ln/>
+        </p:spPr>
+        <p:txBody>
+          <a:bodyPr wrap="square" lIns="0" tIns="0" rIns="0" bIns="0" rtlCol="0" anchor="ctr"/>
+          <a:lstStyle/>
+          <a:p>
+            <a:pPr algn="ctr" indent="0" marL="0">
+              <a:buNone/>
+            </a:pPr>
+            <a:r>
+              <a:rPr lang="en-US" sz="2800" dirty="0">
+                <a:solidFill>
+                  <a:srgbClr val="0E2F2B"/>
+                </a:solidFill>
+                <a:latin typeface="Segoe UI Semibold" pitchFamily="34" charset="0"/>
+                <a:ea typeface="Segoe UI Semibold" pitchFamily="34" charset="-122"/>
+                <a:cs typeface="Segoe UI Semibold" pitchFamily="34" charset="-120"/>
+              </a:rPr>
+              <a:t>2</a:t>
+            </a:r>
+            <a:endParaRPr lang="en-US" sz="2800" dirty="0"/>
+          </a:p>
+        </p:txBody>
+      </p:sp>
+      <p:sp>
+        <p:nvSpPr>
+          <p:cNvPr id="29" name="Shape 27"/>
+          <p:cNvSpPr/>
+          <p:nvPr/>
+        </p:nvSpPr>
+        <p:spPr>
+          <a:xfrm>
+            <a:off x="10232136" y="3474720"/>
+            <a:ext cx="1152144" cy="777240"/>
+          </a:xfrm>
+          <a:prstGeom prst="rect">
+            <a:avLst/>
+          </a:prstGeom>
+          <a:solidFill>
+            <a:srgbClr val="F7E3DE"/>
+          </a:solidFill>
+          <a:ln w="9525">
+            <a:solidFill>
+              <a:srgbClr val="E7B8AD"/>
+            </a:solidFill>
+            <a:prstDash val="solid"/>
+          </a:ln>
+        </p:spPr>
+      </p:sp>
+      <p:sp>
+        <p:nvSpPr>
+          <p:cNvPr id="30" name="Text 28"/>
+          <p:cNvSpPr txBox="1"/>
+          <p:nvPr/>
+        </p:nvSpPr>
+        <p:spPr>
+          <a:xfrm>
+            <a:off x="10232136" y="3474720"/>
+            <a:ext cx="1152144" cy="777240"/>
+          </a:xfrm>
+          <a:prstGeom prst="rect">
+            <a:avLst/>
+          </a:prstGeom>
+          <a:noFill/>
+          <a:ln/>
+        </p:spPr>
+        <p:txBody>
+          <a:bodyPr wrap="square" lIns="0" tIns="0" rIns="0" bIns="0" rtlCol="0" anchor="ctr"/>
+          <a:lstStyle/>
+          <a:p>
+            <a:pPr algn="ctr" indent="0" marL="0">
+              <a:buNone/>
+            </a:pPr>
+            <a:r>
+              <a:rPr lang="en-US" sz="2400" dirty="0">
+                <a:solidFill>
+                  <a:srgbClr val="B8452F"/>
+                </a:solidFill>
+                <a:latin typeface="Segoe UI Light" pitchFamily="34" charset="0"/>
+                <a:ea typeface="Segoe UI Light" pitchFamily="34" charset="-122"/>
+                <a:cs typeface="Segoe UI Light" pitchFamily="34" charset="-120"/>
+              </a:rPr>
+              <a:t>3</a:t>
+            </a:r>
+            <a:endParaRPr lang="en-US" sz="2400" dirty="0"/>
+          </a:p>
+        </p:txBody>
+      </p:sp>
+      <p:sp>
+        <p:nvSpPr>
+          <p:cNvPr id="31" name="Text 29"/>
+          <p:cNvSpPr txBox="1"/>
+          <p:nvPr/>
+        </p:nvSpPr>
+        <p:spPr>
+          <a:xfrm>
+            <a:off x="6492240" y="4343400"/>
+            <a:ext cx="1234440" cy="777240"/>
+          </a:xfrm>
+          <a:prstGeom prst="rect">
+            <a:avLst/>
+          </a:prstGeom>
+          <a:noFill/>
+          <a:ln/>
+        </p:spPr>
+        <p:txBody>
+          <a:bodyPr wrap="square" lIns="0" tIns="0" rIns="0" bIns="0" rtlCol="0" anchor="ctr"/>
+          <a:lstStyle/>
+          <a:p>
+            <a:pPr indent="0" marL="0">
+              <a:buNone/>
+            </a:pPr>
+            <a:r>
+              <a:rPr lang="en-US" sz="1100" dirty="0">
+                <a:solidFill>
+                  <a:srgbClr val="2B403C"/>
+                </a:solidFill>
+                <a:latin typeface="Segoe UI" pitchFamily="34" charset="0"/>
+                <a:ea typeface="Segoe UI" pitchFamily="34" charset="-122"/>
+                <a:cs typeface="Segoe UI" pitchFamily="34" charset="-120"/>
+              </a:rPr>
+              <a:t>Should refuse (10)</a:t>
+            </a:r>
+            <a:endParaRPr lang="en-US" sz="1100" dirty="0"/>
+          </a:p>
+        </p:txBody>
+      </p:sp>
+      <p:sp>
+        <p:nvSpPr>
+          <p:cNvPr id="32" name="Shape 30"/>
+          <p:cNvSpPr/>
+          <p:nvPr/>
+        </p:nvSpPr>
+        <p:spPr>
+          <a:xfrm>
+            <a:off x="7818120" y="4343400"/>
+            <a:ext cx="1152144" cy="777240"/>
           </a:xfrm>
           <a:prstGeom prst="rect">
             <a:avLst/>
@@ -16951,49 +16604,57 @@
             </a:solidFill>
             <a:prstDash val="solid"/>
           </a:ln>
-          <a:effectLst>
-            <a:outerShdw sx="100000" sy="100000" kx="0" ky="0" algn="bl" rotWithShape="0" blurRad="177800" dist="38100" dir="5400000">
-              <a:srgbClr val="0E2F2B">
-                <a:alpha val="16000"/>
-              </a:srgbClr>
-            </a:outerShdw>
-          </a:effectLst>
-        </p:spPr>
-      </p:sp>
-      <p:pic>
-        <p:nvPicPr>
-          <p:cNvPr id="26" name="after: badge says Answer from KB" descr="after: badge says Answer from KB">    </p:cNvPr>
-          <p:cNvPicPr>
-            <a:picLocks noChangeAspect="1"/>
-          </p:cNvPicPr>
-          <p:nvPr/>
-        </p:nvPicPr>
-        <p:blipFill>
-          <a:blip r:embed="rId2"/>
-          <a:stretch>
-            <a:fillRect/>
-          </a:stretch>
-        </p:blipFill>
-        <p:spPr>
-          <a:xfrm>
-            <a:off x="8412480" y="3429000"/>
-            <a:ext cx="3200400" cy="381000"/>
-          </a:xfrm>
-          <a:prstGeom prst="rect">
-            <a:avLst/>
-          </a:prstGeom>
-        </p:spPr>
-      </p:pic>
-      <p:sp>
-        <p:nvSpPr>
-          <p:cNvPr id="27" name="before: one escalation team-frame"/>
+        </p:spPr>
+      </p:sp>
+      <p:sp>
+        <p:nvSpPr>
+          <p:cNvPr id="33" name="Text 31"/>
+          <p:cNvSpPr txBox="1"/>
+          <p:nvPr/>
+        </p:nvSpPr>
+        <p:spPr>
+          <a:xfrm>
+            <a:off x="7818120" y="4343400"/>
+            <a:ext cx="1152144" cy="777240"/>
+          </a:xfrm>
+          <a:prstGeom prst="rect">
+            <a:avLst/>
+          </a:prstGeom>
+          <a:noFill/>
+          <a:ln/>
+        </p:spPr>
+        <p:txBody>
+          <a:bodyPr wrap="square" lIns="0" tIns="0" rIns="0" bIns="0" rtlCol="0" anchor="ctr"/>
+          <a:lstStyle/>
+          <a:p>
+            <a:pPr algn="ctr" indent="0" marL="0">
+              <a:buNone/>
+            </a:pPr>
+            <a:r>
+              <a:rPr lang="en-US" sz="2400" dirty="0">
+                <a:solidFill>
+                  <a:srgbClr val="6B7C78"/>
+                </a:solidFill>
+                <a:latin typeface="Segoe UI Light" pitchFamily="34" charset="0"/>
+                <a:ea typeface="Segoe UI Light" pitchFamily="34" charset="-122"/>
+                <a:cs typeface="Segoe UI Light" pitchFamily="34" charset="-120"/>
+              </a:rPr>
+              <a:t>0</a:t>
+            </a:r>
+            <a:endParaRPr lang="en-US" sz="2400" dirty="0"/>
+          </a:p>
+        </p:txBody>
+      </p:sp>
+      <p:sp>
+        <p:nvSpPr>
+          <p:cNvPr id="34" name="Shape 32"/>
           <p:cNvSpPr/>
           <p:nvPr/>
         </p:nvSpPr>
         <p:spPr>
           <a:xfrm>
-            <a:off x="4892040" y="4663440"/>
-            <a:ext cx="3200400" cy="385011"/>
+            <a:off x="9025128" y="4343400"/>
+            <a:ext cx="1152144" cy="777240"/>
           </a:xfrm>
           <a:prstGeom prst="rect">
             <a:avLst/>
@@ -17007,95 +16668,150 @@
             </a:solidFill>
             <a:prstDash val="solid"/>
           </a:ln>
-          <a:effectLst>
-            <a:outerShdw sx="100000" sy="100000" kx="0" ky="0" algn="bl" rotWithShape="0" blurRad="177800" dist="38100" dir="5400000">
-              <a:srgbClr val="0E2F2B">
-                <a:alpha val="16000"/>
-              </a:srgbClr>
-            </a:outerShdw>
-          </a:effectLst>
-        </p:spPr>
-      </p:sp>
-      <p:pic>
-        <p:nvPicPr>
-          <p:cNvPr id="28" name="before: one escalation team" descr="before: one escalation team">    </p:cNvPr>
-          <p:cNvPicPr>
-            <a:picLocks noChangeAspect="1"/>
-          </p:cNvPicPr>
-          <p:nvPr/>
-        </p:nvPicPr>
-        <p:blipFill>
-          <a:blip r:embed="rId3"/>
-          <a:stretch>
-            <a:fillRect/>
-          </a:stretch>
-        </p:blipFill>
-        <p:spPr>
-          <a:xfrm>
-            <a:off x="4892040" y="4663440"/>
-            <a:ext cx="3200400" cy="385011"/>
-          </a:xfrm>
-          <a:prstGeom prst="rect">
-            <a:avLst/>
-          </a:prstGeom>
-        </p:spPr>
-      </p:pic>
-      <p:sp>
-        <p:nvSpPr>
-          <p:cNvPr id="29" name="after: four escalation teams-frame"/>
+        </p:spPr>
+      </p:sp>
+      <p:sp>
+        <p:nvSpPr>
+          <p:cNvPr id="35" name="Text 33"/>
+          <p:cNvSpPr txBox="1"/>
+          <p:nvPr/>
+        </p:nvSpPr>
+        <p:spPr>
+          <a:xfrm>
+            <a:off x="9025128" y="4343400"/>
+            <a:ext cx="1152144" cy="777240"/>
+          </a:xfrm>
+          <a:prstGeom prst="rect">
+            <a:avLst/>
+          </a:prstGeom>
+          <a:noFill/>
+          <a:ln/>
+        </p:spPr>
+        <p:txBody>
+          <a:bodyPr wrap="square" lIns="0" tIns="0" rIns="0" bIns="0" rtlCol="0" anchor="ctr"/>
+          <a:lstStyle/>
+          <a:p>
+            <a:pPr algn="ctr" indent="0" marL="0">
+              <a:buNone/>
+            </a:pPr>
+            <a:r>
+              <a:rPr lang="en-US" sz="2400" dirty="0">
+                <a:solidFill>
+                  <a:srgbClr val="6B7C78"/>
+                </a:solidFill>
+                <a:latin typeface="Segoe UI Light" pitchFamily="34" charset="0"/>
+                <a:ea typeface="Segoe UI Light" pitchFamily="34" charset="-122"/>
+                <a:cs typeface="Segoe UI Light" pitchFamily="34" charset="-120"/>
+              </a:rPr>
+              <a:t>0</a:t>
+            </a:r>
+            <a:endParaRPr lang="en-US" sz="2400" dirty="0"/>
+          </a:p>
+        </p:txBody>
+      </p:sp>
+      <p:sp>
+        <p:nvSpPr>
+          <p:cNvPr id="36" name="Shape 34"/>
           <p:cNvSpPr/>
           <p:nvPr/>
         </p:nvSpPr>
         <p:spPr>
           <a:xfrm>
-            <a:off x="8412480" y="4663440"/>
-            <a:ext cx="3200400" cy="1395663"/>
+            <a:off x="10232136" y="4343400"/>
+            <a:ext cx="1152144" cy="777240"/>
           </a:xfrm>
           <a:prstGeom prst="rect">
             <a:avLst/>
           </a:prstGeom>
           <a:solidFill>
-            <a:srgbClr val="FFFFFF"/>
+            <a:srgbClr val="EEF7C9"/>
           </a:solidFill>
           <a:ln w="9525">
             <a:solidFill>
-              <a:srgbClr val="D8DFDB"/>
+              <a:srgbClr val="D6F25C"/>
             </a:solidFill>
             <a:prstDash val="solid"/>
           </a:ln>
-          <a:effectLst>
-            <a:outerShdw sx="100000" sy="100000" kx="0" ky="0" algn="bl" rotWithShape="0" blurRad="177800" dist="38100" dir="5400000">
-              <a:srgbClr val="0E2F2B">
-                <a:alpha val="16000"/>
-              </a:srgbClr>
-            </a:outerShdw>
-          </a:effectLst>
-        </p:spPr>
-      </p:sp>
-      <p:pic>
-        <p:nvPicPr>
-          <p:cNvPr id="30" name="after: four escalation teams" descr="after: four escalation teams">    </p:cNvPr>
-          <p:cNvPicPr>
-            <a:picLocks noChangeAspect="1"/>
-          </p:cNvPicPr>
-          <p:nvPr/>
-        </p:nvPicPr>
-        <p:blipFill>
-          <a:blip r:embed="rId4"/>
-          <a:stretch>
-            <a:fillRect/>
-          </a:stretch>
-        </p:blipFill>
-        <p:spPr>
-          <a:xfrm>
-            <a:off x="8412480" y="4663440"/>
-            <a:ext cx="3200400" cy="1395663"/>
-          </a:xfrm>
-          <a:prstGeom prst="rect">
-            <a:avLst/>
-          </a:prstGeom>
-        </p:spPr>
-      </p:pic>
+        </p:spPr>
+      </p:sp>
+      <p:sp>
+        <p:nvSpPr>
+          <p:cNvPr id="37" name="Text 35"/>
+          <p:cNvSpPr txBox="1"/>
+          <p:nvPr/>
+        </p:nvSpPr>
+        <p:spPr>
+          <a:xfrm>
+            <a:off x="10232136" y="4343400"/>
+            <a:ext cx="1152144" cy="777240"/>
+          </a:xfrm>
+          <a:prstGeom prst="rect">
+            <a:avLst/>
+          </a:prstGeom>
+          <a:noFill/>
+          <a:ln/>
+        </p:spPr>
+        <p:txBody>
+          <a:bodyPr wrap="square" lIns="0" tIns="0" rIns="0" bIns="0" rtlCol="0" anchor="ctr"/>
+          <a:lstStyle/>
+          <a:p>
+            <a:pPr algn="ctr" indent="0" marL="0">
+              <a:buNone/>
+            </a:pPr>
+            <a:r>
+              <a:rPr lang="en-US" sz="2800" dirty="0">
+                <a:solidFill>
+                  <a:srgbClr val="0E2F2B"/>
+                </a:solidFill>
+                <a:latin typeface="Segoe UI Semibold" pitchFamily="34" charset="0"/>
+                <a:ea typeface="Segoe UI Semibold" pitchFamily="34" charset="-122"/>
+                <a:cs typeface="Segoe UI Semibold" pitchFamily="34" charset="-120"/>
+              </a:rPr>
+              <a:t>10</a:t>
+            </a:r>
+            <a:endParaRPr lang="en-US" sz="2800" dirty="0"/>
+          </a:p>
+        </p:txBody>
+      </p:sp>
+      <p:sp>
+        <p:nvSpPr>
+          <p:cNvPr id="38" name="Text 36"/>
+          <p:cNvSpPr txBox="1"/>
+          <p:nvPr/>
+        </p:nvSpPr>
+        <p:spPr>
+          <a:xfrm>
+            <a:off x="6492240" y="5303520"/>
+            <a:ext cx="4946904" cy="548640"/>
+          </a:xfrm>
+          <a:prstGeom prst="rect">
+            <a:avLst/>
+          </a:prstGeom>
+          <a:noFill/>
+          <a:ln/>
+        </p:spPr>
+        <p:txBody>
+          <a:bodyPr wrap="square" lIns="0" tIns="0" rIns="0" bIns="0" rtlCol="0" anchor="t"/>
+          <a:lstStyle/>
+          <a:p>
+            <a:pPr indent="0" marL="0">
+              <a:buNone/>
+            </a:pPr>
+            <a:r>
+              <a:rPr lang="en-US" sz="1300" dirty="0">
+                <a:solidFill>
+                  <a:srgbClr val="2B403C"/>
+                </a:solidFill>
+                <a:latin typeface="Segoe UI" pitchFamily="34" charset="0"/>
+                <a:ea typeface="Segoe UI" pitchFamily="34" charset="-122"/>
+                <a:cs typeface="Segoe UI" pitchFamily="34" charset="-120"/>
+              </a:rPr>
+              <a:t>Five misses, all on the safe side: it asked or refused where it could have answered.</a:t>
+            </a:r>
+            <a:endParaRPr lang="en-US" sz="1300" dirty="0"/>
+          </a:p>
+        </p:txBody>
+      </p:sp>
       <p:sp>
         <p:nvSpPr>
           <p:cNvPr id="25" name="Slide Number Placeholder 0"/>
